--- a/en/files/slides/Session_3_EN.pptx
+++ b/en/files/slides/Session_3_EN.pptx
@@ -732,7 +732,7 @@
           <a:p>
             <a:r>
               <a:rPr lang="en-US" sz="1400" b="0" dirty="0"/>
-              <a:t>SESSION 3 OPENING (0:00). Welcome to Weekend 2. In Sessions 1 and 2 we asked a question and found the evidence. Today we choose HOW a study answers a question; tomorrow (Session 4) we judge whether we can trust the answer and how big the effect is.</a:t>
+              <a:t>SESSION 3 OPENING (0:00). Welcome to Week 3. In Sessions 1 and 2 we asked a question and found the evidence. Today we choose HOW a study answers a question; next Saturday (Session 4) we judge whether we can trust the answer and how big the effect is.</a:t>
             </a:r>
           </a:p>
           <a:p>
@@ -960,7 +960,7 @@
           <a:p>
             <a:r>
               <a:rPr lang="en-US" sz="1400" b="0" dirty="0"/>
-              <a:t>Step 1: cases are people WITH the outcome. Step 2: controls are similar people WITHOUT it, from the same source (same ICUs, same period) - choosing controls well is the hardest part. Step 3: look back for the exposure, the same way for both groups. Step 4: 60% of cases vs 20% of controls were exposed. Step 5: the result is an odds ratio (OR = 6.0, which we calculate tomorrow).</a:t>
+              <a:t>Step 1: cases are people WITH the outcome. Step 2: controls are similar people WITHOUT it, from the same source (same ICUs, same period) - choosing controls well is the hardest part. Step 3: look back for the exposure, the same way for both groups. Step 4: 60% of cases vs 20% of controls were exposed. Step 5: the result is an odds ratio (OR = 6.0, which we calculate next Saturday).</a:t>
             </a:r>
           </a:p>
           <a:p>
@@ -4035,7 +4035,7 @@
           <a:p>
             <a:r>
               <a:rPr lang="en-US" sz="1400" b="0" dirty="0"/>
-              <a:t>Exit question answer: a cohort (grouped by the exposure they chose, followed forward); it may only say 'associated' - people who choose vaccination differ in many ways (healthy-user effect), a preview of confounding tomorrow.</a:t>
+              <a:t>Exit question answer: a cohort (grouped by the exposure they chose, followed forward); it may only say 'associated' - people who choose vaccination differ in many ways (healthy-user effect), a preview of confounding next Saturday.</a:t>
             </a:r>
           </a:p>
           <a:p>
@@ -8420,7 +8420,7 @@
                 <a:latin typeface="Century Gothic"/>
                 <a:cs typeface="Century Gothic"/>
               </a:rPr>
-              <a:t>Weekend 2 · Saturday</a:t>
+              <a:t>Week 3 · Saturday</a:t>
             </a:r>
           </a:p>
           <a:p>
@@ -22765,7 +22765,7 @@
                 <a:latin typeface="Century Gothic"/>
                 <a:cs typeface="Century Gothic"/>
               </a:rPr>
-              <a:t>Tomorrow (Session 4): can we trust the result, and how big is the effect?</a:t>
+              <a:t>Next Saturday (Session 4): can we trust the result, and how big is the effect?</a:t>
             </a:r>
           </a:p>
         </p:txBody>

--- a/en/files/slides/Session_3_EN.pptx
+++ b/en/files/slides/Session_3_EN.pptx
@@ -750,13 +750,13 @@
           <a:p>
             <a:r>
               <a:rPr lang="en-US" sz="1400" b="0" dirty="0"/>
-              <a:t>Running example: the fluid question answered twice - by a small randomised trial (Boulet 2024) and by a large cohort (Hyun 2023).</a:t>
+              <a:t>Running example: the fluid question answered twice: by a small randomised trial (Boulet 2024) and by a large cohort (Hyun 2023).</a:t>
             </a:r>
           </a:p>
           <a:p>
             <a:r>
               <a:rPr lang="en-US" sz="1400" b="0" dirty="0"/>
-              <a:t>Ask the room: who has ever taken part in a study as a data collector? Expected: a few hands - use them as examples later.</a:t>
+              <a:t>Ask the room: who has ever taken part in a study as a data collector? Expected: a few hands. Use them as examples later.</a:t>
             </a:r>
           </a:p>
           <a:p>
@@ -855,7 +855,7 @@
           <a:p>
             <a:r>
               <a:rPr lang="en-US" sz="1400" b="0" dirty="0"/>
-              <a:t>Strengths: efficient for RARE outcomes or long latency - you do not need to follow thousands of people. Weaknesses: recall bias, choosing good controls is hard, and you can only calculate an odds ratio, not risks.</a:t>
+              <a:t>Strengths: efficient for RARE outcomes or long latency, because you do not need to follow thousands of people. Weaknesses: recall bias, choosing good controls is hard, and you can only calculate an odds ratio, not risks.</a:t>
             </a:r>
           </a:p>
           <a:p>
@@ -960,13 +960,13 @@
           <a:p>
             <a:r>
               <a:rPr lang="en-US" sz="1400" b="0" dirty="0"/>
-              <a:t>Step 1: cases are people WITH the outcome. Step 2: controls are similar people WITHOUT it, from the same source (same ICUs, same period) - choosing controls well is the hardest part. Step 3: look back for the exposure, the same way for both groups. Step 4: 60% of cases vs 20% of controls were exposed. Step 5: the result is an odds ratio (OR = 6.0, which we calculate next Saturday).</a:t>
+              <a:t>Step 1: cases are people WITH the outcome. Step 2: controls are similar people WITHOUT it, from the same source (same ICUs, same period). Choosing controls well is the hardest part. Step 3: look back for the exposure, the same way for both groups. Step 4: 60% of cases vs 20% of controls were exposed. Step 5: the result is an odds ratio (OR = 6.0, which we calculate next Saturday).</a:t>
             </a:r>
           </a:p>
           <a:p>
             <a:r>
               <a:rPr lang="en-US" sz="1400" b="0" dirty="0"/>
-              <a:t>Misconception: 'controls should be healthy volunteers'. No - controls must come from the population that produced the cases, otherwise the comparison is unfair.</a:t>
+              <a:t>Misconception: 'controls should be healthy volunteers'. No. Controls must come from the population that produced the cases, otherwise the comparison is unfair.</a:t>
             </a:r>
           </a:p>
           <a:p>
@@ -1071,13 +1071,13 @@
           <a:p>
             <a:r>
               <a:rPr lang="en-US" sz="1400" b="0" dirty="0"/>
-              <a:t>Strengths: clear time order, can study several outcomes, gives risks and incidence. Weaknesses: slow and costly if prospective, poor for rare outcomes, and confounding - the investigator did not choose who got more fluid.</a:t>
+              <a:t>Strengths: clear time order, can study several outcomes, gives risks and incidence. Weaknesses: slow and costly if prospective, poor for rare outcomes, and confounding, because the investigator did not choose who got more fluid.</a:t>
             </a:r>
           </a:p>
           <a:p>
             <a:r>
               <a:rPr lang="en-US" sz="1400" b="0" dirty="0"/>
-              <a:t>Misconception: 'retrospective means poor quality'. Not necessarily - the quality depends on how well the data were recorded.</a:t>
+              <a:t>Misconception: 'retrospective means poor quality'. Not necessarily. The quality depends on how well the data were recorded.</a:t>
             </a:r>
           </a:p>
           <a:p>
@@ -1170,13 +1170,13 @@
           <a:p>
             <a:r>
               <a:rPr lang="en-US" sz="1400" b="0" dirty="0"/>
-              <a:t>This is how Paper 2 (Hyun 2023) works - a good example of a cohort built from a registry whose data were collected prospectively.</a:t>
+              <a:t>This is how Paper 2 (Hyun 2023) works. It is a good example of a cohort built from a registry whose data were collected prospectively.</a:t>
             </a:r>
           </a:p>
           <a:p>
             <a:r>
               <a:rPr lang="en-US" sz="1400" b="0" dirty="0"/>
-              <a:t>Step 1: the cohort - who is followed (and who is left out: patients who left the ICU before day 3). Step 2: exposure measured BEFORE the outcome. Step 3: outcome counted later. Step 4: compare the groups; Hyun used propensity-score matching to make them similar (483, 373 and 392 matched pairs for days 1, 2 and 3). Day 2 result: HR 2.13 (95% CI 1.48-3.06); day 1 showed no clear difference.</a:t>
+              <a:t>Step 1: the cohort: who is followed (and who is left out: patients who left the ICU before day 3). Step 2: exposure measured BEFORE the outcome. Step 3: outcome counted later. Step 4: compare the groups; Hyun used propensity-score matching to make them similar (483, 373 and 392 matched pairs for days 1, 2 and 3). Day 2 result: HR 2.13 (95% CI 1.48-3.06); day 1 showed no clear difference.</a:t>
             </a:r>
           </a:p>
           <a:p>
@@ -1188,7 +1188,7 @@
           <a:p>
             <a:r>
               <a:rPr lang="en-US" sz="1400" b="0" dirty="0"/>
-              <a:t>Ask the room: who decided which patients received more fluid? Expected: the treating clinicians, often because the patient was sicker - we come back to this in Session 4 (confounding).</a:t>
+              <a:t>Ask the room: who decided which patients received more fluid? Expected: the treating clinicians, often because the patient was sicker. We come back to this in Session 4 (confounding).</a:t>
             </a:r>
           </a:p>
           <a:p>
@@ -1287,7 +1287,7 @@
           <a:p>
             <a:r>
               <a:rPr lang="en-US" sz="1400" b="0" dirty="0"/>
-              <a:t>Note the honest result: 6 deaths in each group by day 28. With 24 patients per arm this tells us almost nothing about mortality - the trial was a pilot powered for fluid balance.</a:t>
+              <a:t>Note the honest result: 6 deaths in each group by day 28. With 24 patients per arm this tells us almost nothing about mortality. The trial was a pilot powered for fluid balance.</a:t>
             </a:r>
           </a:p>
           <a:p>
@@ -1392,19 +1392,19 @@
           <a:p>
             <a:r>
               <a:rPr lang="en-US" sz="1400" b="0" dirty="0"/>
-              <a:t>Step 1: strict eligibility criteria (we return to these in the proposal builder). Step 2: consent - in the ICU often from a surrogate, before or soon after randomisation. Step 3: randomisation by a central computer keeps the next allocation hidden (allocation concealment - Session 4). Step 4: the two strategies are delivered. Step 5: the primary outcome is the day-5 fluid balance; death by day 28 was 6 of 24 in each group.</a:t>
+              <a:t>Step 1: strict eligibility criteria (we return to these in the proposal builder). Step 2: consent (in the ICU often from a surrogate), before or soon after randomisation. Step 3: randomisation by a central computer keeps the next allocation hidden (allocation concealment, Session 4). Step 4: the two strategies are delivered. Step 5: the primary outcome is the day-5 fluid balance; death by day 28 was 6 of 24 in each group.</a:t>
             </a:r>
           </a:p>
           <a:p>
             <a:r>
               <a:rPr lang="en-US" sz="1400" b="0" dirty="0"/>
-              <a:t>Misconception: 'randomised = blinded'. Not here - clinicians knew the group; only patients and statisticians were blinded.</a:t>
+              <a:t>Misconception: 'randomised = blinded'. Not here. Clinicians knew the group; only patients and statisticians were blinded.</a:t>
             </a:r>
           </a:p>
           <a:p>
             <a:r>
               <a:rPr lang="en-US" sz="1400" b="0" dirty="0"/>
-              <a:t>Ask the room: which step makes this an EXPERIMENT rather than a cohort? Expected: step 3 - the investigator assigns the exposure.</a:t>
+              <a:t>Ask the room: which step makes this an EXPERIMENT rather than a cohort? Expected: step 3, where the investigator assigns the exposure.</a:t>
             </a:r>
           </a:p>
           <a:p>
@@ -1689,7 +1689,7 @@
           <a:p>
             <a:r>
               <a:rPr lang="en-US" sz="1400" b="0" dirty="0"/>
-              <a:t>A systematic review uses a pre-specified, reproducible search (remember PubMed and Boolean from Session 2) and appraises every study found. A meta-analysis then pools the results into one estimate - the diamond at the bottom of a forest plot.</a:t>
+              <a:t>A systematic review uses a pre-specified, reproducible search (remember PubMed and Boolean from Session 2) and appraises every study found. A meta-analysis then pools the results into one estimate: the diamond at the bottom of a forest plot.</a:t>
             </a:r>
           </a:p>
           <a:p>
@@ -1701,7 +1701,7 @@
           <a:p>
             <a:r>
               <a:rPr lang="en-US" sz="1400" b="0" dirty="0"/>
-              <a:t>Misconception: 'a meta-analysis is always the best evidence'. It is only as good as the studies it pools - garbage in, garbage out. A review of small biased trials gives a precise wrong answer.</a:t>
+              <a:t>Misconception: 'a meta-analysis is always the best evidence'. It is only as good as the studies it pools: garbage in, garbage out. A review of small biased trials gives a precise wrong answer.</a:t>
             </a:r>
           </a:p>
           <a:p>
@@ -1806,7 +1806,7 @@
           <a:p>
             <a:r>
               <a:rPr lang="en-US" sz="1400" b="0" dirty="0"/>
-              <a:t>Misconception: 'anything on a higher level beats anything lower down'. A 48-patient pilot RCT does not overrule a careful multicentre cohort on mortality - they answer different parts of the question.</a:t>
+              <a:t>Misconception: 'anything on a higher level beats anything lower down'. A 48-patient pilot RCT does not overrule a careful multicentre cohort on mortality. They answer different parts of the question.</a:t>
             </a:r>
           </a:p>
           <a:p>
@@ -1899,13 +1899,13 @@
           <a:p>
             <a:r>
               <a:rPr lang="en-US" sz="1400" b="0" dirty="0"/>
-              <a:t>Purpose: wake up Session 2 and put each group's own question back on the table - today's proposal builder chooses a design for it.</a:t>
+              <a:t>Purpose: wake up Session 2 and put each group's own question back on the table. Today's proposal builder chooses a design for it.</a:t>
             </a:r>
           </a:p>
           <a:p>
             <a:r>
               <a:rPr lang="en-US" sz="1400" b="0" dirty="0"/>
-              <a:t>Answers. Q1: AND with another concept narrows the search; OR widens it. Q2: the figures and tables (reading order: title, abstract, figures and tables, then methods). Q3: spin - describing a non-significant result as if it were a benefit.</a:t>
+              <a:t>Answers. Q1: AND with another concept narrows the search; OR widens it. Q2: the figures and tables (reading order: title, abstract, figures and tables, then methods). Q3: spin (describing a non-significant result as if it were a benefit).</a:t>
             </a:r>
           </a:p>
           <a:p>
@@ -2022,7 +2022,7 @@
           <a:p>
             <a:r>
               <a:rPr lang="en-US" sz="1400" b="0" dirty="0"/>
-              <a:t>Misconception: people name the design from words in the title ('prospective', 'registry', 'retrospective'). Titles can mislead - use the three questions instead.</a:t>
+              <a:t>Misconception: people name the design from words in the title ('prospective', 'registry', 'retrospective'). Titles can mislead, so use the three questions instead.</a:t>
             </a:r>
           </a:p>
           <a:p>
@@ -2121,7 +2121,7 @@
           <a:p>
             <a:r>
               <a:rPr lang="en-US" sz="1400" b="0" dirty="0"/>
-              <a:t>Teaching point: the RCT's unique strength is balancing UNKNOWN confounders. Its weakness is often generalisability - trial patients are selected (Boulet excluded patients over 85, those needing dialysis and the severely malnourished).</a:t>
+              <a:t>Teaching point: the RCT's unique strength is balancing UNKNOWN confounders. Its weakness is often generalisability: trial patients are selected (Boulet excluded patients over 85, those needing dialysis and the severely malnourished).</a:t>
             </a:r>
           </a:p>
           <a:p>
@@ -2232,7 +2232,7 @@
           <a:p>
             <a:r>
               <a:rPr lang="en-US" sz="1400" b="0" dirty="0"/>
-              <a:t>Hyun (cohort): thousands of patients and the outcome we care about. A positive balance on days 2-3 was associated with higher 28-day mortality (HR 2.13 for day 2, 1.56 for day 3; no clear difference on day 1). But it cannot prove that the fluid caused the deaths - sicker patients receive more fluid.</a:t>
+              <a:t>Hyun (cohort): thousands of patients and the outcome we care about. A positive balance on days 2-3 was associated with higher 28-day mortality (HR 2.13 for day 2, 1.56 for day 3; no clear difference on day 1). But it cannot prove that the fluid caused the deaths, because sicker patients receive more fluid.</a:t>
             </a:r>
           </a:p>
           <a:p>
@@ -2244,7 +2244,7 @@
           <a:p>
             <a:r>
               <a:rPr lang="en-US" sz="1400" b="0" dirty="0"/>
-              <a:t>Ask the room: write one honest sentence for each paper's conclusion. Expected answer: Boulet - 'the strategy did not clearly reduce day-5 fluid balance'; Hyun - 'a positive balance on days 2-3 was associated with higher mortality'.</a:t>
+              <a:t>Ask the room: write one honest sentence for each paper's conclusion. Expected answer: for Boulet, 'the strategy did not clearly reduce day-5 fluid balance'; for Hyun, 'a positive balance on days 2-3 was associated with higher mortality'.</a:t>
             </a:r>
           </a:p>
           <a:p>
@@ -2337,7 +2337,7 @@
           <a:p>
             <a:r>
               <a:rPr lang="en-US" sz="1400" b="0" dirty="0"/>
-              <a:t>Answers. A: up - a randomised trial may make causal statements, and this one honestly reports a null result. B: DOWN - a cohort can say 'associated with', not 'causes' (Hyun's own abstract correctly says 'associated'). C: up - 'associated' is the right word for a cross-sectional survey; it cannot show which came first.</a:t>
+              <a:t>Answers. A: up. A randomised trial may make causal statements, and this one honestly reports a null result. B: DOWN. A cohort can say 'associated with', not 'causes' (Hyun's own abstract correctly says 'associated'). C: up. 'Associated' is the right word for a cross-sectional survey; it cannot show which came first.</a:t>
             </a:r>
           </a:p>
           <a:p>
@@ -2436,13 +2436,13 @@
           <a:p>
             <a:r>
               <a:rPr lang="en-US" sz="1400" b="0" dirty="0"/>
-              <a:t>Run it: 9 minutes in pairs, 6 minutes plenary. In plenary, do not go through all eight - ask which one pairs starred and discuss those. Abstracts 5 (retrospective cohort that sounds like a case-control), 7 (non-randomised before-after study) and 9 (cluster trial, optional - we meet cluster trials after the break) are usually the hardest.</a:t>
+              <a:t>Run it: 9 minutes in pairs, 6 minutes plenary. In plenary, do not go through all eight. Ask which one pairs starred and discuss those. Abstracts 5 (retrospective cohort that sounds like a case-control), 7 (non-randomised before-after study) and 9 (cluster trial, optional; we meet cluster trials after the break) are usually the hardest.</a:t>
             </a:r>
           </a:p>
           <a:p>
             <a:r>
               <a:rPr lang="en-US" sz="1400" b="0" dirty="0"/>
-              <a:t>Teaching point: the evidence word matters more than the label - 'randomly allocated', 'selected patients who developed', 'followed for 12 months', 'on a single day'.</a:t>
+              <a:t>Teaching point: the evidence word matters more than the label: 'randomly allocated', 'selected patients who developed', 'followed for 12 months', 'on a single day'.</a:t>
             </a:r>
           </a:p>
           <a:p>
@@ -2541,7 +2541,7 @@
           <a:p>
             <a:r>
               <a:rPr lang="en-US" sz="1400" b="0" dirty="0"/>
-              <a:t>During the break, walk past the groups and ask informally which design they are thinking of for their own question - it gives you a feel for who will need help in the proposal builder.</a:t>
+              <a:t>During the break, walk past the groups and ask informally which design they are thinking of for their own question. It gives you a feel for who will need help in the proposal builder.</a:t>
             </a:r>
           </a:p>
           <a:p>
@@ -2727,7 +2727,7 @@
           <a:p>
             <a:r>
               <a:rPr lang="en-US" sz="1400" b="0" dirty="0"/>
-              <a:t>Crossover: each patient receives both treatments in random order, with a washout in between, and acts as their own control - so fewer patients are needed. Only for stable, chronic conditions where the effect wears off (e.g. inhalers in COPD). Useless in septic shock: the patient is not the same on day 7.</a:t>
+              <a:t>Crossover: each patient receives both treatments in random order, with a washout in between, and acts as their own control, so fewer patients are needed. Only for stable, chronic conditions where the effect wears off (e.g. inhalers in COPD). Useless in septic shock: the patient is not the same on day 7.</a:t>
             </a:r>
           </a:p>
           <a:p>
@@ -2739,7 +2739,7 @@
           <a:p>
             <a:r>
               <a:rPr lang="en-US" sz="1400" b="0" dirty="0"/>
-              <a:t>Factorial: two questions in one trial - patients are randomised twice (e.g. fluid strategy AND vitamin C), giving four groups. Efficient if the two treatments do not interact.</a:t>
+              <a:t>Factorial: two questions in one trial. Patients are randomised twice (e.g. fluid strategy AND vitamin C), giving four groups. Efficient if the two treatments do not interact.</a:t>
             </a:r>
           </a:p>
           <a:p>
@@ -2751,7 +2751,7 @@
           <a:p>
             <a:r>
               <a:rPr lang="en-US" sz="1400" b="0" dirty="0"/>
-              <a:t>Ask the room: you want to test a new handover checklist for nurses. Which layout? Expected answer: cluster - randomise wards or shifts, not patients.</a:t>
+              <a:t>Ask the room: you want to test a new handover checklist for nurses. Which layout? Expected answer: cluster. Randomise wards or shifts, not patients.</a:t>
             </a:r>
           </a:p>
           <a:p>
@@ -2838,7 +2838,7 @@
           <a:p>
             <a:r>
               <a:rPr lang="en-US" sz="1400" b="0" dirty="0"/>
-              <a:t>A superiority trial asks: is the new treatment BETTER? A non-inferiority trial asks: is it NOT UNACCEPTABLY WORSE - usually because it is cheaper, safer, simpler or uses less fluid.</a:t>
+              <a:t>A superiority trial asks: is the new treatment BETTER? A non-inferiority trial asks: is it NOT UNACCEPTABLY WORSE (usually because it is cheaper, safer, simpler or uses less fluid).</a:t>
             </a:r>
           </a:p>
           <a:p>
@@ -2850,19 +2850,19 @@
           <a:p>
             <a:r>
               <a:rPr lang="en-US" sz="1400" b="0" dirty="0"/>
-              <a:t>Read the bars (difference and 95% CI). A: the whole CI is below 0 - superior. B: the CI crosses 0 but stays below the margin - non-inferior. C: the CI crosses the margin - inconclusive. D: the whole CI is above the margin - inferior.</a:t>
+              <a:t>Read the bars (difference and 95% CI). A: the whole CI is below 0, so superior. B: the CI crosses 0 but stays below the margin, so non-inferior. C: the CI crosses the margin, so inconclusive. D: the whole CI is above the margin, so inferior.</a:t>
             </a:r>
           </a:p>
           <a:p>
             <a:r>
               <a:rPr lang="en-US" sz="1400" b="0" dirty="0"/>
-              <a:t>Misconception: 'p &gt; 0.05 in a superiority trial shows the treatments are equivalent'. No - absence of evidence is not evidence of absence. Boulet's p = 0.42 does not show that restriction is as good as usual care.</a:t>
+              <a:t>Misconception: 'p &gt; 0.05 in a superiority trial shows the treatments are equivalent'. No. Absence of evidence is not evidence of absence. Boulet's p = 0.42 does not show that restriction is as good as usual care.</a:t>
             </a:r>
           </a:p>
           <a:p>
             <a:r>
               <a:rPr lang="en-US" sz="1400" b="0" dirty="0"/>
-              <a:t>Ask the room: who should decide the margin - the statistician or the clinicians? Expected answer: clinicians (and patients), with the statistician; it is a clinical judgement.</a:t>
+              <a:t>Ask the room: who should decide the margin: the statistician or the clinicians? Expected answer: clinicians (and patients), with the statistician; it is a clinical judgement.</a:t>
             </a:r>
           </a:p>
           <a:p>
@@ -2973,7 +2973,7 @@
           <a:p>
             <a:r>
               <a:rPr lang="en-US" sz="1400" b="0" dirty="0"/>
-              <a:t>Ask the room: from these numbers, would you launch a 1,000-patient trial in the same 3 ICUs? Expected answer: not as designed - at 3 patients per month it would take decades; you need many more sites or broader eligibility.</a:t>
+              <a:t>Ask the room: from these numbers, would you launch a 1,000-patient trial in the same 3 ICUs? Expected answer: not as designed. At 3 patients per month it would take decades; you need many more sites or broader eligibility.</a:t>
             </a:r>
           </a:p>
           <a:p>
@@ -3072,7 +3072,7 @@
           <a:p>
             <a:r>
               <a:rPr lang="en-US" sz="1400" b="0" dirty="0"/>
-              <a:t>Misconception: 'design names must be memorised'. No - they can be worked out from the two questions on the takeaway.</a:t>
+              <a:t>Misconception: 'design names must be memorised'. No. They can be worked out from the two questions on the takeaway.</a:t>
             </a:r>
           </a:p>
           <a:p>
@@ -3165,7 +3165,7 @@
           <a:p>
             <a:r>
               <a:rPr lang="en-US" sz="1400" b="0" dirty="0"/>
-              <a:t>Most quality-improvement projects introduce a change for everyone at once - no randomisation, no parallel control. These are quasi-experimental designs.</a:t>
+              <a:t>Most quality-improvement projects introduce a change for everyone at once, with no randomisation and no parallel control. These are quasi-experimental designs.</a:t>
             </a:r>
           </a:p>
           <a:p>
@@ -3195,7 +3195,7 @@
           <a:p>
             <a:r>
               <a:rPr lang="en-US" sz="1400" b="0" dirty="0"/>
-              <a:t>Ask the room: what else changed in your hospital in the same month as your last QI project? Expected answer: usually something - staff rotation, a new policy, an audit - which is exactly why a trend matters.</a:t>
+              <a:t>Ask the room: what else changed in your hospital in the same month as your last QI project? Expected answer: usually something (staff rotation, a new policy, an audit), which is exactly why a trend matters.</a:t>
             </a:r>
           </a:p>
           <a:p>
@@ -3405,7 +3405,7 @@
           <a:p>
             <a:r>
               <a:rPr lang="en-US" sz="1400" b="0" dirty="0"/>
-              <a:t>Teaching point: groups will justify their own design later today in the proposal builder with exactly this logic - 'our question is about X, so the best feasible design is Y'.</a:t>
+              <a:t>Teaching point: groups will justify their own design later today in the proposal builder with exactly this logic: 'our question is about X, so the best feasible design is Y'.</a:t>
             </a:r>
           </a:p>
           <a:p>
@@ -3516,7 +3516,7 @@
           <a:p>
             <a:r>
               <a:rPr lang="en-US" sz="1400" b="0" dirty="0"/>
-              <a:t>Answers. A: non-inferiority trial - define the margin in advance. B: cluster randomised trial - randomise wards, not patients. C: interrupted time series - compare the post-bundle months with the trend before the bundle. D: qualitative design - in-depth interviews (or focus groups) with families.</a:t>
+              <a:t>Answers. A: non-inferiority trial. Define the margin in advance. B: cluster randomised trial. Randomise wards, not patients. C: interrupted time series. Compare the post-bundle months with the trend before the bundle. D: qualitative design using in-depth interviews (or focus groups) with families.</a:t>
             </a:r>
           </a:p>
           <a:p>
@@ -3615,7 +3615,7 @@
           <a:p>
             <a:r>
               <a:rPr lang="en-US" sz="1400" b="0" dirty="0"/>
-              <a:t>Answers for the four given questions (handout Part B; key in Solutions/s3_solutions.md): 1 point-prevalence of pressure injuries - cross-sectional; 2 chlorhexidine bathing introduced unit by unit - cluster randomised trial; 3 sepsis bundle already in place, monthly data - interrupted time series; 4 why nurses do not report near misses - qualitative interviews or focus groups. Two optional bonus questions: case-control and non-inferiority.</a:t>
+              <a:t>Answers for the four given questions (handout Part B; key in Solutions/s3_solutions.md): 1 point-prevalence of pressure injuries (cross-sectional); 2 chlorhexidine bathing introduced unit by unit (cluster randomised trial); 3 sepsis bundle already in place, monthly data (interrupted time series); 4 why nurses do not report near misses (qualitative interviews or focus groups). Two optional bonus questions: case-control and non-inferiority.</a:t>
             </a:r>
           </a:p>
           <a:p>
@@ -3720,7 +3720,7 @@
           <a:p>
             <a:r>
               <a:rPr lang="en-US" sz="1400" b="0" dirty="0"/>
-              <a:t>Walk down the funnel with the ICU example (an observational version of our fluid question). Source population: everyone who could be studied. Inclusion criteria: the P of the PICO, made measurable (age 18+, septic shock, vasopressor started within 24 h). Exclusion criteria: people who meet the inclusion criteria but must be removed for a reason - safety, or the outcome cannot be measured (chronic dialysis, comfort care only).</a:t>
+              <a:t>Walk down the funnel with the ICU example (an observational version of our fluid question). Source population: everyone who could be studied. Inclusion criteria: the P of the PICO, made measurable (age 18+, septic shock, vasopressor started within 24 h). Exclusion criteria: people who meet the inclusion criteria but must be removed for a reason, such as safety or an outcome that cannot be measured (chronic dialysis, comfort care only).</a:t>
             </a:r>
           </a:p>
           <a:p>
@@ -3738,7 +3738,7 @@
           <a:p>
             <a:r>
               <a:rPr lang="en-US" sz="1400" b="0" dirty="0"/>
-              <a:t>Teaching point: every extra exclusion makes the study cleaner but the result applies to fewer patients (external validity - Session 4).</a:t>
+              <a:t>Teaching point: every extra exclusion makes the study cleaner but the result applies to fewer patients (external validity, Session 4).</a:t>
             </a:r>
           </a:p>
           <a:p>
@@ -3843,7 +3843,7 @@
           <a:p>
             <a:r>
               <a:rPr lang="en-US" sz="1400" b="0" dirty="0"/>
-              <a:t>Model answer for the running example (observational version): retrospective cohort of adults with septic shock in our ICU over 3 years; justification - an RCT is ideal but not feasible for one ICU without funding; existing charts record fluid in/out and outcomes; we will say 'associated with'. Inclusion and exclusion as on the funnel slide.</a:t>
+              <a:t>Model answer for the running example (observational version): retrospective cohort of adults with septic shock in our ICU over 3 years; justification: an RCT is ideal but not feasible for one ICU without funding; existing charts record fluid in/out and outcomes; we will say 'associated with'. Inclusion and exclusion as on the funnel slide.</a:t>
             </a:r>
           </a:p>
           <a:p>
@@ -4035,7 +4035,7 @@
           <a:p>
             <a:r>
               <a:rPr lang="en-US" sz="1400" b="0" dirty="0"/>
-              <a:t>Exit question answer: a cohort (grouped by the exposure they chose, followed forward); it may only say 'associated' - people who choose vaccination differ in many ways (healthy-user effect), a preview of confounding next Saturday.</a:t>
+              <a:t>Exit question answer: a cohort (grouped by the exposure they chose, followed forward); it may only say 'associated', because people who choose vaccination differ in many ways (healthy-user effect). This previews confounding next Saturday.</a:t>
             </a:r>
           </a:p>
           <a:p>
@@ -4215,7 +4215,7 @@
           <a:p>
             <a:r>
               <a:rPr lang="en-US" sz="1400" b="0" dirty="0"/>
-              <a:t>This is the thread for the whole day. Read the question aloud - it is the PICO the room built in Session 1.</a:t>
+              <a:t>This is the thread for the whole day. Read the question aloud: it is the PICO the room built in Session 1.</a:t>
             </a:r>
           </a:p>
           <a:p>
@@ -4239,7 +4239,7 @@
           <a:p>
             <a:r>
               <a:rPr lang="en-US" sz="1400" b="0" dirty="0"/>
-              <a:t>Ask the room: which study would you trust more to tell you whether restriction SAVES lives? Expected answer: mixed - that is the point; neither answers it fully. Keep the tension; we resolve it by the end of 3.1.</a:t>
+              <a:t>Ask the room: which study would you trust more to tell you whether restriction SAVES lives? Expected answer: mixed, and that is the point. Neither answers it fully. Keep the tension; we resolve it by the end of 3.1.</a:t>
             </a:r>
           </a:p>
           <a:p>
@@ -4332,7 +4332,7 @@
           <a:p>
             <a:r>
               <a:rPr lang="en-US" sz="1400" b="0" dirty="0"/>
-              <a:t>Boulet: assigned - yes; random - yes; so RCT. Hyun: assigned - no; comparison group - yes; exposure measured before outcome - yes; so cohort.</a:t>
+              <a:t>Boulet: assigned? Yes. Random? Yes. So RCT. Hyun: assigned? No. Comparison group? Yes. Exposure measured before outcome? Yes. So cohort.</a:t>
             </a:r>
           </a:p>
           <a:p>
@@ -4431,7 +4431,7 @@
           <a:p>
             <a:r>
               <a:rPr lang="en-US" sz="1400" b="0" dirty="0"/>
-              <a:t>Controls must come from the population that produced the cases: in our candidaemia example, other ICU patients in the same units and months - not healthy volunteers.</a:t>
+              <a:t>Controls must come from the population that produced the cases: in our candidaemia example, other ICU patients in the same units and months, not healthy volunteers.</a:t>
             </a:r>
           </a:p>
           <a:p>
@@ -4542,7 +4542,7 @@
           <a:p>
             <a:r>
               <a:rPr lang="en-US" sz="1400" b="0" dirty="0"/>
-              <a:t>Misconception: 'a failed superiority trial shows equivalence'. No - it was not designed with a margin.</a:t>
+              <a:t>Misconception: 'a failed superiority trial shows equivalence'. No. It was not designed with a margin.</a:t>
             </a:r>
           </a:p>
           <a:p>
@@ -4728,7 +4728,7 @@
           <a:p>
             <a:r>
               <a:rPr lang="en-US" sz="1400" b="0" dirty="0"/>
-              <a:t>Copyright slide - leave on screen while participants leave.</a:t>
+              <a:t>Copyright slide. Leave on screen while participants leave.</a:t>
             </a:r>
           </a:p>
         </p:txBody>
@@ -4821,7 +4821,7 @@
           <a:p>
             <a:r>
               <a:rPr lang="en-US" sz="1400" b="0" dirty="0"/>
-              <a:t>Tell the room they do not need to memorise names - by the end they will draw them.</a:t>
+              <a:t>Tell the room they do not need to memorise names. By the end they will draw them.</a:t>
             </a:r>
           </a:p>
           <a:p>
@@ -4908,7 +4908,7 @@
           <a:p>
             <a:r>
               <a:rPr lang="en-US" sz="1400" b="0" dirty="0"/>
-              <a:t>Walk the tree from the top. Descriptive studies describe what is there - no comparison. Analytical studies compare groups to test an association.</a:t>
+              <a:t>Walk the tree from the top. Descriptive studies describe what is there, with no comparison. Analytical studies compare groups to test an association.</a:t>
             </a:r>
           </a:p>
           <a:p>
@@ -4926,7 +4926,7 @@
           <a:p>
             <a:r>
               <a:rPr lang="en-US" sz="1400" b="0" dirty="0"/>
-              <a:t>Misconception: 'observational means bad'. No - many key questions (harm, prognosis, rare diseases) can only be answered observationally. It is about fit, not rank.</a:t>
+              <a:t>Misconception: 'observational means bad'. No. Many key questions (harm, prognosis, rare diseases) can only be answered observationally. It is about fit, not rank.</a:t>
             </a:r>
           </a:p>
           <a:p>
@@ -5025,7 +5025,7 @@
           <a:p>
             <a:r>
               <a:rPr lang="en-US" sz="1400" b="0" dirty="0"/>
-              <a:t>Exposure: what comes first - a treatment, a strategy, a risk factor, a behaviour. Outcome: what we count later - death, infection, injury, a lab value. The comparison group is people without the exposure, or with usual care.</a:t>
+              <a:t>Exposure: what comes first (a treatment, a strategy, a risk factor, a behaviour). Outcome: what we count later (death, infection, injury, a lab value). The comparison group is people without the exposure, or with usual care.</a:t>
             </a:r>
           </a:p>
           <a:p>
@@ -5037,7 +5037,7 @@
           <a:p>
             <a:r>
               <a:rPr lang="en-US" sz="1400" b="0" dirty="0"/>
-              <a:t>Misconception: 'the exposure must be harmful'. No - a treatment is an exposure too.</a:t>
+              <a:t>Misconception: 'the exposure must be harmful'. No. A treatment is an exposure too.</a:t>
             </a:r>
           </a:p>
           <a:p>
@@ -5136,7 +5136,7 @@
           <a:p>
             <a:r>
               <a:rPr lang="en-US" sz="1400" b="0" dirty="0"/>
-              <a:t>Cross-sectional study: one snapshot of a population at one moment - for example, a one-day survey of pressure injuries on every ward. It measures prevalence (how many have it NOW).</a:t>
+              <a:t>Cross-sectional study: one snapshot of a population at one moment, for example a one-day survey of pressure injuries on every ward. It measures prevalence (how many have it NOW).</a:t>
             </a:r>
           </a:p>
           <a:p>
@@ -5154,7 +5154,7 @@
           <a:p>
             <a:r>
               <a:rPr lang="en-US" sz="1400" b="0" dirty="0"/>
-              <a:t>Ask the room: give an example of a cross-sectional study you could run in your unit next week. Expected answer: a point-prevalence audit - catheter use, delirium screening, hand-hygiene compliance.</a:t>
+              <a:t>Ask the room: give an example of a cross-sectional study you could run in your unit next week. Expected answer: a point-prevalence audit (catheter use, delirium screening, hand-hygiene compliance).</a:t>
             </a:r>
           </a:p>
           <a:p>
@@ -5247,7 +5247,7 @@
           <a:p>
             <a:r>
               <a:rPr lang="en-US" sz="1400" b="0" dirty="0"/>
-              <a:t>Step 1-2: everyone present on one day, examined the same way (this protects against information bias - Session 4). Step 3: exposure (mattress) and outcome (pressure injury) are recorded at the same moment. Step 4: the result is a prevalence - 37 of 412 patients, 9%.</a:t>
+              <a:t>Step 1-2: everyone present on one day, examined the same way (this protects against information bias, which we meet in Session 4). Step 3: exposure (mattress) and outcome (pressure injury) are recorded at the same moment. Step 4: the result is a prevalence: 37 of 412 patients, 9%.</a:t>
             </a:r>
           </a:p>
           <a:p>
@@ -8540,7 +8540,7 @@
                 <a:latin typeface="Century Gothic"/>
                 <a:cs typeface="Century Gothic"/>
               </a:rPr>
-              <a:t>Proposal builder 3: design, setting and population (35 min) - wrap-up</a:t>
+              <a:t>Proposal builder 3: design, setting and population (35 min), then wrap-up</a:t>
             </a:r>
           </a:p>
         </p:txBody>
@@ -9850,7 +9850,7 @@
                 <a:latin typeface="Century Gothic"/>
                 <a:cs typeface="Century Gothic"/>
               </a:rPr>
-              <a:t>Cohort: exposure first, outcome later - time runs the right way.</a:t>
+              <a:t>Cohort: exposure first, outcome later, so time runs the right way.</a:t>
             </a:r>
           </a:p>
         </p:txBody>
@@ -10791,7 +10791,7 @@
                 <a:latin typeface="Century Gothic"/>
                 <a:cs typeface="Century Gothic"/>
               </a:rPr>
-              <a:t>In an RCT chance - not the clinician - decides who gets what.</a:t>
+              <a:t>In an RCT chance, not the clinician, decides who gets what.</a:t>
             </a:r>
           </a:p>
         </p:txBody>
@@ -11308,7 +11308,7 @@
                 <a:latin typeface="Century Gothic"/>
                 <a:cs typeface="Century Gothic"/>
               </a:rPr>
-              <a:t>Central computer, 1:1 - nobody can predict</a:t>
+              <a:t>Central computer, 1:1, so nobody can predict</a:t>
             </a:r>
           </a:p>
         </p:txBody>
@@ -11551,7 +11551,7 @@
                 <a:latin typeface="Century Gothic"/>
                 <a:cs typeface="Century Gothic"/>
               </a:rPr>
-              <a:t>In a trial the investigator assigns the exposure - by chance.</a:t>
+              <a:t>In a trial the investigator assigns the exposure by chance.</a:t>
             </a:r>
           </a:p>
         </p:txBody>
@@ -12097,7 +12097,7 @@
                 <a:latin typeface="Century Gothic"/>
                 <a:cs typeface="Century Gothic"/>
               </a:rPr>
-              <a:t>One design named for each scenario - answers on the next slide</a:t>
+              <a:t>One design named for each scenario (answers on the next slide)</a:t>
             </a:r>
           </a:p>
         </p:txBody>
@@ -13858,7 +13858,7 @@
                 <a:latin typeface="Century Gothic"/>
                 <a:cs typeface="Century Gothic"/>
               </a:rPr>
-              <a:t>No marks - just a warm-up</a:t>
+              <a:t>No marks, just a warm-up</a:t>
             </a:r>
           </a:p>
         </p:txBody>
@@ -14358,7 +14358,7 @@
                 <a:latin typeface="Century Gothic"/>
                 <a:cs typeface="Century Gothic"/>
               </a:rPr>
-              <a:t>Strengths and weaknesses at a glance</a:t>
+              <a:t>Every design trades something away</a:t>
             </a:r>
           </a:p>
         </p:txBody>
@@ -14425,7 +14425,7 @@
                 <a:latin typeface="Century Gothic"/>
                 <a:cs typeface="Century Gothic"/>
               </a:rPr>
-              <a:t>Every design trades something away.</a:t>
+              <a:t>Strengths and weaknesses at a glance</a:t>
             </a:r>
           </a:p>
         </p:txBody>
@@ -16243,7 +16243,7 @@
                 <a:latin typeface="Century Gothic"/>
                 <a:cs typeface="Century Gothic"/>
               </a:rPr>
-              <a:t>Star the one you found hardest - we discuss it together</a:t>
+              <a:t>Star the one you found hardest: we discuss it together</a:t>
             </a:r>
           </a:p>
         </p:txBody>
@@ -16758,7 +16758,7 @@
                 <a:latin typeface="Century Gothic"/>
                 <a:cs typeface="Century Gothic"/>
               </a:rPr>
-              <a:t>Optional: look at your group's question - which design fits it best?</a:t>
+              <a:t>Optional: which design best fits your group's question?</a:t>
             </a:r>
           </a:p>
           <a:p>
@@ -18105,7 +18105,7 @@
                 <a:latin typeface="Century Gothic"/>
                 <a:cs typeface="Century Gothic"/>
               </a:rPr>
-              <a:t>Ten words you will use all day - you do not need to memorise definitions</a:t>
+              <a:t>Ten words you will use all day (no need to memorise definitions)</a:t>
             </a:r>
           </a:p>
         </p:txBody>
@@ -19560,7 +19560,7 @@
                 <a:latin typeface="Century Gothic"/>
                 <a:cs typeface="Century Gothic"/>
               </a:rPr>
-              <a:t>Start from the question - the design follows from it.</a:t>
+              <a:t>Start from the question, and the design follows from it.</a:t>
             </a:r>
           </a:p>
         </p:txBody>
@@ -20137,7 +20137,7 @@
                 <a:latin typeface="Century Gothic"/>
                 <a:cs typeface="Century Gothic"/>
               </a:rPr>
-              <a:t>One design for each - answers in the notes</a:t>
+              <a:t>One design for each (answers in the notes)</a:t>
             </a:r>
           </a:p>
         </p:txBody>
@@ -20524,7 +20524,7 @@
                 <a:latin typeface="Century Gothic"/>
                 <a:cs typeface="Century Gothic"/>
               </a:rPr>
-              <a:t>Your own question: what will you be allowed to claim - caused or associated?</a:t>
+              <a:t>Your own question: may you say 'caused' or only 'associated'?</a:t>
             </a:r>
           </a:p>
           <a:p>
@@ -20789,7 +20789,7 @@
                 <a:latin typeface="Century Gothic"/>
                 <a:cs typeface="Century Gothic"/>
               </a:rPr>
-              <a:t>5 designs with a reason and a weakness - including your own question</a:t>
+              <a:t>5 designs with a reason and a weakness, including your own question</a:t>
             </a:r>
           </a:p>
         </p:txBody>
@@ -22990,7 +22990,7 @@
                 <a:latin typeface="Century Gothic"/>
                 <a:cs typeface="Century Gothic"/>
               </a:rPr>
-              <a:t>Extra slides - Session 3</a:t>
+              <a:t>Extra slides: Session 3</a:t>
             </a:r>
           </a:p>
         </p:txBody>
@@ -23060,7 +23060,7 @@
                 <a:latin typeface="Century Gothic"/>
                 <a:cs typeface="Century Gothic"/>
               </a:rPr>
-              <a:t>Extra slides - Session 3</a:t>
+              <a:t>Extra slides: Session 3</a:t>
             </a:r>
           </a:p>
           <a:p>
@@ -26968,7 +26968,7 @@
                 <a:latin typeface="Century Gothic"/>
                 <a:cs typeface="Century Gothic"/>
               </a:rPr>
-              <a:t>Name the exposure and the outcome first - the design follows.</a:t>
+              <a:t>Name the exposure and the outcome first, and the design follows.</a:t>
             </a:r>
           </a:p>
         </p:txBody>

--- a/en/files/slides/Session_3_EN.pptx
+++ b/en/files/slides/Session_3_EN.pptx
@@ -8349,8 +8349,8 @@
                 <a:solidFill>
                   <a:srgbClr val="0D7377"/>
                 </a:solidFill>
-                <a:latin typeface="Century Gothic"/>
-                <a:cs typeface="Century Gothic"/>
+                <a:latin typeface="Arial"/>
+                <a:cs typeface="Arial"/>
               </a:rPr>
               <a:t>Session 3 · Design: choosing the right study</a:t>
             </a:r>
@@ -8417,8 +8417,8 @@
                 <a:solidFill>
                   <a:srgbClr val="0070C0"/>
                 </a:solidFill>
-                <a:latin typeface="Century Gothic"/>
-                <a:cs typeface="Century Gothic"/>
+                <a:latin typeface="Arial"/>
+                <a:cs typeface="Arial"/>
               </a:rPr>
               <a:t>Week 3 · Saturday</a:t>
             </a:r>
@@ -8442,8 +8442,8 @@
                 <a:solidFill>
                   <a:srgbClr val="000000"/>
                 </a:solidFill>
-                <a:latin typeface="Century Gothic"/>
-                <a:cs typeface="Century Gothic"/>
+                <a:latin typeface="Arial"/>
+                <a:cs typeface="Arial"/>
               </a:rPr>
               <a:t>Recap quiz on Session 2 (10 min)</a:t>
             </a:r>
@@ -8461,8 +8461,8 @@
                 <a:solidFill>
                   <a:srgbClr val="000000"/>
                 </a:solidFill>
-                <a:latin typeface="Century Gothic"/>
-                <a:cs typeface="Century Gothic"/>
+                <a:latin typeface="Arial"/>
+                <a:cs typeface="Arial"/>
               </a:rPr>
               <a:t>3.1  Study designs in pictures (45 min) + exercise "Name that design" (15 min)</a:t>
             </a:r>
@@ -8480,8 +8480,8 @@
                 <a:solidFill>
                   <a:srgbClr val="000000"/>
                 </a:solidFill>
-                <a:latin typeface="Century Gothic"/>
-                <a:cs typeface="Century Gothic"/>
+                <a:latin typeface="Arial"/>
+                <a:cs typeface="Arial"/>
               </a:rPr>
               <a:t>Break (15 min)</a:t>
             </a:r>
@@ -8499,8 +8499,8 @@
                 <a:solidFill>
                   <a:srgbClr val="000000"/>
                 </a:solidFill>
-                <a:latin typeface="Century Gothic"/>
-                <a:cs typeface="Century Gothic"/>
+                <a:latin typeface="Arial"/>
+                <a:cs typeface="Arial"/>
               </a:rPr>
               <a:t>3.2  More designs: trial variants, pilots, quality improvement, qualitative (35 min)</a:t>
             </a:r>
@@ -8518,8 +8518,8 @@
                 <a:solidFill>
                   <a:srgbClr val="000000"/>
                 </a:solidFill>
-                <a:latin typeface="Century Gothic"/>
-                <a:cs typeface="Century Gothic"/>
+                <a:latin typeface="Arial"/>
+                <a:cs typeface="Arial"/>
               </a:rPr>
               <a:t>Exercise: choose the design for 5 questions (20 min)</a:t>
             </a:r>
@@ -8537,8 +8537,8 @@
                 <a:solidFill>
                   <a:srgbClr val="000000"/>
                 </a:solidFill>
-                <a:latin typeface="Century Gothic"/>
-                <a:cs typeface="Century Gothic"/>
+                <a:latin typeface="Arial"/>
+                <a:cs typeface="Arial"/>
               </a:rPr>
               <a:t>Proposal builder 3: design, setting and population (35 min), then wrap-up</a:t>
             </a:r>
@@ -8575,7 +8575,7 @@
                     <a:lumMod val="50000"/>
                   </a:schemeClr>
                 </a:solidFill>
-                <a:latin typeface="Verdana"/>
+                <a:latin typeface="Arial"/>
               </a:rPr>
               <a:t>Neudata | #ClearDataClearImpact</a:t>
             </a:r>
@@ -8705,8 +8705,8 @@
                 <a:solidFill>
                   <a:srgbClr val="0D7377"/>
                 </a:solidFill>
-                <a:latin typeface="Century Gothic"/>
-                <a:cs typeface="Century Gothic"/>
+                <a:latin typeface="Arial"/>
+                <a:cs typeface="Arial"/>
               </a:rPr>
               <a:t>Case-control: start from the outcome, look back</a:t>
             </a:r>
@@ -8802,8 +8802,8 @@
                 <a:solidFill>
                   <a:srgbClr val="FFFFFF"/>
                 </a:solidFill>
-                <a:latin typeface="Century Gothic"/>
-                <a:cs typeface="Century Gothic"/>
+                <a:latin typeface="Arial"/>
+                <a:cs typeface="Arial"/>
               </a:rPr>
               <a:t>KEY MESSAGE   </a:t>
             </a:r>
@@ -8812,8 +8812,8 @@
                 <a:solidFill>
                   <a:srgbClr val="FFFFFF"/>
                 </a:solidFill>
-                <a:latin typeface="Century Gothic"/>
-                <a:cs typeface="Century Gothic"/>
+                <a:latin typeface="Arial"/>
+                <a:cs typeface="Arial"/>
               </a:rPr>
               <a:t>Case-control: pick people BY outcome, then compare their past exposures.</a:t>
             </a:r>
@@ -8850,7 +8850,7 @@
                     <a:lumMod val="50000"/>
                   </a:schemeClr>
                 </a:solidFill>
-                <a:latin typeface="Verdana"/>
+                <a:latin typeface="Arial"/>
               </a:rPr>
               <a:t>Neudata | #ClearDataClearImpact</a:t>
             </a:r>
@@ -8980,8 +8980,8 @@
                 <a:solidFill>
                   <a:srgbClr val="0D7377"/>
                 </a:solidFill>
-                <a:latin typeface="Century Gothic"/>
-                <a:cs typeface="Century Gothic"/>
+                <a:latin typeface="Arial"/>
+                <a:cs typeface="Arial"/>
               </a:rPr>
               <a:t>Worked example: a case-control study in the ICU</a:t>
             </a:r>
@@ -9047,8 +9047,8 @@
                 <a:solidFill>
                   <a:srgbClr val="595959"/>
                 </a:solidFill>
-                <a:latin typeface="Century Gothic"/>
-                <a:cs typeface="Century Gothic"/>
+                <a:latin typeface="Arial"/>
+                <a:cs typeface="Arial"/>
               </a:rPr>
               <a:t>Question: is parenteral nutrition a risk factor for ICU candidaemia?</a:t>
             </a:r>
@@ -9092,10 +9092,10 @@
                 <a:solidFill>
                   <a:srgbClr val="FFFFFF"/>
                 </a:solidFill>
-                <a:latin typeface="Century Gothic"/>
-                <a:cs typeface="Century Gothic"/>
-              </a:rPr>
-              <a:t>1. Find cases</a:t>
+                <a:latin typeface="Arial"/>
+                <a:cs typeface="Arial"/>
+              </a:rPr>
+              <a:t>Find cases</a:t>
             </a:r>
           </a:p>
         </p:txBody>
@@ -9141,8 +9141,8 @@
                 <a:solidFill>
                   <a:srgbClr val="000000"/>
                 </a:solidFill>
-                <a:latin typeface="Century Gothic"/>
-                <a:cs typeface="Century Gothic"/>
+                <a:latin typeface="Arial"/>
+                <a:cs typeface="Arial"/>
               </a:rPr>
               <a:t>40 ICU patients with candidaemia (lab records)</a:t>
             </a:r>
@@ -9186,10 +9186,10 @@
                 <a:solidFill>
                   <a:srgbClr val="FFFFFF"/>
                 </a:solidFill>
-                <a:latin typeface="Century Gothic"/>
-                <a:cs typeface="Century Gothic"/>
-              </a:rPr>
-              <a:t>2. Find controls</a:t>
+                <a:latin typeface="Arial"/>
+                <a:cs typeface="Arial"/>
+              </a:rPr>
+              <a:t>Find controls</a:t>
             </a:r>
           </a:p>
         </p:txBody>
@@ -9235,8 +9235,8 @@
                 <a:solidFill>
                   <a:srgbClr val="000000"/>
                 </a:solidFill>
-                <a:latin typeface="Century Gothic"/>
-                <a:cs typeface="Century Gothic"/>
+                <a:latin typeface="Arial"/>
+                <a:cs typeface="Arial"/>
               </a:rPr>
               <a:t>80 ICU patients without it, same units and months</a:t>
             </a:r>
@@ -9280,10 +9280,10 @@
                 <a:solidFill>
                   <a:srgbClr val="FFFFFF"/>
                 </a:solidFill>
-                <a:latin typeface="Century Gothic"/>
-                <a:cs typeface="Century Gothic"/>
-              </a:rPr>
-              <a:t>3. Look back</a:t>
+                <a:latin typeface="Arial"/>
+                <a:cs typeface="Arial"/>
+              </a:rPr>
+              <a:t>Look back</a:t>
             </a:r>
           </a:p>
         </p:txBody>
@@ -9329,8 +9329,8 @@
                 <a:solidFill>
                   <a:srgbClr val="000000"/>
                 </a:solidFill>
-                <a:latin typeface="Century Gothic"/>
-                <a:cs typeface="Century Gothic"/>
+                <a:latin typeface="Arial"/>
+                <a:cs typeface="Arial"/>
               </a:rPr>
               <a:t>Parenteral nutrition in the 14 days before?</a:t>
             </a:r>
@@ -9374,10 +9374,10 @@
                 <a:solidFill>
                   <a:srgbClr val="FFFFFF"/>
                 </a:solidFill>
-                <a:latin typeface="Century Gothic"/>
-                <a:cs typeface="Century Gothic"/>
-              </a:rPr>
-              <a:t>4. Compare</a:t>
+                <a:latin typeface="Arial"/>
+                <a:cs typeface="Arial"/>
+              </a:rPr>
+              <a:t>Compare</a:t>
             </a:r>
           </a:p>
         </p:txBody>
@@ -9423,8 +9423,8 @@
                 <a:solidFill>
                   <a:srgbClr val="000000"/>
                 </a:solidFill>
-                <a:latin typeface="Century Gothic"/>
-                <a:cs typeface="Century Gothic"/>
+                <a:latin typeface="Arial"/>
+                <a:cs typeface="Arial"/>
               </a:rPr>
               <a:t>Exposed: 24 of 40 cases vs 16 of 80 controls</a:t>
             </a:r>
@@ -9468,10 +9468,10 @@
                 <a:solidFill>
                   <a:srgbClr val="FFFFFF"/>
                 </a:solidFill>
-                <a:latin typeface="Century Gothic"/>
-                <a:cs typeface="Century Gothic"/>
-              </a:rPr>
-              <a:t>5. Report</a:t>
+                <a:latin typeface="Arial"/>
+                <a:cs typeface="Arial"/>
+              </a:rPr>
+              <a:t>Report</a:t>
             </a:r>
           </a:p>
         </p:txBody>
@@ -9517,8 +9517,8 @@
                 <a:solidFill>
                   <a:srgbClr val="000000"/>
                 </a:solidFill>
-                <a:latin typeface="Century Gothic"/>
-                <a:cs typeface="Century Gothic"/>
+                <a:latin typeface="Arial"/>
+                <a:cs typeface="Arial"/>
               </a:rPr>
               <a:t>Odds ratio (calculated in Session 4)</a:t>
             </a:r>
@@ -9562,8 +9562,8 @@
                 <a:solidFill>
                   <a:srgbClr val="FFFFFF"/>
                 </a:solidFill>
-                <a:latin typeface="Century Gothic"/>
-                <a:cs typeface="Century Gothic"/>
+                <a:latin typeface="Arial"/>
+                <a:cs typeface="Arial"/>
               </a:rPr>
               <a:t>KEY MESSAGE   </a:t>
             </a:r>
@@ -9572,8 +9572,8 @@
                 <a:solidFill>
                   <a:srgbClr val="FFFFFF"/>
                 </a:solidFill>
-                <a:latin typeface="Century Gothic"/>
-                <a:cs typeface="Century Gothic"/>
+                <a:latin typeface="Arial"/>
+                <a:cs typeface="Arial"/>
               </a:rPr>
               <a:t>Cases and controls are chosen by OUTCOME; exposure is measured looking back.</a:t>
             </a:r>
@@ -9610,7 +9610,7 @@
                     <a:lumMod val="50000"/>
                   </a:schemeClr>
                 </a:solidFill>
-                <a:latin typeface="Verdana"/>
+                <a:latin typeface="Arial"/>
               </a:rPr>
               <a:t>Neudata | #ClearDataClearImpact</a:t>
             </a:r>
@@ -9740,8 +9740,8 @@
                 <a:solidFill>
                   <a:srgbClr val="0D7377"/>
                 </a:solidFill>
-                <a:latin typeface="Century Gothic"/>
-                <a:cs typeface="Century Gothic"/>
+                <a:latin typeface="Arial"/>
+                <a:cs typeface="Arial"/>
               </a:rPr>
               <a:t>Cohort: start from the exposure, follow forward</a:t>
             </a:r>
@@ -9837,8 +9837,8 @@
                 <a:solidFill>
                   <a:srgbClr val="FFFFFF"/>
                 </a:solidFill>
-                <a:latin typeface="Century Gothic"/>
-                <a:cs typeface="Century Gothic"/>
+                <a:latin typeface="Arial"/>
+                <a:cs typeface="Arial"/>
               </a:rPr>
               <a:t>KEY MESSAGE   </a:t>
             </a:r>
@@ -9847,8 +9847,8 @@
                 <a:solidFill>
                   <a:srgbClr val="FFFFFF"/>
                 </a:solidFill>
-                <a:latin typeface="Century Gothic"/>
-                <a:cs typeface="Century Gothic"/>
+                <a:latin typeface="Arial"/>
+                <a:cs typeface="Arial"/>
               </a:rPr>
               <a:t>Cohort: exposure first, outcome later, so time runs the right way.</a:t>
             </a:r>
@@ -9885,7 +9885,7 @@
                     <a:lumMod val="50000"/>
                   </a:schemeClr>
                 </a:solidFill>
-                <a:latin typeface="Verdana"/>
+                <a:latin typeface="Arial"/>
               </a:rPr>
               <a:t>Neudata | #ClearDataClearImpact</a:t>
             </a:r>
@@ -10015,8 +10015,8 @@
                 <a:solidFill>
                   <a:srgbClr val="0D7377"/>
                 </a:solidFill>
-                <a:latin typeface="Century Gothic"/>
-                <a:cs typeface="Century Gothic"/>
+                <a:latin typeface="Arial"/>
+                <a:cs typeface="Arial"/>
               </a:rPr>
               <a:t>Worked example: the Hyun cohort, step by step</a:t>
             </a:r>
@@ -10082,8 +10082,8 @@
                 <a:solidFill>
                   <a:srgbClr val="595959"/>
                 </a:solidFill>
-                <a:latin typeface="Century Gothic"/>
-                <a:cs typeface="Century Gothic"/>
+                <a:latin typeface="Arial"/>
+                <a:cs typeface="Arial"/>
               </a:rPr>
               <a:t>Question: is a positive fluid balance associated with death by day 28?</a:t>
             </a:r>
@@ -10127,10 +10127,10 @@
                 <a:solidFill>
                   <a:srgbClr val="FFFFFF"/>
                 </a:solidFill>
-                <a:latin typeface="Century Gothic"/>
-                <a:cs typeface="Century Gothic"/>
-              </a:rPr>
-              <a:t>1. Define the cohort</a:t>
+                <a:latin typeface="Arial"/>
+                <a:cs typeface="Arial"/>
+              </a:rPr>
+              <a:t>Define the cohort</a:t>
             </a:r>
           </a:p>
         </p:txBody>
@@ -10176,8 +10176,8 @@
                 <a:solidFill>
                   <a:srgbClr val="000000"/>
                 </a:solidFill>
-                <a:latin typeface="Century Gothic"/>
-                <a:cs typeface="Century Gothic"/>
+                <a:latin typeface="Arial"/>
+                <a:cs typeface="Arial"/>
               </a:rPr>
               <a:t>Adults with sepsis in 20 hospitals, ICU stay of 3+ days</a:t>
             </a:r>
@@ -10221,10 +10221,10 @@
                 <a:solidFill>
                   <a:srgbClr val="FFFFFF"/>
                 </a:solidFill>
-                <a:latin typeface="Century Gothic"/>
-                <a:cs typeface="Century Gothic"/>
-              </a:rPr>
-              <a:t>2. Measure exposure</a:t>
+                <a:latin typeface="Arial"/>
+                <a:cs typeface="Arial"/>
+              </a:rPr>
+              <a:t>Measure exposure</a:t>
             </a:r>
           </a:p>
         </p:txBody>
@@ -10270,8 +10270,8 @@
                 <a:solidFill>
                   <a:srgbClr val="000000"/>
                 </a:solidFill>
-                <a:latin typeface="Century Gothic"/>
-                <a:cs typeface="Century Gothic"/>
+                <a:latin typeface="Arial"/>
+                <a:cs typeface="Arial"/>
               </a:rPr>
               <a:t>Cumulative fluid balance, ICU days 1-3: positive or negative</a:t>
             </a:r>
@@ -10315,10 +10315,10 @@
                 <a:solidFill>
                   <a:srgbClr val="FFFFFF"/>
                 </a:solidFill>
-                <a:latin typeface="Century Gothic"/>
-                <a:cs typeface="Century Gothic"/>
-              </a:rPr>
-              <a:t>3. Follow forward</a:t>
+                <a:latin typeface="Arial"/>
+                <a:cs typeface="Arial"/>
+              </a:rPr>
+              <a:t>Follow forward</a:t>
             </a:r>
           </a:p>
         </p:txBody>
@@ -10364,8 +10364,8 @@
                 <a:solidFill>
                   <a:srgbClr val="000000"/>
                 </a:solidFill>
-                <a:latin typeface="Century Gothic"/>
-                <a:cs typeface="Century Gothic"/>
+                <a:latin typeface="Arial"/>
+                <a:cs typeface="Arial"/>
               </a:rPr>
               <a:t>Record who dies by day 28</a:t>
             </a:r>
@@ -10409,10 +10409,10 @@
                 <a:solidFill>
                   <a:srgbClr val="FFFFFF"/>
                 </a:solidFill>
-                <a:latin typeface="Century Gothic"/>
-                <a:cs typeface="Century Gothic"/>
-              </a:rPr>
-              <a:t>4. Compare</a:t>
+                <a:latin typeface="Arial"/>
+                <a:cs typeface="Arial"/>
+              </a:rPr>
+              <a:t>Compare</a:t>
             </a:r>
           </a:p>
         </p:txBody>
@@ -10458,8 +10458,8 @@
                 <a:solidFill>
                   <a:srgbClr val="000000"/>
                 </a:solidFill>
-                <a:latin typeface="Century Gothic"/>
-                <a:cs typeface="Century Gothic"/>
+                <a:latin typeface="Arial"/>
+                <a:cs typeface="Arial"/>
               </a:rPr>
               <a:t>Matched pairs; HR 2.13 for day 2</a:t>
             </a:r>
@@ -10503,8 +10503,8 @@
                 <a:solidFill>
                   <a:srgbClr val="FFFFFF"/>
                 </a:solidFill>
-                <a:latin typeface="Century Gothic"/>
-                <a:cs typeface="Century Gothic"/>
+                <a:latin typeface="Arial"/>
+                <a:cs typeface="Arial"/>
               </a:rPr>
               <a:t>KEY MESSAGE   </a:t>
             </a:r>
@@ -10513,8 +10513,8 @@
                 <a:solidFill>
                   <a:srgbClr val="FFFFFF"/>
                 </a:solidFill>
-                <a:latin typeface="Century Gothic"/>
-                <a:cs typeface="Century Gothic"/>
+                <a:latin typeface="Arial"/>
+                <a:cs typeface="Arial"/>
               </a:rPr>
               <a:t>A cohort groups people by EXPOSURE and follows them to the OUTCOME.</a:t>
             </a:r>
@@ -10551,7 +10551,7 @@
                     <a:lumMod val="50000"/>
                   </a:schemeClr>
                 </a:solidFill>
-                <a:latin typeface="Verdana"/>
+                <a:latin typeface="Arial"/>
               </a:rPr>
               <a:t>Neudata | #ClearDataClearImpact</a:t>
             </a:r>
@@ -10681,8 +10681,8 @@
                 <a:solidFill>
                   <a:srgbClr val="0D7377"/>
                 </a:solidFill>
-                <a:latin typeface="Century Gothic"/>
-                <a:cs typeface="Century Gothic"/>
+                <a:latin typeface="Arial"/>
+                <a:cs typeface="Arial"/>
               </a:rPr>
               <a:t>RCT: randomise, then follow forward</a:t>
             </a:r>
@@ -10778,8 +10778,8 @@
                 <a:solidFill>
                   <a:srgbClr val="FFFFFF"/>
                 </a:solidFill>
-                <a:latin typeface="Century Gothic"/>
-                <a:cs typeface="Century Gothic"/>
+                <a:latin typeface="Arial"/>
+                <a:cs typeface="Arial"/>
               </a:rPr>
               <a:t>KEY MESSAGE   </a:t>
             </a:r>
@@ -10788,8 +10788,8 @@
                 <a:solidFill>
                   <a:srgbClr val="FFFFFF"/>
                 </a:solidFill>
-                <a:latin typeface="Century Gothic"/>
-                <a:cs typeface="Century Gothic"/>
+                <a:latin typeface="Arial"/>
+                <a:cs typeface="Arial"/>
               </a:rPr>
               <a:t>In an RCT chance, not the clinician, decides who gets what.</a:t>
             </a:r>
@@ -10826,7 +10826,7 @@
                     <a:lumMod val="50000"/>
                   </a:schemeClr>
                 </a:solidFill>
-                <a:latin typeface="Verdana"/>
+                <a:latin typeface="Arial"/>
               </a:rPr>
               <a:t>Neudata | #ClearDataClearImpact</a:t>
             </a:r>
@@ -10956,8 +10956,8 @@
                 <a:solidFill>
                   <a:srgbClr val="0D7377"/>
                 </a:solidFill>
-                <a:latin typeface="Century Gothic"/>
-                <a:cs typeface="Century Gothic"/>
+                <a:latin typeface="Arial"/>
+                <a:cs typeface="Arial"/>
               </a:rPr>
               <a:t>Worked example: the Boulet trial, step by step</a:t>
             </a:r>
@@ -11023,8 +11023,8 @@
                 <a:solidFill>
                   <a:srgbClr val="595959"/>
                 </a:solidFill>
-                <a:latin typeface="Century Gothic"/>
-                <a:cs typeface="Century Gothic"/>
+                <a:latin typeface="Arial"/>
+                <a:cs typeface="Arial"/>
               </a:rPr>
               <a:t>Question: does restricting non-resuscitation fluids reduce the day-5 fluid balance?</a:t>
             </a:r>
@@ -11068,10 +11068,10 @@
                 <a:solidFill>
                   <a:srgbClr val="FFFFFF"/>
                 </a:solidFill>
-                <a:latin typeface="Century Gothic"/>
-                <a:cs typeface="Century Gothic"/>
-              </a:rPr>
-              <a:t>1. Eligibility</a:t>
+                <a:latin typeface="Arial"/>
+                <a:cs typeface="Arial"/>
+              </a:rPr>
+              <a:t>Eligibility</a:t>
             </a:r>
           </a:p>
         </p:txBody>
@@ -11117,8 +11117,8 @@
                 <a:solidFill>
                   <a:srgbClr val="000000"/>
                 </a:solidFill>
-                <a:latin typeface="Century Gothic"/>
-                <a:cs typeface="Century Gothic"/>
+                <a:latin typeface="Arial"/>
+                <a:cs typeface="Arial"/>
               </a:rPr>
               <a:t>Septic shock, age 18-85, vasopressor &lt; 24 h</a:t>
             </a:r>
@@ -11162,10 +11162,10 @@
                 <a:solidFill>
                   <a:srgbClr val="FFFFFF"/>
                 </a:solidFill>
-                <a:latin typeface="Century Gothic"/>
-                <a:cs typeface="Century Gothic"/>
-              </a:rPr>
-              <a:t>2. Consent</a:t>
+                <a:latin typeface="Arial"/>
+                <a:cs typeface="Arial"/>
+              </a:rPr>
+              <a:t>Consent</a:t>
             </a:r>
           </a:p>
         </p:txBody>
@@ -11211,8 +11211,8 @@
                 <a:solidFill>
                   <a:srgbClr val="000000"/>
                 </a:solidFill>
-                <a:latin typeface="Century Gothic"/>
-                <a:cs typeface="Century Gothic"/>
+                <a:latin typeface="Arial"/>
+                <a:cs typeface="Arial"/>
               </a:rPr>
               <a:t>Patient or legal surrogate</a:t>
             </a:r>
@@ -11256,10 +11256,10 @@
                 <a:solidFill>
                   <a:srgbClr val="FFFFFF"/>
                 </a:solidFill>
-                <a:latin typeface="Century Gothic"/>
-                <a:cs typeface="Century Gothic"/>
-              </a:rPr>
-              <a:t>3. Randomise</a:t>
+                <a:latin typeface="Arial"/>
+                <a:cs typeface="Arial"/>
+              </a:rPr>
+              <a:t>Randomise</a:t>
             </a:r>
           </a:p>
         </p:txBody>
@@ -11305,8 +11305,8 @@
                 <a:solidFill>
                   <a:srgbClr val="000000"/>
                 </a:solidFill>
-                <a:latin typeface="Century Gothic"/>
-                <a:cs typeface="Century Gothic"/>
+                <a:latin typeface="Arial"/>
+                <a:cs typeface="Arial"/>
               </a:rPr>
               <a:t>Central computer, 1:1, so nobody can predict</a:t>
             </a:r>
@@ -11350,10 +11350,10 @@
                 <a:solidFill>
                   <a:srgbClr val="FFFFFF"/>
                 </a:solidFill>
-                <a:latin typeface="Century Gothic"/>
-                <a:cs typeface="Century Gothic"/>
-              </a:rPr>
-              <a:t>4. Treat</a:t>
+                <a:latin typeface="Arial"/>
+                <a:cs typeface="Arial"/>
+              </a:rPr>
+              <a:t>Treat</a:t>
             </a:r>
           </a:p>
         </p:txBody>
@@ -11399,8 +11399,8 @@
                 <a:solidFill>
                   <a:srgbClr val="000000"/>
                 </a:solidFill>
-                <a:latin typeface="Century Gothic"/>
-                <a:cs typeface="Century Gothic"/>
+                <a:latin typeface="Arial"/>
+                <a:cs typeface="Arial"/>
               </a:rPr>
               <a:t>Restrictive vs usual care for 7 days</a:t>
             </a:r>
@@ -11444,10 +11444,10 @@
                 <a:solidFill>
                   <a:srgbClr val="FFFFFF"/>
                 </a:solidFill>
-                <a:latin typeface="Century Gothic"/>
-                <a:cs typeface="Century Gothic"/>
-              </a:rPr>
-              <a:t>5. Measure</a:t>
+                <a:latin typeface="Arial"/>
+                <a:cs typeface="Arial"/>
+              </a:rPr>
+              <a:t>Measure</a:t>
             </a:r>
           </a:p>
         </p:txBody>
@@ -11493,8 +11493,8 @@
                 <a:solidFill>
                   <a:srgbClr val="000000"/>
                 </a:solidFill>
-                <a:latin typeface="Century Gothic"/>
-                <a:cs typeface="Century Gothic"/>
+                <a:latin typeface="Arial"/>
+                <a:cs typeface="Arial"/>
               </a:rPr>
               <a:t>Fluid balance at day 5; death by day 28</a:t>
             </a:r>
@@ -11538,8 +11538,8 @@
                 <a:solidFill>
                   <a:srgbClr val="FFFFFF"/>
                 </a:solidFill>
-                <a:latin typeface="Century Gothic"/>
-                <a:cs typeface="Century Gothic"/>
+                <a:latin typeface="Arial"/>
+                <a:cs typeface="Arial"/>
               </a:rPr>
               <a:t>KEY MESSAGE   </a:t>
             </a:r>
@@ -11548,8 +11548,8 @@
                 <a:solidFill>
                   <a:srgbClr val="FFFFFF"/>
                 </a:solidFill>
-                <a:latin typeface="Century Gothic"/>
-                <a:cs typeface="Century Gothic"/>
+                <a:latin typeface="Arial"/>
+                <a:cs typeface="Arial"/>
               </a:rPr>
               <a:t>In a trial the investigator assigns the exposure by chance.</a:t>
             </a:r>
@@ -11586,7 +11586,7 @@
                     <a:lumMod val="50000"/>
                   </a:schemeClr>
                 </a:solidFill>
-                <a:latin typeface="Verdana"/>
+                <a:latin typeface="Arial"/>
               </a:rPr>
               <a:t>Neudata | #ClearDataClearImpact</a:t>
             </a:r>
@@ -11716,8 +11716,8 @@
                 <a:solidFill>
                   <a:srgbClr val="0D7377"/>
                 </a:solidFill>
-                <a:latin typeface="Century Gothic"/>
-                <a:cs typeface="Century Gothic"/>
+                <a:latin typeface="Arial"/>
+                <a:cs typeface="Arial"/>
               </a:rPr>
               <a:t>Check your understanding: name the design</a:t>
             </a:r>
@@ -11787,8 +11787,8 @@
                 <a:solidFill>
                   <a:srgbClr val="FFFFFF"/>
                 </a:solidFill>
-                <a:latin typeface="Century Gothic"/>
-                <a:cs typeface="Century Gothic"/>
+                <a:latin typeface="Arial"/>
+                <a:cs typeface="Arial"/>
               </a:rPr>
               <a:t>QUICK QUIZ   |   3 min</a:t>
             </a:r>
@@ -11825,25 +11825,19 @@
               <a:spcBef>
                 <a:spcPts val="450"/>
               </a:spcBef>
-              <a:buNone/>
-            </a:pPr>
-            <a:r>
-              <a:rPr lang="en-US" sz="1650" b="1" dirty="0">
-                <a:solidFill>
-                  <a:srgbClr val="6C3483"/>
-                </a:solidFill>
-                <a:latin typeface="Century Gothic"/>
-                <a:cs typeface="Century Gothic"/>
-              </a:rPr>
-              <a:t>1.  </a:t>
-            </a:r>
+              <a:buClr>
+                <a:srgbClr val="6C3483"/>
+              </a:buClr>
+              <a:buFont typeface="Arial"/>
+              <a:buChar char="•"/>
+            </a:pPr>
             <a:r>
               <a:rPr lang="en-US" sz="1650" dirty="0">
                 <a:solidFill>
                   <a:srgbClr val="000000"/>
                 </a:solidFill>
-                <a:latin typeface="Century Gothic"/>
-                <a:cs typeface="Century Gothic"/>
+                <a:latin typeface="Arial"/>
+                <a:cs typeface="Arial"/>
               </a:rPr>
               <a:t>A. All 300 inpatients are checked today for a urinary catheter and for urinary infection</a:t>
             </a:r>
@@ -11856,25 +11850,19 @@
               <a:spcBef>
                 <a:spcPts val="450"/>
               </a:spcBef>
-              <a:buNone/>
-            </a:pPr>
-            <a:r>
-              <a:rPr lang="en-US" sz="1650" b="1" dirty="0">
-                <a:solidFill>
-                  <a:srgbClr val="6C3483"/>
-                </a:solidFill>
-                <a:latin typeface="Century Gothic"/>
-                <a:cs typeface="Century Gothic"/>
-              </a:rPr>
-              <a:t>2.  </a:t>
-            </a:r>
+              <a:buClr>
+                <a:srgbClr val="6C3483"/>
+              </a:buClr>
+              <a:buFont typeface="Arial"/>
+              <a:buChar char="•"/>
+            </a:pPr>
             <a:r>
               <a:rPr lang="en-US" sz="1650" dirty="0">
                 <a:solidFill>
                   <a:srgbClr val="000000"/>
                 </a:solidFill>
-                <a:latin typeface="Century Gothic"/>
-                <a:cs typeface="Century Gothic"/>
+                <a:latin typeface="Arial"/>
+                <a:cs typeface="Arial"/>
               </a:rPr>
               <a:t>B. Patients with ventilator pneumonia are compared with patients without it for earlier sedation use</a:t>
             </a:r>
@@ -11887,25 +11875,19 @@
               <a:spcBef>
                 <a:spcPts val="450"/>
               </a:spcBef>
-              <a:buNone/>
-            </a:pPr>
-            <a:r>
-              <a:rPr lang="en-US" sz="1650" b="1" dirty="0">
-                <a:solidFill>
-                  <a:srgbClr val="6C3483"/>
-                </a:solidFill>
-                <a:latin typeface="Century Gothic"/>
-                <a:cs typeface="Century Gothic"/>
-              </a:rPr>
-              <a:t>3.  </a:t>
-            </a:r>
+              <a:buClr>
+                <a:srgbClr val="6C3483"/>
+              </a:buClr>
+              <a:buFont typeface="Arial"/>
+              <a:buChar char="•"/>
+            </a:pPr>
             <a:r>
               <a:rPr lang="en-US" sz="1650" dirty="0">
                 <a:solidFill>
                   <a:srgbClr val="000000"/>
                 </a:solidFill>
-                <a:latin typeface="Century Gothic"/>
-                <a:cs typeface="Century Gothic"/>
+                <a:latin typeface="Arial"/>
+                <a:cs typeface="Arial"/>
               </a:rPr>
               <a:t>C. Patients who received early mobilisation (physiotherapist's decision) and those who did not are followed to discharge</a:t>
             </a:r>
@@ -11949,8 +11931,8 @@
                 <a:solidFill>
                   <a:srgbClr val="6C3483"/>
                 </a:solidFill>
-                <a:latin typeface="Century Gothic"/>
-                <a:cs typeface="Century Gothic"/>
+                <a:latin typeface="Arial"/>
+                <a:cs typeface="Arial"/>
               </a:rPr>
               <a:t>Choose</a:t>
             </a:r>
@@ -11971,8 +11953,8 @@
                 <a:solidFill>
                   <a:srgbClr val="000000"/>
                 </a:solidFill>
-                <a:latin typeface="Century Gothic"/>
-                <a:cs typeface="Century Gothic"/>
+                <a:latin typeface="Arial"/>
+                <a:cs typeface="Arial"/>
               </a:rPr>
               <a:t>Cross-sectional</a:t>
             </a:r>
@@ -11993,8 +11975,8 @@
                 <a:solidFill>
                   <a:srgbClr val="000000"/>
                 </a:solidFill>
-                <a:latin typeface="Century Gothic"/>
-                <a:cs typeface="Century Gothic"/>
+                <a:latin typeface="Arial"/>
+                <a:cs typeface="Arial"/>
               </a:rPr>
               <a:t>Case-control</a:t>
             </a:r>
@@ -12015,8 +11997,8 @@
                 <a:solidFill>
                   <a:srgbClr val="000000"/>
                 </a:solidFill>
-                <a:latin typeface="Century Gothic"/>
-                <a:cs typeface="Century Gothic"/>
+                <a:latin typeface="Arial"/>
+                <a:cs typeface="Arial"/>
               </a:rPr>
               <a:t>Cohort</a:t>
             </a:r>
@@ -12037,8 +12019,8 @@
                 <a:solidFill>
                   <a:srgbClr val="000000"/>
                 </a:solidFill>
-                <a:latin typeface="Century Gothic"/>
-                <a:cs typeface="Century Gothic"/>
+                <a:latin typeface="Arial"/>
+                <a:cs typeface="Arial"/>
               </a:rPr>
               <a:t>RCT</a:t>
             </a:r>
@@ -12084,8 +12066,8 @@
                 <a:solidFill>
                   <a:srgbClr val="6C3483"/>
                 </a:solidFill>
-                <a:latin typeface="Century Gothic"/>
-                <a:cs typeface="Century Gothic"/>
+                <a:latin typeface="Arial"/>
+                <a:cs typeface="Arial"/>
               </a:rPr>
               <a:t>OUTPUT   </a:t>
             </a:r>
@@ -12094,8 +12076,8 @@
                 <a:solidFill>
                   <a:srgbClr val="000000"/>
                 </a:solidFill>
-                <a:latin typeface="Century Gothic"/>
-                <a:cs typeface="Century Gothic"/>
+                <a:latin typeface="Arial"/>
+                <a:cs typeface="Arial"/>
               </a:rPr>
               <a:t>One design named for each scenario (answers on the next slide)</a:t>
             </a:r>
@@ -12132,7 +12114,7 @@
                     <a:lumMod val="50000"/>
                   </a:schemeClr>
                 </a:solidFill>
-                <a:latin typeface="Verdana"/>
+                <a:latin typeface="Arial"/>
               </a:rPr>
               <a:t>Neudata | #ClearDataClearImpact</a:t>
             </a:r>
@@ -12262,8 +12244,8 @@
                 <a:solidFill>
                   <a:srgbClr val="0D7377"/>
                 </a:solidFill>
-                <a:latin typeface="Century Gothic"/>
-                <a:cs typeface="Century Gothic"/>
+                <a:latin typeface="Arial"/>
+                <a:cs typeface="Arial"/>
               </a:rPr>
               <a:t>Answers: name the design</a:t>
             </a:r>
@@ -12333,8 +12315,8 @@
                 <a:solidFill>
                   <a:srgbClr val="FFFFFF"/>
                 </a:solidFill>
-                <a:latin typeface="Century Gothic"/>
-                <a:cs typeface="Century Gothic"/>
+                <a:latin typeface="Arial"/>
+                <a:cs typeface="Arial"/>
               </a:rPr>
               <a:t>A. Cross-sectional</a:t>
             </a:r>
@@ -12382,8 +12364,8 @@
                 <a:solidFill>
                   <a:srgbClr val="000000"/>
                 </a:solidFill>
-                <a:latin typeface="Century Gothic"/>
-                <a:cs typeface="Century Gothic"/>
+                <a:latin typeface="Arial"/>
+                <a:cs typeface="Arial"/>
               </a:rPr>
               <a:t>One day, everyone</a:t>
             </a:r>
@@ -12403,8 +12385,8 @@
                 <a:solidFill>
                   <a:srgbClr val="000000"/>
                 </a:solidFill>
-                <a:latin typeface="Century Gothic"/>
-                <a:cs typeface="Century Gothic"/>
+                <a:latin typeface="Arial"/>
+                <a:cs typeface="Arial"/>
               </a:rPr>
               <a:t>Exposure and outcome measured together</a:t>
             </a:r>
@@ -12424,8 +12406,8 @@
                 <a:solidFill>
                   <a:srgbClr val="000000"/>
                 </a:solidFill>
-                <a:latin typeface="Century Gothic"/>
-                <a:cs typeface="Century Gothic"/>
+                <a:latin typeface="Arial"/>
+                <a:cs typeface="Arial"/>
               </a:rPr>
               <a:t>Gives prevalence</a:t>
             </a:r>
@@ -12467,8 +12449,8 @@
                 <a:solidFill>
                   <a:srgbClr val="FFFFFF"/>
                 </a:solidFill>
-                <a:latin typeface="Century Gothic"/>
-                <a:cs typeface="Century Gothic"/>
+                <a:latin typeface="Arial"/>
+                <a:cs typeface="Arial"/>
               </a:rPr>
               <a:t>B. Case-control</a:t>
             </a:r>
@@ -12516,8 +12498,8 @@
                 <a:solidFill>
                   <a:srgbClr val="000000"/>
                 </a:solidFill>
-                <a:latin typeface="Century Gothic"/>
-                <a:cs typeface="Century Gothic"/>
+                <a:latin typeface="Arial"/>
+                <a:cs typeface="Arial"/>
               </a:rPr>
               <a:t>Chosen by OUTCOME (pneumonia)</a:t>
             </a:r>
@@ -12537,8 +12519,8 @@
                 <a:solidFill>
                   <a:srgbClr val="000000"/>
                 </a:solidFill>
-                <a:latin typeface="Century Gothic"/>
-                <a:cs typeface="Century Gothic"/>
+                <a:latin typeface="Arial"/>
+                <a:cs typeface="Arial"/>
               </a:rPr>
               <a:t>Look back for exposure (sedation)</a:t>
             </a:r>
@@ -12558,8 +12540,8 @@
                 <a:solidFill>
                   <a:srgbClr val="000000"/>
                 </a:solidFill>
-                <a:latin typeface="Century Gothic"/>
-                <a:cs typeface="Century Gothic"/>
+                <a:latin typeface="Arial"/>
+                <a:cs typeface="Arial"/>
               </a:rPr>
               <a:t>Gives an odds ratio</a:t>
             </a:r>
@@ -12601,8 +12583,8 @@
                 <a:solidFill>
                   <a:srgbClr val="FFFFFF"/>
                 </a:solidFill>
-                <a:latin typeface="Century Gothic"/>
-                <a:cs typeface="Century Gothic"/>
+                <a:latin typeface="Arial"/>
+                <a:cs typeface="Arial"/>
               </a:rPr>
               <a:t>C. Cohort</a:t>
             </a:r>
@@ -12650,8 +12632,8 @@
                 <a:solidFill>
                   <a:srgbClr val="000000"/>
                 </a:solidFill>
-                <a:latin typeface="Century Gothic"/>
-                <a:cs typeface="Century Gothic"/>
+                <a:latin typeface="Arial"/>
+                <a:cs typeface="Arial"/>
               </a:rPr>
               <a:t>Grouped by EXPOSURE (mobilisation)</a:t>
             </a:r>
@@ -12671,8 +12653,8 @@
                 <a:solidFill>
                   <a:srgbClr val="000000"/>
                 </a:solidFill>
-                <a:latin typeface="Century Gothic"/>
-                <a:cs typeface="Century Gothic"/>
+                <a:latin typeface="Arial"/>
+                <a:cs typeface="Arial"/>
               </a:rPr>
               <a:t>Followed forward to discharge</a:t>
             </a:r>
@@ -12692,8 +12674,8 @@
                 <a:solidFill>
                   <a:srgbClr val="000000"/>
                 </a:solidFill>
-                <a:latin typeface="Century Gothic"/>
-                <a:cs typeface="Century Gothic"/>
+                <a:latin typeface="Arial"/>
+                <a:cs typeface="Arial"/>
               </a:rPr>
               <a:t>Not an RCT: nobody randomised</a:t>
             </a:r>
@@ -12737,8 +12719,8 @@
                 <a:solidFill>
                   <a:srgbClr val="FFFFFF"/>
                 </a:solidFill>
-                <a:latin typeface="Century Gothic"/>
-                <a:cs typeface="Century Gothic"/>
+                <a:latin typeface="Arial"/>
+                <a:cs typeface="Arial"/>
               </a:rPr>
               <a:t>KEY MESSAGE   </a:t>
             </a:r>
@@ -12747,8 +12729,8 @@
                 <a:solidFill>
                   <a:srgbClr val="FFFFFF"/>
                 </a:solidFill>
-                <a:latin typeface="Century Gothic"/>
-                <a:cs typeface="Century Gothic"/>
+                <a:latin typeface="Arial"/>
+                <a:cs typeface="Arial"/>
               </a:rPr>
               <a:t>Ask: chosen by exposure or by outcome? Assigned by chance or not?</a:t>
             </a:r>
@@ -12785,7 +12767,7 @@
                     <a:lumMod val="50000"/>
                   </a:schemeClr>
                 </a:solidFill>
-                <a:latin typeface="Verdana"/>
+                <a:latin typeface="Arial"/>
               </a:rPr>
               <a:t>Neudata | #ClearDataClearImpact</a:t>
             </a:r>
@@ -12915,8 +12897,8 @@
                 <a:solidFill>
                   <a:srgbClr val="0D7377"/>
                 </a:solidFill>
-                <a:latin typeface="Century Gothic"/>
-                <a:cs typeface="Century Gothic"/>
+                <a:latin typeface="Arial"/>
+                <a:cs typeface="Arial"/>
               </a:rPr>
               <a:t>Systematic reviews and meta-analysis: studies of studies</a:t>
             </a:r>
@@ -13012,8 +12994,8 @@
                 <a:solidFill>
                   <a:srgbClr val="FFFFFF"/>
                 </a:solidFill>
-                <a:latin typeface="Century Gothic"/>
-                <a:cs typeface="Century Gothic"/>
+                <a:latin typeface="Arial"/>
+                <a:cs typeface="Arial"/>
               </a:rPr>
               <a:t>KEY MESSAGE   </a:t>
             </a:r>
@@ -13022,8 +13004,8 @@
                 <a:solidFill>
                   <a:srgbClr val="FFFFFF"/>
                 </a:solidFill>
-                <a:latin typeface="Century Gothic"/>
-                <a:cs typeface="Century Gothic"/>
+                <a:latin typeface="Arial"/>
+                <a:cs typeface="Arial"/>
               </a:rPr>
               <a:t>A systematic review searches and appraises; a meta-analysis pools the numbers.</a:t>
             </a:r>
@@ -13060,7 +13042,7 @@
                     <a:lumMod val="50000"/>
                   </a:schemeClr>
                 </a:solidFill>
-                <a:latin typeface="Verdana"/>
+                <a:latin typeface="Arial"/>
               </a:rPr>
               <a:t>Neudata | #ClearDataClearImpact</a:t>
             </a:r>
@@ -13190,8 +13172,8 @@
                 <a:solidFill>
                   <a:srgbClr val="0D7377"/>
                 </a:solidFill>
-                <a:latin typeface="Century Gothic"/>
-                <a:cs typeface="Century Gothic"/>
+                <a:latin typeface="Arial"/>
+                <a:cs typeface="Arial"/>
               </a:rPr>
               <a:t>Where the two papers sit on the evidence pyramid</a:t>
             </a:r>
@@ -13257,8 +13239,8 @@
                 <a:solidFill>
                   <a:srgbClr val="0D7377"/>
                 </a:solidFill>
-                <a:latin typeface="Century Gothic"/>
-                <a:cs typeface="Century Gothic"/>
+                <a:latin typeface="Arial"/>
+                <a:cs typeface="Arial"/>
               </a:rPr>
               <a:t>Read it with care</a:t>
             </a:r>
@@ -13276,8 +13258,8 @@
                 <a:solidFill>
                   <a:srgbClr val="000000"/>
                 </a:solidFill>
-                <a:latin typeface="Century Gothic"/>
-                <a:cs typeface="Century Gothic"/>
+                <a:latin typeface="Arial"/>
+                <a:cs typeface="Arial"/>
               </a:rPr>
               <a:t>Higher = less prone to bias, on average</a:t>
             </a:r>
@@ -13295,8 +13277,8 @@
                 <a:solidFill>
                   <a:srgbClr val="000000"/>
                 </a:solidFill>
-                <a:latin typeface="Century Gothic"/>
-                <a:cs typeface="Century Gothic"/>
+                <a:latin typeface="Arial"/>
+                <a:cs typeface="Arial"/>
               </a:rPr>
               <a:t>A rule of thumb, not a law</a:t>
             </a:r>
@@ -13314,8 +13296,8 @@
                 <a:solidFill>
                   <a:srgbClr val="000000"/>
                 </a:solidFill>
-                <a:latin typeface="Century Gothic"/>
-                <a:cs typeface="Century Gothic"/>
+                <a:latin typeface="Arial"/>
+                <a:cs typeface="Arial"/>
               </a:rPr>
               <a:t>A good cohort can beat a poor RCT</a:t>
             </a:r>
@@ -13333,8 +13315,8 @@
                 <a:solidFill>
                   <a:srgbClr val="000000"/>
                 </a:solidFill>
-                <a:latin typeface="Century Gothic"/>
-                <a:cs typeface="Century Gothic"/>
+                <a:latin typeface="Arial"/>
+                <a:cs typeface="Arial"/>
               </a:rPr>
               <a:t>The best design is the one that fits the question</a:t>
             </a:r>
@@ -13395,7 +13377,7 @@
                     <a:lumMod val="50000"/>
                   </a:schemeClr>
                 </a:solidFill>
-                <a:latin typeface="Verdana"/>
+                <a:latin typeface="Arial"/>
               </a:rPr>
               <a:t>Neudata | #ClearDataClearImpact</a:t>
             </a:r>
@@ -13525,8 +13507,8 @@
                 <a:solidFill>
                   <a:srgbClr val="0D7377"/>
                 </a:solidFill>
-                <a:latin typeface="Century Gothic"/>
-                <a:cs typeface="Century Gothic"/>
+                <a:latin typeface="Arial"/>
+                <a:cs typeface="Arial"/>
               </a:rPr>
               <a:t>Recap quiz: three questions on Session 2</a:t>
             </a:r>
@@ -13596,8 +13578,8 @@
                 <a:solidFill>
                   <a:srgbClr val="FFFFFF"/>
                 </a:solidFill>
-                <a:latin typeface="Century Gothic"/>
-                <a:cs typeface="Century Gothic"/>
+                <a:latin typeface="Arial"/>
+                <a:cs typeface="Arial"/>
               </a:rPr>
               <a:t>QUICK QUIZ   |   10 min</a:t>
             </a:r>
@@ -13634,25 +13616,19 @@
               <a:spcBef>
                 <a:spcPts val="450"/>
               </a:spcBef>
-              <a:buNone/>
-            </a:pPr>
-            <a:r>
-              <a:rPr lang="en-US" sz="1650" b="1" dirty="0">
-                <a:solidFill>
-                  <a:srgbClr val="6C3483"/>
-                </a:solidFill>
-                <a:latin typeface="Century Gothic"/>
-                <a:cs typeface="Century Gothic"/>
-              </a:rPr>
-              <a:t>1.  </a:t>
-            </a:r>
+              <a:buClr>
+                <a:srgbClr val="6C3483"/>
+              </a:buClr>
+              <a:buFont typeface="Arial"/>
+              <a:buChar char="•"/>
+            </a:pPr>
             <a:r>
               <a:rPr lang="en-US" sz="1650" dirty="0">
                 <a:solidFill>
                   <a:srgbClr val="000000"/>
                 </a:solidFill>
-                <a:latin typeface="Century Gothic"/>
-                <a:cs typeface="Century Gothic"/>
+                <a:latin typeface="Arial"/>
+                <a:cs typeface="Arial"/>
               </a:rPr>
               <a:t>Q1. Your PubMed search finds 3,000 papers. Add a concept with AND, or a synonym with OR?</a:t>
             </a:r>
@@ -13665,25 +13641,19 @@
               <a:spcBef>
                 <a:spcPts val="450"/>
               </a:spcBef>
-              <a:buNone/>
-            </a:pPr>
-            <a:r>
-              <a:rPr lang="en-US" sz="1650" b="1" dirty="0">
-                <a:solidFill>
-                  <a:srgbClr val="6C3483"/>
-                </a:solidFill>
-                <a:latin typeface="Century Gothic"/>
-                <a:cs typeface="Century Gothic"/>
-              </a:rPr>
-              <a:t>2.  </a:t>
-            </a:r>
+              <a:buClr>
+                <a:srgbClr val="6C3483"/>
+              </a:buClr>
+              <a:buFont typeface="Arial"/>
+              <a:buChar char="•"/>
+            </a:pPr>
             <a:r>
               <a:rPr lang="en-US" sz="1650" dirty="0">
                 <a:solidFill>
                   <a:srgbClr val="000000"/>
                 </a:solidFill>
-                <a:latin typeface="Century Gothic"/>
-                <a:cs typeface="Century Gothic"/>
+                <a:latin typeface="Arial"/>
+                <a:cs typeface="Arial"/>
               </a:rPr>
               <a:t>Q2. After the title and abstract, what do you read next in a paper?</a:t>
             </a:r>
@@ -13696,25 +13666,19 @@
               <a:spcBef>
                 <a:spcPts val="450"/>
               </a:spcBef>
-              <a:buNone/>
-            </a:pPr>
-            <a:r>
-              <a:rPr lang="en-US" sz="1650" b="1" dirty="0">
-                <a:solidFill>
-                  <a:srgbClr val="6C3483"/>
-                </a:solidFill>
-                <a:latin typeface="Century Gothic"/>
-                <a:cs typeface="Century Gothic"/>
-              </a:rPr>
-              <a:t>3.  </a:t>
-            </a:r>
+              <a:buClr>
+                <a:srgbClr val="6C3483"/>
+              </a:buClr>
+              <a:buFont typeface="Arial"/>
+              <a:buChar char="•"/>
+            </a:pPr>
             <a:r>
               <a:rPr lang="en-US" sz="1650" dirty="0">
                 <a:solidFill>
                   <a:srgbClr val="000000"/>
                 </a:solidFill>
-                <a:latin typeface="Century Gothic"/>
-                <a:cs typeface="Century Gothic"/>
+                <a:latin typeface="Arial"/>
+                <a:cs typeface="Arial"/>
               </a:rPr>
               <a:t>Q3. An abstract says 'a trend towards lower mortality (p = 0.42)'. What is this called?</a:t>
             </a:r>
@@ -13727,25 +13691,19 @@
               <a:spcBef>
                 <a:spcPts val="450"/>
               </a:spcBef>
-              <a:buNone/>
-            </a:pPr>
-            <a:r>
-              <a:rPr lang="en-US" sz="1650" b="1" dirty="0">
-                <a:solidFill>
-                  <a:srgbClr val="6C3483"/>
-                </a:solidFill>
-                <a:latin typeface="Century Gothic"/>
-                <a:cs typeface="Century Gothic"/>
-              </a:rPr>
-              <a:t>4.  </a:t>
-            </a:r>
+              <a:buClr>
+                <a:srgbClr val="6C3483"/>
+              </a:buClr>
+              <a:buFont typeface="Arial"/>
+              <a:buChar char="•"/>
+            </a:pPr>
             <a:r>
               <a:rPr lang="en-US" sz="1650" dirty="0">
                 <a:solidFill>
                   <a:srgbClr val="000000"/>
                 </a:solidFill>
-                <a:latin typeface="Century Gothic"/>
-                <a:cs typeface="Century Gothic"/>
+                <a:latin typeface="Arial"/>
+                <a:cs typeface="Arial"/>
               </a:rPr>
               <a:t>Groups: re-read your research question and problem statement (2 min)</a:t>
             </a:r>
@@ -13789,8 +13747,8 @@
                 <a:solidFill>
                   <a:srgbClr val="6C3483"/>
                 </a:solidFill>
-                <a:latin typeface="Century Gothic"/>
-                <a:cs typeface="Century Gothic"/>
+                <a:latin typeface="Arial"/>
+                <a:cs typeface="Arial"/>
               </a:rPr>
               <a:t>How we run it</a:t>
             </a:r>
@@ -13811,8 +13769,8 @@
                 <a:solidFill>
                   <a:srgbClr val="000000"/>
                 </a:solidFill>
-                <a:latin typeface="Century Gothic"/>
-                <a:cs typeface="Century Gothic"/>
+                <a:latin typeface="Arial"/>
+                <a:cs typeface="Arial"/>
               </a:rPr>
               <a:t>Answer alone first (30 s each)</a:t>
             </a:r>
@@ -13833,8 +13791,8 @@
                 <a:solidFill>
                   <a:srgbClr val="000000"/>
                 </a:solidFill>
-                <a:latin typeface="Century Gothic"/>
-                <a:cs typeface="Century Gothic"/>
+                <a:latin typeface="Arial"/>
+                <a:cs typeface="Arial"/>
               </a:rPr>
               <a:t>Show of hands, then reveal</a:t>
             </a:r>
@@ -13855,8 +13813,8 @@
                 <a:solidFill>
                   <a:srgbClr val="000000"/>
                 </a:solidFill>
-                <a:latin typeface="Century Gothic"/>
-                <a:cs typeface="Century Gothic"/>
+                <a:latin typeface="Arial"/>
+                <a:cs typeface="Arial"/>
               </a:rPr>
               <a:t>No marks, just a warm-up</a:t>
             </a:r>
@@ -13902,8 +13860,8 @@
                 <a:solidFill>
                   <a:srgbClr val="6C3483"/>
                 </a:solidFill>
-                <a:latin typeface="Century Gothic"/>
-                <a:cs typeface="Century Gothic"/>
+                <a:latin typeface="Arial"/>
+                <a:cs typeface="Arial"/>
               </a:rPr>
               <a:t>OUTPUT   </a:t>
             </a:r>
@@ -13912,8 +13870,8 @@
                 <a:solidFill>
                   <a:srgbClr val="000000"/>
                 </a:solidFill>
-                <a:latin typeface="Century Gothic"/>
-                <a:cs typeface="Century Gothic"/>
+                <a:latin typeface="Arial"/>
+                <a:cs typeface="Arial"/>
               </a:rPr>
               <a:t>Each group's question, re-read and confirmed</a:t>
             </a:r>
@@ -13950,7 +13908,7 @@
                     <a:lumMod val="50000"/>
                   </a:schemeClr>
                 </a:solidFill>
-                <a:latin typeface="Verdana"/>
+                <a:latin typeface="Arial"/>
               </a:rPr>
               <a:t>Neudata | #ClearDataClearImpact</a:t>
             </a:r>
@@ -14080,8 +14038,8 @@
                 <a:solidFill>
                   <a:srgbClr val="0D7377"/>
                 </a:solidFill>
-                <a:latin typeface="Century Gothic"/>
-                <a:cs typeface="Century Gothic"/>
+                <a:latin typeface="Arial"/>
+                <a:cs typeface="Arial"/>
               </a:rPr>
               <a:t>Name the design in three questions</a:t>
             </a:r>
@@ -14177,8 +14135,8 @@
                 <a:solidFill>
                   <a:srgbClr val="FFFFFF"/>
                 </a:solidFill>
-                <a:latin typeface="Century Gothic"/>
-                <a:cs typeface="Century Gothic"/>
+                <a:latin typeface="Arial"/>
+                <a:cs typeface="Arial"/>
               </a:rPr>
               <a:t>KEY MESSAGE   </a:t>
             </a:r>
@@ -14187,8 +14145,8 @@
                 <a:solidFill>
                   <a:srgbClr val="FFFFFF"/>
                 </a:solidFill>
-                <a:latin typeface="Century Gothic"/>
-                <a:cs typeface="Century Gothic"/>
+                <a:latin typeface="Arial"/>
+                <a:cs typeface="Arial"/>
               </a:rPr>
               <a:t>Assigned? Random? Which way does time run? Three questions name the design.</a:t>
             </a:r>
@@ -14225,7 +14183,7 @@
                     <a:lumMod val="50000"/>
                   </a:schemeClr>
                 </a:solidFill>
-                <a:latin typeface="Verdana"/>
+                <a:latin typeface="Arial"/>
               </a:rPr>
               <a:t>Neudata | #ClearDataClearImpact</a:t>
             </a:r>
@@ -14355,8 +14313,8 @@
                 <a:solidFill>
                   <a:srgbClr val="0D7377"/>
                 </a:solidFill>
-                <a:latin typeface="Century Gothic"/>
-                <a:cs typeface="Century Gothic"/>
+                <a:latin typeface="Arial"/>
+                <a:cs typeface="Arial"/>
               </a:rPr>
               <a:t>Every design trades something away</a:t>
             </a:r>
@@ -14422,8 +14380,8 @@
                 <a:solidFill>
                   <a:srgbClr val="595959"/>
                 </a:solidFill>
-                <a:latin typeface="Century Gothic"/>
-                <a:cs typeface="Century Gothic"/>
+                <a:latin typeface="Arial"/>
+                <a:cs typeface="Arial"/>
               </a:rPr>
               <a:t>Strengths and weaknesses at a glance</a:t>
             </a:r>
@@ -14465,8 +14423,8 @@
                 <a:solidFill>
                   <a:srgbClr val="FFFFFF"/>
                 </a:solidFill>
-                <a:latin typeface="Century Gothic"/>
-                <a:cs typeface="Century Gothic"/>
+                <a:latin typeface="Arial"/>
+                <a:cs typeface="Arial"/>
               </a:rPr>
               <a:t>Cross-sectional</a:t>
             </a:r>
@@ -14514,8 +14472,8 @@
                 <a:solidFill>
                   <a:srgbClr val="2E8B57"/>
                 </a:solidFill>
-                <a:latin typeface="Century Gothic"/>
-                <a:cs typeface="Century Gothic"/>
+                <a:latin typeface="Arial"/>
+                <a:cs typeface="Arial"/>
               </a:rPr>
               <a:t>+ quick and cheap</a:t>
             </a:r>
@@ -14535,8 +14493,8 @@
                 <a:solidFill>
                   <a:srgbClr val="2E8B57"/>
                 </a:solidFill>
-                <a:latin typeface="Century Gothic"/>
-                <a:cs typeface="Century Gothic"/>
+                <a:latin typeface="Arial"/>
+                <a:cs typeface="Arial"/>
               </a:rPr>
               <a:t>+ gives prevalence</a:t>
             </a:r>
@@ -14556,8 +14514,8 @@
                 <a:solidFill>
                   <a:srgbClr val="B23B2E"/>
                 </a:solidFill>
-                <a:latin typeface="Century Gothic"/>
-                <a:cs typeface="Century Gothic"/>
+                <a:latin typeface="Arial"/>
+                <a:cs typeface="Arial"/>
               </a:rPr>
               <a:t>- which came first?</a:t>
             </a:r>
@@ -14599,8 +14557,8 @@
                 <a:solidFill>
                   <a:srgbClr val="FFFFFF"/>
                 </a:solidFill>
-                <a:latin typeface="Century Gothic"/>
-                <a:cs typeface="Century Gothic"/>
+                <a:latin typeface="Arial"/>
+                <a:cs typeface="Arial"/>
               </a:rPr>
               <a:t>Case-control</a:t>
             </a:r>
@@ -14648,8 +14606,8 @@
                 <a:solidFill>
                   <a:srgbClr val="2E8B57"/>
                 </a:solidFill>
-                <a:latin typeface="Century Gothic"/>
-                <a:cs typeface="Century Gothic"/>
+                <a:latin typeface="Arial"/>
+                <a:cs typeface="Arial"/>
               </a:rPr>
               <a:t>+ rare outcomes</a:t>
             </a:r>
@@ -14669,8 +14627,8 @@
                 <a:solidFill>
                   <a:srgbClr val="2E8B57"/>
                 </a:solidFill>
-                <a:latin typeface="Century Gothic"/>
-                <a:cs typeface="Century Gothic"/>
+                <a:latin typeface="Arial"/>
+                <a:cs typeface="Arial"/>
               </a:rPr>
               <a:t>+ few patients, fast</a:t>
             </a:r>
@@ -14690,8 +14648,8 @@
                 <a:solidFill>
                   <a:srgbClr val="B23B2E"/>
                 </a:solidFill>
-                <a:latin typeface="Century Gothic"/>
-                <a:cs typeface="Century Gothic"/>
+                <a:latin typeface="Arial"/>
+                <a:cs typeface="Arial"/>
               </a:rPr>
               <a:t>- recall bias</a:t>
             </a:r>
@@ -14711,8 +14669,8 @@
                 <a:solidFill>
                   <a:srgbClr val="B23B2E"/>
                 </a:solidFill>
-                <a:latin typeface="Century Gothic"/>
-                <a:cs typeface="Century Gothic"/>
+                <a:latin typeface="Arial"/>
+                <a:cs typeface="Arial"/>
               </a:rPr>
               <a:t>- odds ratio only</a:t>
             </a:r>
@@ -14754,8 +14712,8 @@
                 <a:solidFill>
                   <a:srgbClr val="FFFFFF"/>
                 </a:solidFill>
-                <a:latin typeface="Century Gothic"/>
-                <a:cs typeface="Century Gothic"/>
+                <a:latin typeface="Arial"/>
+                <a:cs typeface="Arial"/>
               </a:rPr>
               <a:t>Cohort</a:t>
             </a:r>
@@ -14803,8 +14761,8 @@
                 <a:solidFill>
                   <a:srgbClr val="2E8B57"/>
                 </a:solidFill>
-                <a:latin typeface="Century Gothic"/>
-                <a:cs typeface="Century Gothic"/>
+                <a:latin typeface="Arial"/>
+                <a:cs typeface="Arial"/>
               </a:rPr>
               <a:t>+ clear time order</a:t>
             </a:r>
@@ -14824,8 +14782,8 @@
                 <a:solidFill>
                   <a:srgbClr val="2E8B57"/>
                 </a:solidFill>
-                <a:latin typeface="Century Gothic"/>
-                <a:cs typeface="Century Gothic"/>
+                <a:latin typeface="Arial"/>
+                <a:cs typeface="Arial"/>
               </a:rPr>
               <a:t>+ risks, many outcomes</a:t>
             </a:r>
@@ -14845,8 +14803,8 @@
                 <a:solidFill>
                   <a:srgbClr val="B23B2E"/>
                 </a:solidFill>
-                <a:latin typeface="Century Gothic"/>
-                <a:cs typeface="Century Gothic"/>
+                <a:latin typeface="Arial"/>
+                <a:cs typeface="Arial"/>
               </a:rPr>
               <a:t>- slow if prospective</a:t>
             </a:r>
@@ -14866,8 +14824,8 @@
                 <a:solidFill>
                   <a:srgbClr val="B23B2E"/>
                 </a:solidFill>
-                <a:latin typeface="Century Gothic"/>
-                <a:cs typeface="Century Gothic"/>
+                <a:latin typeface="Arial"/>
+                <a:cs typeface="Arial"/>
               </a:rPr>
               <a:t>- confounding</a:t>
             </a:r>
@@ -14909,8 +14867,8 @@
                 <a:solidFill>
                   <a:srgbClr val="FFFFFF"/>
                 </a:solidFill>
-                <a:latin typeface="Century Gothic"/>
-                <a:cs typeface="Century Gothic"/>
+                <a:latin typeface="Arial"/>
+                <a:cs typeface="Arial"/>
               </a:rPr>
               <a:t>RCT</a:t>
             </a:r>
@@ -14958,8 +14916,8 @@
                 <a:solidFill>
                   <a:srgbClr val="2E8B57"/>
                 </a:solidFill>
-                <a:latin typeface="Century Gothic"/>
-                <a:cs typeface="Century Gothic"/>
+                <a:latin typeface="Arial"/>
+                <a:cs typeface="Arial"/>
               </a:rPr>
               <a:t>+ balances the unknown</a:t>
             </a:r>
@@ -14979,8 +14937,8 @@
                 <a:solidFill>
                   <a:srgbClr val="2E8B57"/>
                 </a:solidFill>
-                <a:latin typeface="Century Gothic"/>
-                <a:cs typeface="Century Gothic"/>
+                <a:latin typeface="Arial"/>
+                <a:cs typeface="Arial"/>
               </a:rPr>
               <a:t>+ strongest for cause</a:t>
             </a:r>
@@ -15000,8 +14958,8 @@
                 <a:solidFill>
                   <a:srgbClr val="B23B2E"/>
                 </a:solidFill>
-                <a:latin typeface="Century Gothic"/>
-                <a:cs typeface="Century Gothic"/>
+                <a:latin typeface="Arial"/>
+                <a:cs typeface="Arial"/>
               </a:rPr>
               <a:t>- costly, ethical limits</a:t>
             </a:r>
@@ -15021,8 +14979,8 @@
                 <a:solidFill>
                   <a:srgbClr val="B23B2E"/>
                 </a:solidFill>
-                <a:latin typeface="Century Gothic"/>
-                <a:cs typeface="Century Gothic"/>
+                <a:latin typeface="Arial"/>
+                <a:cs typeface="Arial"/>
               </a:rPr>
               <a:t>- selected patients</a:t>
             </a:r>
@@ -15066,8 +15024,8 @@
                 <a:solidFill>
                   <a:srgbClr val="FFFFFF"/>
                 </a:solidFill>
-                <a:latin typeface="Century Gothic"/>
-                <a:cs typeface="Century Gothic"/>
+                <a:latin typeface="Arial"/>
+                <a:cs typeface="Arial"/>
               </a:rPr>
               <a:t>KEY MESSAGE   </a:t>
             </a:r>
@@ -15076,8 +15034,8 @@
                 <a:solidFill>
                   <a:srgbClr val="FFFFFF"/>
                 </a:solidFill>
-                <a:latin typeface="Century Gothic"/>
-                <a:cs typeface="Century Gothic"/>
+                <a:latin typeface="Arial"/>
+                <a:cs typeface="Arial"/>
               </a:rPr>
               <a:t>No design is perfect: choose the one whose weakness hurts your question least.</a:t>
             </a:r>
@@ -15114,7 +15072,7 @@
                     <a:lumMod val="50000"/>
                   </a:schemeClr>
                 </a:solidFill>
-                <a:latin typeface="Verdana"/>
+                <a:latin typeface="Arial"/>
               </a:rPr>
               <a:t>Neudata | #ClearDataClearImpact</a:t>
             </a:r>
@@ -15244,8 +15202,8 @@
                 <a:solidFill>
                   <a:srgbClr val="0D7377"/>
                 </a:solidFill>
-                <a:latin typeface="Century Gothic"/>
-                <a:cs typeface="Century Gothic"/>
+                <a:latin typeface="Arial"/>
+                <a:cs typeface="Arial"/>
               </a:rPr>
               <a:t>What can each design claim?</a:t>
             </a:r>
@@ -15341,8 +15299,8 @@
                 <a:solidFill>
                   <a:srgbClr val="FFFFFF"/>
                 </a:solidFill>
-                <a:latin typeface="Century Gothic"/>
-                <a:cs typeface="Century Gothic"/>
+                <a:latin typeface="Arial"/>
+                <a:cs typeface="Arial"/>
               </a:rPr>
               <a:t>KEY MESSAGE   </a:t>
             </a:r>
@@ -15351,8 +15309,8 @@
                 <a:solidFill>
                   <a:srgbClr val="FFFFFF"/>
                 </a:solidFill>
-                <a:latin typeface="Century Gothic"/>
-                <a:cs typeface="Century Gothic"/>
+                <a:latin typeface="Arial"/>
+                <a:cs typeface="Arial"/>
               </a:rPr>
               <a:t>RCTs can say 'caused'; cohorts should say 'associated'.</a:t>
             </a:r>
@@ -15389,7 +15347,7 @@
                     <a:lumMod val="50000"/>
                   </a:schemeClr>
                 </a:solidFill>
-                <a:latin typeface="Verdana"/>
+                <a:latin typeface="Arial"/>
               </a:rPr>
               <a:t>Neudata | #ClearDataClearImpact</a:t>
             </a:r>
@@ -15519,8 +15477,8 @@
                 <a:solidFill>
                   <a:srgbClr val="0D7377"/>
                 </a:solidFill>
-                <a:latin typeface="Century Gothic"/>
-                <a:cs typeface="Century Gothic"/>
+                <a:latin typeface="Arial"/>
+                <a:cs typeface="Arial"/>
               </a:rPr>
               <a:t>Check your understanding: caused or associated?</a:t>
             </a:r>
@@ -15590,8 +15548,8 @@
                 <a:solidFill>
                   <a:srgbClr val="FFFFFF"/>
                 </a:solidFill>
-                <a:latin typeface="Century Gothic"/>
-                <a:cs typeface="Century Gothic"/>
+                <a:latin typeface="Arial"/>
+                <a:cs typeface="Arial"/>
               </a:rPr>
               <a:t>QUICK QUIZ   |   2 min</a:t>
             </a:r>
@@ -15628,25 +15586,19 @@
               <a:spcBef>
                 <a:spcPts val="450"/>
               </a:spcBef>
-              <a:buNone/>
-            </a:pPr>
-            <a:r>
-              <a:rPr lang="en-US" sz="1650" b="1" dirty="0">
-                <a:solidFill>
-                  <a:srgbClr val="6C3483"/>
-                </a:solidFill>
-                <a:latin typeface="Century Gothic"/>
-                <a:cs typeface="Century Gothic"/>
-              </a:rPr>
-              <a:t>1.  </a:t>
-            </a:r>
+              <a:buClr>
+                <a:srgbClr val="6C3483"/>
+              </a:buClr>
+              <a:buFont typeface="Arial"/>
+              <a:buChar char="•"/>
+            </a:pPr>
             <a:r>
               <a:rPr lang="en-US" sz="1650" dirty="0">
                 <a:solidFill>
                   <a:srgbClr val="000000"/>
                 </a:solidFill>
-                <a:latin typeface="Century Gothic"/>
-                <a:cs typeface="Century Gothic"/>
+                <a:latin typeface="Arial"/>
+                <a:cs typeface="Arial"/>
               </a:rPr>
               <a:t>A. Boulet (RCT): 'The restrictive strategy did not reduce the day-5 fluid balance'</a:t>
             </a:r>
@@ -15659,25 +15611,19 @@
               <a:spcBef>
                 <a:spcPts val="450"/>
               </a:spcBef>
-              <a:buNone/>
-            </a:pPr>
-            <a:r>
-              <a:rPr lang="en-US" sz="1650" b="1" dirty="0">
-                <a:solidFill>
-                  <a:srgbClr val="6C3483"/>
-                </a:solidFill>
-                <a:latin typeface="Century Gothic"/>
-                <a:cs typeface="Century Gothic"/>
-              </a:rPr>
-              <a:t>2.  </a:t>
-            </a:r>
+              <a:buClr>
+                <a:srgbClr val="6C3483"/>
+              </a:buClr>
+              <a:buFont typeface="Arial"/>
+              <a:buChar char="•"/>
+            </a:pPr>
             <a:r>
               <a:rPr lang="en-US" sz="1650" dirty="0">
                 <a:solidFill>
                   <a:srgbClr val="000000"/>
                 </a:solidFill>
-                <a:latin typeface="Century Gothic"/>
-                <a:cs typeface="Century Gothic"/>
+                <a:latin typeface="Arial"/>
+                <a:cs typeface="Arial"/>
               </a:rPr>
               <a:t>B. Hyun (cohort): 'A positive fluid balance CAUSES higher 28-day mortality'</a:t>
             </a:r>
@@ -15690,25 +15636,19 @@
               <a:spcBef>
                 <a:spcPts val="450"/>
               </a:spcBef>
-              <a:buNone/>
-            </a:pPr>
-            <a:r>
-              <a:rPr lang="en-US" sz="1650" b="1" dirty="0">
-                <a:solidFill>
-                  <a:srgbClr val="6C3483"/>
-                </a:solidFill>
-                <a:latin typeface="Century Gothic"/>
-                <a:cs typeface="Century Gothic"/>
-              </a:rPr>
-              <a:t>3.  </a:t>
-            </a:r>
+              <a:buClr>
+                <a:srgbClr val="6C3483"/>
+              </a:buClr>
+              <a:buFont typeface="Arial"/>
+              <a:buChar char="•"/>
+            </a:pPr>
             <a:r>
               <a:rPr lang="en-US" sz="1650" dirty="0">
                 <a:solidFill>
                   <a:srgbClr val="000000"/>
                 </a:solidFill>
-                <a:latin typeface="Century Gothic"/>
-                <a:cs typeface="Century Gothic"/>
+                <a:latin typeface="Arial"/>
+                <a:cs typeface="Arial"/>
               </a:rPr>
               <a:t>C. A one-day survey: 'Urinary catheters are associated with urinary infection'</a:t>
             </a:r>
@@ -15752,8 +15692,8 @@
                 <a:solidFill>
                   <a:srgbClr val="6C3483"/>
                 </a:solidFill>
-                <a:latin typeface="Century Gothic"/>
-                <a:cs typeface="Century Gothic"/>
+                <a:latin typeface="Arial"/>
+                <a:cs typeface="Arial"/>
               </a:rPr>
               <a:t>For each</a:t>
             </a:r>
@@ -15774,8 +15714,8 @@
                 <a:solidFill>
                   <a:srgbClr val="000000"/>
                 </a:solidFill>
-                <a:latin typeface="Century Gothic"/>
-                <a:cs typeface="Century Gothic"/>
+                <a:latin typeface="Arial"/>
+                <a:cs typeface="Arial"/>
               </a:rPr>
               <a:t>Is the wording right for the design?</a:t>
             </a:r>
@@ -15796,8 +15736,8 @@
                 <a:solidFill>
                   <a:srgbClr val="000000"/>
                 </a:solidFill>
-                <a:latin typeface="Century Gothic"/>
-                <a:cs typeface="Century Gothic"/>
+                <a:latin typeface="Arial"/>
+                <a:cs typeface="Arial"/>
               </a:rPr>
               <a:t>Thumbs up or thumbs down</a:t>
             </a:r>
@@ -15843,8 +15783,8 @@
                 <a:solidFill>
                   <a:srgbClr val="6C3483"/>
                 </a:solidFill>
-                <a:latin typeface="Century Gothic"/>
-                <a:cs typeface="Century Gothic"/>
+                <a:latin typeface="Arial"/>
+                <a:cs typeface="Arial"/>
               </a:rPr>
               <a:t>OUTPUT   </a:t>
             </a:r>
@@ -15853,8 +15793,8 @@
                 <a:solidFill>
                   <a:srgbClr val="000000"/>
                 </a:solidFill>
-                <a:latin typeface="Century Gothic"/>
-                <a:cs typeface="Century Gothic"/>
+                <a:latin typeface="Arial"/>
+                <a:cs typeface="Arial"/>
               </a:rPr>
               <a:t>Thumbs up / down for each sentence</a:t>
             </a:r>
@@ -15891,7 +15831,7 @@
                     <a:lumMod val="50000"/>
                   </a:schemeClr>
                 </a:solidFill>
-                <a:latin typeface="Verdana"/>
+                <a:latin typeface="Arial"/>
               </a:rPr>
               <a:t>Neudata | #ClearDataClearImpact</a:t>
             </a:r>
@@ -16021,8 +15961,8 @@
                 <a:solidFill>
                   <a:srgbClr val="0D7377"/>
                 </a:solidFill>
-                <a:latin typeface="Century Gothic"/>
-                <a:cs typeface="Century Gothic"/>
+                <a:latin typeface="Arial"/>
+                <a:cs typeface="Arial"/>
               </a:rPr>
               <a:t>Exercise: Name that design</a:t>
             </a:r>
@@ -16092,8 +16032,8 @@
                 <a:solidFill>
                   <a:srgbClr val="FFFFFF"/>
                 </a:solidFill>
-                <a:latin typeface="Century Gothic"/>
-                <a:cs typeface="Century Gothic"/>
+                <a:latin typeface="Arial"/>
+                <a:cs typeface="Arial"/>
               </a:rPr>
               <a:t>GROUP WORK   |   15 min</a:t>
             </a:r>
@@ -16130,25 +16070,19 @@
               <a:spcBef>
                 <a:spcPts val="450"/>
               </a:spcBef>
-              <a:buNone/>
-            </a:pPr>
-            <a:r>
-              <a:rPr lang="en-US" sz="1650" b="1" dirty="0">
-                <a:solidFill>
-                  <a:srgbClr val="0D7377"/>
-                </a:solidFill>
-                <a:latin typeface="Century Gothic"/>
-                <a:cs typeface="Century Gothic"/>
-              </a:rPr>
-              <a:t>1.  </a:t>
-            </a:r>
+              <a:buClr>
+                <a:srgbClr val="0D7377"/>
+              </a:buClr>
+              <a:buFont typeface="Arial"/>
+              <a:buChar char="•"/>
+            </a:pPr>
             <a:r>
               <a:rPr lang="en-US" sz="1650" dirty="0">
                 <a:solidFill>
                   <a:srgbClr val="000000"/>
                 </a:solidFill>
-                <a:latin typeface="Century Gothic"/>
-                <a:cs typeface="Century Gothic"/>
+                <a:latin typeface="Arial"/>
+                <a:cs typeface="Arial"/>
               </a:rPr>
               <a:t>Work in pairs with the handout: 8 short clinical abstracts</a:t>
             </a:r>
@@ -16161,25 +16095,19 @@
               <a:spcBef>
                 <a:spcPts val="450"/>
               </a:spcBef>
-              <a:buNone/>
-            </a:pPr>
-            <a:r>
-              <a:rPr lang="en-US" sz="1650" b="1" dirty="0">
-                <a:solidFill>
-                  <a:srgbClr val="0D7377"/>
-                </a:solidFill>
-                <a:latin typeface="Century Gothic"/>
-                <a:cs typeface="Century Gothic"/>
-              </a:rPr>
-              <a:t>2.  </a:t>
-            </a:r>
+              <a:buClr>
+                <a:srgbClr val="0D7377"/>
+              </a:buClr>
+              <a:buFont typeface="Arial"/>
+              <a:buChar char="•"/>
+            </a:pPr>
             <a:r>
               <a:rPr lang="en-US" sz="1650" dirty="0">
                 <a:solidFill>
                   <a:srgbClr val="000000"/>
                 </a:solidFill>
-                <a:latin typeface="Century Gothic"/>
-                <a:cs typeface="Century Gothic"/>
+                <a:latin typeface="Arial"/>
+                <a:cs typeface="Arial"/>
               </a:rPr>
               <a:t>For each, ask the three questions: assigned? random? which way does time run?</a:t>
             </a:r>
@@ -16192,25 +16120,19 @@
               <a:spcBef>
                 <a:spcPts val="450"/>
               </a:spcBef>
-              <a:buNone/>
-            </a:pPr>
-            <a:r>
-              <a:rPr lang="en-US" sz="1650" b="1" dirty="0">
-                <a:solidFill>
-                  <a:srgbClr val="0D7377"/>
-                </a:solidFill>
-                <a:latin typeface="Century Gothic"/>
-                <a:cs typeface="Century Gothic"/>
-              </a:rPr>
-              <a:t>3.  </a:t>
-            </a:r>
+              <a:buClr>
+                <a:srgbClr val="0D7377"/>
+              </a:buClr>
+              <a:buFont typeface="Arial"/>
+              <a:buChar char="•"/>
+            </a:pPr>
             <a:r>
               <a:rPr lang="en-US" sz="1650" dirty="0">
                 <a:solidFill>
                   <a:srgbClr val="000000"/>
                 </a:solidFill>
-                <a:latin typeface="Century Gothic"/>
-                <a:cs typeface="Century Gothic"/>
+                <a:latin typeface="Arial"/>
+                <a:cs typeface="Arial"/>
               </a:rPr>
               <a:t>Write the design and one word of evidence from the abstract</a:t>
             </a:r>
@@ -16223,25 +16145,19 @@
               <a:spcBef>
                 <a:spcPts val="450"/>
               </a:spcBef>
-              <a:buNone/>
-            </a:pPr>
-            <a:r>
-              <a:rPr lang="en-US" sz="1650" b="1" dirty="0">
-                <a:solidFill>
-                  <a:srgbClr val="0D7377"/>
-                </a:solidFill>
-                <a:latin typeface="Century Gothic"/>
-                <a:cs typeface="Century Gothic"/>
-              </a:rPr>
-              <a:t>4.  </a:t>
-            </a:r>
+              <a:buClr>
+                <a:srgbClr val="0D7377"/>
+              </a:buClr>
+              <a:buFont typeface="Arial"/>
+              <a:buChar char="•"/>
+            </a:pPr>
             <a:r>
               <a:rPr lang="en-US" sz="1650" dirty="0">
                 <a:solidFill>
                   <a:srgbClr val="000000"/>
                 </a:solidFill>
-                <a:latin typeface="Century Gothic"/>
-                <a:cs typeface="Century Gothic"/>
+                <a:latin typeface="Arial"/>
+                <a:cs typeface="Arial"/>
               </a:rPr>
               <a:t>Star the one you found hardest: we discuss it together</a:t>
             </a:r>
@@ -16285,8 +16201,8 @@
                 <a:solidFill>
                   <a:srgbClr val="0D7377"/>
                 </a:solidFill>
-                <a:latin typeface="Century Gothic"/>
-                <a:cs typeface="Century Gothic"/>
+                <a:latin typeface="Arial"/>
+                <a:cs typeface="Arial"/>
               </a:rPr>
               <a:t>Use the tree</a:t>
             </a:r>
@@ -16307,8 +16223,8 @@
                 <a:solidFill>
                   <a:srgbClr val="000000"/>
                 </a:solidFill>
-                <a:latin typeface="Century Gothic"/>
-                <a:cs typeface="Century Gothic"/>
+                <a:latin typeface="Arial"/>
+                <a:cs typeface="Arial"/>
               </a:rPr>
               <a:t>Assigned + random = RCT</a:t>
             </a:r>
@@ -16329,8 +16245,8 @@
                 <a:solidFill>
                   <a:srgbClr val="000000"/>
                 </a:solidFill>
-                <a:latin typeface="Century Gothic"/>
-                <a:cs typeface="Century Gothic"/>
+                <a:latin typeface="Arial"/>
+                <a:cs typeface="Arial"/>
               </a:rPr>
               <a:t>Outcome first, look back = case-control</a:t>
             </a:r>
@@ -16351,8 +16267,8 @@
                 <a:solidFill>
                   <a:srgbClr val="000000"/>
                 </a:solidFill>
-                <a:latin typeface="Century Gothic"/>
-                <a:cs typeface="Century Gothic"/>
+                <a:latin typeface="Arial"/>
+                <a:cs typeface="Arial"/>
               </a:rPr>
               <a:t>Exposure first, follow = cohort</a:t>
             </a:r>
@@ -16373,8 +16289,8 @@
                 <a:solidFill>
                   <a:srgbClr val="000000"/>
                 </a:solidFill>
-                <a:latin typeface="Century Gothic"/>
-                <a:cs typeface="Century Gothic"/>
+                <a:latin typeface="Arial"/>
+                <a:cs typeface="Arial"/>
               </a:rPr>
               <a:t>Same moment = cross-sectional</a:t>
             </a:r>
@@ -16420,8 +16336,8 @@
                 <a:solidFill>
                   <a:srgbClr val="0D7377"/>
                 </a:solidFill>
-                <a:latin typeface="Century Gothic"/>
-                <a:cs typeface="Century Gothic"/>
+                <a:latin typeface="Arial"/>
+                <a:cs typeface="Arial"/>
               </a:rPr>
               <a:t>OUTPUT   </a:t>
             </a:r>
@@ -16430,8 +16346,8 @@
                 <a:solidFill>
                   <a:srgbClr val="000000"/>
                 </a:solidFill>
-                <a:latin typeface="Century Gothic"/>
-                <a:cs typeface="Century Gothic"/>
+                <a:latin typeface="Arial"/>
+                <a:cs typeface="Arial"/>
               </a:rPr>
               <a:t>8 designs named, each with one piece of evidence</a:t>
             </a:r>
@@ -16468,7 +16384,7 @@
                     <a:lumMod val="50000"/>
                   </a:schemeClr>
                 </a:solidFill>
-                <a:latin typeface="Verdana"/>
+                <a:latin typeface="Arial"/>
               </a:rPr>
               <a:t>Neudata | #ClearDataClearImpact</a:t>
             </a:r>
@@ -16598,8 +16514,8 @@
                 <a:solidFill>
                   <a:srgbClr val="0D7377"/>
                 </a:solidFill>
-                <a:latin typeface="Century Gothic"/>
-                <a:cs typeface="Century Gothic"/>
+                <a:latin typeface="Arial"/>
+                <a:cs typeface="Arial"/>
               </a:rPr>
               <a:t>Break</a:t>
             </a:r>
@@ -16669,8 +16585,8 @@
                 <a:solidFill>
                   <a:srgbClr val="FFFFFF"/>
                 </a:solidFill>
-                <a:latin typeface="Century Gothic"/>
-                <a:cs typeface="Century Gothic"/>
+                <a:latin typeface="Arial"/>
+                <a:cs typeface="Arial"/>
               </a:rPr>
               <a:t>BREAK   |   15 min</a:t>
             </a:r>
@@ -16707,25 +16623,19 @@
               <a:spcBef>
                 <a:spcPts val="450"/>
               </a:spcBef>
-              <a:buNone/>
-            </a:pPr>
-            <a:r>
-              <a:rPr lang="en-US" sz="1650" b="1" dirty="0">
-                <a:solidFill>
-                  <a:srgbClr val="8A99A3"/>
-                </a:solidFill>
-                <a:latin typeface="Century Gothic"/>
-                <a:cs typeface="Century Gothic"/>
-              </a:rPr>
-              <a:t>1.  </a:t>
-            </a:r>
+              <a:buClr>
+                <a:srgbClr val="8A99A3"/>
+              </a:buClr>
+              <a:buFont typeface="Arial"/>
+              <a:buChar char="•"/>
+            </a:pPr>
             <a:r>
               <a:rPr lang="en-US" sz="1650" dirty="0">
                 <a:solidFill>
                   <a:srgbClr val="000000"/>
                 </a:solidFill>
-                <a:latin typeface="Century Gothic"/>
-                <a:cs typeface="Century Gothic"/>
+                <a:latin typeface="Arial"/>
+                <a:cs typeface="Arial"/>
               </a:rPr>
               <a:t>Stretch, coffee, fresh air</a:t>
             </a:r>
@@ -16738,25 +16648,19 @@
               <a:spcBef>
                 <a:spcPts val="450"/>
               </a:spcBef>
-              <a:buNone/>
-            </a:pPr>
-            <a:r>
-              <a:rPr lang="en-US" sz="1650" b="1" dirty="0">
-                <a:solidFill>
-                  <a:srgbClr val="8A99A3"/>
-                </a:solidFill>
-                <a:latin typeface="Century Gothic"/>
-                <a:cs typeface="Century Gothic"/>
-              </a:rPr>
-              <a:t>2.  </a:t>
-            </a:r>
+              <a:buClr>
+                <a:srgbClr val="8A99A3"/>
+              </a:buClr>
+              <a:buFont typeface="Arial"/>
+              <a:buChar char="•"/>
+            </a:pPr>
             <a:r>
               <a:rPr lang="en-US" sz="1650" dirty="0">
                 <a:solidFill>
                   <a:srgbClr val="000000"/>
                 </a:solidFill>
-                <a:latin typeface="Century Gothic"/>
-                <a:cs typeface="Century Gothic"/>
+                <a:latin typeface="Arial"/>
+                <a:cs typeface="Arial"/>
               </a:rPr>
               <a:t>Optional: which design best fits your group's question?</a:t>
             </a:r>
@@ -16769,25 +16673,19 @@
               <a:spcBef>
                 <a:spcPts val="450"/>
               </a:spcBef>
-              <a:buNone/>
-            </a:pPr>
-            <a:r>
-              <a:rPr lang="en-US" sz="1650" b="1" dirty="0">
-                <a:solidFill>
-                  <a:srgbClr val="8A99A3"/>
-                </a:solidFill>
-                <a:latin typeface="Century Gothic"/>
-                <a:cs typeface="Century Gothic"/>
-              </a:rPr>
-              <a:t>3.  </a:t>
-            </a:r>
+              <a:buClr>
+                <a:srgbClr val="8A99A3"/>
+              </a:buClr>
+              <a:buFont typeface="Arial"/>
+              <a:buChar char="•"/>
+            </a:pPr>
             <a:r>
               <a:rPr lang="en-US" sz="1650" dirty="0">
                 <a:solidFill>
                   <a:srgbClr val="000000"/>
                 </a:solidFill>
-                <a:latin typeface="Century Gothic"/>
-                <a:cs typeface="Century Gothic"/>
+                <a:latin typeface="Arial"/>
+                <a:cs typeface="Arial"/>
               </a:rPr>
               <a:t>We restart with more study designs</a:t>
             </a:r>
@@ -16824,7 +16722,7 @@
                     <a:lumMod val="50000"/>
                   </a:schemeClr>
                 </a:solidFill>
-                <a:latin typeface="Verdana"/>
+                <a:latin typeface="Arial"/>
               </a:rPr>
               <a:t>Neudata | #ClearDataClearImpact</a:t>
             </a:r>
@@ -16954,8 +16852,8 @@
                 <a:solidFill>
                   <a:srgbClr val="0D7377"/>
                 </a:solidFill>
-                <a:latin typeface="Century Gothic"/>
-                <a:cs typeface="Century Gothic"/>
+                <a:latin typeface="Arial"/>
+                <a:cs typeface="Arial"/>
               </a:rPr>
               <a:t>3.2  More designs</a:t>
             </a:r>
@@ -17024,8 +16922,8 @@
                 <a:solidFill>
                   <a:srgbClr val="0D7377"/>
                 </a:solidFill>
-                <a:latin typeface="Century Gothic"/>
-                <a:cs typeface="Century Gothic"/>
+                <a:latin typeface="Arial"/>
+                <a:cs typeface="Arial"/>
               </a:rPr>
               <a:t>Real projects bend the basic designs.</a:t>
             </a:r>
@@ -17042,8 +16940,8 @@
                 <a:solidFill>
                   <a:srgbClr val="595959"/>
                 </a:solidFill>
-                <a:latin typeface="Century Gothic"/>
-                <a:cs typeface="Century Gothic"/>
+                <a:latin typeface="Arial"/>
+                <a:cs typeface="Arial"/>
               </a:rPr>
               <a:t>Trial variants, non-inferiority, pilots, quality-improvement designs and qualitative research. (35 minutes)</a:t>
             </a:r>
@@ -17080,7 +16978,7 @@
                     <a:lumMod val="50000"/>
                   </a:schemeClr>
                 </a:solidFill>
-                <a:latin typeface="Verdana"/>
+                <a:latin typeface="Arial"/>
               </a:rPr>
               <a:t>Neudata | #ClearDataClearImpact</a:t>
             </a:r>
@@ -17210,8 +17108,8 @@
                 <a:solidFill>
                   <a:srgbClr val="0D7377"/>
                 </a:solidFill>
-                <a:latin typeface="Century Gothic"/>
-                <a:cs typeface="Century Gothic"/>
+                <a:latin typeface="Arial"/>
+                <a:cs typeface="Arial"/>
               </a:rPr>
               <a:t>Not every trial is parallel: four layouts</a:t>
             </a:r>
@@ -17307,8 +17205,8 @@
                 <a:solidFill>
                   <a:srgbClr val="FFFFFF"/>
                 </a:solidFill>
-                <a:latin typeface="Century Gothic"/>
-                <a:cs typeface="Century Gothic"/>
+                <a:latin typeface="Arial"/>
+                <a:cs typeface="Arial"/>
               </a:rPr>
               <a:t>KEY MESSAGE   </a:t>
             </a:r>
@@ -17317,8 +17215,8 @@
                 <a:solidFill>
                   <a:srgbClr val="FFFFFF"/>
                 </a:solidFill>
-                <a:latin typeface="Century Gothic"/>
-                <a:cs typeface="Century Gothic"/>
+                <a:latin typeface="Arial"/>
+                <a:cs typeface="Arial"/>
               </a:rPr>
               <a:t>Choose the trial layout that fits the treatment and the unit of care.</a:t>
             </a:r>
@@ -17355,7 +17253,7 @@
                     <a:lumMod val="50000"/>
                   </a:schemeClr>
                 </a:solidFill>
-                <a:latin typeface="Verdana"/>
+                <a:latin typeface="Arial"/>
               </a:rPr>
               <a:t>Neudata | #ClearDataClearImpact</a:t>
             </a:r>
@@ -17485,8 +17383,8 @@
                 <a:solidFill>
                   <a:srgbClr val="0D7377"/>
                 </a:solidFill>
-                <a:latin typeface="Century Gothic"/>
-                <a:cs typeface="Century Gothic"/>
+                <a:latin typeface="Arial"/>
+                <a:cs typeface="Arial"/>
               </a:rPr>
               <a:t>Superiority or non-inferiority? The margin picture</a:t>
             </a:r>
@@ -17582,8 +17480,8 @@
                 <a:solidFill>
                   <a:srgbClr val="FFFFFF"/>
                 </a:solidFill>
-                <a:latin typeface="Century Gothic"/>
-                <a:cs typeface="Century Gothic"/>
+                <a:latin typeface="Arial"/>
+                <a:cs typeface="Arial"/>
               </a:rPr>
               <a:t>KEY MESSAGE   </a:t>
             </a:r>
@@ -17592,8 +17490,8 @@
                 <a:solidFill>
                   <a:srgbClr val="FFFFFF"/>
                 </a:solidFill>
-                <a:latin typeface="Century Gothic"/>
-                <a:cs typeface="Century Gothic"/>
+                <a:latin typeface="Arial"/>
+                <a:cs typeface="Arial"/>
               </a:rPr>
               <a:t>Non-inferiority: the whole CI must stay below a margin fixed in advance.</a:t>
             </a:r>
@@ -17630,7 +17528,7 @@
                     <a:lumMod val="50000"/>
                   </a:schemeClr>
                 </a:solidFill>
-                <a:latin typeface="Verdana"/>
+                <a:latin typeface="Arial"/>
               </a:rPr>
               <a:t>Neudata | #ClearDataClearImpact</a:t>
             </a:r>
@@ -17760,8 +17658,8 @@
                 <a:solidFill>
                   <a:srgbClr val="0D7377"/>
                 </a:solidFill>
-                <a:latin typeface="Century Gothic"/>
-                <a:cs typeface="Century Gothic"/>
+                <a:latin typeface="Arial"/>
+                <a:cs typeface="Arial"/>
               </a:rPr>
               <a:t>Pilot and feasibility studies: the rehearsal</a:t>
             </a:r>
@@ -17857,8 +17755,8 @@
                 <a:solidFill>
                   <a:srgbClr val="FFFFFF"/>
                 </a:solidFill>
-                <a:latin typeface="Century Gothic"/>
-                <a:cs typeface="Century Gothic"/>
+                <a:latin typeface="Arial"/>
+                <a:cs typeface="Arial"/>
               </a:rPr>
               <a:t>KEY MESSAGE   </a:t>
             </a:r>
@@ -17867,8 +17765,8 @@
                 <a:solidFill>
                   <a:srgbClr val="FFFFFF"/>
                 </a:solidFill>
-                <a:latin typeface="Century Gothic"/>
-                <a:cs typeface="Century Gothic"/>
+                <a:latin typeface="Arial"/>
+                <a:cs typeface="Arial"/>
               </a:rPr>
               <a:t>A pilot asks 'can we do it?', not 'does it work?'</a:t>
             </a:r>
@@ -17905,7 +17803,7 @@
                     <a:lumMod val="50000"/>
                   </a:schemeClr>
                 </a:solidFill>
-                <a:latin typeface="Verdana"/>
+                <a:latin typeface="Arial"/>
               </a:rPr>
               <a:t>Neudata | #ClearDataClearImpact</a:t>
             </a:r>
@@ -18035,8 +17933,8 @@
                 <a:solidFill>
                   <a:srgbClr val="0D7377"/>
                 </a:solidFill>
-                <a:latin typeface="Century Gothic"/>
-                <a:cs typeface="Century Gothic"/>
+                <a:latin typeface="Arial"/>
+                <a:cs typeface="Arial"/>
               </a:rPr>
               <a:t>Key words of the day</a:t>
             </a:r>
@@ -18102,8 +18000,8 @@
                 <a:solidFill>
                   <a:srgbClr val="595959"/>
                 </a:solidFill>
-                <a:latin typeface="Century Gothic"/>
-                <a:cs typeface="Century Gothic"/>
+                <a:latin typeface="Arial"/>
+                <a:cs typeface="Arial"/>
               </a:rPr>
               <a:t>Ten words you will use all day (no need to memorise definitions)</a:t>
             </a:r>
@@ -18145,8 +18043,8 @@
                 <a:solidFill>
                   <a:srgbClr val="FFFFFF"/>
                 </a:solidFill>
-                <a:latin typeface="Century Gothic"/>
-                <a:cs typeface="Century Gothic"/>
+                <a:latin typeface="Arial"/>
+                <a:cs typeface="Arial"/>
               </a:rPr>
               <a:t>The pieces</a:t>
             </a:r>
@@ -18194,8 +18092,8 @@
                 <a:solidFill>
                   <a:srgbClr val="000000"/>
                 </a:solidFill>
-                <a:latin typeface="Century Gothic"/>
-                <a:cs typeface="Century Gothic"/>
+                <a:latin typeface="Arial"/>
+                <a:cs typeface="Arial"/>
               </a:rPr>
               <a:t>Exposure: what comes first</a:t>
             </a:r>
@@ -18215,8 +18113,8 @@
                 <a:solidFill>
                   <a:srgbClr val="000000"/>
                 </a:solidFill>
-                <a:latin typeface="Century Gothic"/>
-                <a:cs typeface="Century Gothic"/>
+                <a:latin typeface="Arial"/>
+                <a:cs typeface="Arial"/>
               </a:rPr>
               <a:t>Outcome: what we count later</a:t>
             </a:r>
@@ -18236,8 +18134,8 @@
                 <a:solidFill>
                   <a:srgbClr val="000000"/>
                 </a:solidFill>
-                <a:latin typeface="Century Gothic"/>
-                <a:cs typeface="Century Gothic"/>
+                <a:latin typeface="Arial"/>
+                <a:cs typeface="Arial"/>
               </a:rPr>
               <a:t>Comparison group</a:t>
             </a:r>
@@ -18279,8 +18177,8 @@
                 <a:solidFill>
                   <a:srgbClr val="FFFFFF"/>
                 </a:solidFill>
-                <a:latin typeface="Century Gothic"/>
-                <a:cs typeface="Century Gothic"/>
+                <a:latin typeface="Arial"/>
+                <a:cs typeface="Arial"/>
               </a:rPr>
               <a:t>Who decides?</a:t>
             </a:r>
@@ -18328,8 +18226,8 @@
                 <a:solidFill>
                   <a:srgbClr val="000000"/>
                 </a:solidFill>
-                <a:latin typeface="Century Gothic"/>
-                <a:cs typeface="Century Gothic"/>
+                <a:latin typeface="Arial"/>
+                <a:cs typeface="Arial"/>
               </a:rPr>
               <a:t>Observational: we watch</a:t>
             </a:r>
@@ -18349,8 +18247,8 @@
                 <a:solidFill>
                   <a:srgbClr val="000000"/>
                 </a:solidFill>
-                <a:latin typeface="Century Gothic"/>
-                <a:cs typeface="Century Gothic"/>
+                <a:latin typeface="Arial"/>
+                <a:cs typeface="Arial"/>
               </a:rPr>
               <a:t>Experimental: we assign</a:t>
             </a:r>
@@ -18370,8 +18268,8 @@
                 <a:solidFill>
                   <a:srgbClr val="000000"/>
                 </a:solidFill>
-                <a:latin typeface="Century Gothic"/>
-                <a:cs typeface="Century Gothic"/>
+                <a:latin typeface="Arial"/>
+                <a:cs typeface="Arial"/>
               </a:rPr>
               <a:t>Randomised: chance assigns</a:t>
             </a:r>
@@ -18413,8 +18311,8 @@
                 <a:solidFill>
                   <a:srgbClr val="FFFFFF"/>
                 </a:solidFill>
-                <a:latin typeface="Century Gothic"/>
-                <a:cs typeface="Century Gothic"/>
+                <a:latin typeface="Arial"/>
+                <a:cs typeface="Arial"/>
               </a:rPr>
               <a:t>Which way in time?</a:t>
             </a:r>
@@ -18462,8 +18360,8 @@
                 <a:solidFill>
                   <a:srgbClr val="000000"/>
                 </a:solidFill>
-                <a:latin typeface="Century Gothic"/>
-                <a:cs typeface="Century Gothic"/>
+                <a:latin typeface="Arial"/>
+                <a:cs typeface="Arial"/>
               </a:rPr>
               <a:t>Cross-sectional: snapshot</a:t>
             </a:r>
@@ -18483,8 +18381,8 @@
                 <a:solidFill>
                   <a:srgbClr val="000000"/>
                 </a:solidFill>
-                <a:latin typeface="Century Gothic"/>
-                <a:cs typeface="Century Gothic"/>
+                <a:latin typeface="Arial"/>
+                <a:cs typeface="Arial"/>
               </a:rPr>
               <a:t>Case-control: look back</a:t>
             </a:r>
@@ -18504,8 +18402,8 @@
                 <a:solidFill>
                   <a:srgbClr val="000000"/>
                 </a:solidFill>
-                <a:latin typeface="Century Gothic"/>
-                <a:cs typeface="Century Gothic"/>
+                <a:latin typeface="Arial"/>
+                <a:cs typeface="Arial"/>
               </a:rPr>
               <a:t>Cohort: follow forward</a:t>
             </a:r>
@@ -18547,8 +18445,8 @@
                 <a:solidFill>
                   <a:srgbClr val="FFFFFF"/>
                 </a:solidFill>
-                <a:latin typeface="Century Gothic"/>
-                <a:cs typeface="Century Gothic"/>
+                <a:latin typeface="Arial"/>
+                <a:cs typeface="Arial"/>
               </a:rPr>
               <a:t>After the break</a:t>
             </a:r>
@@ -18596,8 +18494,8 @@
                 <a:solidFill>
                   <a:srgbClr val="000000"/>
                 </a:solidFill>
-                <a:latin typeface="Century Gothic"/>
-                <a:cs typeface="Century Gothic"/>
+                <a:latin typeface="Arial"/>
+                <a:cs typeface="Arial"/>
               </a:rPr>
               <a:t>Cluster, crossover trials</a:t>
             </a:r>
@@ -18617,8 +18515,8 @@
                 <a:solidFill>
                   <a:srgbClr val="000000"/>
                 </a:solidFill>
-                <a:latin typeface="Century Gothic"/>
-                <a:cs typeface="Century Gothic"/>
+                <a:latin typeface="Arial"/>
+                <a:cs typeface="Arial"/>
               </a:rPr>
               <a:t>Non-inferiority, pilot</a:t>
             </a:r>
@@ -18638,8 +18536,8 @@
                 <a:solidFill>
                   <a:srgbClr val="000000"/>
                 </a:solidFill>
-                <a:latin typeface="Century Gothic"/>
-                <a:cs typeface="Century Gothic"/>
+                <a:latin typeface="Arial"/>
+                <a:cs typeface="Arial"/>
               </a:rPr>
               <a:t>Time series, qualitative</a:t>
             </a:r>
@@ -18683,8 +18581,8 @@
                 <a:solidFill>
                   <a:srgbClr val="FFFFFF"/>
                 </a:solidFill>
-                <a:latin typeface="Century Gothic"/>
-                <a:cs typeface="Century Gothic"/>
+                <a:latin typeface="Arial"/>
+                <a:cs typeface="Arial"/>
               </a:rPr>
               <a:t>KEY MESSAGE   </a:t>
             </a:r>
@@ -18693,8 +18591,8 @@
                 <a:solidFill>
                   <a:srgbClr val="FFFFFF"/>
                 </a:solidFill>
-                <a:latin typeface="Century Gothic"/>
-                <a:cs typeface="Century Gothic"/>
+                <a:latin typeface="Arial"/>
+                <a:cs typeface="Arial"/>
               </a:rPr>
               <a:t>Two questions name most designs: who decided the exposure, and which way does time run?</a:t>
             </a:r>
@@ -18731,7 +18629,7 @@
                     <a:lumMod val="50000"/>
                   </a:schemeClr>
                 </a:solidFill>
-                <a:latin typeface="Verdana"/>
+                <a:latin typeface="Arial"/>
               </a:rPr>
               <a:t>Neudata | #ClearDataClearImpact</a:t>
             </a:r>
@@ -18861,8 +18759,8 @@
                 <a:solidFill>
                   <a:srgbClr val="0D7377"/>
                 </a:solidFill>
-                <a:latin typeface="Century Gothic"/>
-                <a:cs typeface="Century Gothic"/>
+                <a:latin typeface="Arial"/>
+                <a:cs typeface="Arial"/>
               </a:rPr>
               <a:t>Quasi-experimental designs: before-after and interrupted time series</a:t>
             </a:r>
@@ -18952,8 +18850,8 @@
                 <a:solidFill>
                   <a:srgbClr val="595959"/>
                 </a:solidFill>
-                <a:latin typeface="Century Gothic"/>
-                <a:cs typeface="Century Gothic"/>
+                <a:latin typeface="Arial"/>
+                <a:cs typeface="Arial"/>
               </a:rPr>
               <a:t>Simulated data for teaching</a:t>
             </a:r>
@@ -18997,8 +18895,8 @@
                 <a:solidFill>
                   <a:srgbClr val="FFFFFF"/>
                 </a:solidFill>
-                <a:latin typeface="Century Gothic"/>
-                <a:cs typeface="Century Gothic"/>
+                <a:latin typeface="Arial"/>
+                <a:cs typeface="Arial"/>
               </a:rPr>
               <a:t>KEY MESSAGE   </a:t>
             </a:r>
@@ -19007,8 +18905,8 @@
                 <a:solidFill>
                   <a:srgbClr val="FFFFFF"/>
                 </a:solidFill>
-                <a:latin typeface="Century Gothic"/>
-                <a:cs typeface="Century Gothic"/>
+                <a:latin typeface="Arial"/>
+                <a:cs typeface="Arial"/>
               </a:rPr>
               <a:t>Compare against the trend you expected, not against one 'before' average.</a:t>
             </a:r>
@@ -19045,7 +18943,7 @@
                     <a:lumMod val="50000"/>
                   </a:schemeClr>
                 </a:solidFill>
-                <a:latin typeface="Verdana"/>
+                <a:latin typeface="Arial"/>
               </a:rPr>
               <a:t>Neudata | #ClearDataClearImpact</a:t>
             </a:r>
@@ -19175,8 +19073,8 @@
                 <a:solidFill>
                   <a:srgbClr val="0D7377"/>
                 </a:solidFill>
-                <a:latin typeface="Century Gothic"/>
-                <a:cs typeface="Century Gothic"/>
+                <a:latin typeface="Arial"/>
+                <a:cs typeface="Arial"/>
               </a:rPr>
               <a:t>Qualitative designs: when numbers cannot answer</a:t>
             </a:r>
@@ -19272,8 +19170,8 @@
                 <a:solidFill>
                   <a:srgbClr val="FFFFFF"/>
                 </a:solidFill>
-                <a:latin typeface="Century Gothic"/>
-                <a:cs typeface="Century Gothic"/>
+                <a:latin typeface="Arial"/>
+                <a:cs typeface="Arial"/>
               </a:rPr>
               <a:t>KEY MESSAGE   </a:t>
             </a:r>
@@ -19282,8 +19180,8 @@
                 <a:solidFill>
                   <a:srgbClr val="FFFFFF"/>
                 </a:solidFill>
-                <a:latin typeface="Century Gothic"/>
-                <a:cs typeface="Century Gothic"/>
+                <a:latin typeface="Arial"/>
+                <a:cs typeface="Arial"/>
               </a:rPr>
               <a:t>Qualitative research explains WHY and HOW; it complements numbers.</a:t>
             </a:r>
@@ -19320,7 +19218,7 @@
                     <a:lumMod val="50000"/>
                   </a:schemeClr>
                 </a:solidFill>
-                <a:latin typeface="Verdana"/>
+                <a:latin typeface="Arial"/>
               </a:rPr>
               <a:t>Neudata | #ClearDataClearImpact</a:t>
             </a:r>
@@ -19450,8 +19348,8 @@
                 <a:solidFill>
                   <a:srgbClr val="0D7377"/>
                 </a:solidFill>
-                <a:latin typeface="Century Gothic"/>
-                <a:cs typeface="Century Gothic"/>
+                <a:latin typeface="Arial"/>
+                <a:cs typeface="Arial"/>
               </a:rPr>
               <a:t>Match the design to the question</a:t>
             </a:r>
@@ -19547,8 +19445,8 @@
                 <a:solidFill>
                   <a:srgbClr val="FFFFFF"/>
                 </a:solidFill>
-                <a:latin typeface="Century Gothic"/>
-                <a:cs typeface="Century Gothic"/>
+                <a:latin typeface="Arial"/>
+                <a:cs typeface="Arial"/>
               </a:rPr>
               <a:t>KEY MESSAGE   </a:t>
             </a:r>
@@ -19557,8 +19455,8 @@
                 <a:solidFill>
                   <a:srgbClr val="FFFFFF"/>
                 </a:solidFill>
-                <a:latin typeface="Century Gothic"/>
-                <a:cs typeface="Century Gothic"/>
+                <a:latin typeface="Arial"/>
+                <a:cs typeface="Arial"/>
               </a:rPr>
               <a:t>Start from the question, and the design follows from it.</a:t>
             </a:r>
@@ -19595,7 +19493,7 @@
                     <a:lumMod val="50000"/>
                   </a:schemeClr>
                 </a:solidFill>
-                <a:latin typeface="Verdana"/>
+                <a:latin typeface="Arial"/>
               </a:rPr>
               <a:t>Neudata | #ClearDataClearImpact</a:t>
             </a:r>
@@ -19725,8 +19623,8 @@
                 <a:solidFill>
                   <a:srgbClr val="0D7377"/>
                 </a:solidFill>
-                <a:latin typeface="Century Gothic"/>
-                <a:cs typeface="Century Gothic"/>
+                <a:latin typeface="Arial"/>
+                <a:cs typeface="Arial"/>
               </a:rPr>
               <a:t>Check your understanding: which design?</a:t>
             </a:r>
@@ -19796,8 +19694,8 @@
                 <a:solidFill>
                   <a:srgbClr val="FFFFFF"/>
                 </a:solidFill>
-                <a:latin typeface="Century Gothic"/>
-                <a:cs typeface="Century Gothic"/>
+                <a:latin typeface="Arial"/>
+                <a:cs typeface="Arial"/>
               </a:rPr>
               <a:t>QUICK QUIZ   |   3 min</a:t>
             </a:r>
@@ -19834,25 +19732,19 @@
               <a:spcBef>
                 <a:spcPts val="450"/>
               </a:spcBef>
-              <a:buNone/>
-            </a:pPr>
-            <a:r>
-              <a:rPr lang="en-US" sz="1650" b="1" dirty="0">
-                <a:solidFill>
-                  <a:srgbClr val="6C3483"/>
-                </a:solidFill>
-                <a:latin typeface="Century Gothic"/>
-                <a:cs typeface="Century Gothic"/>
-              </a:rPr>
-              <a:t>1.  </a:t>
-            </a:r>
+              <a:buClr>
+                <a:srgbClr val="6C3483"/>
+              </a:buClr>
+              <a:buFont typeface="Arial"/>
+              <a:buChar char="•"/>
+            </a:pPr>
             <a:r>
               <a:rPr lang="en-US" sz="1650" dirty="0">
                 <a:solidFill>
                   <a:srgbClr val="000000"/>
                 </a:solidFill>
-                <a:latin typeface="Century Gothic"/>
-                <a:cs typeface="Century Gothic"/>
+                <a:latin typeface="Arial"/>
+                <a:cs typeface="Arial"/>
               </a:rPr>
               <a:t>A. A cheaper antibiotic schedule; we only need to show it is not worse</a:t>
             </a:r>
@@ -19865,25 +19757,19 @@
               <a:spcBef>
                 <a:spcPts val="450"/>
               </a:spcBef>
-              <a:buNone/>
-            </a:pPr>
-            <a:r>
-              <a:rPr lang="en-US" sz="1650" b="1" dirty="0">
-                <a:solidFill>
-                  <a:srgbClr val="6C3483"/>
-                </a:solidFill>
-                <a:latin typeface="Century Gothic"/>
-                <a:cs typeface="Century Gothic"/>
-              </a:rPr>
-              <a:t>2.  </a:t>
-            </a:r>
+              <a:buClr>
+                <a:srgbClr val="6C3483"/>
+              </a:buClr>
+              <a:buFont typeface="Arial"/>
+              <a:buChar char="•"/>
+            </a:pPr>
             <a:r>
               <a:rPr lang="en-US" sz="1650" dirty="0">
                 <a:solidFill>
                   <a:srgbClr val="000000"/>
                 </a:solidFill>
-                <a:latin typeface="Century Gothic"/>
-                <a:cs typeface="Century Gothic"/>
+                <a:latin typeface="Arial"/>
+                <a:cs typeface="Arial"/>
               </a:rPr>
               <a:t>B. A hand-hygiene programme delivered to whole wards</a:t>
             </a:r>
@@ -19896,25 +19782,19 @@
               <a:spcBef>
                 <a:spcPts val="450"/>
               </a:spcBef>
-              <a:buNone/>
-            </a:pPr>
-            <a:r>
-              <a:rPr lang="en-US" sz="1650" b="1" dirty="0">
-                <a:solidFill>
-                  <a:srgbClr val="6C3483"/>
-                </a:solidFill>
-                <a:latin typeface="Century Gothic"/>
-                <a:cs typeface="Century Gothic"/>
-              </a:rPr>
-              <a:t>3.  </a:t>
-            </a:r>
+              <a:buClr>
+                <a:srgbClr val="6C3483"/>
+              </a:buClr>
+              <a:buFont typeface="Arial"/>
+              <a:buChar char="•"/>
+            </a:pPr>
             <a:r>
               <a:rPr lang="en-US" sz="1650" dirty="0">
                 <a:solidFill>
                   <a:srgbClr val="000000"/>
                 </a:solidFill>
-                <a:latin typeface="Century Gothic"/>
-                <a:cs typeface="Century Gothic"/>
+                <a:latin typeface="Arial"/>
+                <a:cs typeface="Arial"/>
               </a:rPr>
               <a:t>C. A sepsis bundle started in 2023; we have 3 years of monthly mortality data</a:t>
             </a:r>
@@ -19927,25 +19807,19 @@
               <a:spcBef>
                 <a:spcPts val="450"/>
               </a:spcBef>
-              <a:buNone/>
-            </a:pPr>
-            <a:r>
-              <a:rPr lang="en-US" sz="1650" b="1" dirty="0">
-                <a:solidFill>
-                  <a:srgbClr val="6C3483"/>
-                </a:solidFill>
-                <a:latin typeface="Century Gothic"/>
-                <a:cs typeface="Century Gothic"/>
-              </a:rPr>
-              <a:t>4.  </a:t>
-            </a:r>
+              <a:buClr>
+                <a:srgbClr val="6C3483"/>
+              </a:buClr>
+              <a:buFont typeface="Arial"/>
+              <a:buChar char="•"/>
+            </a:pPr>
             <a:r>
               <a:rPr lang="en-US" sz="1650" dirty="0">
                 <a:solidFill>
                   <a:srgbClr val="000000"/>
                 </a:solidFill>
-                <a:latin typeface="Century Gothic"/>
-                <a:cs typeface="Century Gothic"/>
+                <a:latin typeface="Arial"/>
+                <a:cs typeface="Arial"/>
               </a:rPr>
               <a:t>D. Why do families refuse research consent in the ICU?</a:t>
             </a:r>
@@ -19989,8 +19863,8 @@
                 <a:solidFill>
                   <a:srgbClr val="6C3483"/>
                 </a:solidFill>
-                <a:latin typeface="Century Gothic"/>
-                <a:cs typeface="Century Gothic"/>
+                <a:latin typeface="Arial"/>
+                <a:cs typeface="Arial"/>
               </a:rPr>
               <a:t>Choose</a:t>
             </a:r>
@@ -20011,8 +19885,8 @@
                 <a:solidFill>
                   <a:srgbClr val="000000"/>
                 </a:solidFill>
-                <a:latin typeface="Century Gothic"/>
-                <a:cs typeface="Century Gothic"/>
+                <a:latin typeface="Arial"/>
+                <a:cs typeface="Arial"/>
               </a:rPr>
               <a:t>Cluster trial</a:t>
             </a:r>
@@ -20033,8 +19907,8 @@
                 <a:solidFill>
                   <a:srgbClr val="000000"/>
                 </a:solidFill>
-                <a:latin typeface="Century Gothic"/>
-                <a:cs typeface="Century Gothic"/>
+                <a:latin typeface="Arial"/>
+                <a:cs typeface="Arial"/>
               </a:rPr>
               <a:t>Non-inferiority trial</a:t>
             </a:r>
@@ -20055,8 +19929,8 @@
                 <a:solidFill>
                   <a:srgbClr val="000000"/>
                 </a:solidFill>
-                <a:latin typeface="Century Gothic"/>
-                <a:cs typeface="Century Gothic"/>
+                <a:latin typeface="Arial"/>
+                <a:cs typeface="Arial"/>
               </a:rPr>
               <a:t>Interrupted time series</a:t>
             </a:r>
@@ -20077,8 +19951,8 @@
                 <a:solidFill>
                   <a:srgbClr val="000000"/>
                 </a:solidFill>
-                <a:latin typeface="Century Gothic"/>
-                <a:cs typeface="Century Gothic"/>
+                <a:latin typeface="Arial"/>
+                <a:cs typeface="Arial"/>
               </a:rPr>
               <a:t>Qualitative interviews</a:t>
             </a:r>
@@ -20124,8 +19998,8 @@
                 <a:solidFill>
                   <a:srgbClr val="6C3483"/>
                 </a:solidFill>
-                <a:latin typeface="Century Gothic"/>
-                <a:cs typeface="Century Gothic"/>
+                <a:latin typeface="Arial"/>
+                <a:cs typeface="Arial"/>
               </a:rPr>
               <a:t>OUTPUT   </a:t>
             </a:r>
@@ -20134,8 +20008,8 @@
                 <a:solidFill>
                   <a:srgbClr val="000000"/>
                 </a:solidFill>
-                <a:latin typeface="Century Gothic"/>
-                <a:cs typeface="Century Gothic"/>
+                <a:latin typeface="Arial"/>
+                <a:cs typeface="Arial"/>
               </a:rPr>
               <a:t>One design for each (answers in the notes)</a:t>
             </a:r>
@@ -20172,7 +20046,7 @@
                     <a:lumMod val="50000"/>
                   </a:schemeClr>
                 </a:solidFill>
-                <a:latin typeface="Verdana"/>
+                <a:latin typeface="Arial"/>
               </a:rPr>
               <a:t>Neudata | #ClearDataClearImpact</a:t>
             </a:r>
@@ -20302,8 +20176,8 @@
                 <a:solidFill>
                   <a:srgbClr val="0D7377"/>
                 </a:solidFill>
-                <a:latin typeface="Century Gothic"/>
-                <a:cs typeface="Century Gothic"/>
+                <a:latin typeface="Arial"/>
+                <a:cs typeface="Arial"/>
               </a:rPr>
               <a:t>Exercise: choose the design for 5 questions</a:t>
             </a:r>
@@ -20373,8 +20247,8 @@
                 <a:solidFill>
                   <a:srgbClr val="FFFFFF"/>
                 </a:solidFill>
-                <a:latin typeface="Century Gothic"/>
-                <a:cs typeface="Century Gothic"/>
+                <a:latin typeface="Arial"/>
+                <a:cs typeface="Arial"/>
               </a:rPr>
               <a:t>GROUP WORK   |   20 min</a:t>
             </a:r>
@@ -20411,25 +20285,19 @@
               <a:spcBef>
                 <a:spcPts val="450"/>
               </a:spcBef>
-              <a:buNone/>
-            </a:pPr>
-            <a:r>
-              <a:rPr lang="en-US" sz="1650" b="1" dirty="0">
-                <a:solidFill>
-                  <a:srgbClr val="0D7377"/>
-                </a:solidFill>
-                <a:latin typeface="Century Gothic"/>
-                <a:cs typeface="Century Gothic"/>
-              </a:rPr>
-              <a:t>1.  </a:t>
-            </a:r>
+              <a:buClr>
+                <a:srgbClr val="0D7377"/>
+              </a:buClr>
+              <a:buFont typeface="Arial"/>
+              <a:buChar char="•"/>
+            </a:pPr>
             <a:r>
               <a:rPr lang="en-US" sz="1650" dirty="0">
                 <a:solidFill>
                   <a:srgbClr val="000000"/>
                 </a:solidFill>
-                <a:latin typeface="Century Gothic"/>
-                <a:cs typeface="Century Gothic"/>
+                <a:latin typeface="Arial"/>
+                <a:cs typeface="Arial"/>
               </a:rPr>
               <a:t>Handout Part B: four clinical questions + your group's own question</a:t>
             </a:r>
@@ -20442,25 +20310,19 @@
               <a:spcBef>
                 <a:spcPts val="450"/>
               </a:spcBef>
-              <a:buNone/>
-            </a:pPr>
-            <a:r>
-              <a:rPr lang="en-US" sz="1650" b="1" dirty="0">
-                <a:solidFill>
-                  <a:srgbClr val="0D7377"/>
-                </a:solidFill>
-                <a:latin typeface="Century Gothic"/>
-                <a:cs typeface="Century Gothic"/>
-              </a:rPr>
-              <a:t>2.  </a:t>
-            </a:r>
+              <a:buClr>
+                <a:srgbClr val="0D7377"/>
+              </a:buClr>
+              <a:buFont typeface="Arial"/>
+              <a:buChar char="•"/>
+            </a:pPr>
             <a:r>
               <a:rPr lang="en-US" sz="1650" dirty="0">
                 <a:solidFill>
                   <a:srgbClr val="000000"/>
                 </a:solidFill>
-                <a:latin typeface="Century Gothic"/>
-                <a:cs typeface="Century Gothic"/>
+                <a:latin typeface="Arial"/>
+                <a:cs typeface="Arial"/>
               </a:rPr>
               <a:t>For each: name the best FEASIBLE design (use the decision tree)</a:t>
             </a:r>
@@ -20473,25 +20335,19 @@
               <a:spcBef>
                 <a:spcPts val="450"/>
               </a:spcBef>
-              <a:buNone/>
-            </a:pPr>
-            <a:r>
-              <a:rPr lang="en-US" sz="1650" b="1" dirty="0">
-                <a:solidFill>
-                  <a:srgbClr val="0D7377"/>
-                </a:solidFill>
-                <a:latin typeface="Century Gothic"/>
-                <a:cs typeface="Century Gothic"/>
-              </a:rPr>
-              <a:t>3.  </a:t>
-            </a:r>
+              <a:buClr>
+                <a:srgbClr val="0D7377"/>
+              </a:buClr>
+              <a:buFont typeface="Arial"/>
+              <a:buChar char="•"/>
+            </a:pPr>
             <a:r>
               <a:rPr lang="en-US" sz="1650" dirty="0">
                 <a:solidFill>
                   <a:srgbClr val="000000"/>
                 </a:solidFill>
-                <a:latin typeface="Century Gothic"/>
-                <a:cs typeface="Century Gothic"/>
+                <a:latin typeface="Arial"/>
+                <a:cs typeface="Arial"/>
               </a:rPr>
               <a:t>Write one reason and the design's main weakness</a:t>
             </a:r>
@@ -20504,25 +20360,19 @@
               <a:spcBef>
                 <a:spcPts val="450"/>
               </a:spcBef>
-              <a:buNone/>
-            </a:pPr>
-            <a:r>
-              <a:rPr lang="en-US" sz="1650" b="1" dirty="0">
-                <a:solidFill>
-                  <a:srgbClr val="0D7377"/>
-                </a:solidFill>
-                <a:latin typeface="Century Gothic"/>
-                <a:cs typeface="Century Gothic"/>
-              </a:rPr>
-              <a:t>4.  </a:t>
-            </a:r>
+              <a:buClr>
+                <a:srgbClr val="0D7377"/>
+              </a:buClr>
+              <a:buFont typeface="Arial"/>
+              <a:buChar char="•"/>
+            </a:pPr>
             <a:r>
               <a:rPr lang="en-US" sz="1650" dirty="0">
                 <a:solidFill>
                   <a:srgbClr val="000000"/>
                 </a:solidFill>
-                <a:latin typeface="Century Gothic"/>
-                <a:cs typeface="Century Gothic"/>
+                <a:latin typeface="Arial"/>
+                <a:cs typeface="Arial"/>
               </a:rPr>
               <a:t>Your own question: may you say 'caused' or only 'associated'?</a:t>
             </a:r>
@@ -20535,25 +20385,19 @@
               <a:spcBef>
                 <a:spcPts val="450"/>
               </a:spcBef>
-              <a:buNone/>
-            </a:pPr>
-            <a:r>
-              <a:rPr lang="en-US" sz="1650" b="1" dirty="0">
-                <a:solidFill>
-                  <a:srgbClr val="0D7377"/>
-                </a:solidFill>
-                <a:latin typeface="Century Gothic"/>
-                <a:cs typeface="Century Gothic"/>
-              </a:rPr>
-              <a:t>5.  </a:t>
-            </a:r>
+              <a:buClr>
+                <a:srgbClr val="0D7377"/>
+              </a:buClr>
+              <a:buFont typeface="Arial"/>
+              <a:buChar char="•"/>
+            </a:pPr>
             <a:r>
               <a:rPr lang="en-US" sz="1650" dirty="0">
                 <a:solidFill>
                   <a:srgbClr val="000000"/>
                 </a:solidFill>
-                <a:latin typeface="Century Gothic"/>
-                <a:cs typeface="Century Gothic"/>
+                <a:latin typeface="Arial"/>
+                <a:cs typeface="Arial"/>
               </a:rPr>
               <a:t>Two groups share their own question and design (1 minute each)</a:t>
             </a:r>
@@ -20597,8 +20441,8 @@
                 <a:solidFill>
                   <a:srgbClr val="0D7377"/>
                 </a:solidFill>
-                <a:latin typeface="Century Gothic"/>
-                <a:cs typeface="Century Gothic"/>
+                <a:latin typeface="Arial"/>
+                <a:cs typeface="Arial"/>
               </a:rPr>
               <a:t>Remember</a:t>
             </a:r>
@@ -20619,8 +20463,8 @@
                 <a:solidFill>
                   <a:srgbClr val="000000"/>
                 </a:solidFill>
-                <a:latin typeface="Century Gothic"/>
-                <a:cs typeface="Century Gothic"/>
+                <a:latin typeface="Arial"/>
+                <a:cs typeface="Arial"/>
               </a:rPr>
               <a:t>How common now? Cross-sectional</a:t>
             </a:r>
@@ -20641,8 +20485,8 @@
                 <a:solidFill>
                   <a:srgbClr val="000000"/>
                 </a:solidFill>
-                <a:latin typeface="Century Gothic"/>
-                <a:cs typeface="Century Gothic"/>
+                <a:latin typeface="Arial"/>
+                <a:cs typeface="Arial"/>
               </a:rPr>
               <a:t>Rare outcome? Case-control</a:t>
             </a:r>
@@ -20663,8 +20507,8 @@
                 <a:solidFill>
                   <a:srgbClr val="000000"/>
                 </a:solidFill>
-                <a:latin typeface="Century Gothic"/>
-                <a:cs typeface="Century Gothic"/>
+                <a:latin typeface="Arial"/>
+                <a:cs typeface="Arial"/>
               </a:rPr>
               <a:t>What happens after? Cohort</a:t>
             </a:r>
@@ -20685,8 +20529,8 @@
                 <a:solidFill>
                   <a:srgbClr val="000000"/>
                 </a:solidFill>
-                <a:latin typeface="Century Gothic"/>
-                <a:cs typeface="Century Gothic"/>
+                <a:latin typeface="Arial"/>
+                <a:cs typeface="Arial"/>
               </a:rPr>
               <a:t>Does it work? RCT / cluster</a:t>
             </a:r>
@@ -20707,8 +20551,8 @@
                 <a:solidFill>
                   <a:srgbClr val="000000"/>
                 </a:solidFill>
-                <a:latin typeface="Century Gothic"/>
-                <a:cs typeface="Century Gothic"/>
+                <a:latin typeface="Arial"/>
+                <a:cs typeface="Arial"/>
               </a:rPr>
               <a:t>Already changed? Time series</a:t>
             </a:r>
@@ -20729,8 +20573,8 @@
                 <a:solidFill>
                   <a:srgbClr val="000000"/>
                 </a:solidFill>
-                <a:latin typeface="Century Gothic"/>
-                <a:cs typeface="Century Gothic"/>
+                <a:latin typeface="Arial"/>
+                <a:cs typeface="Arial"/>
               </a:rPr>
               <a:t>Why / how? Qualitative</a:t>
             </a:r>
@@ -20776,8 +20620,8 @@
                 <a:solidFill>
                   <a:srgbClr val="0D7377"/>
                 </a:solidFill>
-                <a:latin typeface="Century Gothic"/>
-                <a:cs typeface="Century Gothic"/>
+                <a:latin typeface="Arial"/>
+                <a:cs typeface="Arial"/>
               </a:rPr>
               <a:t>OUTPUT   </a:t>
             </a:r>
@@ -20786,8 +20630,8 @@
                 <a:solidFill>
                   <a:srgbClr val="000000"/>
                 </a:solidFill>
-                <a:latin typeface="Century Gothic"/>
-                <a:cs typeface="Century Gothic"/>
+                <a:latin typeface="Arial"/>
+                <a:cs typeface="Arial"/>
               </a:rPr>
               <a:t>5 designs with a reason and a weakness, including your own question</a:t>
             </a:r>
@@ -20824,7 +20668,7 @@
                     <a:lumMod val="50000"/>
                   </a:schemeClr>
                 </a:solidFill>
-                <a:latin typeface="Verdana"/>
+                <a:latin typeface="Arial"/>
               </a:rPr>
               <a:t>Neudata | #ClearDataClearImpact</a:t>
             </a:r>
@@ -20954,8 +20798,8 @@
                 <a:solidFill>
                   <a:srgbClr val="0D7377"/>
                 </a:solidFill>
-                <a:latin typeface="Century Gothic"/>
-                <a:cs typeface="Century Gothic"/>
+                <a:latin typeface="Arial"/>
+                <a:cs typeface="Arial"/>
               </a:rPr>
               <a:t>Who is in your study? Inclusion and exclusion criteria</a:t>
             </a:r>
@@ -21051,8 +20895,8 @@
                 <a:solidFill>
                   <a:srgbClr val="FFFFFF"/>
                 </a:solidFill>
-                <a:latin typeface="Century Gothic"/>
-                <a:cs typeface="Century Gothic"/>
+                <a:latin typeface="Arial"/>
+                <a:cs typeface="Arial"/>
               </a:rPr>
               <a:t>KEY MESSAGE   </a:t>
             </a:r>
@@ -21061,8 +20905,8 @@
                 <a:solidFill>
                   <a:srgbClr val="FFFFFF"/>
                 </a:solidFill>
-                <a:latin typeface="Century Gothic"/>
-                <a:cs typeface="Century Gothic"/>
+                <a:latin typeface="Arial"/>
+                <a:cs typeface="Arial"/>
               </a:rPr>
               <a:t>Inclusion describes your P; exclusion removes eligible people for a stated reason.</a:t>
             </a:r>
@@ -21099,7 +20943,7 @@
                     <a:lumMod val="50000"/>
                   </a:schemeClr>
                 </a:solidFill>
-                <a:latin typeface="Verdana"/>
+                <a:latin typeface="Arial"/>
               </a:rPr>
               <a:t>Neudata | #ClearDataClearImpact</a:t>
             </a:r>
@@ -21229,8 +21073,8 @@
                 <a:solidFill>
                   <a:srgbClr val="0D7377"/>
                 </a:solidFill>
-                <a:latin typeface="Century Gothic"/>
-                <a:cs typeface="Century Gothic"/>
+                <a:latin typeface="Arial"/>
+                <a:cs typeface="Arial"/>
               </a:rPr>
               <a:t>Proposal builder 3: design, setting and population</a:t>
             </a:r>
@@ -21300,8 +21144,8 @@
                 <a:solidFill>
                   <a:srgbClr val="FFFFFF"/>
                 </a:solidFill>
-                <a:latin typeface="Century Gothic"/>
-                <a:cs typeface="Century Gothic"/>
+                <a:latin typeface="Arial"/>
+                <a:cs typeface="Arial"/>
               </a:rPr>
               <a:t>PROPOSAL BUILDER   |   35 min</a:t>
             </a:r>
@@ -21338,25 +21182,19 @@
               <a:spcBef>
                 <a:spcPts val="450"/>
               </a:spcBef>
-              <a:buNone/>
-            </a:pPr>
-            <a:r>
-              <a:rPr lang="en-US" sz="1650" b="1" dirty="0">
-                <a:solidFill>
-                  <a:srgbClr val="055F56"/>
-                </a:solidFill>
-                <a:latin typeface="Century Gothic"/>
-                <a:cs typeface="Century Gothic"/>
-              </a:rPr>
-              <a:t>1.  </a:t>
-            </a:r>
+              <a:buClr>
+                <a:srgbClr val="055F56"/>
+              </a:buClr>
+              <a:buFont typeface="Arial"/>
+              <a:buChar char="•"/>
+            </a:pPr>
             <a:r>
               <a:rPr lang="en-US" sz="1650" dirty="0">
                 <a:solidFill>
                   <a:srgbClr val="000000"/>
                 </a:solidFill>
-                <a:latin typeface="Century Gothic"/>
-                <a:cs typeface="Century Gothic"/>
+                <a:latin typeface="Arial"/>
+                <a:cs typeface="Arial"/>
               </a:rPr>
               <a:t>Re-read your research question from Part 1</a:t>
             </a:r>
@@ -21369,25 +21207,19 @@
               <a:spcBef>
                 <a:spcPts val="450"/>
               </a:spcBef>
-              <a:buNone/>
-            </a:pPr>
-            <a:r>
-              <a:rPr lang="en-US" sz="1650" b="1" dirty="0">
-                <a:solidFill>
-                  <a:srgbClr val="055F56"/>
-                </a:solidFill>
-                <a:latin typeface="Century Gothic"/>
-                <a:cs typeface="Century Gothic"/>
-              </a:rPr>
-              <a:t>2.  </a:t>
-            </a:r>
+              <a:buClr>
+                <a:srgbClr val="055F56"/>
+              </a:buClr>
+              <a:buFont typeface="Arial"/>
+              <a:buChar char="•"/>
+            </a:pPr>
             <a:r>
               <a:rPr lang="en-US" sz="1650" dirty="0">
                 <a:solidFill>
                   <a:srgbClr val="000000"/>
                 </a:solidFill>
-                <a:latin typeface="Century Gothic"/>
-                <a:cs typeface="Century Gothic"/>
+                <a:latin typeface="Arial"/>
+                <a:cs typeface="Arial"/>
               </a:rPr>
               <a:t>Choose the design with the decision tree; justify it in 3-5 sentences</a:t>
             </a:r>
@@ -21400,25 +21232,19 @@
               <a:spcBef>
                 <a:spcPts val="450"/>
               </a:spcBef>
-              <a:buNone/>
-            </a:pPr>
-            <a:r>
-              <a:rPr lang="en-US" sz="1650" b="1" dirty="0">
-                <a:solidFill>
-                  <a:srgbClr val="055F56"/>
-                </a:solidFill>
-                <a:latin typeface="Century Gothic"/>
-                <a:cs typeface="Century Gothic"/>
-              </a:rPr>
-              <a:t>3.  </a:t>
-            </a:r>
+              <a:buClr>
+                <a:srgbClr val="055F56"/>
+              </a:buClr>
+              <a:buFont typeface="Arial"/>
+              <a:buChar char="•"/>
+            </a:pPr>
             <a:r>
               <a:rPr lang="en-US" sz="1650" dirty="0">
                 <a:solidFill>
                   <a:srgbClr val="000000"/>
                 </a:solidFill>
-                <a:latin typeface="Century Gothic"/>
-                <a:cs typeface="Century Gothic"/>
+                <a:latin typeface="Arial"/>
+                <a:cs typeface="Arial"/>
               </a:rPr>
               <a:t>Setting: where, when, which units, which data source</a:t>
             </a:r>
@@ -21431,25 +21257,19 @@
               <a:spcBef>
                 <a:spcPts val="450"/>
               </a:spcBef>
-              <a:buNone/>
-            </a:pPr>
-            <a:r>
-              <a:rPr lang="en-US" sz="1650" b="1" dirty="0">
-                <a:solidFill>
-                  <a:srgbClr val="055F56"/>
-                </a:solidFill>
-                <a:latin typeface="Century Gothic"/>
-                <a:cs typeface="Century Gothic"/>
-              </a:rPr>
-              <a:t>4.  </a:t>
-            </a:r>
+              <a:buClr>
+                <a:srgbClr val="055F56"/>
+              </a:buClr>
+              <a:buFont typeface="Arial"/>
+              <a:buChar char="•"/>
+            </a:pPr>
             <a:r>
               <a:rPr lang="en-US" sz="1650" dirty="0">
                 <a:solidFill>
                   <a:srgbClr val="000000"/>
                 </a:solidFill>
-                <a:latin typeface="Century Gothic"/>
-                <a:cs typeface="Century Gothic"/>
+                <a:latin typeface="Arial"/>
+                <a:cs typeface="Arial"/>
               </a:rPr>
               <a:t>Population: 3-5 inclusion and 3-5 exclusion criteria (with reasons)</a:t>
             </a:r>
@@ -21462,25 +21282,19 @@
               <a:spcBef>
                 <a:spcPts val="450"/>
               </a:spcBef>
-              <a:buNone/>
-            </a:pPr>
-            <a:r>
-              <a:rPr lang="en-US" sz="1650" b="1" dirty="0">
-                <a:solidFill>
-                  <a:srgbClr val="055F56"/>
-                </a:solidFill>
-                <a:latin typeface="Century Gothic"/>
-                <a:cs typeface="Century Gothic"/>
-              </a:rPr>
-              <a:t>5.  </a:t>
-            </a:r>
+              <a:buClr>
+                <a:srgbClr val="055F56"/>
+              </a:buClr>
+              <a:buFont typeface="Arial"/>
+              <a:buChar char="•"/>
+            </a:pPr>
             <a:r>
               <a:rPr lang="en-US" sz="1650" dirty="0">
                 <a:solidFill>
                   <a:srgbClr val="000000"/>
                 </a:solidFill>
-                <a:latin typeface="Century Gothic"/>
-                <a:cs typeface="Century Gothic"/>
+                <a:latin typeface="Arial"/>
+                <a:cs typeface="Arial"/>
               </a:rPr>
               <a:t>Draw your study on a timeline: exposure, then outcome</a:t>
             </a:r>
@@ -21493,25 +21307,19 @@
               <a:spcBef>
                 <a:spcPts val="450"/>
               </a:spcBef>
-              <a:buNone/>
-            </a:pPr>
-            <a:r>
-              <a:rPr lang="en-US" sz="1650" b="1" dirty="0">
-                <a:solidFill>
-                  <a:srgbClr val="055F56"/>
-                </a:solidFill>
-                <a:latin typeface="Century Gothic"/>
-                <a:cs typeface="Century Gothic"/>
-              </a:rPr>
-              <a:t>6.  </a:t>
-            </a:r>
+              <a:buClr>
+                <a:srgbClr val="055F56"/>
+              </a:buClr>
+              <a:buFont typeface="Arial"/>
+              <a:buChar char="•"/>
+            </a:pPr>
             <a:r>
               <a:rPr lang="en-US" sz="1650" dirty="0">
                 <a:solidFill>
                   <a:srgbClr val="000000"/>
                 </a:solidFill>
-                <a:latin typeface="Century Gothic"/>
-                <a:cs typeface="Century Gothic"/>
+                <a:latin typeface="Arial"/>
+                <a:cs typeface="Arial"/>
               </a:rPr>
               <a:t>Ask the facilitator to check before you finish</a:t>
             </a:r>
@@ -21555,8 +21363,8 @@
                 <a:solidFill>
                   <a:srgbClr val="055F56"/>
                 </a:solidFill>
-                <a:latin typeface="Century Gothic"/>
-                <a:cs typeface="Century Gothic"/>
+                <a:latin typeface="Arial"/>
+                <a:cs typeface="Arial"/>
               </a:rPr>
               <a:t>Facilitator check</a:t>
             </a:r>
@@ -21577,8 +21385,8 @@
                 <a:solidFill>
                   <a:srgbClr val="000000"/>
                 </a:solidFill>
-                <a:latin typeface="Century Gothic"/>
-                <a:cs typeface="Century Gothic"/>
+                <a:latin typeface="Arial"/>
+                <a:cs typeface="Arial"/>
               </a:rPr>
               <a:t>Design matches the question?</a:t>
             </a:r>
@@ -21599,8 +21407,8 @@
                 <a:solidFill>
                   <a:srgbClr val="000000"/>
                 </a:solidFill>
-                <a:latin typeface="Century Gothic"/>
-                <a:cs typeface="Century Gothic"/>
+                <a:latin typeface="Arial"/>
+                <a:cs typeface="Arial"/>
               </a:rPr>
               <a:t>Feasible in your unit?</a:t>
             </a:r>
@@ -21621,8 +21429,8 @@
                 <a:solidFill>
                   <a:srgbClr val="000000"/>
                 </a:solidFill>
-                <a:latin typeface="Century Gothic"/>
-                <a:cs typeface="Century Gothic"/>
+                <a:latin typeface="Arial"/>
+                <a:cs typeface="Arial"/>
               </a:rPr>
               <a:t>Inclusion = your P?</a:t>
             </a:r>
@@ -21643,8 +21451,8 @@
                 <a:solidFill>
                   <a:srgbClr val="000000"/>
                 </a:solidFill>
-                <a:latin typeface="Century Gothic"/>
-                <a:cs typeface="Century Gothic"/>
+                <a:latin typeface="Arial"/>
+                <a:cs typeface="Arial"/>
               </a:rPr>
               <a:t>Each exclusion has a reason?</a:t>
             </a:r>
@@ -21665,8 +21473,8 @@
                 <a:solidFill>
                   <a:srgbClr val="000000"/>
                 </a:solidFill>
-                <a:latin typeface="Century Gothic"/>
-                <a:cs typeface="Century Gothic"/>
+                <a:latin typeface="Arial"/>
+                <a:cs typeface="Arial"/>
               </a:rPr>
               <a:t>Caused or associated?</a:t>
             </a:r>
@@ -21712,8 +21520,8 @@
                 <a:solidFill>
                   <a:srgbClr val="055F56"/>
                 </a:solidFill>
-                <a:latin typeface="Century Gothic"/>
-                <a:cs typeface="Century Gothic"/>
+                <a:latin typeface="Arial"/>
+                <a:cs typeface="Arial"/>
               </a:rPr>
               <a:t>OUTPUT   </a:t>
             </a:r>
@@ -21722,8 +21530,8 @@
                 <a:solidFill>
                   <a:srgbClr val="000000"/>
                 </a:solidFill>
-                <a:latin typeface="Century Gothic"/>
-                <a:cs typeface="Century Gothic"/>
+                <a:latin typeface="Arial"/>
+                <a:cs typeface="Arial"/>
               </a:rPr>
               <a:t>Proposal Part 2a written: design + justification, setting, population</a:t>
             </a:r>
@@ -21760,7 +21568,7 @@
                     <a:lumMod val="50000"/>
                   </a:schemeClr>
                 </a:solidFill>
-                <a:latin typeface="Verdana"/>
+                <a:latin typeface="Arial"/>
               </a:rPr>
               <a:t>Neudata | #ClearDataClearImpact</a:t>
             </a:r>
@@ -21890,8 +21698,8 @@
                 <a:solidFill>
                   <a:srgbClr val="0D7377"/>
                 </a:solidFill>
-                <a:latin typeface="Century Gothic"/>
-                <a:cs typeface="Century Gothic"/>
+                <a:latin typeface="Arial"/>
+                <a:cs typeface="Arial"/>
               </a:rPr>
               <a:t>Session 3 in one slide</a:t>
             </a:r>
@@ -21961,8 +21769,8 @@
                 <a:solidFill>
                   <a:srgbClr val="FFFFFF"/>
                 </a:solidFill>
-                <a:latin typeface="Century Gothic"/>
-                <a:cs typeface="Century Gothic"/>
+                <a:latin typeface="Arial"/>
+                <a:cs typeface="Arial"/>
               </a:rPr>
               <a:t>3.1 Basic designs</a:t>
             </a:r>
@@ -22010,8 +21818,8 @@
                 <a:solidFill>
                   <a:srgbClr val="000000"/>
                 </a:solidFill>
-                <a:latin typeface="Century Gothic"/>
-                <a:cs typeface="Century Gothic"/>
+                <a:latin typeface="Arial"/>
+                <a:cs typeface="Arial"/>
               </a:rPr>
               <a:t>Snapshot, look back, follow forward</a:t>
             </a:r>
@@ -22031,8 +21839,8 @@
                 <a:solidFill>
                   <a:srgbClr val="000000"/>
                 </a:solidFill>
-                <a:latin typeface="Century Gothic"/>
-                <a:cs typeface="Century Gothic"/>
+                <a:latin typeface="Arial"/>
+                <a:cs typeface="Arial"/>
               </a:rPr>
               <a:t>RCT = chance assigns the exposure</a:t>
             </a:r>
@@ -22052,8 +21860,8 @@
                 <a:solidFill>
                   <a:srgbClr val="000000"/>
                 </a:solidFill>
-                <a:latin typeface="Century Gothic"/>
-                <a:cs typeface="Century Gothic"/>
+                <a:latin typeface="Arial"/>
+                <a:cs typeface="Arial"/>
               </a:rPr>
               <a:t>RCT may say 'caused'; cohort says 'associated'</a:t>
             </a:r>
@@ -22095,8 +21903,8 @@
                 <a:solidFill>
                   <a:srgbClr val="FFFFFF"/>
                 </a:solidFill>
-                <a:latin typeface="Century Gothic"/>
-                <a:cs typeface="Century Gothic"/>
+                <a:latin typeface="Arial"/>
+                <a:cs typeface="Arial"/>
               </a:rPr>
               <a:t>3.2 More designs</a:t>
             </a:r>
@@ -22144,8 +21952,8 @@
                 <a:solidFill>
                   <a:srgbClr val="000000"/>
                 </a:solidFill>
-                <a:latin typeface="Century Gothic"/>
-                <a:cs typeface="Century Gothic"/>
+                <a:latin typeface="Arial"/>
+                <a:cs typeface="Arial"/>
               </a:rPr>
               <a:t>Cluster, crossover, factorial</a:t>
             </a:r>
@@ -22165,8 +21973,8 @@
                 <a:solidFill>
                   <a:srgbClr val="000000"/>
                 </a:solidFill>
-                <a:latin typeface="Century Gothic"/>
-                <a:cs typeface="Century Gothic"/>
+                <a:latin typeface="Arial"/>
+                <a:cs typeface="Arial"/>
               </a:rPr>
               <a:t>Non-inferiority needs a margin</a:t>
             </a:r>
@@ -22186,8 +21994,8 @@
                 <a:solidFill>
                   <a:srgbClr val="000000"/>
                 </a:solidFill>
-                <a:latin typeface="Century Gothic"/>
-                <a:cs typeface="Century Gothic"/>
+                <a:latin typeface="Arial"/>
+                <a:cs typeface="Arial"/>
               </a:rPr>
               <a:t>Pilot, time series, qualitative</a:t>
             </a:r>
@@ -22229,8 +22037,8 @@
                 <a:solidFill>
                   <a:srgbClr val="FFFFFF"/>
                 </a:solidFill>
-                <a:latin typeface="Century Gothic"/>
-                <a:cs typeface="Century Gothic"/>
+                <a:latin typeface="Arial"/>
+                <a:cs typeface="Arial"/>
               </a:rPr>
               <a:t>Your proposal</a:t>
             </a:r>
@@ -22278,8 +22086,8 @@
                 <a:solidFill>
                   <a:srgbClr val="000000"/>
                 </a:solidFill>
-                <a:latin typeface="Century Gothic"/>
-                <a:cs typeface="Century Gothic"/>
+                <a:latin typeface="Arial"/>
+                <a:cs typeface="Arial"/>
               </a:rPr>
               <a:t>Design + justification</a:t>
             </a:r>
@@ -22299,8 +22107,8 @@
                 <a:solidFill>
                   <a:srgbClr val="000000"/>
                 </a:solidFill>
-                <a:latin typeface="Century Gothic"/>
-                <a:cs typeface="Century Gothic"/>
+                <a:latin typeface="Arial"/>
+                <a:cs typeface="Arial"/>
               </a:rPr>
               <a:t>Setting</a:t>
             </a:r>
@@ -22320,8 +22128,8 @@
                 <a:solidFill>
                   <a:srgbClr val="000000"/>
                 </a:solidFill>
-                <a:latin typeface="Century Gothic"/>
-                <a:cs typeface="Century Gothic"/>
+                <a:latin typeface="Arial"/>
+                <a:cs typeface="Arial"/>
               </a:rPr>
               <a:t>Inclusion and exclusion criteria</a:t>
             </a:r>
@@ -22365,8 +22173,8 @@
                 <a:solidFill>
                   <a:srgbClr val="FFFFFF"/>
                 </a:solidFill>
-                <a:latin typeface="Century Gothic"/>
-                <a:cs typeface="Century Gothic"/>
+                <a:latin typeface="Arial"/>
+                <a:cs typeface="Arial"/>
               </a:rPr>
               <a:t>KEY MESSAGE   </a:t>
             </a:r>
@@ -22375,8 +22183,8 @@
                 <a:solidFill>
                   <a:srgbClr val="FFFFFF"/>
                 </a:solidFill>
-                <a:latin typeface="Century Gothic"/>
-                <a:cs typeface="Century Gothic"/>
+                <a:latin typeface="Arial"/>
+                <a:cs typeface="Arial"/>
               </a:rPr>
               <a:t>The question picks the design; the design decides what you may claim.</a:t>
             </a:r>
@@ -22413,7 +22221,7 @@
                     <a:lumMod val="50000"/>
                   </a:schemeClr>
                 </a:solidFill>
-                <a:latin typeface="Verdana"/>
+                <a:latin typeface="Arial"/>
               </a:rPr>
               <a:t>Neudata | #ClearDataClearImpact</a:t>
             </a:r>
@@ -22543,8 +22351,8 @@
                 <a:solidFill>
                   <a:srgbClr val="0D7377"/>
                 </a:solidFill>
-                <a:latin typeface="Century Gothic"/>
-                <a:cs typeface="Century Gothic"/>
+                <a:latin typeface="Arial"/>
+                <a:cs typeface="Arial"/>
               </a:rPr>
               <a:t>Wrap-up and homework</a:t>
             </a:r>
@@ -22614,8 +22422,8 @@
                 <a:solidFill>
                   <a:srgbClr val="FFFFFF"/>
                 </a:solidFill>
-                <a:latin typeface="Century Gothic"/>
-                <a:cs typeface="Century Gothic"/>
+                <a:latin typeface="Arial"/>
+                <a:cs typeface="Arial"/>
               </a:rPr>
               <a:t>DISCUSSION   |   5 min</a:t>
             </a:r>
@@ -22652,25 +22460,19 @@
               <a:spcBef>
                 <a:spcPts val="450"/>
               </a:spcBef>
-              <a:buNone/>
-            </a:pPr>
-            <a:r>
-              <a:rPr lang="en-US" sz="1650" b="1" dirty="0">
-                <a:solidFill>
-                  <a:srgbClr val="1F5C7A"/>
-                </a:solidFill>
-                <a:latin typeface="Century Gothic"/>
-                <a:cs typeface="Century Gothic"/>
-              </a:rPr>
-              <a:t>1.  </a:t>
-            </a:r>
+              <a:buClr>
+                <a:srgbClr val="1F5C7A"/>
+              </a:buClr>
+              <a:buFont typeface="Arial"/>
+              <a:buChar char="•"/>
+            </a:pPr>
             <a:r>
               <a:rPr lang="en-US" sz="1650" dirty="0">
                 <a:solidFill>
                   <a:srgbClr val="000000"/>
                 </a:solidFill>
-                <a:latin typeface="Century Gothic"/>
-                <a:cs typeface="Century Gothic"/>
+                <a:latin typeface="Arial"/>
+                <a:cs typeface="Arial"/>
               </a:rPr>
               <a:t>Exit question: a study compares patients who chose to get a flu vaccine with those who did not. Design? Caused or associated?</a:t>
             </a:r>
@@ -22683,25 +22485,19 @@
               <a:spcBef>
                 <a:spcPts val="450"/>
               </a:spcBef>
-              <a:buNone/>
-            </a:pPr>
-            <a:r>
-              <a:rPr lang="en-US" sz="1650" b="1" dirty="0">
-                <a:solidFill>
-                  <a:srgbClr val="1F5C7A"/>
-                </a:solidFill>
-                <a:latin typeface="Century Gothic"/>
-                <a:cs typeface="Century Gothic"/>
-              </a:rPr>
-              <a:t>2.  </a:t>
-            </a:r>
+              <a:buClr>
+                <a:srgbClr val="1F5C7A"/>
+              </a:buClr>
+              <a:buFont typeface="Arial"/>
+              <a:buChar char="•"/>
+            </a:pPr>
             <a:r>
               <a:rPr lang="en-US" sz="1650" dirty="0">
                 <a:solidFill>
                   <a:srgbClr val="000000"/>
                 </a:solidFill>
-                <a:latin typeface="Century Gothic"/>
-                <a:cs typeface="Century Gothic"/>
+                <a:latin typeface="Arial"/>
+                <a:cs typeface="Arial"/>
               </a:rPr>
               <a:t>Homework: finish Proposal Part 2a (design, setting, population)</a:t>
             </a:r>
@@ -22714,25 +22510,19 @@
               <a:spcBef>
                 <a:spcPts val="450"/>
               </a:spcBef>
-              <a:buNone/>
-            </a:pPr>
-            <a:r>
-              <a:rPr lang="en-US" sz="1650" b="1" dirty="0">
-                <a:solidFill>
-                  <a:srgbClr val="1F5C7A"/>
-                </a:solidFill>
-                <a:latin typeface="Century Gothic"/>
-                <a:cs typeface="Century Gothic"/>
-              </a:rPr>
-              <a:t>3.  </a:t>
-            </a:r>
+              <a:buClr>
+                <a:srgbClr val="1F5C7A"/>
+              </a:buClr>
+              <a:buFont typeface="Arial"/>
+              <a:buChar char="•"/>
+            </a:pPr>
             <a:r>
               <a:rPr lang="en-US" sz="1650" dirty="0">
                 <a:solidFill>
                   <a:srgbClr val="000000"/>
                 </a:solidFill>
-                <a:latin typeface="Century Gothic"/>
-                <a:cs typeface="Century Gothic"/>
+                <a:latin typeface="Arial"/>
+                <a:cs typeface="Arial"/>
               </a:rPr>
               <a:t>Homework: read the 'Patients' paragraph of Boulet and the 'Data source' paragraph of Hyun</a:t>
             </a:r>
@@ -22745,25 +22535,19 @@
               <a:spcBef>
                 <a:spcPts val="450"/>
               </a:spcBef>
-              <a:buNone/>
-            </a:pPr>
-            <a:r>
-              <a:rPr lang="en-US" sz="1650" b="1" dirty="0">
-                <a:solidFill>
-                  <a:srgbClr val="1F5C7A"/>
-                </a:solidFill>
-                <a:latin typeface="Century Gothic"/>
-                <a:cs typeface="Century Gothic"/>
-              </a:rPr>
-              <a:t>4.  </a:t>
-            </a:r>
+              <a:buClr>
+                <a:srgbClr val="1F5C7A"/>
+              </a:buClr>
+              <a:buFont typeface="Arial"/>
+              <a:buChar char="•"/>
+            </a:pPr>
             <a:r>
               <a:rPr lang="en-US" sz="1650" dirty="0">
                 <a:solidFill>
                   <a:srgbClr val="000000"/>
                 </a:solidFill>
-                <a:latin typeface="Century Gothic"/>
-                <a:cs typeface="Century Gothic"/>
+                <a:latin typeface="Arial"/>
+                <a:cs typeface="Arial"/>
               </a:rPr>
               <a:t>Next Saturday (Session 4): can we trust the result, and how big is the effect?</a:t>
             </a:r>
@@ -22809,8 +22593,8 @@
                 <a:solidFill>
                   <a:srgbClr val="1F5C7A"/>
                 </a:solidFill>
-                <a:latin typeface="Century Gothic"/>
-                <a:cs typeface="Century Gothic"/>
+                <a:latin typeface="Arial"/>
+                <a:cs typeface="Arial"/>
               </a:rPr>
               <a:t>OUTPUT   </a:t>
             </a:r>
@@ -22819,8 +22603,8 @@
                 <a:solidFill>
                   <a:srgbClr val="000000"/>
                 </a:solidFill>
-                <a:latin typeface="Century Gothic"/>
-                <a:cs typeface="Century Gothic"/>
+                <a:latin typeface="Arial"/>
+                <a:cs typeface="Arial"/>
               </a:rPr>
               <a:t>Exit answer on a sticky note</a:t>
             </a:r>
@@ -22857,7 +22641,7 @@
                     <a:lumMod val="50000"/>
                   </a:schemeClr>
                 </a:solidFill>
-                <a:latin typeface="Verdana"/>
+                <a:latin typeface="Arial"/>
               </a:rPr>
               <a:t>Neudata | #ClearDataClearImpact</a:t>
             </a:r>
@@ -22987,8 +22771,8 @@
                 <a:solidFill>
                   <a:srgbClr val="0D7377"/>
                 </a:solidFill>
-                <a:latin typeface="Century Gothic"/>
-                <a:cs typeface="Century Gothic"/>
+                <a:latin typeface="Arial"/>
+                <a:cs typeface="Arial"/>
               </a:rPr>
               <a:t>Extra slides: Session 3</a:t>
             </a:r>
@@ -23057,8 +22841,8 @@
                 <a:solidFill>
                   <a:srgbClr val="0D7377"/>
                 </a:solidFill>
-                <a:latin typeface="Century Gothic"/>
-                <a:cs typeface="Century Gothic"/>
+                <a:latin typeface="Arial"/>
+                <a:cs typeface="Arial"/>
               </a:rPr>
               <a:t>Extra slides: Session 3</a:t>
             </a:r>
@@ -23075,8 +22859,8 @@
                 <a:solidFill>
                   <a:srgbClr val="595959"/>
                 </a:solidFill>
-                <a:latin typeface="Century Gothic"/>
-                <a:cs typeface="Century Gothic"/>
+                <a:latin typeface="Arial"/>
+                <a:cs typeface="Arial"/>
               </a:rPr>
               <a:t>Use if time allows, or for self-study</a:t>
             </a:r>
@@ -23113,7 +22897,7 @@
                     <a:lumMod val="50000"/>
                   </a:schemeClr>
                 </a:solidFill>
-                <a:latin typeface="Verdana"/>
+                <a:latin typeface="Arial"/>
               </a:rPr>
               <a:t>Neudata | #ClearDataClearImpact</a:t>
             </a:r>
@@ -23243,8 +23027,8 @@
                 <a:solidFill>
                   <a:srgbClr val="0D7377"/>
                 </a:solidFill>
-                <a:latin typeface="Century Gothic"/>
-                <a:cs typeface="Century Gothic"/>
+                <a:latin typeface="Arial"/>
+                <a:cs typeface="Arial"/>
               </a:rPr>
               <a:t>One question, two designs</a:t>
             </a:r>
@@ -23340,8 +23124,8 @@
                 <a:solidFill>
                   <a:srgbClr val="FFFFFF"/>
                 </a:solidFill>
-                <a:latin typeface="Century Gothic"/>
-                <a:cs typeface="Century Gothic"/>
+                <a:latin typeface="Arial"/>
+                <a:cs typeface="Arial"/>
               </a:rPr>
               <a:t>KEY MESSAGE   </a:t>
             </a:r>
@@ -23350,8 +23134,8 @@
                 <a:solidFill>
                   <a:srgbClr val="FFFFFF"/>
                 </a:solidFill>
-                <a:latin typeface="Century Gothic"/>
-                <a:cs typeface="Century Gothic"/>
+                <a:latin typeface="Arial"/>
+                <a:cs typeface="Arial"/>
               </a:rPr>
               <a:t>Same question, two designs: the design decides what you may claim.</a:t>
             </a:r>
@@ -23388,7 +23172,7 @@
                     <a:lumMod val="50000"/>
                   </a:schemeClr>
                 </a:solidFill>
-                <a:latin typeface="Verdana"/>
+                <a:latin typeface="Arial"/>
               </a:rPr>
               <a:t>Neudata | #ClearDataClearImpact</a:t>
             </a:r>
@@ -23518,8 +23302,8 @@
                 <a:solidFill>
                   <a:srgbClr val="0D7377"/>
                 </a:solidFill>
-                <a:latin typeface="Century Gothic"/>
-                <a:cs typeface="Century Gothic"/>
+                <a:latin typeface="Arial"/>
+                <a:cs typeface="Arial"/>
               </a:rPr>
               <a:t>The decision tree in action: Boulet and Hyun</a:t>
             </a:r>
@@ -23591,8 +23375,8 @@
                 <a:solidFill>
                   <a:srgbClr val="FFFFFF"/>
                 </a:solidFill>
-                <a:latin typeface="Century Gothic"/>
-                <a:cs typeface="Century Gothic"/>
+                <a:latin typeface="Arial"/>
+                <a:cs typeface="Arial"/>
               </a:rPr>
               <a:t>Assigned?</a:t>
             </a:r>
@@ -23640,8 +23424,8 @@
                 <a:solidFill>
                   <a:srgbClr val="000000"/>
                 </a:solidFill>
-                <a:latin typeface="Century Gothic"/>
-                <a:cs typeface="Century Gothic"/>
+                <a:latin typeface="Arial"/>
+                <a:cs typeface="Arial"/>
               </a:rPr>
               <a:t>Boulet: yes, the trial assigned the strategy</a:t>
             </a:r>
@@ -23661,8 +23445,8 @@
                 <a:solidFill>
                   <a:srgbClr val="000000"/>
                 </a:solidFill>
-                <a:latin typeface="Century Gothic"/>
-                <a:cs typeface="Century Gothic"/>
+                <a:latin typeface="Arial"/>
+                <a:cs typeface="Arial"/>
               </a:rPr>
               <a:t>Hyun: no, clinicians decided</a:t>
             </a:r>
@@ -23706,8 +23490,8 @@
                 <a:solidFill>
                   <a:srgbClr val="FFFFFF"/>
                 </a:solidFill>
-                <a:latin typeface="Century Gothic"/>
-                <a:cs typeface="Century Gothic"/>
+                <a:latin typeface="Arial"/>
+                <a:cs typeface="Arial"/>
               </a:rPr>
               <a:t>Random?</a:t>
             </a:r>
@@ -23755,8 +23539,8 @@
                 <a:solidFill>
                   <a:srgbClr val="000000"/>
                 </a:solidFill>
-                <a:latin typeface="Century Gothic"/>
-                <a:cs typeface="Century Gothic"/>
+                <a:latin typeface="Arial"/>
+                <a:cs typeface="Arial"/>
               </a:rPr>
               <a:t>Boulet: yes, central computer</a:t>
             </a:r>
@@ -23800,8 +23584,8 @@
                 <a:solidFill>
                   <a:srgbClr val="FFFFFF"/>
                 </a:solidFill>
-                <a:latin typeface="Century Gothic"/>
-                <a:cs typeface="Century Gothic"/>
+                <a:latin typeface="Arial"/>
+                <a:cs typeface="Arial"/>
               </a:rPr>
               <a:t>Comparison?</a:t>
             </a:r>
@@ -23849,8 +23633,8 @@
                 <a:solidFill>
                   <a:srgbClr val="000000"/>
                 </a:solidFill>
-                <a:latin typeface="Century Gothic"/>
-                <a:cs typeface="Century Gothic"/>
+                <a:latin typeface="Arial"/>
+                <a:cs typeface="Arial"/>
               </a:rPr>
               <a:t>Hyun: yes, positive vs negative balance</a:t>
             </a:r>
@@ -23894,8 +23678,8 @@
                 <a:solidFill>
                   <a:srgbClr val="FFFFFF"/>
                 </a:solidFill>
-                <a:latin typeface="Century Gothic"/>
-                <a:cs typeface="Century Gothic"/>
+                <a:latin typeface="Arial"/>
+                <a:cs typeface="Arial"/>
               </a:rPr>
               <a:t>Time order?</a:t>
             </a:r>
@@ -23943,8 +23727,8 @@
                 <a:solidFill>
                   <a:srgbClr val="000000"/>
                 </a:solidFill>
-                <a:latin typeface="Century Gothic"/>
-                <a:cs typeface="Century Gothic"/>
+                <a:latin typeface="Arial"/>
+                <a:cs typeface="Arial"/>
               </a:rPr>
               <a:t>Hyun: exposure days 1-3, then death by day 28</a:t>
             </a:r>
@@ -23988,8 +23772,8 @@
                 <a:solidFill>
                   <a:srgbClr val="FFFFFF"/>
                 </a:solidFill>
-                <a:latin typeface="Century Gothic"/>
-                <a:cs typeface="Century Gothic"/>
+                <a:latin typeface="Arial"/>
+                <a:cs typeface="Arial"/>
               </a:rPr>
               <a:t>Design</a:t>
             </a:r>
@@ -24037,8 +23821,8 @@
                 <a:solidFill>
                   <a:srgbClr val="000000"/>
                 </a:solidFill>
-                <a:latin typeface="Century Gothic"/>
-                <a:cs typeface="Century Gothic"/>
+                <a:latin typeface="Arial"/>
+                <a:cs typeface="Arial"/>
               </a:rPr>
               <a:t>Boulet: RCT</a:t>
             </a:r>
@@ -24058,8 +23842,8 @@
                 <a:solidFill>
                   <a:srgbClr val="000000"/>
                 </a:solidFill>
-                <a:latin typeface="Century Gothic"/>
-                <a:cs typeface="Century Gothic"/>
+                <a:latin typeface="Arial"/>
+                <a:cs typeface="Arial"/>
               </a:rPr>
               <a:t>Hyun: cohort</a:t>
             </a:r>
@@ -24103,8 +23887,8 @@
                 <a:solidFill>
                   <a:srgbClr val="FFFFFF"/>
                 </a:solidFill>
-                <a:latin typeface="Century Gothic"/>
-                <a:cs typeface="Century Gothic"/>
+                <a:latin typeface="Arial"/>
+                <a:cs typeface="Arial"/>
               </a:rPr>
               <a:t>KEY MESSAGE   </a:t>
             </a:r>
@@ -24113,8 +23897,8 @@
                 <a:solidFill>
                   <a:srgbClr val="FFFFFF"/>
                 </a:solidFill>
-                <a:latin typeface="Century Gothic"/>
-                <a:cs typeface="Century Gothic"/>
+                <a:latin typeface="Arial"/>
+                <a:cs typeface="Arial"/>
               </a:rPr>
               <a:t>Walk every paper through the same questions before reading its results.</a:t>
             </a:r>
@@ -24151,7 +23935,7 @@
                     <a:lumMod val="50000"/>
                   </a:schemeClr>
                 </a:solidFill>
-                <a:latin typeface="Verdana"/>
+                <a:latin typeface="Arial"/>
               </a:rPr>
               <a:t>Neudata | #ClearDataClearImpact</a:t>
             </a:r>
@@ -24281,8 +24065,8 @@
                 <a:solidFill>
                   <a:srgbClr val="0D7377"/>
                 </a:solidFill>
-                <a:latin typeface="Century Gothic"/>
-                <a:cs typeface="Century Gothic"/>
+                <a:latin typeface="Arial"/>
+                <a:cs typeface="Arial"/>
               </a:rPr>
               <a:t>Choosing good controls in a case-control study</a:t>
             </a:r>
@@ -24352,8 +24136,8 @@
                 <a:solidFill>
                   <a:srgbClr val="FFFFFF"/>
                 </a:solidFill>
-                <a:latin typeface="Century Gothic"/>
-                <a:cs typeface="Century Gothic"/>
+                <a:latin typeface="Arial"/>
+                <a:cs typeface="Arial"/>
               </a:rPr>
               <a:t>Same source</a:t>
             </a:r>
@@ -24401,8 +24185,8 @@
                 <a:solidFill>
                   <a:srgbClr val="000000"/>
                 </a:solidFill>
-                <a:latin typeface="Century Gothic"/>
-                <a:cs typeface="Century Gothic"/>
+                <a:latin typeface="Arial"/>
+                <a:cs typeface="Arial"/>
               </a:rPr>
               <a:t>Same hospital, units and period as the cases</a:t>
             </a:r>
@@ -24422,8 +24206,8 @@
                 <a:solidFill>
                   <a:srgbClr val="000000"/>
                 </a:solidFill>
-                <a:latin typeface="Century Gothic"/>
-                <a:cs typeface="Century Gothic"/>
+                <a:latin typeface="Arial"/>
+                <a:cs typeface="Arial"/>
               </a:rPr>
               <a:t>Would have become a case if they had the outcome</a:t>
             </a:r>
@@ -24465,8 +24249,8 @@
                 <a:solidFill>
                   <a:srgbClr val="FFFFFF"/>
                 </a:solidFill>
-                <a:latin typeface="Century Gothic"/>
-                <a:cs typeface="Century Gothic"/>
+                <a:latin typeface="Arial"/>
+                <a:cs typeface="Arial"/>
               </a:rPr>
               <a:t>Same measurement</a:t>
             </a:r>
@@ -24514,8 +24298,8 @@
                 <a:solidFill>
                   <a:srgbClr val="000000"/>
                 </a:solidFill>
-                <a:latin typeface="Century Gothic"/>
-                <a:cs typeface="Century Gothic"/>
+                <a:latin typeface="Arial"/>
+                <a:cs typeface="Arial"/>
               </a:rPr>
               <a:t>Same records, same questions</a:t>
             </a:r>
@@ -24535,8 +24319,8 @@
                 <a:solidFill>
                   <a:srgbClr val="000000"/>
                 </a:solidFill>
-                <a:latin typeface="Century Gothic"/>
-                <a:cs typeface="Century Gothic"/>
+                <a:latin typeface="Arial"/>
+                <a:cs typeface="Arial"/>
               </a:rPr>
               <a:t>Ideally assessor blind to case status</a:t>
             </a:r>
@@ -24578,8 +24362,8 @@
                 <a:solidFill>
                   <a:srgbClr val="FFFFFF"/>
                 </a:solidFill>
-                <a:latin typeface="Century Gothic"/>
-                <a:cs typeface="Century Gothic"/>
+                <a:latin typeface="Arial"/>
+                <a:cs typeface="Arial"/>
               </a:rPr>
               <a:t>Matching (optional)</a:t>
             </a:r>
@@ -24627,8 +24411,8 @@
                 <a:solidFill>
                   <a:srgbClr val="000000"/>
                 </a:solidFill>
-                <a:latin typeface="Century Gothic"/>
-                <a:cs typeface="Century Gothic"/>
+                <a:latin typeface="Arial"/>
+                <a:cs typeface="Arial"/>
               </a:rPr>
               <a:t>e.g. age, month of admission</a:t>
             </a:r>
@@ -24648,8 +24432,8 @@
                 <a:solidFill>
                   <a:srgbClr val="000000"/>
                 </a:solidFill>
-                <a:latin typeface="Century Gothic"/>
-                <a:cs typeface="Century Gothic"/>
+                <a:latin typeface="Arial"/>
+                <a:cs typeface="Arial"/>
               </a:rPr>
               <a:t>Do not match on the exposure itself</a:t>
             </a:r>
@@ -24693,8 +24477,8 @@
                 <a:solidFill>
                   <a:srgbClr val="FFFFFF"/>
                 </a:solidFill>
-                <a:latin typeface="Century Gothic"/>
-                <a:cs typeface="Century Gothic"/>
+                <a:latin typeface="Arial"/>
+                <a:cs typeface="Arial"/>
               </a:rPr>
               <a:t>KEY MESSAGE   </a:t>
             </a:r>
@@ -24703,8 +24487,8 @@
                 <a:solidFill>
                   <a:srgbClr val="FFFFFF"/>
                 </a:solidFill>
-                <a:latin typeface="Century Gothic"/>
-                <a:cs typeface="Century Gothic"/>
+                <a:latin typeface="Arial"/>
+                <a:cs typeface="Arial"/>
               </a:rPr>
               <a:t>Bad controls make any case-control study meaningless.</a:t>
             </a:r>
@@ -24741,7 +24525,7 @@
                     <a:lumMod val="50000"/>
                   </a:schemeClr>
                 </a:solidFill>
-                <a:latin typeface="Verdana"/>
+                <a:latin typeface="Arial"/>
               </a:rPr>
               <a:t>Neudata | #ClearDataClearImpact</a:t>
             </a:r>
@@ -24871,8 +24655,8 @@
                 <a:solidFill>
                   <a:srgbClr val="0D7377"/>
                 </a:solidFill>
-                <a:latin typeface="Century Gothic"/>
-                <a:cs typeface="Century Gothic"/>
+                <a:latin typeface="Arial"/>
+                <a:cs typeface="Arial"/>
               </a:rPr>
               <a:t>Superiority, equivalence and non-inferiority</a:t>
             </a:r>
@@ -24942,8 +24726,8 @@
                 <a:solidFill>
                   <a:srgbClr val="FFFFFF"/>
                 </a:solidFill>
-                <a:latin typeface="Century Gothic"/>
-                <a:cs typeface="Century Gothic"/>
+                <a:latin typeface="Arial"/>
+                <a:cs typeface="Arial"/>
               </a:rPr>
               <a:t>Superiority</a:t>
             </a:r>
@@ -24991,8 +24775,8 @@
                 <a:solidFill>
                   <a:srgbClr val="000000"/>
                 </a:solidFill>
-                <a:latin typeface="Century Gothic"/>
-                <a:cs typeface="Century Gothic"/>
+                <a:latin typeface="Arial"/>
+                <a:cs typeface="Arial"/>
               </a:rPr>
               <a:t>Is the new treatment BETTER?</a:t>
             </a:r>
@@ -25012,8 +24796,8 @@
                 <a:solidFill>
                   <a:srgbClr val="000000"/>
                 </a:solidFill>
-                <a:latin typeface="Century Gothic"/>
-                <a:cs typeface="Century Gothic"/>
+                <a:latin typeface="Arial"/>
+                <a:cs typeface="Arial"/>
               </a:rPr>
               <a:t>Whole CI on the 'better' side of 0</a:t>
             </a:r>
@@ -25055,8 +24839,8 @@
                 <a:solidFill>
                   <a:srgbClr val="FFFFFF"/>
                 </a:solidFill>
-                <a:latin typeface="Century Gothic"/>
-                <a:cs typeface="Century Gothic"/>
+                <a:latin typeface="Arial"/>
+                <a:cs typeface="Arial"/>
               </a:rPr>
               <a:t>Equivalence</a:t>
             </a:r>
@@ -25104,8 +24888,8 @@
                 <a:solidFill>
                   <a:srgbClr val="000000"/>
                 </a:solidFill>
-                <a:latin typeface="Century Gothic"/>
-                <a:cs typeface="Century Gothic"/>
+                <a:latin typeface="Arial"/>
+                <a:cs typeface="Arial"/>
               </a:rPr>
               <a:t>Is it about the SAME?</a:t>
             </a:r>
@@ -25125,8 +24909,8 @@
                 <a:solidFill>
                   <a:srgbClr val="000000"/>
                 </a:solidFill>
-                <a:latin typeface="Century Gothic"/>
-                <a:cs typeface="Century Gothic"/>
+                <a:latin typeface="Arial"/>
+                <a:cs typeface="Arial"/>
               </a:rPr>
               <a:t>Whole CI inside -margin to +margin</a:t>
             </a:r>
@@ -25168,8 +24952,8 @@
                 <a:solidFill>
                   <a:srgbClr val="FFFFFF"/>
                 </a:solidFill>
-                <a:latin typeface="Century Gothic"/>
-                <a:cs typeface="Century Gothic"/>
+                <a:latin typeface="Arial"/>
+                <a:cs typeface="Arial"/>
               </a:rPr>
               <a:t>Non-inferiority</a:t>
             </a:r>
@@ -25217,8 +25001,8 @@
                 <a:solidFill>
                   <a:srgbClr val="000000"/>
                 </a:solidFill>
-                <a:latin typeface="Century Gothic"/>
-                <a:cs typeface="Century Gothic"/>
+                <a:latin typeface="Arial"/>
+                <a:cs typeface="Arial"/>
               </a:rPr>
               <a:t>Is it NOT unacceptably worse?</a:t>
             </a:r>
@@ -25238,8 +25022,8 @@
                 <a:solidFill>
                   <a:srgbClr val="000000"/>
                 </a:solidFill>
-                <a:latin typeface="Century Gothic"/>
-                <a:cs typeface="Century Gothic"/>
+                <a:latin typeface="Arial"/>
+                <a:cs typeface="Arial"/>
               </a:rPr>
               <a:t>Whole CI below +margin</a:t>
             </a:r>
@@ -25283,8 +25067,8 @@
                 <a:solidFill>
                   <a:srgbClr val="FFFFFF"/>
                 </a:solidFill>
-                <a:latin typeface="Century Gothic"/>
-                <a:cs typeface="Century Gothic"/>
+                <a:latin typeface="Arial"/>
+                <a:cs typeface="Arial"/>
               </a:rPr>
               <a:t>KEY MESSAGE   </a:t>
             </a:r>
@@ -25293,8 +25077,8 @@
                 <a:solidFill>
                   <a:srgbClr val="FFFFFF"/>
                 </a:solidFill>
-                <a:latin typeface="Century Gothic"/>
-                <a:cs typeface="Century Gothic"/>
+                <a:latin typeface="Arial"/>
+                <a:cs typeface="Arial"/>
               </a:rPr>
               <a:t>The question (better, same, not worse) is fixed in the protocol, before the data.</a:t>
             </a:r>
@@ -25331,7 +25115,7 @@
                     <a:lumMod val="50000"/>
                   </a:schemeClr>
                 </a:solidFill>
-                <a:latin typeface="Verdana"/>
+                <a:latin typeface="Arial"/>
               </a:rPr>
               <a:t>Neudata | #ClearDataClearImpact</a:t>
             </a:r>
@@ -25461,8 +25245,8 @@
                 <a:solidFill>
                   <a:srgbClr val="0D7377"/>
                 </a:solidFill>
-                <a:latin typeface="Century Gothic"/>
-                <a:cs typeface="Century Gothic"/>
+                <a:latin typeface="Arial"/>
+                <a:cs typeface="Arial"/>
               </a:rPr>
               <a:t>Making a quality-improvement evaluation stronger</a:t>
             </a:r>
@@ -25532,8 +25316,8 @@
                 <a:solidFill>
                   <a:srgbClr val="FFFFFF"/>
                 </a:solidFill>
-                <a:latin typeface="Century Gothic"/>
-                <a:cs typeface="Century Gothic"/>
+                <a:latin typeface="Arial"/>
+                <a:cs typeface="Arial"/>
               </a:rPr>
               <a:t>More time points</a:t>
             </a:r>
@@ -25581,8 +25365,8 @@
                 <a:solidFill>
                   <a:srgbClr val="000000"/>
                 </a:solidFill>
-                <a:latin typeface="Century Gothic"/>
-                <a:cs typeface="Century Gothic"/>
+                <a:latin typeface="Arial"/>
+                <a:cs typeface="Arial"/>
               </a:rPr>
               <a:t>At least 8-12 points before and after</a:t>
             </a:r>
@@ -25602,8 +25386,8 @@
                 <a:solidFill>
                   <a:srgbClr val="000000"/>
                 </a:solidFill>
-                <a:latin typeface="Century Gothic"/>
-                <a:cs typeface="Century Gothic"/>
+                <a:latin typeface="Arial"/>
+                <a:cs typeface="Arial"/>
               </a:rPr>
               <a:t>Same definition every month</a:t>
             </a:r>
@@ -25645,8 +25429,8 @@
                 <a:solidFill>
                   <a:srgbClr val="FFFFFF"/>
                 </a:solidFill>
-                <a:latin typeface="Century Gothic"/>
-                <a:cs typeface="Century Gothic"/>
+                <a:latin typeface="Arial"/>
+                <a:cs typeface="Arial"/>
               </a:rPr>
               <a:t>A control series</a:t>
             </a:r>
@@ -25694,8 +25478,8 @@
                 <a:solidFill>
                   <a:srgbClr val="000000"/>
                 </a:solidFill>
-                <a:latin typeface="Century Gothic"/>
-                <a:cs typeface="Century Gothic"/>
+                <a:latin typeface="Arial"/>
+                <a:cs typeface="Arial"/>
               </a:rPr>
               <a:t>A ward or hospital without the change</a:t>
             </a:r>
@@ -25715,8 +25499,8 @@
                 <a:solidFill>
                   <a:srgbClr val="000000"/>
                 </a:solidFill>
-                <a:latin typeface="Century Gothic"/>
-                <a:cs typeface="Century Gothic"/>
+                <a:latin typeface="Arial"/>
+                <a:cs typeface="Arial"/>
               </a:rPr>
               <a:t>Same months, same measure</a:t>
             </a:r>
@@ -25758,8 +25542,8 @@
                 <a:solidFill>
                   <a:srgbClr val="FFFFFF"/>
                 </a:solidFill>
-                <a:latin typeface="Century Gothic"/>
-                <a:cs typeface="Century Gothic"/>
+                <a:latin typeface="Arial"/>
+                <a:cs typeface="Arial"/>
               </a:rPr>
               <a:t>Record co-interventions</a:t>
             </a:r>
@@ -25807,8 +25591,8 @@
                 <a:solidFill>
                   <a:srgbClr val="000000"/>
                 </a:solidFill>
-                <a:latin typeface="Century Gothic"/>
-                <a:cs typeface="Century Gothic"/>
+                <a:latin typeface="Arial"/>
+                <a:cs typeface="Arial"/>
               </a:rPr>
               <a:t>Staff changes, new policies, audits</a:t>
             </a:r>
@@ -25828,8 +25612,8 @@
                 <a:solidFill>
                   <a:srgbClr val="000000"/>
                 </a:solidFill>
-                <a:latin typeface="Century Gothic"/>
-                <a:cs typeface="Century Gothic"/>
+                <a:latin typeface="Arial"/>
+                <a:cs typeface="Arial"/>
               </a:rPr>
               <a:t>Write them down as they happen</a:t>
             </a:r>
@@ -25873,8 +25657,8 @@
                 <a:solidFill>
                   <a:srgbClr val="FFFFFF"/>
                 </a:solidFill>
-                <a:latin typeface="Century Gothic"/>
-                <a:cs typeface="Century Gothic"/>
+                <a:latin typeface="Arial"/>
+                <a:cs typeface="Arial"/>
               </a:rPr>
               <a:t>KEY MESSAGE   </a:t>
             </a:r>
@@ -25883,8 +25667,8 @@
                 <a:solidFill>
                   <a:srgbClr val="FFFFFF"/>
                 </a:solidFill>
-                <a:latin typeface="Century Gothic"/>
-                <a:cs typeface="Century Gothic"/>
+                <a:latin typeface="Arial"/>
+                <a:cs typeface="Arial"/>
               </a:rPr>
               <a:t>A before-after average is weak; a long, controlled time series is much stronger.</a:t>
             </a:r>
@@ -25921,7 +25705,7 @@
                     <a:lumMod val="50000"/>
                   </a:schemeClr>
                 </a:solidFill>
-                <a:latin typeface="Verdana"/>
+                <a:latin typeface="Arial"/>
               </a:rPr>
               <a:t>Neudata | #ClearDataClearImpact</a:t>
             </a:r>
@@ -26075,8 +25859,8 @@
                 <a:solidFill>
                   <a:srgbClr val="4472C4"/>
                 </a:solidFill>
-                <a:latin typeface="Century Gothic"/>
-                <a:cs typeface="Century Gothic"/>
+                <a:latin typeface="Arial"/>
+                <a:cs typeface="Arial"/>
               </a:rPr>
               <a:t>Copyright © Neudata, 2026</a:t>
             </a:r>
@@ -26221,7 +26005,7 @@
                     <a:lumMod val="50000"/>
                   </a:schemeClr>
                 </a:solidFill>
-                <a:latin typeface="Verdana"/>
+                <a:latin typeface="Arial"/>
               </a:rPr>
               <a:t>Neudata | #ClearDataClearImpact</a:t>
             </a:r>
@@ -26327,8 +26111,8 @@
                 <a:solidFill>
                   <a:srgbClr val="0D7377"/>
                 </a:solidFill>
-                <a:latin typeface="Century Gothic"/>
-                <a:cs typeface="Century Gothic"/>
+                <a:latin typeface="Arial"/>
+                <a:cs typeface="Arial"/>
               </a:rPr>
               <a:t>3.1  Study designs in pictures</a:t>
             </a:r>
@@ -26397,8 +26181,8 @@
                 <a:solidFill>
                   <a:srgbClr val="0D7377"/>
                 </a:solidFill>
-                <a:latin typeface="Century Gothic"/>
-                <a:cs typeface="Century Gothic"/>
+                <a:latin typeface="Arial"/>
+                <a:cs typeface="Arial"/>
               </a:rPr>
               <a:t>Did the investigator assign the exposure, or just watch?</a:t>
             </a:r>
@@ -26415,8 +26199,8 @@
                 <a:solidFill>
                   <a:srgbClr val="595959"/>
                 </a:solidFill>
-                <a:latin typeface="Century Gothic"/>
-                <a:cs typeface="Century Gothic"/>
+                <a:latin typeface="Arial"/>
+                <a:cs typeface="Arial"/>
               </a:rPr>
               <a:t>That one question sorts almost every study design. (45 minutes)</a:t>
             </a:r>
@@ -26453,7 +26237,7 @@
                     <a:lumMod val="50000"/>
                   </a:schemeClr>
                 </a:solidFill>
-                <a:latin typeface="Verdana"/>
+                <a:latin typeface="Arial"/>
               </a:rPr>
               <a:t>Neudata | #ClearDataClearImpact</a:t>
             </a:r>
@@ -26583,8 +26367,8 @@
                 <a:solidFill>
                   <a:srgbClr val="0D7377"/>
                 </a:solidFill>
-                <a:latin typeface="Century Gothic"/>
-                <a:cs typeface="Century Gothic"/>
+                <a:latin typeface="Arial"/>
+                <a:cs typeface="Arial"/>
               </a:rPr>
               <a:t>The family tree of study designs</a:t>
             </a:r>
@@ -26680,8 +26464,8 @@
                 <a:solidFill>
                   <a:srgbClr val="FFFFFF"/>
                 </a:solidFill>
-                <a:latin typeface="Century Gothic"/>
-                <a:cs typeface="Century Gothic"/>
+                <a:latin typeface="Arial"/>
+                <a:cs typeface="Arial"/>
               </a:rPr>
               <a:t>KEY MESSAGE   </a:t>
             </a:r>
@@ -26690,8 +26474,8 @@
                 <a:solidFill>
                   <a:srgbClr val="FFFFFF"/>
                 </a:solidFill>
-                <a:latin typeface="Century Gothic"/>
-                <a:cs typeface="Century Gothic"/>
+                <a:latin typeface="Arial"/>
+                <a:cs typeface="Arial"/>
               </a:rPr>
               <a:t>Descriptive designs describe; analytical designs compare groups.</a:t>
             </a:r>
@@ -26728,7 +26512,7 @@
                     <a:lumMod val="50000"/>
                   </a:schemeClr>
                 </a:solidFill>
-                <a:latin typeface="Verdana"/>
+                <a:latin typeface="Arial"/>
               </a:rPr>
               <a:t>Neudata | #ClearDataClearImpact</a:t>
             </a:r>
@@ -26858,8 +26642,8 @@
                 <a:solidFill>
                   <a:srgbClr val="0D7377"/>
                 </a:solidFill>
-                <a:latin typeface="Century Gothic"/>
-                <a:cs typeface="Century Gothic"/>
+                <a:latin typeface="Arial"/>
+                <a:cs typeface="Arial"/>
               </a:rPr>
               <a:t>Exposure and outcome: the two words you need</a:t>
             </a:r>
@@ -26955,8 +26739,8 @@
                 <a:solidFill>
                   <a:srgbClr val="FFFFFF"/>
                 </a:solidFill>
-                <a:latin typeface="Century Gothic"/>
-                <a:cs typeface="Century Gothic"/>
+                <a:latin typeface="Arial"/>
+                <a:cs typeface="Arial"/>
               </a:rPr>
               <a:t>KEY MESSAGE   </a:t>
             </a:r>
@@ -26965,8 +26749,8 @@
                 <a:solidFill>
                   <a:srgbClr val="FFFFFF"/>
                 </a:solidFill>
-                <a:latin typeface="Century Gothic"/>
-                <a:cs typeface="Century Gothic"/>
+                <a:latin typeface="Arial"/>
+                <a:cs typeface="Arial"/>
               </a:rPr>
               <a:t>Name the exposure and the outcome first, and the design follows.</a:t>
             </a:r>
@@ -27003,7 +26787,7 @@
                     <a:lumMod val="50000"/>
                   </a:schemeClr>
                 </a:solidFill>
-                <a:latin typeface="Verdana"/>
+                <a:latin typeface="Arial"/>
               </a:rPr>
               <a:t>Neudata | #ClearDataClearImpact</a:t>
             </a:r>
@@ -27133,8 +26917,8 @@
                 <a:solidFill>
                   <a:srgbClr val="0D7377"/>
                 </a:solidFill>
-                <a:latin typeface="Century Gothic"/>
-                <a:cs typeface="Century Gothic"/>
+                <a:latin typeface="Arial"/>
+                <a:cs typeface="Arial"/>
               </a:rPr>
               <a:t>Descriptive designs: describe, do not compare</a:t>
             </a:r>
@@ -27230,8 +27014,8 @@
                 <a:solidFill>
                   <a:srgbClr val="FFFFFF"/>
                 </a:solidFill>
-                <a:latin typeface="Century Gothic"/>
-                <a:cs typeface="Century Gothic"/>
+                <a:latin typeface="Arial"/>
+                <a:cs typeface="Arial"/>
               </a:rPr>
               <a:t>KEY MESSAGE   </a:t>
             </a:r>
@@ -27240,8 +27024,8 @@
                 <a:solidFill>
                   <a:srgbClr val="FFFFFF"/>
                 </a:solidFill>
-                <a:latin typeface="Century Gothic"/>
-                <a:cs typeface="Century Gothic"/>
+                <a:latin typeface="Arial"/>
+                <a:cs typeface="Arial"/>
               </a:rPr>
               <a:t>Descriptive studies raise questions; they cannot answer 'does X cause Y?'</a:t>
             </a:r>
@@ -27278,7 +27062,7 @@
                     <a:lumMod val="50000"/>
                   </a:schemeClr>
                 </a:solidFill>
-                <a:latin typeface="Verdana"/>
+                <a:latin typeface="Arial"/>
               </a:rPr>
               <a:t>Neudata | #ClearDataClearImpact</a:t>
             </a:r>
@@ -27408,8 +27192,8 @@
                 <a:solidFill>
                   <a:srgbClr val="0D7377"/>
                 </a:solidFill>
-                <a:latin typeface="Century Gothic"/>
-                <a:cs typeface="Century Gothic"/>
+                <a:latin typeface="Arial"/>
+                <a:cs typeface="Arial"/>
               </a:rPr>
               <a:t>Worked example: a one-day point-prevalence survey</a:t>
             </a:r>
@@ -27475,8 +27259,8 @@
                 <a:solidFill>
                   <a:srgbClr val="595959"/>
                 </a:solidFill>
-                <a:latin typeface="Century Gothic"/>
-                <a:cs typeface="Century Gothic"/>
+                <a:latin typeface="Arial"/>
+                <a:cs typeface="Arial"/>
               </a:rPr>
               <a:t>A cross-sectional study you could run next week</a:t>
             </a:r>
@@ -27520,10 +27304,10 @@
                 <a:solidFill>
                   <a:srgbClr val="FFFFFF"/>
                 </a:solidFill>
-                <a:latin typeface="Century Gothic"/>
-                <a:cs typeface="Century Gothic"/>
-              </a:rPr>
-              <a:t>1. Choose a day</a:t>
+                <a:latin typeface="Arial"/>
+                <a:cs typeface="Arial"/>
+              </a:rPr>
+              <a:t>Choose a day</a:t>
             </a:r>
           </a:p>
         </p:txBody>
@@ -27569,8 +27353,8 @@
                 <a:solidFill>
                   <a:srgbClr val="000000"/>
                 </a:solidFill>
-                <a:latin typeface="Century Gothic"/>
-                <a:cs typeface="Century Gothic"/>
+                <a:latin typeface="Arial"/>
+                <a:cs typeface="Arial"/>
               </a:rPr>
               <a:t>All inpatients on all wards, one weekday</a:t>
             </a:r>
@@ -27614,10 +27398,10 @@
                 <a:solidFill>
                   <a:srgbClr val="FFFFFF"/>
                 </a:solidFill>
-                <a:latin typeface="Century Gothic"/>
-                <a:cs typeface="Century Gothic"/>
-              </a:rPr>
-              <a:t>2. Examine everyone</a:t>
+                <a:latin typeface="Arial"/>
+                <a:cs typeface="Arial"/>
+              </a:rPr>
+              <a:t>Examine everyone</a:t>
             </a:r>
           </a:p>
         </p:txBody>
@@ -27663,8 +27447,8 @@
                 <a:solidFill>
                   <a:srgbClr val="000000"/>
                 </a:solidFill>
-                <a:latin typeface="Century Gothic"/>
-                <a:cs typeface="Century Gothic"/>
+                <a:latin typeface="Arial"/>
+                <a:cs typeface="Arial"/>
               </a:rPr>
               <a:t>Two trained nurses, one standard form</a:t>
             </a:r>
@@ -27708,10 +27492,10 @@
                 <a:solidFill>
                   <a:srgbClr val="FFFFFF"/>
                 </a:solidFill>
-                <a:latin typeface="Century Gothic"/>
-                <a:cs typeface="Century Gothic"/>
-              </a:rPr>
-              <a:t>3. Record both</a:t>
+                <a:latin typeface="Arial"/>
+                <a:cs typeface="Arial"/>
+              </a:rPr>
+              <a:t>Record both</a:t>
             </a:r>
           </a:p>
         </p:txBody>
@@ -27757,8 +27541,8 @@
                 <a:solidFill>
                   <a:srgbClr val="000000"/>
                 </a:solidFill>
-                <a:latin typeface="Century Gothic"/>
-                <a:cs typeface="Century Gothic"/>
+                <a:latin typeface="Arial"/>
+                <a:cs typeface="Arial"/>
               </a:rPr>
               <a:t>Pressure injury (yes/no) AND mattress type, at the same visit</a:t>
             </a:r>
@@ -27802,10 +27586,10 @@
                 <a:solidFill>
                   <a:srgbClr val="FFFFFF"/>
                 </a:solidFill>
-                <a:latin typeface="Century Gothic"/>
-                <a:cs typeface="Century Gothic"/>
-              </a:rPr>
-              <a:t>4. Count</a:t>
+                <a:latin typeface="Arial"/>
+                <a:cs typeface="Arial"/>
+              </a:rPr>
+              <a:t>Count</a:t>
             </a:r>
           </a:p>
         </p:txBody>
@@ -27851,8 +27635,8 @@
                 <a:solidFill>
                   <a:srgbClr val="000000"/>
                 </a:solidFill>
-                <a:latin typeface="Century Gothic"/>
-                <a:cs typeface="Century Gothic"/>
+                <a:latin typeface="Arial"/>
+                <a:cs typeface="Arial"/>
               </a:rPr>
               <a:t>e.g. 37 of 412 = 9% prevalence today</a:t>
             </a:r>
@@ -27896,8 +27680,8 @@
                 <a:solidFill>
                   <a:srgbClr val="FFFFFF"/>
                 </a:solidFill>
-                <a:latin typeface="Century Gothic"/>
-                <a:cs typeface="Century Gothic"/>
+                <a:latin typeface="Arial"/>
+                <a:cs typeface="Arial"/>
               </a:rPr>
               <a:t>KEY MESSAGE   </a:t>
             </a:r>
@@ -27906,8 +27690,8 @@
                 <a:solidFill>
                   <a:srgbClr val="FFFFFF"/>
                 </a:solidFill>
-                <a:latin typeface="Century Gothic"/>
-                <a:cs typeface="Century Gothic"/>
+                <a:latin typeface="Arial"/>
+                <a:cs typeface="Arial"/>
               </a:rPr>
               <a:t>A snapshot gives prevalence; it cannot show which came first.</a:t>
             </a:r>
@@ -27944,7 +27728,7 @@
                     <a:lumMod val="50000"/>
                   </a:schemeClr>
                 </a:solidFill>
-                <a:latin typeface="Verdana"/>
+                <a:latin typeface="Arial"/>
               </a:rPr>
               <a:t>Neudata | #ClearDataClearImpact</a:t>
             </a:r>
@@ -28061,7 +27845,7 @@
     </a:clrScheme>
     <a:fontScheme name="Office">
       <a:majorFont>
-        <a:latin typeface="Calibri"/>
+        <a:latin typeface="Arial"/>
         <a:ea typeface=""/>
         <a:cs typeface=""/>
         <a:font script="Jpan" typeface="ＭＳ Ｐゴシック"/>
@@ -28096,7 +27880,7 @@
         <a:font script="Geor" typeface="Sylfaen"/>
       </a:majorFont>
       <a:minorFont>
-        <a:latin typeface="Calibri"/>
+        <a:latin typeface="Arial"/>
         <a:ea typeface=""/>
         <a:cs typeface=""/>
         <a:font script="Jpan" typeface="ＭＳ Ｐゴシック"/>
@@ -28381,7 +28165,7 @@
     </a:clrScheme>
     <a:fontScheme name="Office">
       <a:majorFont>
-        <a:latin typeface="Calibri Light" panose="020F0302020204030204"/>
+        <a:latin typeface="Arial" panose="020F0302020204030204"/>
         <a:ea typeface=""/>
         <a:cs typeface=""/>
         <a:font script="Jpan" typeface="游ゴシック Light"/>
@@ -28416,7 +28200,7 @@
         <a:font script="Geor" typeface="Sylfaen"/>
       </a:majorFont>
       <a:minorFont>
-        <a:latin typeface="Calibri" panose="020F0502020204030204"/>
+        <a:latin typeface="Arial" panose="020F0502020204030204"/>
         <a:ea typeface=""/>
         <a:cs typeface=""/>
         <a:font script="Jpan" typeface="游ゴシック"/>
@@ -28642,7 +28426,7 @@
     </a:clrScheme>
     <a:fontScheme name="Office">
       <a:majorFont>
-        <a:latin typeface="Calibri Light" panose="020F0302020204030204"/>
+        <a:latin typeface="Arial" panose="020F0302020204030204"/>
         <a:ea typeface=""/>
         <a:cs typeface=""/>
         <a:font script="Jpan" typeface="游ゴシック Light"/>
@@ -28677,7 +28461,7 @@
         <a:font script="Geor" typeface="Sylfaen"/>
       </a:majorFont>
       <a:minorFont>
-        <a:latin typeface="Calibri" panose="020F0502020204030204"/>
+        <a:latin typeface="Arial" panose="020F0502020204030204"/>
         <a:ea typeface=""/>
         <a:cs typeface=""/>
         <a:font script="Jpan" typeface="游ゴシック"/>

--- a/en/files/slides/Session_3_EN.pptx
+++ b/en/files/slides/Session_3_EN.pptx
@@ -1929,7 +1929,7 @@
           <a:p>
             <a:r>
               <a:rPr lang="en-US" sz="1400" b="0" dirty="0"/>
-              <a:t>Run it as three poll questions (Zoom or Teams poll, or a form). Show the results, then the answer.</a:t>
+              <a:t>Run it as three poll questions (Zoom or Teams poll). Show the results, then the answer.</a:t>
             </a:r>
           </a:p>
           <a:p>
@@ -9204,12 +9204,12 @@
           </a:ln>
         </p:spPr>
         <p:txBody>
-          <a:bodyPr wrap="square" lIns="110000" tIns="91440" rIns="110000" bIns="91440" rtlCol="0" anchor="t">
+          <a:bodyPr wrap="square" lIns="110000" tIns="91440" rIns="110000" bIns="91440" rtlCol="0" anchor="ctr">
             <a:normAutofit/>
           </a:bodyPr>
           <a:lstStyle/>
           <a:p>
-            <a:pPr marL="0" indent="0" algn="l">
+            <a:pPr marL="0" indent="0" algn="ctr">
               <a:lnSpc>
                 <a:spcPct val="104000"/>
               </a:lnSpc>
@@ -9298,12 +9298,12 @@
           </a:ln>
         </p:spPr>
         <p:txBody>
-          <a:bodyPr wrap="square" lIns="110000" tIns="91440" rIns="110000" bIns="91440" rtlCol="0" anchor="t">
+          <a:bodyPr wrap="square" lIns="110000" tIns="91440" rIns="110000" bIns="91440" rtlCol="0" anchor="ctr">
             <a:normAutofit/>
           </a:bodyPr>
           <a:lstStyle/>
           <a:p>
-            <a:pPr marL="0" indent="0" algn="l">
+            <a:pPr marL="0" indent="0" algn="ctr">
               <a:lnSpc>
                 <a:spcPct val="104000"/>
               </a:lnSpc>
@@ -9392,12 +9392,12 @@
           </a:ln>
         </p:spPr>
         <p:txBody>
-          <a:bodyPr wrap="square" lIns="110000" tIns="91440" rIns="110000" bIns="91440" rtlCol="0" anchor="t">
+          <a:bodyPr wrap="square" lIns="110000" tIns="91440" rIns="110000" bIns="91440" rtlCol="0" anchor="ctr">
             <a:normAutofit/>
           </a:bodyPr>
           <a:lstStyle/>
           <a:p>
-            <a:pPr marL="0" indent="0" algn="l">
+            <a:pPr marL="0" indent="0" algn="ctr">
               <a:lnSpc>
                 <a:spcPct val="104000"/>
               </a:lnSpc>
@@ -9486,12 +9486,12 @@
           </a:ln>
         </p:spPr>
         <p:txBody>
-          <a:bodyPr wrap="square" lIns="110000" tIns="91440" rIns="110000" bIns="91440" rtlCol="0" anchor="t">
+          <a:bodyPr wrap="square" lIns="110000" tIns="91440" rIns="110000" bIns="91440" rtlCol="0" anchor="ctr">
             <a:normAutofit/>
           </a:bodyPr>
           <a:lstStyle/>
           <a:p>
-            <a:pPr marL="0" indent="0" algn="l">
+            <a:pPr marL="0" indent="0" algn="ctr">
               <a:lnSpc>
                 <a:spcPct val="104000"/>
               </a:lnSpc>
@@ -9580,12 +9580,12 @@
           </a:ln>
         </p:spPr>
         <p:txBody>
-          <a:bodyPr wrap="square" lIns="110000" tIns="91440" rIns="110000" bIns="91440" rtlCol="0" anchor="t">
+          <a:bodyPr wrap="square" lIns="110000" tIns="91440" rIns="110000" bIns="91440" rtlCol="0" anchor="ctr">
             <a:normAutofit/>
           </a:bodyPr>
           <a:lstStyle/>
           <a:p>
-            <a:pPr marL="0" indent="0" algn="l">
+            <a:pPr marL="0" indent="0" algn="ctr">
               <a:lnSpc>
                 <a:spcPct val="104000"/>
               </a:lnSpc>
@@ -10239,12 +10239,12 @@
           </a:ln>
         </p:spPr>
         <p:txBody>
-          <a:bodyPr wrap="square" lIns="110000" tIns="91440" rIns="110000" bIns="91440" rtlCol="0" anchor="t">
+          <a:bodyPr wrap="square" lIns="110000" tIns="91440" rIns="110000" bIns="91440" rtlCol="0" anchor="ctr">
             <a:normAutofit/>
           </a:bodyPr>
           <a:lstStyle/>
           <a:p>
-            <a:pPr marL="0" indent="0" algn="l">
+            <a:pPr marL="0" indent="0" algn="ctr">
               <a:lnSpc>
                 <a:spcPct val="104000"/>
               </a:lnSpc>
@@ -10333,12 +10333,12 @@
           </a:ln>
         </p:spPr>
         <p:txBody>
-          <a:bodyPr wrap="square" lIns="110000" tIns="91440" rIns="110000" bIns="91440" rtlCol="0" anchor="t">
+          <a:bodyPr wrap="square" lIns="110000" tIns="91440" rIns="110000" bIns="91440" rtlCol="0" anchor="ctr">
             <a:normAutofit/>
           </a:bodyPr>
           <a:lstStyle/>
           <a:p>
-            <a:pPr marL="0" indent="0" algn="l">
+            <a:pPr marL="0" indent="0" algn="ctr">
               <a:lnSpc>
                 <a:spcPct val="104000"/>
               </a:lnSpc>
@@ -10427,12 +10427,12 @@
           </a:ln>
         </p:spPr>
         <p:txBody>
-          <a:bodyPr wrap="square" lIns="110000" tIns="91440" rIns="110000" bIns="91440" rtlCol="0" anchor="t">
+          <a:bodyPr wrap="square" lIns="110000" tIns="91440" rIns="110000" bIns="91440" rtlCol="0" anchor="ctr">
             <a:normAutofit/>
           </a:bodyPr>
           <a:lstStyle/>
           <a:p>
-            <a:pPr marL="0" indent="0" algn="l">
+            <a:pPr marL="0" indent="0" algn="ctr">
               <a:lnSpc>
                 <a:spcPct val="104000"/>
               </a:lnSpc>
@@ -10521,12 +10521,12 @@
           </a:ln>
         </p:spPr>
         <p:txBody>
-          <a:bodyPr wrap="square" lIns="110000" tIns="91440" rIns="110000" bIns="91440" rtlCol="0" anchor="t">
+          <a:bodyPr wrap="square" lIns="110000" tIns="91440" rIns="110000" bIns="91440" rtlCol="0" anchor="ctr">
             <a:normAutofit/>
           </a:bodyPr>
           <a:lstStyle/>
           <a:p>
-            <a:pPr marL="0" indent="0" algn="l">
+            <a:pPr marL="0" indent="0" algn="ctr">
               <a:lnSpc>
                 <a:spcPct val="104000"/>
               </a:lnSpc>
@@ -11219,12 +11219,12 @@
           </a:ln>
         </p:spPr>
         <p:txBody>
-          <a:bodyPr wrap="square" lIns="110000" tIns="91440" rIns="110000" bIns="91440" rtlCol="0" anchor="t">
+          <a:bodyPr wrap="square" lIns="110000" tIns="91440" rIns="110000" bIns="91440" rtlCol="0" anchor="ctr">
             <a:normAutofit/>
           </a:bodyPr>
           <a:lstStyle/>
           <a:p>
-            <a:pPr marL="0" indent="0" algn="l">
+            <a:pPr marL="0" indent="0" algn="ctr">
               <a:lnSpc>
                 <a:spcPct val="104000"/>
               </a:lnSpc>
@@ -11313,12 +11313,12 @@
           </a:ln>
         </p:spPr>
         <p:txBody>
-          <a:bodyPr wrap="square" lIns="110000" tIns="91440" rIns="110000" bIns="91440" rtlCol="0" anchor="t">
+          <a:bodyPr wrap="square" lIns="110000" tIns="91440" rIns="110000" bIns="91440" rtlCol="0" anchor="ctr">
             <a:normAutofit/>
           </a:bodyPr>
           <a:lstStyle/>
           <a:p>
-            <a:pPr marL="0" indent="0" algn="l">
+            <a:pPr marL="0" indent="0" algn="ctr">
               <a:lnSpc>
                 <a:spcPct val="104000"/>
               </a:lnSpc>
@@ -11407,12 +11407,12 @@
           </a:ln>
         </p:spPr>
         <p:txBody>
-          <a:bodyPr wrap="square" lIns="110000" tIns="91440" rIns="110000" bIns="91440" rtlCol="0" anchor="t">
+          <a:bodyPr wrap="square" lIns="110000" tIns="91440" rIns="110000" bIns="91440" rtlCol="0" anchor="ctr">
             <a:normAutofit/>
           </a:bodyPr>
           <a:lstStyle/>
           <a:p>
-            <a:pPr marL="0" indent="0" algn="l">
+            <a:pPr marL="0" indent="0" algn="ctr">
               <a:lnSpc>
                 <a:spcPct val="104000"/>
               </a:lnSpc>
@@ -11501,12 +11501,12 @@
           </a:ln>
         </p:spPr>
         <p:txBody>
-          <a:bodyPr wrap="square" lIns="110000" tIns="91440" rIns="110000" bIns="91440" rtlCol="0" anchor="t">
+          <a:bodyPr wrap="square" lIns="110000" tIns="91440" rIns="110000" bIns="91440" rtlCol="0" anchor="ctr">
             <a:normAutofit/>
           </a:bodyPr>
           <a:lstStyle/>
           <a:p>
-            <a:pPr marL="0" indent="0" algn="l">
+            <a:pPr marL="0" indent="0" algn="ctr">
               <a:lnSpc>
                 <a:spcPct val="104000"/>
               </a:lnSpc>
@@ -11595,12 +11595,12 @@
           </a:ln>
         </p:spPr>
         <p:txBody>
-          <a:bodyPr wrap="square" lIns="110000" tIns="91440" rIns="110000" bIns="91440" rtlCol="0" anchor="t">
+          <a:bodyPr wrap="square" lIns="110000" tIns="91440" rIns="110000" bIns="91440" rtlCol="0" anchor="ctr">
             <a:normAutofit/>
           </a:bodyPr>
           <a:lstStyle/>
           <a:p>
-            <a:pPr marL="0" indent="0" algn="l">
+            <a:pPr marL="0" indent="0" algn="ctr">
               <a:lnSpc>
                 <a:spcPct val="104000"/>
               </a:lnSpc>
@@ -12881,12 +12881,12 @@
           </a:ln>
         </p:spPr>
         <p:txBody>
-          <a:bodyPr wrap="square" lIns="137160" tIns="91440" rIns="137160" bIns="91440" rtlCol="0" anchor="t">
+          <a:bodyPr wrap="square" lIns="137160" tIns="91440" rIns="137160" bIns="91440" rtlCol="0" anchor="ctr">
             <a:normAutofit/>
           </a:bodyPr>
           <a:lstStyle/>
           <a:p>
-            <a:pPr marL="0" indent="0" algn="l">
+            <a:pPr marL="0" indent="0" algn="ctr">
               <a:lnSpc>
                 <a:spcPct val="104000"/>
               </a:lnSpc>
@@ -12907,7 +12907,7 @@
             </a:r>
           </a:p>
           <a:p>
-            <a:pPr marL="0" indent="0" algn="l">
+            <a:pPr marL="0" indent="0" algn="ctr">
               <a:lnSpc>
                 <a:spcPct val="104000"/>
               </a:lnSpc>
@@ -12928,7 +12928,7 @@
             </a:r>
           </a:p>
           <a:p>
-            <a:pPr marL="0" indent="0" algn="l">
+            <a:pPr marL="0" indent="0" algn="ctr">
               <a:lnSpc>
                 <a:spcPct val="104000"/>
               </a:lnSpc>
@@ -13015,12 +13015,12 @@
           </a:ln>
         </p:spPr>
         <p:txBody>
-          <a:bodyPr wrap="square" lIns="137160" tIns="91440" rIns="137160" bIns="91440" rtlCol="0" anchor="t">
+          <a:bodyPr wrap="square" lIns="137160" tIns="91440" rIns="137160" bIns="91440" rtlCol="0" anchor="ctr">
             <a:normAutofit/>
           </a:bodyPr>
           <a:lstStyle/>
           <a:p>
-            <a:pPr marL="0" indent="0" algn="l">
+            <a:pPr marL="0" indent="0" algn="ctr">
               <a:lnSpc>
                 <a:spcPct val="104000"/>
               </a:lnSpc>
@@ -13041,7 +13041,7 @@
             </a:r>
           </a:p>
           <a:p>
-            <a:pPr marL="0" indent="0" algn="l">
+            <a:pPr marL="0" indent="0" algn="ctr">
               <a:lnSpc>
                 <a:spcPct val="104000"/>
               </a:lnSpc>
@@ -13062,7 +13062,7 @@
             </a:r>
           </a:p>
           <a:p>
-            <a:pPr marL="0" indent="0" algn="l">
+            <a:pPr marL="0" indent="0" algn="ctr">
               <a:lnSpc>
                 <a:spcPct val="104000"/>
               </a:lnSpc>
@@ -13083,7 +13083,7 @@
             </a:r>
           </a:p>
           <a:p>
-            <a:pPr marL="0" indent="0" algn="l">
+            <a:pPr marL="0" indent="0" algn="ctr">
               <a:lnSpc>
                 <a:spcPct val="104000"/>
               </a:lnSpc>
@@ -13170,12 +13170,12 @@
           </a:ln>
         </p:spPr>
         <p:txBody>
-          <a:bodyPr wrap="square" lIns="137160" tIns="91440" rIns="137160" bIns="91440" rtlCol="0" anchor="t">
+          <a:bodyPr wrap="square" lIns="137160" tIns="91440" rIns="137160" bIns="91440" rtlCol="0" anchor="ctr">
             <a:normAutofit/>
           </a:bodyPr>
           <a:lstStyle/>
           <a:p>
-            <a:pPr marL="0" indent="0" algn="l">
+            <a:pPr marL="0" indent="0" algn="ctr">
               <a:lnSpc>
                 <a:spcPct val="104000"/>
               </a:lnSpc>
@@ -13196,7 +13196,7 @@
             </a:r>
           </a:p>
           <a:p>
-            <a:pPr marL="0" indent="0" algn="l">
+            <a:pPr marL="0" indent="0" algn="ctr">
               <a:lnSpc>
                 <a:spcPct val="104000"/>
               </a:lnSpc>
@@ -13217,7 +13217,7 @@
             </a:r>
           </a:p>
           <a:p>
-            <a:pPr marL="0" indent="0" algn="l">
+            <a:pPr marL="0" indent="0" algn="ctr">
               <a:lnSpc>
                 <a:spcPct val="104000"/>
               </a:lnSpc>
@@ -13238,7 +13238,7 @@
             </a:r>
           </a:p>
           <a:p>
-            <a:pPr marL="0" indent="0" algn="l">
+            <a:pPr marL="0" indent="0" algn="ctr">
               <a:lnSpc>
                 <a:spcPct val="104000"/>
               </a:lnSpc>
@@ -13325,12 +13325,12 @@
           </a:ln>
         </p:spPr>
         <p:txBody>
-          <a:bodyPr wrap="square" lIns="137160" tIns="91440" rIns="137160" bIns="91440" rtlCol="0" anchor="t">
+          <a:bodyPr wrap="square" lIns="137160" tIns="91440" rIns="137160" bIns="91440" rtlCol="0" anchor="ctr">
             <a:normAutofit/>
           </a:bodyPr>
           <a:lstStyle/>
           <a:p>
-            <a:pPr marL="0" indent="0" algn="l">
+            <a:pPr marL="0" indent="0" algn="ctr">
               <a:lnSpc>
                 <a:spcPct val="104000"/>
               </a:lnSpc>
@@ -13351,7 +13351,7 @@
             </a:r>
           </a:p>
           <a:p>
-            <a:pPr marL="0" indent="0" algn="l">
+            <a:pPr marL="0" indent="0" algn="ctr">
               <a:lnSpc>
                 <a:spcPct val="104000"/>
               </a:lnSpc>
@@ -13372,7 +13372,7 @@
             </a:r>
           </a:p>
           <a:p>
-            <a:pPr marL="0" indent="0" algn="l">
+            <a:pPr marL="0" indent="0" algn="ctr">
               <a:lnSpc>
                 <a:spcPct val="104000"/>
               </a:lnSpc>
@@ -13393,7 +13393,7 @@
             </a:r>
           </a:p>
           <a:p>
-            <a:pPr marL="0" indent="0" algn="l">
+            <a:pPr marL="0" indent="0" algn="ctr">
               <a:lnSpc>
                 <a:spcPct val="104000"/>
               </a:lnSpc>
@@ -13857,12 +13857,12 @@
           </a:ln>
         </p:spPr>
         <p:txBody>
-          <a:bodyPr wrap="square" lIns="137160" tIns="91440" rIns="137160" bIns="91440" rtlCol="0" anchor="t">
+          <a:bodyPr wrap="square" lIns="137160" tIns="91440" rIns="137160" bIns="91440" rtlCol="0" anchor="ctr">
             <a:normAutofit/>
           </a:bodyPr>
           <a:lstStyle/>
           <a:p>
-            <a:pPr marL="0" indent="0" algn="l">
+            <a:pPr marL="0" indent="0" algn="ctr">
               <a:buNone/>
             </a:pPr>
             <a:r>
@@ -13877,15 +13877,14 @@
             </a:r>
           </a:p>
           <a:p>
-            <a:pPr marL="274320" indent="-274320" algn="l">
+            <a:pPr marL="0" indent="0" algn="ctr">
               <a:lnSpc>
                 <a:spcPct val="104000"/>
               </a:lnSpc>
               <a:spcBef>
                 <a:spcPts val="300"/>
               </a:spcBef>
-              <a:buFont typeface="Arial"/>
-              <a:buChar char="•"/>
+              <a:buNone/>
             </a:pPr>
             <a:r>
               <a:rPr lang="en-US" sz="1500" dirty="0">
@@ -13899,15 +13898,14 @@
             </a:r>
           </a:p>
           <a:p>
-            <a:pPr marL="274320" indent="-274320" algn="l">
+            <a:pPr marL="0" indent="0" algn="ctr">
               <a:lnSpc>
                 <a:spcPct val="104000"/>
               </a:lnSpc>
               <a:spcBef>
                 <a:spcPts val="300"/>
               </a:spcBef>
-              <a:buFont typeface="Arial"/>
-              <a:buChar char="•"/>
+              <a:buNone/>
             </a:pPr>
             <a:r>
               <a:rPr lang="en-US" sz="1500" dirty="0">
@@ -13921,15 +13919,14 @@
             </a:r>
           </a:p>
           <a:p>
-            <a:pPr marL="274320" indent="-274320" algn="l">
+            <a:pPr marL="0" indent="0" algn="ctr">
               <a:lnSpc>
                 <a:spcPct val="104000"/>
               </a:lnSpc>
               <a:spcBef>
                 <a:spcPts val="300"/>
               </a:spcBef>
-              <a:buFont typeface="Arial"/>
-              <a:buChar char="•"/>
+              <a:buNone/>
             </a:pPr>
             <a:r>
               <a:rPr lang="en-US" sz="1500" dirty="0">
@@ -14262,12 +14259,12 @@
           </a:ln>
         </p:spPr>
         <p:txBody>
-          <a:bodyPr wrap="square" lIns="137160" tIns="91440" rIns="137160" bIns="91440" rtlCol="0" anchor="t">
+          <a:bodyPr wrap="square" lIns="137160" tIns="91440" rIns="137160" bIns="91440" rtlCol="0" anchor="ctr">
             <a:normAutofit/>
           </a:bodyPr>
           <a:lstStyle/>
           <a:p>
-            <a:pPr marL="0" indent="0" algn="l">
+            <a:pPr marL="0" indent="0" algn="ctr">
               <a:lnSpc>
                 <a:spcPct val="104000"/>
               </a:lnSpc>
@@ -14288,7 +14285,7 @@
             </a:r>
           </a:p>
           <a:p>
-            <a:pPr marL="0" indent="0" algn="l">
+            <a:pPr marL="0" indent="0" algn="ctr">
               <a:lnSpc>
                 <a:spcPct val="104000"/>
               </a:lnSpc>
@@ -14309,7 +14306,7 @@
             </a:r>
           </a:p>
           <a:p>
-            <a:pPr marL="0" indent="0" algn="l">
+            <a:pPr marL="0" indent="0" algn="ctr">
               <a:lnSpc>
                 <a:spcPct val="104000"/>
               </a:lnSpc>
@@ -14330,7 +14327,7 @@
             </a:r>
           </a:p>
           <a:p>
-            <a:pPr marL="0" indent="0" algn="l">
+            <a:pPr marL="0" indent="0" algn="ctr">
               <a:lnSpc>
                 <a:spcPct val="104000"/>
               </a:lnSpc>
@@ -14351,7 +14348,7 @@
             </a:r>
           </a:p>
           <a:p>
-            <a:pPr marL="0" indent="0" algn="l">
+            <a:pPr marL="0" indent="0" algn="ctr">
               <a:lnSpc>
                 <a:spcPct val="104000"/>
               </a:lnSpc>
@@ -14372,7 +14369,7 @@
             </a:r>
           </a:p>
           <a:p>
-            <a:pPr marL="0" indent="0" algn="l">
+            <a:pPr marL="0" indent="0" algn="ctr">
               <a:lnSpc>
                 <a:spcPct val="104000"/>
               </a:lnSpc>
@@ -14459,12 +14456,12 @@
           </a:ln>
         </p:spPr>
         <p:txBody>
-          <a:bodyPr wrap="square" lIns="137160" tIns="91440" rIns="137160" bIns="91440" rtlCol="0" anchor="t">
+          <a:bodyPr wrap="square" lIns="137160" tIns="91440" rIns="137160" bIns="91440" rtlCol="0" anchor="ctr">
             <a:normAutofit/>
           </a:bodyPr>
           <a:lstStyle/>
           <a:p>
-            <a:pPr marL="0" indent="0" algn="l">
+            <a:pPr marL="0" indent="0" algn="ctr">
               <a:lnSpc>
                 <a:spcPct val="104000"/>
               </a:lnSpc>
@@ -14485,7 +14482,7 @@
             </a:r>
           </a:p>
           <a:p>
-            <a:pPr marL="0" indent="0" algn="l">
+            <a:pPr marL="0" indent="0" algn="ctr">
               <a:lnSpc>
                 <a:spcPct val="104000"/>
               </a:lnSpc>
@@ -14506,7 +14503,7 @@
             </a:r>
           </a:p>
           <a:p>
-            <a:pPr marL="0" indent="0" algn="l">
+            <a:pPr marL="0" indent="0" algn="ctr">
               <a:lnSpc>
                 <a:spcPct val="104000"/>
               </a:lnSpc>
@@ -14527,7 +14524,7 @@
             </a:r>
           </a:p>
           <a:p>
-            <a:pPr marL="0" indent="0" algn="l">
+            <a:pPr marL="0" indent="0" algn="ctr">
               <a:lnSpc>
                 <a:spcPct val="104000"/>
               </a:lnSpc>
@@ -14548,7 +14545,7 @@
             </a:r>
           </a:p>
           <a:p>
-            <a:pPr marL="0" indent="0" algn="l">
+            <a:pPr marL="0" indent="0" algn="ctr">
               <a:lnSpc>
                 <a:spcPct val="104000"/>
               </a:lnSpc>
@@ -14569,7 +14566,7 @@
             </a:r>
           </a:p>
           <a:p>
-            <a:pPr marL="0" indent="0" algn="l">
+            <a:pPr marL="0" indent="0" algn="ctr">
               <a:lnSpc>
                 <a:spcPct val="104000"/>
               </a:lnSpc>
@@ -15008,12 +15005,12 @@
           </a:ln>
         </p:spPr>
         <p:txBody>
-          <a:bodyPr wrap="square" lIns="137160" tIns="91440" rIns="137160" bIns="91440" rtlCol="0" anchor="t">
+          <a:bodyPr wrap="square" lIns="137160" tIns="91440" rIns="137160" bIns="91440" rtlCol="0" anchor="ctr">
             <a:normAutofit/>
           </a:bodyPr>
           <a:lstStyle/>
           <a:p>
-            <a:pPr marL="0" indent="0" algn="l">
+            <a:pPr marL="0" indent="0" algn="ctr">
               <a:buNone/>
             </a:pPr>
             <a:r>
@@ -15028,15 +15025,14 @@
             </a:r>
           </a:p>
           <a:p>
-            <a:pPr marL="274320" indent="-274320" algn="l">
+            <a:pPr marL="0" indent="0" algn="ctr">
               <a:lnSpc>
                 <a:spcPct val="104000"/>
               </a:lnSpc>
               <a:spcBef>
                 <a:spcPts val="300"/>
               </a:spcBef>
-              <a:buFont typeface="Arial"/>
-              <a:buChar char="•"/>
+              <a:buNone/>
             </a:pPr>
             <a:r>
               <a:rPr lang="en-US" sz="1500" dirty="0">
@@ -15050,15 +15046,14 @@
             </a:r>
           </a:p>
           <a:p>
-            <a:pPr marL="274320" indent="-274320" algn="l">
+            <a:pPr marL="0" indent="0" algn="ctr">
               <a:lnSpc>
                 <a:spcPct val="104000"/>
               </a:lnSpc>
               <a:spcBef>
                 <a:spcPts val="300"/>
               </a:spcBef>
-              <a:buFont typeface="Arial"/>
-              <a:buChar char="•"/>
+              <a:buNone/>
             </a:pPr>
             <a:r>
               <a:rPr lang="en-US" sz="1500" dirty="0">
@@ -15542,12 +15537,12 @@
           </a:ln>
         </p:spPr>
         <p:txBody>
-          <a:bodyPr wrap="square" lIns="137160" tIns="91440" rIns="137160" bIns="91440" rtlCol="0" anchor="t">
+          <a:bodyPr wrap="square" lIns="137160" tIns="91440" rIns="137160" bIns="91440" rtlCol="0" anchor="ctr">
             <a:normAutofit/>
           </a:bodyPr>
           <a:lstStyle/>
           <a:p>
-            <a:pPr marL="0" indent="0" algn="l">
+            <a:pPr marL="0" indent="0" algn="ctr">
               <a:buNone/>
             </a:pPr>
             <a:r>
@@ -15562,15 +15557,14 @@
             </a:r>
           </a:p>
           <a:p>
-            <a:pPr marL="274320" indent="-274320" algn="l">
+            <a:pPr marL="0" indent="0" algn="ctr">
               <a:lnSpc>
                 <a:spcPct val="104000"/>
               </a:lnSpc>
               <a:spcBef>
                 <a:spcPts val="300"/>
               </a:spcBef>
-              <a:buFont typeface="Arial"/>
-              <a:buChar char="•"/>
+              <a:buNone/>
             </a:pPr>
             <a:r>
               <a:rPr lang="en-US" sz="1500" dirty="0">
@@ -15584,15 +15578,14 @@
             </a:r>
           </a:p>
           <a:p>
-            <a:pPr marL="274320" indent="-274320" algn="l">
+            <a:pPr marL="0" indent="0" algn="ctr">
               <a:lnSpc>
                 <a:spcPct val="104000"/>
               </a:lnSpc>
               <a:spcBef>
                 <a:spcPts val="300"/>
               </a:spcBef>
-              <a:buFont typeface="Arial"/>
-              <a:buChar char="•"/>
+              <a:buNone/>
             </a:pPr>
             <a:r>
               <a:rPr lang="en-US" sz="1500" dirty="0">
@@ -15606,15 +15599,14 @@
             </a:r>
           </a:p>
           <a:p>
-            <a:pPr marL="274320" indent="-274320" algn="l">
+            <a:pPr marL="0" indent="0" algn="ctr">
               <a:lnSpc>
                 <a:spcPct val="104000"/>
               </a:lnSpc>
               <a:spcBef>
                 <a:spcPts val="300"/>
               </a:spcBef>
-              <a:buFont typeface="Arial"/>
-              <a:buChar char="•"/>
+              <a:buNone/>
             </a:pPr>
             <a:r>
               <a:rPr lang="en-US" sz="1500" dirty="0">
@@ -15628,15 +15620,14 @@
             </a:r>
           </a:p>
           <a:p>
-            <a:pPr marL="274320" indent="-274320" algn="l">
+            <a:pPr marL="0" indent="0" algn="ctr">
               <a:lnSpc>
                 <a:spcPct val="104000"/>
               </a:lnSpc>
               <a:spcBef>
                 <a:spcPts val="300"/>
               </a:spcBef>
-              <a:buFont typeface="Arial"/>
-              <a:buChar char="•"/>
+              <a:buNone/>
             </a:pPr>
             <a:r>
               <a:rPr lang="en-US" sz="1500" dirty="0">
@@ -17323,12 +17314,12 @@
           </a:ln>
         </p:spPr>
         <p:txBody>
-          <a:bodyPr wrap="square" lIns="137160" tIns="91440" rIns="137160" bIns="91440" rtlCol="0" anchor="t">
+          <a:bodyPr wrap="square" lIns="137160" tIns="91440" rIns="137160" bIns="91440" rtlCol="0" anchor="ctr">
             <a:normAutofit/>
           </a:bodyPr>
           <a:lstStyle/>
           <a:p>
-            <a:pPr marL="0" indent="0" algn="l">
+            <a:pPr marL="0" indent="0" algn="ctr">
               <a:lnSpc>
                 <a:spcPct val="104000"/>
               </a:lnSpc>
@@ -17349,7 +17340,7 @@
             </a:r>
           </a:p>
           <a:p>
-            <a:pPr marL="0" indent="0" algn="l">
+            <a:pPr marL="0" indent="0" algn="ctr">
               <a:lnSpc>
                 <a:spcPct val="104000"/>
               </a:lnSpc>
@@ -17370,7 +17361,7 @@
             </a:r>
           </a:p>
           <a:p>
-            <a:pPr marL="0" indent="0" algn="l">
+            <a:pPr marL="0" indent="0" algn="ctr">
               <a:lnSpc>
                 <a:spcPct val="104000"/>
               </a:lnSpc>
@@ -17391,7 +17382,7 @@
             </a:r>
           </a:p>
           <a:p>
-            <a:pPr marL="0" indent="0" algn="l">
+            <a:pPr marL="0" indent="0" algn="ctr">
               <a:lnSpc>
                 <a:spcPct val="104000"/>
               </a:lnSpc>
@@ -17478,12 +17469,12 @@
           </a:ln>
         </p:spPr>
         <p:txBody>
-          <a:bodyPr wrap="square" lIns="137160" tIns="91440" rIns="137160" bIns="91440" rtlCol="0" anchor="t">
+          <a:bodyPr wrap="square" lIns="137160" tIns="91440" rIns="137160" bIns="91440" rtlCol="0" anchor="ctr">
             <a:normAutofit/>
           </a:bodyPr>
           <a:lstStyle/>
           <a:p>
-            <a:pPr marL="0" indent="0" algn="l">
+            <a:pPr marL="0" indent="0" algn="ctr">
               <a:lnSpc>
                 <a:spcPct val="104000"/>
               </a:lnSpc>
@@ -17504,7 +17495,7 @@
             </a:r>
           </a:p>
           <a:p>
-            <a:pPr marL="0" indent="0" algn="l">
+            <a:pPr marL="0" indent="0" algn="ctr">
               <a:lnSpc>
                 <a:spcPct val="104000"/>
               </a:lnSpc>
@@ -17525,7 +17516,7 @@
             </a:r>
           </a:p>
           <a:p>
-            <a:pPr marL="0" indent="0" algn="l">
+            <a:pPr marL="0" indent="0" algn="ctr">
               <a:lnSpc>
                 <a:spcPct val="104000"/>
               </a:lnSpc>
@@ -17546,7 +17537,7 @@
             </a:r>
           </a:p>
           <a:p>
-            <a:pPr marL="0" indent="0" algn="l">
+            <a:pPr marL="0" indent="0" algn="ctr">
               <a:lnSpc>
                 <a:spcPct val="104000"/>
               </a:lnSpc>
@@ -17567,7 +17558,7 @@
             </a:r>
           </a:p>
           <a:p>
-            <a:pPr marL="0" indent="0" algn="l">
+            <a:pPr marL="0" indent="0" algn="ctr">
               <a:lnSpc>
                 <a:spcPct val="104000"/>
               </a:lnSpc>
@@ -18258,12 +18249,12 @@
           </a:ln>
         </p:spPr>
         <p:txBody>
-          <a:bodyPr wrap="square" lIns="137160" tIns="91440" rIns="137160" bIns="91440" rtlCol="0" anchor="t">
+          <a:bodyPr wrap="square" lIns="137160" tIns="91440" rIns="137160" bIns="91440" rtlCol="0" anchor="ctr">
             <a:normAutofit/>
           </a:bodyPr>
           <a:lstStyle/>
           <a:p>
-            <a:pPr marL="0" indent="0" algn="l">
+            <a:pPr marL="0" indent="0" algn="ctr">
               <a:lnSpc>
                 <a:spcPct val="104000"/>
               </a:lnSpc>
@@ -18284,7 +18275,7 @@
             </a:r>
           </a:p>
           <a:p>
-            <a:pPr marL="0" indent="0" algn="l">
+            <a:pPr marL="0" indent="0" algn="ctr">
               <a:lnSpc>
                 <a:spcPct val="104000"/>
               </a:lnSpc>
@@ -18305,7 +18296,7 @@
             </a:r>
           </a:p>
           <a:p>
-            <a:pPr marL="0" indent="0" algn="l">
+            <a:pPr marL="0" indent="0" algn="ctr">
               <a:lnSpc>
                 <a:spcPct val="104000"/>
               </a:lnSpc>
@@ -18392,12 +18383,12 @@
           </a:ln>
         </p:spPr>
         <p:txBody>
-          <a:bodyPr wrap="square" lIns="137160" tIns="91440" rIns="137160" bIns="91440" rtlCol="0" anchor="t">
+          <a:bodyPr wrap="square" lIns="137160" tIns="91440" rIns="137160" bIns="91440" rtlCol="0" anchor="ctr">
             <a:normAutofit/>
           </a:bodyPr>
           <a:lstStyle/>
           <a:p>
-            <a:pPr marL="0" indent="0" algn="l">
+            <a:pPr marL="0" indent="0" algn="ctr">
               <a:lnSpc>
                 <a:spcPct val="104000"/>
               </a:lnSpc>
@@ -18418,7 +18409,7 @@
             </a:r>
           </a:p>
           <a:p>
-            <a:pPr marL="0" indent="0" algn="l">
+            <a:pPr marL="0" indent="0" algn="ctr">
               <a:lnSpc>
                 <a:spcPct val="104000"/>
               </a:lnSpc>
@@ -18439,7 +18430,7 @@
             </a:r>
           </a:p>
           <a:p>
-            <a:pPr marL="0" indent="0" algn="l">
+            <a:pPr marL="0" indent="0" algn="ctr">
               <a:lnSpc>
                 <a:spcPct val="104000"/>
               </a:lnSpc>
@@ -18526,12 +18517,12 @@
           </a:ln>
         </p:spPr>
         <p:txBody>
-          <a:bodyPr wrap="square" lIns="137160" tIns="91440" rIns="137160" bIns="91440" rtlCol="0" anchor="t">
+          <a:bodyPr wrap="square" lIns="137160" tIns="91440" rIns="137160" bIns="91440" rtlCol="0" anchor="ctr">
             <a:normAutofit/>
           </a:bodyPr>
           <a:lstStyle/>
           <a:p>
-            <a:pPr marL="0" indent="0" algn="l">
+            <a:pPr marL="0" indent="0" algn="ctr">
               <a:lnSpc>
                 <a:spcPct val="104000"/>
               </a:lnSpc>
@@ -18552,7 +18543,7 @@
             </a:r>
           </a:p>
           <a:p>
-            <a:pPr marL="0" indent="0" algn="l">
+            <a:pPr marL="0" indent="0" algn="ctr">
               <a:lnSpc>
                 <a:spcPct val="104000"/>
               </a:lnSpc>
@@ -18573,7 +18564,7 @@
             </a:r>
           </a:p>
           <a:p>
-            <a:pPr marL="0" indent="0" algn="l">
+            <a:pPr marL="0" indent="0" algn="ctr">
               <a:lnSpc>
                 <a:spcPct val="104000"/>
               </a:lnSpc>
@@ -18950,12 +18941,12 @@
           </a:ln>
         </p:spPr>
         <p:txBody>
-          <a:bodyPr wrap="square" lIns="137160" tIns="91440" rIns="137160" bIns="91440" rtlCol="0" anchor="t">
+          <a:bodyPr wrap="square" lIns="137160" tIns="91440" rIns="137160" bIns="91440" rtlCol="0" anchor="ctr">
             <a:normAutofit/>
           </a:bodyPr>
           <a:lstStyle/>
           <a:p>
-            <a:pPr marL="0" indent="0" algn="l">
+            <a:pPr marL="0" indent="0" algn="ctr">
               <a:lnSpc>
                 <a:spcPct val="104000"/>
               </a:lnSpc>
@@ -18976,7 +18967,7 @@
             </a:r>
           </a:p>
           <a:p>
-            <a:pPr marL="0" indent="0" algn="l">
+            <a:pPr marL="0" indent="0" algn="ctr">
               <a:lnSpc>
                 <a:spcPct val="104000"/>
               </a:lnSpc>
@@ -18997,7 +18988,7 @@
             </a:r>
           </a:p>
           <a:p>
-            <a:pPr marL="0" indent="0" algn="l">
+            <a:pPr marL="0" indent="0" algn="ctr">
               <a:lnSpc>
                 <a:spcPct val="104000"/>
               </a:lnSpc>
@@ -19084,12 +19075,12 @@
           </a:ln>
         </p:spPr>
         <p:txBody>
-          <a:bodyPr wrap="square" lIns="137160" tIns="91440" rIns="137160" bIns="91440" rtlCol="0" anchor="t">
+          <a:bodyPr wrap="square" lIns="137160" tIns="91440" rIns="137160" bIns="91440" rtlCol="0" anchor="ctr">
             <a:normAutofit/>
           </a:bodyPr>
           <a:lstStyle/>
           <a:p>
-            <a:pPr marL="0" indent="0" algn="l">
+            <a:pPr marL="0" indent="0" algn="ctr">
               <a:lnSpc>
                 <a:spcPct val="104000"/>
               </a:lnSpc>
@@ -19110,7 +19101,7 @@
             </a:r>
           </a:p>
           <a:p>
-            <a:pPr marL="0" indent="0" algn="l">
+            <a:pPr marL="0" indent="0" algn="ctr">
               <a:lnSpc>
                 <a:spcPct val="104000"/>
               </a:lnSpc>
@@ -19131,7 +19122,7 @@
             </a:r>
           </a:p>
           <a:p>
-            <a:pPr marL="0" indent="0" algn="l">
+            <a:pPr marL="0" indent="0" algn="ctr">
               <a:lnSpc>
                 <a:spcPct val="104000"/>
               </a:lnSpc>
@@ -19218,12 +19209,12 @@
           </a:ln>
         </p:spPr>
         <p:txBody>
-          <a:bodyPr wrap="square" lIns="137160" tIns="91440" rIns="137160" bIns="91440" rtlCol="0" anchor="t">
+          <a:bodyPr wrap="square" lIns="137160" tIns="91440" rIns="137160" bIns="91440" rtlCol="0" anchor="ctr">
             <a:normAutofit/>
           </a:bodyPr>
           <a:lstStyle/>
           <a:p>
-            <a:pPr marL="0" indent="0" algn="l">
+            <a:pPr marL="0" indent="0" algn="ctr">
               <a:lnSpc>
                 <a:spcPct val="104000"/>
               </a:lnSpc>
@@ -19244,7 +19235,7 @@
             </a:r>
           </a:p>
           <a:p>
-            <a:pPr marL="0" indent="0" algn="l">
+            <a:pPr marL="0" indent="0" algn="ctr">
               <a:lnSpc>
                 <a:spcPct val="104000"/>
               </a:lnSpc>
@@ -19265,7 +19256,7 @@
             </a:r>
           </a:p>
           <a:p>
-            <a:pPr marL="0" indent="0" algn="l">
+            <a:pPr marL="0" indent="0" algn="ctr">
               <a:lnSpc>
                 <a:spcPct val="104000"/>
               </a:lnSpc>
@@ -19352,12 +19343,12 @@
           </a:ln>
         </p:spPr>
         <p:txBody>
-          <a:bodyPr wrap="square" lIns="137160" tIns="91440" rIns="137160" bIns="91440" rtlCol="0" anchor="t">
+          <a:bodyPr wrap="square" lIns="137160" tIns="91440" rIns="137160" bIns="91440" rtlCol="0" anchor="ctr">
             <a:normAutofit/>
           </a:bodyPr>
           <a:lstStyle/>
           <a:p>
-            <a:pPr marL="0" indent="0" algn="l">
+            <a:pPr marL="0" indent="0" algn="ctr">
               <a:lnSpc>
                 <a:spcPct val="104000"/>
               </a:lnSpc>
@@ -19378,7 +19369,7 @@
             </a:r>
           </a:p>
           <a:p>
-            <a:pPr marL="0" indent="0" algn="l">
+            <a:pPr marL="0" indent="0" algn="ctr">
               <a:lnSpc>
                 <a:spcPct val="104000"/>
               </a:lnSpc>
@@ -19399,7 +19390,7 @@
             </a:r>
           </a:p>
           <a:p>
-            <a:pPr marL="0" indent="0" algn="l">
+            <a:pPr marL="0" indent="0" algn="ctr">
               <a:lnSpc>
                 <a:spcPct val="104000"/>
               </a:lnSpc>
@@ -20567,12 +20558,12 @@
           </a:ln>
         </p:spPr>
         <p:txBody>
-          <a:bodyPr wrap="square" lIns="137160" tIns="91440" rIns="137160" bIns="91440" rtlCol="0" anchor="t">
+          <a:bodyPr wrap="square" lIns="137160" tIns="91440" rIns="137160" bIns="91440" rtlCol="0" anchor="ctr">
             <a:normAutofit/>
           </a:bodyPr>
           <a:lstStyle/>
           <a:p>
-            <a:pPr marL="0" indent="0" algn="l">
+            <a:pPr marL="0" indent="0" algn="ctr">
               <a:buNone/>
             </a:pPr>
             <a:r>
@@ -20587,15 +20578,14 @@
             </a:r>
           </a:p>
           <a:p>
-            <a:pPr marL="274320" indent="-274320" algn="l">
+            <a:pPr marL="0" indent="0" algn="ctr">
               <a:lnSpc>
                 <a:spcPct val="104000"/>
               </a:lnSpc>
               <a:spcBef>
                 <a:spcPts val="300"/>
               </a:spcBef>
-              <a:buFont typeface="Arial"/>
-              <a:buChar char="•"/>
+              <a:buNone/>
             </a:pPr>
             <a:r>
               <a:rPr lang="en-US" sz="1500" dirty="0">
@@ -20609,15 +20599,14 @@
             </a:r>
           </a:p>
           <a:p>
-            <a:pPr marL="274320" indent="-274320" algn="l">
+            <a:pPr marL="0" indent="0" algn="ctr">
               <a:lnSpc>
                 <a:spcPct val="104000"/>
               </a:lnSpc>
               <a:spcBef>
                 <a:spcPts val="300"/>
               </a:spcBef>
-              <a:buFont typeface="Arial"/>
-              <a:buChar char="•"/>
+              <a:buNone/>
             </a:pPr>
             <a:r>
               <a:rPr lang="en-US" sz="1500" dirty="0">
@@ -20631,15 +20620,14 @@
             </a:r>
           </a:p>
           <a:p>
-            <a:pPr marL="274320" indent="-274320" algn="l">
+            <a:pPr marL="0" indent="0" algn="ctr">
               <a:lnSpc>
                 <a:spcPct val="104000"/>
               </a:lnSpc>
               <a:spcBef>
                 <a:spcPts val="300"/>
               </a:spcBef>
-              <a:buFont typeface="Arial"/>
-              <a:buChar char="•"/>
+              <a:buNone/>
             </a:pPr>
             <a:r>
               <a:rPr lang="en-US" sz="1500" dirty="0">
@@ -20653,15 +20641,14 @@
             </a:r>
           </a:p>
           <a:p>
-            <a:pPr marL="274320" indent="-274320" algn="l">
+            <a:pPr marL="0" indent="0" algn="ctr">
               <a:lnSpc>
                 <a:spcPct val="104000"/>
               </a:lnSpc>
               <a:spcBef>
                 <a:spcPts val="300"/>
               </a:spcBef>
-              <a:buFont typeface="Arial"/>
-              <a:buChar char="•"/>
+              <a:buNone/>
             </a:pPr>
             <a:r>
               <a:rPr lang="en-US" sz="1500" dirty="0">
@@ -20675,15 +20662,14 @@
             </a:r>
           </a:p>
           <a:p>
-            <a:pPr marL="274320" indent="-274320" algn="l">
+            <a:pPr marL="0" indent="0" algn="ctr">
               <a:lnSpc>
                 <a:spcPct val="104000"/>
               </a:lnSpc>
               <a:spcBef>
                 <a:spcPts val="300"/>
               </a:spcBef>
-              <a:buFont typeface="Arial"/>
-              <a:buChar char="•"/>
+              <a:buNone/>
             </a:pPr>
             <a:r>
               <a:rPr lang="en-US" sz="1500" dirty="0">
@@ -21467,12 +21453,12 @@
           </a:ln>
         </p:spPr>
         <p:txBody>
-          <a:bodyPr wrap="square" lIns="137160" tIns="91440" rIns="137160" bIns="91440" rtlCol="0" anchor="t">
+          <a:bodyPr wrap="square" lIns="137160" tIns="91440" rIns="137160" bIns="91440" rtlCol="0" anchor="ctr">
             <a:normAutofit/>
           </a:bodyPr>
           <a:lstStyle/>
           <a:p>
-            <a:pPr marL="0" indent="0" algn="l">
+            <a:pPr marL="0" indent="0" algn="ctr">
               <a:buNone/>
             </a:pPr>
             <a:r>
@@ -21487,15 +21473,14 @@
             </a:r>
           </a:p>
           <a:p>
-            <a:pPr marL="274320" indent="-274320" algn="l">
+            <a:pPr marL="0" indent="0" algn="ctr">
               <a:lnSpc>
                 <a:spcPct val="104000"/>
               </a:lnSpc>
               <a:spcBef>
                 <a:spcPts val="300"/>
               </a:spcBef>
-              <a:buFont typeface="Arial"/>
-              <a:buChar char="•"/>
+              <a:buNone/>
             </a:pPr>
             <a:r>
               <a:rPr lang="en-US" sz="1500" dirty="0">
@@ -21509,15 +21494,14 @@
             </a:r>
           </a:p>
           <a:p>
-            <a:pPr marL="274320" indent="-274320" algn="l">
+            <a:pPr marL="0" indent="0" algn="ctr">
               <a:lnSpc>
                 <a:spcPct val="104000"/>
               </a:lnSpc>
               <a:spcBef>
                 <a:spcPts val="300"/>
               </a:spcBef>
-              <a:buFont typeface="Arial"/>
-              <a:buChar char="•"/>
+              <a:buNone/>
             </a:pPr>
             <a:r>
               <a:rPr lang="en-US" sz="1500" dirty="0">
@@ -21531,15 +21515,14 @@
             </a:r>
           </a:p>
           <a:p>
-            <a:pPr marL="274320" indent="-274320" algn="l">
+            <a:pPr marL="0" indent="0" algn="ctr">
               <a:lnSpc>
                 <a:spcPct val="104000"/>
               </a:lnSpc>
               <a:spcBef>
                 <a:spcPts val="300"/>
               </a:spcBef>
-              <a:buFont typeface="Arial"/>
-              <a:buChar char="•"/>
+              <a:buNone/>
             </a:pPr>
             <a:r>
               <a:rPr lang="en-US" sz="1500" dirty="0">
@@ -21553,15 +21536,14 @@
             </a:r>
           </a:p>
           <a:p>
-            <a:pPr marL="274320" indent="-274320" algn="l">
+            <a:pPr marL="0" indent="0" algn="ctr">
               <a:lnSpc>
                 <a:spcPct val="104000"/>
               </a:lnSpc>
               <a:spcBef>
                 <a:spcPts val="300"/>
               </a:spcBef>
-              <a:buFont typeface="Arial"/>
-              <a:buChar char="•"/>
+              <a:buNone/>
             </a:pPr>
             <a:r>
               <a:rPr lang="en-US" sz="1500" dirty="0">
@@ -21575,15 +21557,14 @@
             </a:r>
           </a:p>
           <a:p>
-            <a:pPr marL="274320" indent="-274320" algn="l">
+            <a:pPr marL="0" indent="0" algn="ctr">
               <a:lnSpc>
                 <a:spcPct val="104000"/>
               </a:lnSpc>
               <a:spcBef>
                 <a:spcPts val="300"/>
               </a:spcBef>
-              <a:buFont typeface="Arial"/>
-              <a:buChar char="•"/>
+              <a:buNone/>
             </a:pPr>
             <a:r>
               <a:rPr lang="en-US" sz="1500" dirty="0">
@@ -21916,12 +21897,12 @@
           </a:ln>
         </p:spPr>
         <p:txBody>
-          <a:bodyPr wrap="square" lIns="137160" tIns="91440" rIns="137160" bIns="91440" rtlCol="0" anchor="t">
+          <a:bodyPr wrap="square" lIns="137160" tIns="91440" rIns="137160" bIns="91440" rtlCol="0" anchor="ctr">
             <a:normAutofit/>
           </a:bodyPr>
           <a:lstStyle/>
           <a:p>
-            <a:pPr marL="0" indent="0" algn="l">
+            <a:pPr marL="0" indent="0" algn="ctr">
               <a:lnSpc>
                 <a:spcPct val="104000"/>
               </a:lnSpc>
@@ -21942,7 +21923,7 @@
             </a:r>
           </a:p>
           <a:p>
-            <a:pPr marL="0" indent="0" algn="l">
+            <a:pPr marL="0" indent="0" algn="ctr">
               <a:lnSpc>
                 <a:spcPct val="104000"/>
               </a:lnSpc>
@@ -21963,7 +21944,7 @@
             </a:r>
           </a:p>
           <a:p>
-            <a:pPr marL="0" indent="0" algn="l">
+            <a:pPr marL="0" indent="0" algn="ctr">
               <a:lnSpc>
                 <a:spcPct val="104000"/>
               </a:lnSpc>
@@ -22050,12 +22031,12 @@
           </a:ln>
         </p:spPr>
         <p:txBody>
-          <a:bodyPr wrap="square" lIns="137160" tIns="91440" rIns="137160" bIns="91440" rtlCol="0" anchor="t">
+          <a:bodyPr wrap="square" lIns="137160" tIns="91440" rIns="137160" bIns="91440" rtlCol="0" anchor="ctr">
             <a:normAutofit/>
           </a:bodyPr>
           <a:lstStyle/>
           <a:p>
-            <a:pPr marL="0" indent="0" algn="l">
+            <a:pPr marL="0" indent="0" algn="ctr">
               <a:lnSpc>
                 <a:spcPct val="104000"/>
               </a:lnSpc>
@@ -22076,7 +22057,7 @@
             </a:r>
           </a:p>
           <a:p>
-            <a:pPr marL="0" indent="0" algn="l">
+            <a:pPr marL="0" indent="0" algn="ctr">
               <a:lnSpc>
                 <a:spcPct val="104000"/>
               </a:lnSpc>
@@ -22097,7 +22078,7 @@
             </a:r>
           </a:p>
           <a:p>
-            <a:pPr marL="0" indent="0" algn="l">
+            <a:pPr marL="0" indent="0" algn="ctr">
               <a:lnSpc>
                 <a:spcPct val="104000"/>
               </a:lnSpc>
@@ -22184,12 +22165,12 @@
           </a:ln>
         </p:spPr>
         <p:txBody>
-          <a:bodyPr wrap="square" lIns="137160" tIns="91440" rIns="137160" bIns="91440" rtlCol="0" anchor="t">
+          <a:bodyPr wrap="square" lIns="137160" tIns="91440" rIns="137160" bIns="91440" rtlCol="0" anchor="ctr">
             <a:normAutofit/>
           </a:bodyPr>
           <a:lstStyle/>
           <a:p>
-            <a:pPr marL="0" indent="0" algn="l">
+            <a:pPr marL="0" indent="0" algn="ctr">
               <a:lnSpc>
                 <a:spcPct val="104000"/>
               </a:lnSpc>
@@ -22210,7 +22191,7 @@
             </a:r>
           </a:p>
           <a:p>
-            <a:pPr marL="0" indent="0" algn="l">
+            <a:pPr marL="0" indent="0" algn="ctr">
               <a:lnSpc>
                 <a:spcPct val="104000"/>
               </a:lnSpc>
@@ -22231,7 +22212,7 @@
             </a:r>
           </a:p>
           <a:p>
-            <a:pPr marL="0" indent="0" algn="l">
+            <a:pPr marL="0" indent="0" algn="ctr">
               <a:lnSpc>
                 <a:spcPct val="104000"/>
               </a:lnSpc>
@@ -22591,7 +22572,7 @@
                 <a:latin typeface="Arial"/>
                 <a:cs typeface="Arial"/>
               </a:rPr>
-              <a:t>Exit question (chat or 1-question form): doctors chose restrictive fluids for some patients with septic shock and not for others. Both groups are followed to day 28. Which design? 'Caused' or 'associated'?</a:t>
+              <a:t>Exit question (in the chat): doctors chose restrictive fluids for some patients with septic shock and not for others. Both groups are followed to day 28. Which design? 'Caused' or 'associated'?</a:t>
             </a:r>
           </a:p>
           <a:p>
@@ -23272,12 +23253,12 @@
           </a:ln>
         </p:spPr>
         <p:txBody>
-          <a:bodyPr wrap="square" lIns="110000" tIns="91440" rIns="110000" bIns="91440" rtlCol="0" anchor="t">
+          <a:bodyPr wrap="square" lIns="110000" tIns="91440" rIns="110000" bIns="91440" rtlCol="0" anchor="ctr">
             <a:normAutofit/>
           </a:bodyPr>
           <a:lstStyle/>
           <a:p>
-            <a:pPr marL="0" indent="0" algn="l">
+            <a:pPr marL="0" indent="0" algn="ctr">
               <a:lnSpc>
                 <a:spcPct val="104000"/>
               </a:lnSpc>
@@ -23298,7 +23279,7 @@
             </a:r>
           </a:p>
           <a:p>
-            <a:pPr marL="0" indent="0" algn="l">
+            <a:pPr marL="0" indent="0" algn="ctr">
               <a:lnSpc>
                 <a:spcPct val="104000"/>
               </a:lnSpc>
@@ -23387,12 +23368,12 @@
           </a:ln>
         </p:spPr>
         <p:txBody>
-          <a:bodyPr wrap="square" lIns="110000" tIns="91440" rIns="110000" bIns="91440" rtlCol="0" anchor="t">
+          <a:bodyPr wrap="square" lIns="110000" tIns="91440" rIns="110000" bIns="91440" rtlCol="0" anchor="ctr">
             <a:normAutofit/>
           </a:bodyPr>
           <a:lstStyle/>
           <a:p>
-            <a:pPr marL="0" indent="0" algn="l">
+            <a:pPr marL="0" indent="0" algn="ctr">
               <a:lnSpc>
                 <a:spcPct val="104000"/>
               </a:lnSpc>
@@ -23481,12 +23462,12 @@
           </a:ln>
         </p:spPr>
         <p:txBody>
-          <a:bodyPr wrap="square" lIns="110000" tIns="91440" rIns="110000" bIns="91440" rtlCol="0" anchor="t">
+          <a:bodyPr wrap="square" lIns="110000" tIns="91440" rIns="110000" bIns="91440" rtlCol="0" anchor="ctr">
             <a:normAutofit/>
           </a:bodyPr>
           <a:lstStyle/>
           <a:p>
-            <a:pPr marL="0" indent="0" algn="l">
+            <a:pPr marL="0" indent="0" algn="ctr">
               <a:lnSpc>
                 <a:spcPct val="104000"/>
               </a:lnSpc>
@@ -23575,12 +23556,12 @@
           </a:ln>
         </p:spPr>
         <p:txBody>
-          <a:bodyPr wrap="square" lIns="110000" tIns="91440" rIns="110000" bIns="91440" rtlCol="0" anchor="t">
+          <a:bodyPr wrap="square" lIns="110000" tIns="91440" rIns="110000" bIns="91440" rtlCol="0" anchor="ctr">
             <a:normAutofit/>
           </a:bodyPr>
           <a:lstStyle/>
           <a:p>
-            <a:pPr marL="0" indent="0" algn="l">
+            <a:pPr marL="0" indent="0" algn="ctr">
               <a:lnSpc>
                 <a:spcPct val="104000"/>
               </a:lnSpc>
@@ -23669,12 +23650,12 @@
           </a:ln>
         </p:spPr>
         <p:txBody>
-          <a:bodyPr wrap="square" lIns="110000" tIns="91440" rIns="110000" bIns="91440" rtlCol="0" anchor="t">
+          <a:bodyPr wrap="square" lIns="110000" tIns="91440" rIns="110000" bIns="91440" rtlCol="0" anchor="ctr">
             <a:normAutofit/>
           </a:bodyPr>
           <a:lstStyle/>
           <a:p>
-            <a:pPr marL="0" indent="0" algn="l">
+            <a:pPr marL="0" indent="0" algn="ctr">
               <a:lnSpc>
                 <a:spcPct val="104000"/>
               </a:lnSpc>
@@ -23695,7 +23676,7 @@
             </a:r>
           </a:p>
           <a:p>
-            <a:pPr marL="0" indent="0" algn="l">
+            <a:pPr marL="0" indent="0" algn="ctr">
               <a:lnSpc>
                 <a:spcPct val="104000"/>
               </a:lnSpc>
@@ -24134,12 +24115,12 @@
           </a:ln>
         </p:spPr>
         <p:txBody>
-          <a:bodyPr wrap="square" lIns="137160" tIns="91440" rIns="137160" bIns="91440" rtlCol="0" anchor="t">
+          <a:bodyPr wrap="square" lIns="137160" tIns="91440" rIns="137160" bIns="91440" rtlCol="0" anchor="ctr">
             <a:normAutofit/>
           </a:bodyPr>
           <a:lstStyle/>
           <a:p>
-            <a:pPr marL="0" indent="0" algn="l">
+            <a:pPr marL="0" indent="0" algn="ctr">
               <a:buNone/>
             </a:pPr>
             <a:r>
@@ -24154,15 +24135,14 @@
             </a:r>
           </a:p>
           <a:p>
-            <a:pPr marL="274320" indent="-274320" algn="l">
+            <a:pPr marL="0" indent="0" algn="ctr">
               <a:lnSpc>
                 <a:spcPct val="104000"/>
               </a:lnSpc>
               <a:spcBef>
                 <a:spcPts val="300"/>
               </a:spcBef>
-              <a:buFont typeface="Arial"/>
-              <a:buChar char="•"/>
+              <a:buNone/>
             </a:pPr>
             <a:r>
               <a:rPr lang="en-US" sz="1500" dirty="0">
@@ -24176,15 +24156,14 @@
             </a:r>
           </a:p>
           <a:p>
-            <a:pPr marL="274320" indent="-274320" algn="l">
+            <a:pPr marL="0" indent="0" algn="ctr">
               <a:lnSpc>
                 <a:spcPct val="104000"/>
               </a:lnSpc>
               <a:spcBef>
                 <a:spcPts val="300"/>
               </a:spcBef>
-              <a:buFont typeface="Arial"/>
-              <a:buChar char="•"/>
+              <a:buNone/>
             </a:pPr>
             <a:r>
               <a:rPr lang="en-US" sz="1500" dirty="0">
@@ -24198,15 +24177,14 @@
             </a:r>
           </a:p>
           <a:p>
-            <a:pPr marL="274320" indent="-274320" algn="l">
+            <a:pPr marL="0" indent="0" algn="ctr">
               <a:lnSpc>
                 <a:spcPct val="104000"/>
               </a:lnSpc>
               <a:spcBef>
                 <a:spcPts val="300"/>
               </a:spcBef>
-              <a:buFont typeface="Arial"/>
-              <a:buChar char="•"/>
+              <a:buNone/>
             </a:pPr>
             <a:r>
               <a:rPr lang="en-US" sz="1500" dirty="0">
@@ -24220,15 +24198,14 @@
             </a:r>
           </a:p>
           <a:p>
-            <a:pPr marL="274320" indent="-274320" algn="l">
+            <a:pPr marL="0" indent="0" algn="ctr">
               <a:lnSpc>
                 <a:spcPct val="104000"/>
               </a:lnSpc>
               <a:spcBef>
                 <a:spcPts val="300"/>
               </a:spcBef>
-              <a:buFont typeface="Arial"/>
-              <a:buChar char="•"/>
+              <a:buNone/>
             </a:pPr>
             <a:r>
               <a:rPr lang="en-US" sz="1500" dirty="0">
@@ -24561,12 +24538,12 @@
           </a:ln>
         </p:spPr>
         <p:txBody>
-          <a:bodyPr wrap="square" lIns="137160" tIns="91440" rIns="137160" bIns="91440" rtlCol="0" anchor="t">
+          <a:bodyPr wrap="square" lIns="137160" tIns="91440" rIns="137160" bIns="91440" rtlCol="0" anchor="ctr">
             <a:normAutofit/>
           </a:bodyPr>
           <a:lstStyle/>
           <a:p>
-            <a:pPr marL="0" indent="0" algn="l">
+            <a:pPr marL="0" indent="0" algn="ctr">
               <a:lnSpc>
                 <a:spcPct val="104000"/>
               </a:lnSpc>
@@ -24587,7 +24564,7 @@
             </a:r>
           </a:p>
           <a:p>
-            <a:pPr marL="0" indent="0" algn="l">
+            <a:pPr marL="0" indent="0" algn="ctr">
               <a:lnSpc>
                 <a:spcPct val="104000"/>
               </a:lnSpc>
@@ -24608,7 +24585,7 @@
             </a:r>
           </a:p>
           <a:p>
-            <a:pPr marL="0" indent="0" algn="l">
+            <a:pPr marL="0" indent="0" algn="ctr">
               <a:lnSpc>
                 <a:spcPct val="104000"/>
               </a:lnSpc>
@@ -24695,12 +24672,12 @@
           </a:ln>
         </p:spPr>
         <p:txBody>
-          <a:bodyPr wrap="square" lIns="137160" tIns="91440" rIns="137160" bIns="91440" rtlCol="0" anchor="t">
+          <a:bodyPr wrap="square" lIns="137160" tIns="91440" rIns="137160" bIns="91440" rtlCol="0" anchor="ctr">
             <a:normAutofit/>
           </a:bodyPr>
           <a:lstStyle/>
           <a:p>
-            <a:pPr marL="0" indent="0" algn="l">
+            <a:pPr marL="0" indent="0" algn="ctr">
               <a:lnSpc>
                 <a:spcPct val="104000"/>
               </a:lnSpc>
@@ -24721,7 +24698,7 @@
             </a:r>
           </a:p>
           <a:p>
-            <a:pPr marL="0" indent="0" algn="l">
+            <a:pPr marL="0" indent="0" algn="ctr">
               <a:lnSpc>
                 <a:spcPct val="104000"/>
               </a:lnSpc>
@@ -24742,7 +24719,7 @@
             </a:r>
           </a:p>
           <a:p>
-            <a:pPr marL="0" indent="0" algn="l">
+            <a:pPr marL="0" indent="0" algn="ctr">
               <a:lnSpc>
                 <a:spcPct val="104000"/>
               </a:lnSpc>
@@ -24829,12 +24806,12 @@
           </a:ln>
         </p:spPr>
         <p:txBody>
-          <a:bodyPr wrap="square" lIns="137160" tIns="91440" rIns="137160" bIns="91440" rtlCol="0" anchor="t">
+          <a:bodyPr wrap="square" lIns="137160" tIns="91440" rIns="137160" bIns="91440" rtlCol="0" anchor="ctr">
             <a:normAutofit/>
           </a:bodyPr>
           <a:lstStyle/>
           <a:p>
-            <a:pPr marL="0" indent="0" algn="l">
+            <a:pPr marL="0" indent="0" algn="ctr">
               <a:lnSpc>
                 <a:spcPct val="104000"/>
               </a:lnSpc>
@@ -24855,7 +24832,7 @@
             </a:r>
           </a:p>
           <a:p>
-            <a:pPr marL="0" indent="0" algn="l">
+            <a:pPr marL="0" indent="0" algn="ctr">
               <a:lnSpc>
                 <a:spcPct val="104000"/>
               </a:lnSpc>
@@ -24876,7 +24853,7 @@
             </a:r>
           </a:p>
           <a:p>
-            <a:pPr marL="0" indent="0" algn="l">
+            <a:pPr marL="0" indent="0" algn="ctr">
               <a:lnSpc>
                 <a:spcPct val="104000"/>
               </a:lnSpc>
@@ -25253,12 +25230,12 @@
           </a:ln>
         </p:spPr>
         <p:txBody>
-          <a:bodyPr wrap="square" lIns="137160" tIns="91440" rIns="137160" bIns="91440" rtlCol="0" anchor="t">
+          <a:bodyPr wrap="square" lIns="137160" tIns="91440" rIns="137160" bIns="91440" rtlCol="0" anchor="ctr">
             <a:normAutofit/>
           </a:bodyPr>
           <a:lstStyle/>
           <a:p>
-            <a:pPr marL="0" indent="0" algn="l">
+            <a:pPr marL="0" indent="0" algn="ctr">
               <a:lnSpc>
                 <a:spcPct val="104000"/>
               </a:lnSpc>
@@ -25279,7 +25256,7 @@
             </a:r>
           </a:p>
           <a:p>
-            <a:pPr marL="0" indent="0" algn="l">
+            <a:pPr marL="0" indent="0" algn="ctr">
               <a:lnSpc>
                 <a:spcPct val="104000"/>
               </a:lnSpc>
@@ -25300,7 +25277,7 @@
             </a:r>
           </a:p>
           <a:p>
-            <a:pPr marL="0" indent="0" algn="l">
+            <a:pPr marL="0" indent="0" algn="ctr">
               <a:lnSpc>
                 <a:spcPct val="104000"/>
               </a:lnSpc>
@@ -25321,7 +25298,7 @@
             </a:r>
           </a:p>
           <a:p>
-            <a:pPr marL="0" indent="0" algn="l">
+            <a:pPr marL="0" indent="0" algn="ctr">
               <a:lnSpc>
                 <a:spcPct val="104000"/>
               </a:lnSpc>
@@ -25408,12 +25385,12 @@
           </a:ln>
         </p:spPr>
         <p:txBody>
-          <a:bodyPr wrap="square" lIns="137160" tIns="91440" rIns="137160" bIns="91440" rtlCol="0" anchor="t">
+          <a:bodyPr wrap="square" lIns="137160" tIns="91440" rIns="137160" bIns="91440" rtlCol="0" anchor="ctr">
             <a:normAutofit/>
           </a:bodyPr>
           <a:lstStyle/>
           <a:p>
-            <a:pPr marL="0" indent="0" algn="l">
+            <a:pPr marL="0" indent="0" algn="ctr">
               <a:lnSpc>
                 <a:spcPct val="104000"/>
               </a:lnSpc>
@@ -25434,7 +25411,7 @@
             </a:r>
           </a:p>
           <a:p>
-            <a:pPr marL="0" indent="0" algn="l">
+            <a:pPr marL="0" indent="0" algn="ctr">
               <a:lnSpc>
                 <a:spcPct val="104000"/>
               </a:lnSpc>
@@ -25455,7 +25432,7 @@
             </a:r>
           </a:p>
           <a:p>
-            <a:pPr marL="0" indent="0" algn="l">
+            <a:pPr marL="0" indent="0" algn="ctr">
               <a:lnSpc>
                 <a:spcPct val="104000"/>
               </a:lnSpc>
@@ -25476,7 +25453,7 @@
             </a:r>
           </a:p>
           <a:p>
-            <a:pPr marL="0" indent="0" algn="l">
+            <a:pPr marL="0" indent="0" algn="ctr">
               <a:lnSpc>
                 <a:spcPct val="104000"/>
               </a:lnSpc>
@@ -25915,12 +25892,12 @@
           </a:ln>
         </p:spPr>
         <p:txBody>
-          <a:bodyPr wrap="square" lIns="137160" tIns="91440" rIns="137160" bIns="91440" rtlCol="0" anchor="t">
+          <a:bodyPr wrap="square" lIns="137160" tIns="91440" rIns="137160" bIns="91440" rtlCol="0" anchor="ctr">
             <a:normAutofit/>
           </a:bodyPr>
           <a:lstStyle/>
           <a:p>
-            <a:pPr marL="0" indent="0" algn="l">
+            <a:pPr marL="0" indent="0" algn="ctr">
               <a:buNone/>
             </a:pPr>
             <a:r>
@@ -25935,15 +25912,14 @@
             </a:r>
           </a:p>
           <a:p>
-            <a:pPr marL="274320" indent="-274320" algn="l">
+            <a:pPr marL="0" indent="0" algn="ctr">
               <a:lnSpc>
                 <a:spcPct val="104000"/>
               </a:lnSpc>
               <a:spcBef>
                 <a:spcPts val="300"/>
               </a:spcBef>
-              <a:buFont typeface="Arial"/>
-              <a:buChar char="•"/>
+              <a:buNone/>
             </a:pPr>
             <a:r>
               <a:rPr lang="en-US" sz="1500" dirty="0">
@@ -25957,15 +25933,14 @@
             </a:r>
           </a:p>
           <a:p>
-            <a:pPr marL="274320" indent="-274320" algn="l">
+            <a:pPr marL="0" indent="0" algn="ctr">
               <a:lnSpc>
                 <a:spcPct val="104000"/>
               </a:lnSpc>
               <a:spcBef>
                 <a:spcPts val="300"/>
               </a:spcBef>
-              <a:buFont typeface="Arial"/>
-              <a:buChar char="•"/>
+              <a:buNone/>
             </a:pPr>
             <a:r>
               <a:rPr lang="en-US" sz="1500" dirty="0">
@@ -25979,15 +25954,14 @@
             </a:r>
           </a:p>
           <a:p>
-            <a:pPr marL="274320" indent="-274320" algn="l">
+            <a:pPr marL="0" indent="0" algn="ctr">
               <a:lnSpc>
                 <a:spcPct val="104000"/>
               </a:lnSpc>
               <a:spcBef>
                 <a:spcPts val="300"/>
               </a:spcBef>
-              <a:buFont typeface="Arial"/>
-              <a:buChar char="•"/>
+              <a:buNone/>
             </a:pPr>
             <a:r>
               <a:rPr lang="en-US" sz="1500" dirty="0">
@@ -26320,12 +26294,12 @@
           </a:ln>
         </p:spPr>
         <p:txBody>
-          <a:bodyPr wrap="square" lIns="137160" tIns="91440" rIns="137160" bIns="91440" rtlCol="0" anchor="t">
+          <a:bodyPr wrap="square" lIns="137160" tIns="91440" rIns="137160" bIns="91440" rtlCol="0" anchor="ctr">
             <a:normAutofit/>
           </a:bodyPr>
           <a:lstStyle/>
           <a:p>
-            <a:pPr marL="0" indent="0" algn="l">
+            <a:pPr marL="0" indent="0" algn="ctr">
               <a:lnSpc>
                 <a:spcPct val="104000"/>
               </a:lnSpc>
@@ -26346,7 +26320,7 @@
             </a:r>
           </a:p>
           <a:p>
-            <a:pPr marL="0" indent="0" algn="l">
+            <a:pPr marL="0" indent="0" algn="ctr">
               <a:lnSpc>
                 <a:spcPct val="104000"/>
               </a:lnSpc>
@@ -26433,12 +26407,12 @@
           </a:ln>
         </p:spPr>
         <p:txBody>
-          <a:bodyPr wrap="square" lIns="137160" tIns="91440" rIns="137160" bIns="91440" rtlCol="0" anchor="t">
+          <a:bodyPr wrap="square" lIns="137160" tIns="91440" rIns="137160" bIns="91440" rtlCol="0" anchor="ctr">
             <a:normAutofit/>
           </a:bodyPr>
           <a:lstStyle/>
           <a:p>
-            <a:pPr marL="0" indent="0" algn="l">
+            <a:pPr marL="0" indent="0" algn="ctr">
               <a:lnSpc>
                 <a:spcPct val="104000"/>
               </a:lnSpc>
@@ -26459,7 +26433,7 @@
             </a:r>
           </a:p>
           <a:p>
-            <a:pPr marL="0" indent="0" algn="l">
+            <a:pPr marL="0" indent="0" algn="ctr">
               <a:lnSpc>
                 <a:spcPct val="104000"/>
               </a:lnSpc>
@@ -26546,12 +26520,12 @@
           </a:ln>
         </p:spPr>
         <p:txBody>
-          <a:bodyPr wrap="square" lIns="137160" tIns="91440" rIns="137160" bIns="91440" rtlCol="0" anchor="t">
+          <a:bodyPr wrap="square" lIns="137160" tIns="91440" rIns="137160" bIns="91440" rtlCol="0" anchor="ctr">
             <a:normAutofit/>
           </a:bodyPr>
           <a:lstStyle/>
           <a:p>
-            <a:pPr marL="0" indent="0" algn="l">
+            <a:pPr marL="0" indent="0" algn="ctr">
               <a:lnSpc>
                 <a:spcPct val="104000"/>
               </a:lnSpc>
@@ -26572,7 +26546,7 @@
             </a:r>
           </a:p>
           <a:p>
-            <a:pPr marL="0" indent="0" algn="l">
+            <a:pPr marL="0" indent="0" algn="ctr">
               <a:lnSpc>
                 <a:spcPct val="104000"/>
               </a:lnSpc>
@@ -26949,12 +26923,12 @@
           </a:ln>
         </p:spPr>
         <p:txBody>
-          <a:bodyPr wrap="square" lIns="137160" tIns="91440" rIns="137160" bIns="91440" rtlCol="0" anchor="t">
+          <a:bodyPr wrap="square" lIns="137160" tIns="91440" rIns="137160" bIns="91440" rtlCol="0" anchor="ctr">
             <a:normAutofit/>
           </a:bodyPr>
           <a:lstStyle/>
           <a:p>
-            <a:pPr marL="0" indent="0" algn="l">
+            <a:pPr marL="0" indent="0" algn="ctr">
               <a:lnSpc>
                 <a:spcPct val="104000"/>
               </a:lnSpc>
@@ -26975,7 +26949,7 @@
             </a:r>
           </a:p>
           <a:p>
-            <a:pPr marL="0" indent="0" algn="l">
+            <a:pPr marL="0" indent="0" algn="ctr">
               <a:lnSpc>
                 <a:spcPct val="104000"/>
               </a:lnSpc>
@@ -27062,12 +27036,12 @@
           </a:ln>
         </p:spPr>
         <p:txBody>
-          <a:bodyPr wrap="square" lIns="137160" tIns="91440" rIns="137160" bIns="91440" rtlCol="0" anchor="t">
+          <a:bodyPr wrap="square" lIns="137160" tIns="91440" rIns="137160" bIns="91440" rtlCol="0" anchor="ctr">
             <a:normAutofit/>
           </a:bodyPr>
           <a:lstStyle/>
           <a:p>
-            <a:pPr marL="0" indent="0" algn="l">
+            <a:pPr marL="0" indent="0" algn="ctr">
               <a:lnSpc>
                 <a:spcPct val="104000"/>
               </a:lnSpc>
@@ -27088,7 +27062,7 @@
             </a:r>
           </a:p>
           <a:p>
-            <a:pPr marL="0" indent="0" algn="l">
+            <a:pPr marL="0" indent="0" algn="ctr">
               <a:lnSpc>
                 <a:spcPct val="104000"/>
               </a:lnSpc>
@@ -27175,12 +27149,12 @@
           </a:ln>
         </p:spPr>
         <p:txBody>
-          <a:bodyPr wrap="square" lIns="137160" tIns="91440" rIns="137160" bIns="91440" rtlCol="0" anchor="t">
+          <a:bodyPr wrap="square" lIns="137160" tIns="91440" rIns="137160" bIns="91440" rtlCol="0" anchor="ctr">
             <a:normAutofit/>
           </a:bodyPr>
           <a:lstStyle/>
           <a:p>
-            <a:pPr marL="0" indent="0" algn="l">
+            <a:pPr marL="0" indent="0" algn="ctr">
               <a:lnSpc>
                 <a:spcPct val="104000"/>
               </a:lnSpc>
@@ -27201,7 +27175,7 @@
             </a:r>
           </a:p>
           <a:p>
-            <a:pPr marL="0" indent="0" algn="l">
+            <a:pPr marL="0" indent="0" algn="ctr">
               <a:lnSpc>
                 <a:spcPct val="104000"/>
               </a:lnSpc>
@@ -27539,12 +27513,12 @@
           </a:ln>
         </p:spPr>
         <p:txBody>
-          <a:bodyPr wrap="square" lIns="137160" tIns="91440" rIns="137160" bIns="91440" rtlCol="0" anchor="t">
+          <a:bodyPr wrap="square" lIns="137160" tIns="91440" rIns="137160" bIns="91440" rtlCol="0" anchor="ctr">
             <a:normAutofit/>
           </a:bodyPr>
           <a:lstStyle/>
           <a:p>
-            <a:pPr marL="0" indent="0" algn="l">
+            <a:pPr marL="0" indent="0" algn="ctr">
               <a:lnSpc>
                 <a:spcPct val="104000"/>
               </a:lnSpc>
@@ -27565,7 +27539,7 @@
             </a:r>
           </a:p>
           <a:p>
-            <a:pPr marL="0" indent="0" algn="l">
+            <a:pPr marL="0" indent="0" algn="ctr">
               <a:lnSpc>
                 <a:spcPct val="104000"/>
               </a:lnSpc>
@@ -27652,12 +27626,12 @@
           </a:ln>
         </p:spPr>
         <p:txBody>
-          <a:bodyPr wrap="square" lIns="137160" tIns="91440" rIns="137160" bIns="91440" rtlCol="0" anchor="t">
+          <a:bodyPr wrap="square" lIns="137160" tIns="91440" rIns="137160" bIns="91440" rtlCol="0" anchor="ctr">
             <a:normAutofit/>
           </a:bodyPr>
           <a:lstStyle/>
           <a:p>
-            <a:pPr marL="0" indent="0" algn="l">
+            <a:pPr marL="0" indent="0" algn="ctr">
               <a:lnSpc>
                 <a:spcPct val="104000"/>
               </a:lnSpc>
@@ -27678,7 +27652,7 @@
             </a:r>
           </a:p>
           <a:p>
-            <a:pPr marL="0" indent="0" algn="l">
+            <a:pPr marL="0" indent="0" algn="ctr">
               <a:lnSpc>
                 <a:spcPct val="104000"/>
               </a:lnSpc>
@@ -27765,12 +27739,12 @@
           </a:ln>
         </p:spPr>
         <p:txBody>
-          <a:bodyPr wrap="square" lIns="137160" tIns="91440" rIns="137160" bIns="91440" rtlCol="0" anchor="t">
+          <a:bodyPr wrap="square" lIns="137160" tIns="91440" rIns="137160" bIns="91440" rtlCol="0" anchor="ctr">
             <a:normAutofit/>
           </a:bodyPr>
           <a:lstStyle/>
           <a:p>
-            <a:pPr marL="0" indent="0" algn="l">
+            <a:pPr marL="0" indent="0" algn="ctr">
               <a:lnSpc>
                 <a:spcPct val="104000"/>
               </a:lnSpc>
@@ -27791,7 +27765,7 @@
             </a:r>
           </a:p>
           <a:p>
-            <a:pPr marL="0" indent="0" algn="l">
+            <a:pPr marL="0" indent="0" algn="ctr">
               <a:lnSpc>
                 <a:spcPct val="104000"/>
               </a:lnSpc>
@@ -28661,12 +28635,12 @@
           </a:ln>
         </p:spPr>
         <p:txBody>
-          <a:bodyPr wrap="square" lIns="137160" tIns="91440" rIns="137160" bIns="91440" rtlCol="0" anchor="t">
+          <a:bodyPr wrap="square" lIns="137160" tIns="91440" rIns="137160" bIns="91440" rtlCol="0" anchor="ctr">
             <a:normAutofit/>
           </a:bodyPr>
           <a:lstStyle/>
           <a:p>
-            <a:pPr marL="0" indent="0" algn="l">
+            <a:pPr marL="0" indent="0" algn="ctr">
               <a:lnSpc>
                 <a:spcPct val="104000"/>
               </a:lnSpc>
@@ -28687,7 +28661,7 @@
             </a:r>
           </a:p>
           <a:p>
-            <a:pPr marL="0" indent="0" algn="l">
+            <a:pPr marL="0" indent="0" algn="ctr">
               <a:lnSpc>
                 <a:spcPct val="104000"/>
               </a:lnSpc>
@@ -28708,7 +28682,7 @@
             </a:r>
           </a:p>
           <a:p>
-            <a:pPr marL="0" indent="0" algn="l">
+            <a:pPr marL="0" indent="0" algn="ctr">
               <a:lnSpc>
                 <a:spcPct val="104000"/>
               </a:lnSpc>
@@ -28795,12 +28769,12 @@
           </a:ln>
         </p:spPr>
         <p:txBody>
-          <a:bodyPr wrap="square" lIns="137160" tIns="91440" rIns="137160" bIns="91440" rtlCol="0" anchor="t">
+          <a:bodyPr wrap="square" lIns="137160" tIns="91440" rIns="137160" bIns="91440" rtlCol="0" anchor="ctr">
             <a:normAutofit/>
           </a:bodyPr>
           <a:lstStyle/>
           <a:p>
-            <a:pPr marL="0" indent="0" algn="l">
+            <a:pPr marL="0" indent="0" algn="ctr">
               <a:lnSpc>
                 <a:spcPct val="104000"/>
               </a:lnSpc>
@@ -28821,7 +28795,7 @@
             </a:r>
           </a:p>
           <a:p>
-            <a:pPr marL="0" indent="0" algn="l">
+            <a:pPr marL="0" indent="0" algn="ctr">
               <a:lnSpc>
                 <a:spcPct val="104000"/>
               </a:lnSpc>
@@ -28842,7 +28816,7 @@
             </a:r>
           </a:p>
           <a:p>
-            <a:pPr marL="0" indent="0" algn="l">
+            <a:pPr marL="0" indent="0" algn="ctr">
               <a:lnSpc>
                 <a:spcPct val="104000"/>
               </a:lnSpc>
@@ -28929,12 +28903,12 @@
           </a:ln>
         </p:spPr>
         <p:txBody>
-          <a:bodyPr wrap="square" lIns="137160" tIns="91440" rIns="137160" bIns="91440" rtlCol="0" anchor="t">
+          <a:bodyPr wrap="square" lIns="137160" tIns="91440" rIns="137160" bIns="91440" rtlCol="0" anchor="ctr">
             <a:normAutofit/>
           </a:bodyPr>
           <a:lstStyle/>
           <a:p>
-            <a:pPr marL="0" indent="0" algn="l">
+            <a:pPr marL="0" indent="0" algn="ctr">
               <a:lnSpc>
                 <a:spcPct val="104000"/>
               </a:lnSpc>
@@ -28955,7 +28929,7 @@
             </a:r>
           </a:p>
           <a:p>
-            <a:pPr marL="0" indent="0" algn="l">
+            <a:pPr marL="0" indent="0" algn="ctr">
               <a:lnSpc>
                 <a:spcPct val="104000"/>
               </a:lnSpc>
@@ -28976,7 +28950,7 @@
             </a:r>
           </a:p>
           <a:p>
-            <a:pPr marL="0" indent="0" algn="l">
+            <a:pPr marL="0" indent="0" algn="ctr">
               <a:lnSpc>
                 <a:spcPct val="104000"/>
               </a:lnSpc>
@@ -29063,12 +29037,12 @@
           </a:ln>
         </p:spPr>
         <p:txBody>
-          <a:bodyPr wrap="square" lIns="137160" tIns="91440" rIns="137160" bIns="91440" rtlCol="0" anchor="t">
+          <a:bodyPr wrap="square" lIns="137160" tIns="91440" rIns="137160" bIns="91440" rtlCol="0" anchor="ctr">
             <a:normAutofit/>
           </a:bodyPr>
           <a:lstStyle/>
           <a:p>
-            <a:pPr marL="0" indent="0" algn="l">
+            <a:pPr marL="0" indent="0" algn="ctr">
               <a:lnSpc>
                 <a:spcPct val="104000"/>
               </a:lnSpc>
@@ -29089,7 +29063,7 @@
             </a:r>
           </a:p>
           <a:p>
-            <a:pPr marL="0" indent="0" algn="l">
+            <a:pPr marL="0" indent="0" algn="ctr">
               <a:lnSpc>
                 <a:spcPct val="104000"/>
               </a:lnSpc>
@@ -29110,7 +29084,7 @@
             </a:r>
           </a:p>
           <a:p>
-            <a:pPr marL="0" indent="0" algn="l">
+            <a:pPr marL="0" indent="0" algn="ctr">
               <a:lnSpc>
                 <a:spcPct val="104000"/>
               </a:lnSpc>
@@ -30078,12 +30052,12 @@
           </a:ln>
         </p:spPr>
         <p:txBody>
-          <a:bodyPr wrap="square" lIns="137160" tIns="91440" rIns="137160" bIns="91440" rtlCol="0" anchor="t">
+          <a:bodyPr wrap="square" lIns="137160" tIns="91440" rIns="137160" bIns="91440" rtlCol="0" anchor="ctr">
             <a:normAutofit/>
           </a:bodyPr>
           <a:lstStyle/>
           <a:p>
-            <a:pPr marL="0" indent="0" algn="l">
+            <a:pPr marL="0" indent="0" algn="ctr">
               <a:lnSpc>
                 <a:spcPct val="104000"/>
               </a:lnSpc>
@@ -30104,7 +30078,7 @@
             </a:r>
           </a:p>
           <a:p>
-            <a:pPr marL="0" indent="0" algn="l">
+            <a:pPr marL="0" indent="0" algn="ctr">
               <a:lnSpc>
                 <a:spcPct val="104000"/>
               </a:lnSpc>
@@ -30125,7 +30099,7 @@
             </a:r>
           </a:p>
           <a:p>
-            <a:pPr marL="0" indent="0" algn="l">
+            <a:pPr marL="0" indent="0" algn="ctr">
               <a:lnSpc>
                 <a:spcPct val="104000"/>
               </a:lnSpc>
@@ -30146,7 +30120,7 @@
             </a:r>
           </a:p>
           <a:p>
-            <a:pPr marL="0" indent="0" algn="l">
+            <a:pPr marL="0" indent="0" algn="ctr">
               <a:lnSpc>
                 <a:spcPct val="104000"/>
               </a:lnSpc>
@@ -30233,12 +30207,12 @@
           </a:ln>
         </p:spPr>
         <p:txBody>
-          <a:bodyPr wrap="square" lIns="137160" tIns="91440" rIns="137160" bIns="91440" rtlCol="0" anchor="t">
+          <a:bodyPr wrap="square" lIns="137160" tIns="91440" rIns="137160" bIns="91440" rtlCol="0" anchor="ctr">
             <a:normAutofit/>
           </a:bodyPr>
           <a:lstStyle/>
           <a:p>
-            <a:pPr marL="0" indent="0" algn="l">
+            <a:pPr marL="0" indent="0" algn="ctr">
               <a:lnSpc>
                 <a:spcPct val="104000"/>
               </a:lnSpc>
@@ -30259,7 +30233,7 @@
             </a:r>
           </a:p>
           <a:p>
-            <a:pPr marL="0" indent="0" algn="l">
+            <a:pPr marL="0" indent="0" algn="ctr">
               <a:lnSpc>
                 <a:spcPct val="104000"/>
               </a:lnSpc>
@@ -30280,7 +30254,7 @@
             </a:r>
           </a:p>
           <a:p>
-            <a:pPr marL="0" indent="0" algn="l">
+            <a:pPr marL="0" indent="0" algn="ctr">
               <a:lnSpc>
                 <a:spcPct val="104000"/>
               </a:lnSpc>
@@ -30301,7 +30275,7 @@
             </a:r>
           </a:p>
           <a:p>
-            <a:pPr marL="0" indent="0" algn="l">
+            <a:pPr marL="0" indent="0" algn="ctr">
               <a:lnSpc>
                 <a:spcPct val="104000"/>
               </a:lnSpc>
@@ -30680,12 +30654,12 @@
           </a:ln>
         </p:spPr>
         <p:txBody>
-          <a:bodyPr wrap="square" lIns="110000" tIns="91440" rIns="110000" bIns="91440" rtlCol="0" anchor="t">
+          <a:bodyPr wrap="square" lIns="110000" tIns="91440" rIns="110000" bIns="91440" rtlCol="0" anchor="ctr">
             <a:normAutofit/>
           </a:bodyPr>
           <a:lstStyle/>
           <a:p>
-            <a:pPr marL="0" indent="0" algn="l">
+            <a:pPr marL="0" indent="0" algn="ctr">
               <a:lnSpc>
                 <a:spcPct val="104000"/>
               </a:lnSpc>
@@ -30774,12 +30748,12 @@
           </a:ln>
         </p:spPr>
         <p:txBody>
-          <a:bodyPr wrap="square" lIns="110000" tIns="91440" rIns="110000" bIns="91440" rtlCol="0" anchor="t">
+          <a:bodyPr wrap="square" lIns="110000" tIns="91440" rIns="110000" bIns="91440" rtlCol="0" anchor="ctr">
             <a:normAutofit/>
           </a:bodyPr>
           <a:lstStyle/>
           <a:p>
-            <a:pPr marL="0" indent="0" algn="l">
+            <a:pPr marL="0" indent="0" algn="ctr">
               <a:lnSpc>
                 <a:spcPct val="104000"/>
               </a:lnSpc>
@@ -30868,12 +30842,12 @@
           </a:ln>
         </p:spPr>
         <p:txBody>
-          <a:bodyPr wrap="square" lIns="110000" tIns="91440" rIns="110000" bIns="91440" rtlCol="0" anchor="t">
+          <a:bodyPr wrap="square" lIns="110000" tIns="91440" rIns="110000" bIns="91440" rtlCol="0" anchor="ctr">
             <a:normAutofit/>
           </a:bodyPr>
           <a:lstStyle/>
           <a:p>
-            <a:pPr marL="0" indent="0" algn="l">
+            <a:pPr marL="0" indent="0" algn="ctr">
               <a:lnSpc>
                 <a:spcPct val="104000"/>
               </a:lnSpc>
@@ -30962,12 +30936,12 @@
           </a:ln>
         </p:spPr>
         <p:txBody>
-          <a:bodyPr wrap="square" lIns="110000" tIns="91440" rIns="110000" bIns="91440" rtlCol="0" anchor="t">
+          <a:bodyPr wrap="square" lIns="110000" tIns="91440" rIns="110000" bIns="91440" rtlCol="0" anchor="ctr">
             <a:normAutofit/>
           </a:bodyPr>
           <a:lstStyle/>
           <a:p>
-            <a:pPr marL="0" indent="0" algn="l">
+            <a:pPr marL="0" indent="0" algn="ctr">
               <a:lnSpc>
                 <a:spcPct val="104000"/>
               </a:lnSpc>

--- a/en/files/slides/Session_3_EN.pptx
+++ b/en/files/slides/Session_3_EN.pptx
@@ -1182,7 +1182,7 @@
           <a:p>
             <a:r>
               <a:rPr lang="en-US" sz="1400" b="0" dirty="0"/>
-              <a:t>Step 1: the cohort: who is followed (and who is left out: patients who left the ICU before day 3). Step 2: exposure measured before the outcome. Step 3: outcome counted later. Step 4: compare the groups. Hyun used propensity-score matching to make them similar (483, 373 and 392 matched pairs for days 1, 2 and 3). Day 2 result: hazard ratio (HR) 2.13 (95% confidence interval, CI, 1.48-3.06). Day 1 showed no clear difference. HR is explained properly in Session 6. For now 'about twice the rate of death'.</a:t>
+              <a:t>Step 1: the cohort: who is followed (and who is left out: patients who left the ICU before day 3). Step 2: exposure measured before the outcome. Step 3: outcome counted later. Step 4: compare the groups. Hyun used propensity-score matching to make them similar (483, 373 and 392 matched pairs for days 1, 2 and 3). Day 2 result: hazard ratio (HR) 2.13 (95% confidence interval, CI, 1.48-3.06). Day 1 showed no clear difference. Participants learned how to read a paper in Session 2 (2.3): question, design, main result. This slide applies it. The paper reports a hazard ratio (HR); on the slide we say it in plain words. Ratios come later: risk ratio and odds ratio in Session 4, HR in Session 6, with a summary slide on when each is used.</a:t>
             </a:r>
           </a:p>
           <a:p>
@@ -10167,7 +10167,7 @@
                 <a:latin typeface="Arial"/>
                 <a:cs typeface="Arial"/>
               </a:rPr>
-              <a:t>Question: is a positive fluid balance associated with death by day 28?</a:t>
+              <a:t>Read it as in Session 2. Question: is a positive fluid balance associated with death by day 28?</a:t>
             </a:r>
           </a:p>
         </p:txBody>
@@ -10543,7 +10543,7 @@
                 <a:latin typeface="Arial"/>
                 <a:cs typeface="Arial"/>
               </a:rPr>
-              <a:t>Matched pairs. Hazard ratio (HR) 2.13 for day 2</a:t>
+              <a:t>Matched pairs. On day 2, deaths about twice as frequent</a:t>
             </a:r>
           </a:p>
         </p:txBody>
@@ -14202,7 +14202,7 @@
         </p:nvSpPr>
         <p:spPr>
           <a:xfrm>
-            <a:off x="457200" y="1581816"/>
+            <a:off x="457200" y="1489211"/>
             <a:ext cx="5538800" cy="640000"/>
           </a:xfrm>
           <a:prstGeom prst="rect">
@@ -14245,8 +14245,8 @@
         </p:nvSpPr>
         <p:spPr>
           <a:xfrm>
-            <a:off x="457200" y="2221816"/>
-            <a:ext cx="5538800" cy="2304552"/>
+            <a:off x="457200" y="2129211"/>
+            <a:ext cx="5538800" cy="2582365"/>
           </a:xfrm>
           <a:prstGeom prst="rect">
             <a:avLst/>
@@ -14399,7 +14399,7 @@
         </p:nvSpPr>
         <p:spPr>
           <a:xfrm>
-            <a:off x="6196000" y="1581816"/>
+            <a:off x="6196000" y="1489211"/>
             <a:ext cx="5538800" cy="640000"/>
           </a:xfrm>
           <a:prstGeom prst="rect">
@@ -14442,8 +14442,8 @@
         </p:nvSpPr>
         <p:spPr>
           <a:xfrm>
-            <a:off x="6196000" y="2221816"/>
-            <a:ext cx="5538800" cy="2304552"/>
+            <a:off x="6196000" y="2129211"/>
+            <a:ext cx="5538800" cy="2582365"/>
           </a:xfrm>
           <a:prstGeom prst="rect">
             <a:avLst/>
@@ -14520,7 +14520,7 @@
                 <a:latin typeface="Arial"/>
                 <a:cs typeface="Arial"/>
               </a:rPr>
-              <a:t>'Associated with' (HR 2.13 on day 2)</a:t>
+              <a:t>'Associated with' (day 2: deaths about twice as frequent)</a:t>
             </a:r>
           </a:p>
           <a:p>

--- a/en/files/slides/Session_3_EN.pptx
+++ b/en/files/slides/Session_3_EN.pptx
@@ -732,43 +732,25 @@
           <a:p>
             <a:r>
               <a:rPr lang="en-US" sz="1400" b="0" dirty="0"/>
-              <a:t>Session 3 opening (19:30). Welcome to Week 3. In Sessions 1 and 2 we asked a question and found the evidence. Today we choose how a study answers a question. Next Saturday (Session 4) we judge whether we can trust the answer and how big the effect is.</a:t>
+              <a:t>Start 19:30. Point: the design decides what you may claim at the end.</a:t>
             </a:r>
           </a:p>
           <a:p>
             <a:r>
               <a:rPr lang="en-US" sz="1400" b="0" dirty="0"/>
-              <a:t>Teaching point: the design decides what you are allowed to claim at the end. A good question with the wrong design produces a weak study.</a:t>
+              <a:t>Ask: 'Who has ever collected data for a study?' Use them as examples later.</a:t>
             </a:r>
           </a:p>
           <a:p>
             <a:r>
               <a:rPr lang="en-US" sz="1400" b="0" dirty="0"/>
-              <a:t>How we work online (repeat briefly): quick answers go in the poll. For other questions the instructor calls on two or three people to answer with the microphone on. Use the 'raise hand' button to speak. Every exercise is done by the whole class together, with the instructor typing the class answer on the shared screen. There are no groups.</a:t>
+              <a:t>Clock: 19:30 recap, 19:40 3.1, 20:25 Name that design, 20:40 break, 20:55 3.2, 21:25 choose the design, 21:40 proposal builder 3, 22:25 wrap-up.</a:t>
             </a:r>
           </a:p>
           <a:p>
             <a:r>
               <a:rPr lang="en-US" sz="1400" b="0" dirty="0"/>
-              <a:t>Pace: this is a slow session on purpose. Every design is shown as a picture or a short table, then as a worked example, then checked with a quick poll.</a:t>
-            </a:r>
-          </a:p>
-          <a:p>
-            <a:r>
-              <a:rPr lang="en-US" sz="1400" b="0" dirty="0"/>
-              <a:t>Running example: our fluid question, answered twice: by a small randomised trial (Paper 1, Boulet 2024) and by a large cohort (Paper 2, Hyun 2023). Both are in the course folder, Course/Papers.</a:t>
-            </a:r>
-          </a:p>
-          <a:p>
-            <a:r>
-              <a:rPr lang="en-US" sz="1400" b="0" dirty="0"/>
-              <a:t>Ask the class (call on two or three people, microphone on): who has ever collected data for a study? Expected: a few. Use them as examples later.</a:t>
-            </a:r>
-          </a:p>
-          <a:p>
-            <a:r>
-              <a:rPr lang="en-US" sz="1400" b="0" dirty="0"/>
-              <a:t>Timing: 1 minute. Clock: 19:30 recap quiz (10), 19:40 section 3.1 (45), 20:25 Name that design (15), 20:40 break (15), 20:55 section 3.2 (30), 21:25 choose the design (15), 21:40 proposal builder 3 (45), 22:25 wrap-up (5), 22:30 end.</a:t>
+              <a:t>Timing: 1 minute.</a:t>
             </a:r>
           </a:p>
         </p:txBody>
@@ -849,31 +831,19 @@
           <a:p>
             <a:r>
               <a:rPr lang="en-US" sz="1400" b="0" dirty="0"/>
-              <a:t>Trace the arrow with the cursor from right to left. We start today with people who already have the outcome (cases) and similar people who do not (controls). Then we look back for the exposure.</a:t>
+              <a:t>Trace the arrow right to left. Good for rare outcomes. Weaknesses: recall bias, choosing controls, odds ratio only.</a:t>
             </a:r>
           </a:p>
           <a:p>
             <a:r>
               <a:rPr lang="en-US" sz="1400" b="0" dirty="0"/>
-              <a:t>Example on the picture: ICU patients who developed candidaemia (cases) versus ICU patients who did not (controls). Look back in the records for parenteral nutrition.</a:t>
+              <a:t>Case-control selects by outcome, a cohort by exposure.</a:t>
             </a:r>
           </a:p>
           <a:p>
             <a:r>
               <a:rPr lang="en-US" sz="1400" b="0" dirty="0"/>
-              <a:t>Strengths: efficient for rare outcomes or long latency, because you do not need to follow thousands of people. Weaknesses: recall bias, choosing good controls is hard, and you can only calculate an odds ratio, not risks.</a:t>
-            </a:r>
-          </a:p>
-          <a:p>
-            <a:r>
-              <a:rPr lang="en-US" sz="1400" b="0" dirty="0"/>
-              <a:t>Misconception: 'case-control is the same as a retrospective cohort because both use old records'. The difference is how people are selected: by outcome in case-control, by exposure in a cohort.</a:t>
-            </a:r>
-          </a:p>
-          <a:p>
-            <a:r>
-              <a:rPr lang="en-US" sz="1400" b="0" dirty="0"/>
-              <a:t>Ask the class (call on two or three people, microphone on): why can you not calculate the risk of candidaemia from a case-control study? Expected answer: the investigator chose how many cases and controls to include, so the proportion with the outcome is set by design, not by nature.</a:t>
+              <a:t>Ask: 'Why can you not calculate the risk of candidaemia here?' Expected: we chose how many cases and controls.</a:t>
             </a:r>
           </a:p>
           <a:p>
@@ -960,25 +930,13 @@
           <a:p>
             <a:r>
               <a:rPr lang="en-US" sz="1400" b="0" dirty="0"/>
-              <a:t>Another example (outside the fluid question). In Session 4 the class calculates the odds ratio for a case-control study on our fluid question that uses the same numbers (24 of 40 vs 16 of 80), so take your time here.</a:t>
+              <a:t>Take your time: Session 4 uses the same numbers to calculate the OR.</a:t>
             </a:r>
           </a:p>
           <a:p>
             <a:r>
               <a:rPr lang="en-US" sz="1400" b="0" dirty="0"/>
-              <a:t>Step 1: cases are people with the outcome. Step 2: controls are similar people without it, from the same source (same ICUs, same period). Choosing controls well is the hardest part. Step 3: look back for the exposure, the same way for both groups. Step 4: 60% of cases vs 20% of controls were exposed. Step 5: the result is an odds ratio (OR = 6.0, which we calculate next Saturday).</a:t>
-            </a:r>
-          </a:p>
-          <a:p>
-            <a:r>
-              <a:rPr lang="en-US" sz="1400" b="0" dirty="0"/>
-              <a:t>Misconception: 'controls should be healthy volunteers'. No. Controls must come from the population that produced the cases, otherwise the comparison is unfair.</a:t>
-            </a:r>
-          </a:p>
-          <a:p>
-            <a:r>
-              <a:rPr lang="en-US" sz="1400" b="0" dirty="0"/>
-              <a:t>Ask the class (call on two or three people, microphone on): why can we not report the risk of candidaemia from this study? Expected answer: we chose how many cases and controls to include (1:2), so the proportion with candidaemia is set by us.</a:t>
+              <a:t>Controls must come from the population that produced the cases, not healthy volunteers.</a:t>
             </a:r>
           </a:p>
           <a:p>
@@ -1065,31 +1023,13 @@
           <a:p>
             <a:r>
               <a:rPr lang="en-US" sz="1400" b="0" dirty="0"/>
-              <a:t>Arrow left to right. Group people by exposure (here: positive versus negative fluid balance in the first ICU days) and count who develops the outcome (death by day 28). This is Paper 2, Hyun 2023.</a:t>
+              <a:t>Arrow left to right. This is Paper 2. A retrospective cohort still goes from exposure to outcome.</a:t>
             </a:r>
           </a:p>
           <a:p>
             <a:r>
               <a:rPr lang="en-US" sz="1400" b="0" dirty="0"/>
-              <a:t>Prospective cohort: you start now and follow into the future. Retrospective cohort: you start in old records, but the logic is still exposure then outcome. Hyun analysed a registry whose data were collected prospectively.</a:t>
-            </a:r>
-          </a:p>
-          <a:p>
-            <a:r>
-              <a:rPr lang="en-US" sz="1400" b="0" dirty="0"/>
-              <a:t>Strengths: clear time order, can study several outcomes, gives risks and incidence. Weaknesses: slow and costly if prospective, poor for rare outcomes, and confounding, because the investigator did not choose who got more fluid.</a:t>
-            </a:r>
-          </a:p>
-          <a:p>
-            <a:r>
-              <a:rPr lang="en-US" sz="1400" b="0" dirty="0"/>
-              <a:t>Misconception: 'retrospective means poor quality'. Not necessarily. The quality depends on how well the data were recorded.</a:t>
-            </a:r>
-          </a:p>
-          <a:p>
-            <a:r>
-              <a:rPr lang="en-US" sz="1400" b="0" dirty="0"/>
-              <a:t>Ask the class (call on two or three people, microphone on): in Hyun, who decided which patients received more fluid? Expected answer: the treating clinicians, according to how sick the patient looked. Hold that thought for confounding in Session 4.</a:t>
+              <a:t>Ask: 'In Hyun, who decided which patients got more fluid?' Expected: the clinicians, by how sick the patient looked. Hold this for Session 4.</a:t>
             </a:r>
           </a:p>
           <a:p>
@@ -1176,25 +1116,7 @@
           <a:p>
             <a:r>
               <a:rPr lang="en-US" sz="1400" b="0" dirty="0"/>
-              <a:t>This is how Paper 2 (Hyun 2023, course folder Course/Papers) works. It is a good example of a cohort built from a registry whose data were collected prospectively.</a:t>
-            </a:r>
-          </a:p>
-          <a:p>
-            <a:r>
-              <a:rPr lang="en-US" sz="1400" b="0" dirty="0"/>
-              <a:t>Step 1: the cohort: who is followed (and who is left out: patients who left the ICU before day 3). Step 2: exposure measured before the outcome. Step 3: outcome counted later. Step 4: compare the groups. Hyun used propensity-score matching to make them similar (483, 373 and 392 matched pairs for days 1, 2 and 3). Day 2 result: hazard ratio (HR) 2.13 (95% confidence interval, CI, 1.48-3.06). Day 1 showed no clear difference. Participants learned how to read a paper in Session 2 (2.3): question, design, main result. This slide applies it. The paper reports a hazard ratio (HR); on the slide we say it in plain words. Ratios come later: risk ratio and odds ratio in Session 4, HR in Session 6, with a summary slide on when each is used.</a:t>
-            </a:r>
-          </a:p>
-          <a:p>
-            <a:r>
-              <a:rPr lang="en-US" sz="1400" b="0" dirty="0"/>
-              <a:t>Misconception: 'a cohort needs to start today'. A retrospective cohort uses old records but still goes exposure then outcome.</a:t>
-            </a:r>
-          </a:p>
-          <a:p>
-            <a:r>
-              <a:rPr lang="en-US" sz="1400" b="0" dirty="0"/>
-              <a:t>Ask the class (call on two or three people, microphone on): who decided which patients received more fluid? Expected: the treating clinicians, often because the patient was sicker. We come back to this in Session 4 (confounding).</a:t>
+              <a:t>Day 2 result: HR 2.13 (95% CI 1.48-3.06). Day 1: no clear difference. Say the HR in plain words. HR is taught in Session 6.</a:t>
             </a:r>
           </a:p>
           <a:p>
@@ -1281,37 +1203,25 @@
           <a:p>
             <a:r>
               <a:rPr lang="en-US" sz="1400" b="0" dirty="0"/>
-              <a:t>Paper 1, Boulet 2024: 50 adults with septic shock randomised by a central computer, 1:1, to a restrictive strategy for non-resuscitation fluids or usual care. Two patients in the usual-care group withdrew consent, so 24 + 24 were analysed.</a:t>
+              <a:t>An RCT is a cohort in which chance assigns the exposure, so groups are alike for measured and unmeasured factors.</a:t>
             </a:r>
           </a:p>
           <a:p>
             <a:r>
               <a:rPr lang="en-US" sz="1400" b="0" dirty="0"/>
-              <a:t>Teaching point: an RCT is a cohort in which the investigator assigns the exposure by chance. That is why groups are alike at the start, for factors we measured and factors we did not.</a:t>
+              <a:t>6 deaths in each group: almost nothing about mortality. The pilot was powered for fluid balance.</a:t>
             </a:r>
           </a:p>
           <a:p>
             <a:r>
               <a:rPr lang="en-US" sz="1400" b="0" dirty="0"/>
-              <a:t>Note the honest result: 6 deaths in each group by day 28. With 24 patients per arm this tells us almost nothing about mortality. The trial was a pilot powered for fluid balance.</a:t>
+              <a:t>Ask: 'Why not randomise everything?' Expected: ethics, rare or slow outcomes, cost.</a:t>
             </a:r>
           </a:p>
           <a:p>
             <a:r>
               <a:rPr lang="en-US" sz="1400" b="0" dirty="0"/>
-              <a:t>Misconception: 'RCT = truth'. A small, unblinded or badly run RCT can still mislead. Design is necessary, not sufficient.</a:t>
-            </a:r>
-          </a:p>
-          <a:p>
-            <a:r>
-              <a:rPr lang="en-US" sz="1400" b="0" dirty="0"/>
-              <a:t>Ask the class (call on two or three people, microphone on): why not randomise everything? Expected answer: some exposures cannot ethically be assigned (smoking, harm), some outcomes are rare or take years, and trials are expensive.</a:t>
-            </a:r>
-          </a:p>
-          <a:p>
-            <a:r>
-              <a:rPr lang="en-US" sz="1400" b="0" dirty="0"/>
-              <a:t>Timing: 2 minutes. After the break, 3.2 shows the other ways a trial can be laid out.</a:t>
+              <a:t>Timing: 2 minutes.</a:t>
             </a:r>
           </a:p>
         </p:txBody>
@@ -1392,25 +1302,13 @@
           <a:p>
             <a:r>
               <a:rPr lang="en-US" sz="1400" b="0" dirty="0"/>
-              <a:t>This is Paper 1 (Boulet 2024, course folder Course/Papers), a pilot randomised trial in 3 ICUs.</a:t>
+              <a:t>Clinicians knew the group. Only patients and statisticians were blinded.</a:t>
             </a:r>
           </a:p>
           <a:p>
             <a:r>
               <a:rPr lang="en-US" sz="1400" b="0" dirty="0"/>
-              <a:t>Step 1: strict eligibility criteria (we return to these in the proposal builder). Step 2: consent (in the ICU often from a surrogate), before or soon after randomisation. Step 3: randomisation by a central computer keeps the next allocation hidden (allocation concealment, Session 4). Step 4: the two strategies are delivered. Step 5: the primary outcome is the day-5 fluid balance. Death by day 28 was 6 of 24 in each group.</a:t>
-            </a:r>
-          </a:p>
-          <a:p>
-            <a:r>
-              <a:rPr lang="en-US" sz="1400" b="0" dirty="0"/>
-              <a:t>Misconception: 'randomised = blinded'. Not here. Clinicians knew the group. Only patients and statisticians were blinded.</a:t>
-            </a:r>
-          </a:p>
-          <a:p>
-            <a:r>
-              <a:rPr lang="en-US" sz="1400" b="0" dirty="0"/>
-              <a:t>Ask the class (poll): which step makes this an experiment rather than a cohort? Expected: step 3, where the investigator assigns the exposure.</a:t>
+              <a:t>Poll: 'Which step makes this an experiment?' Expected: step 3, randomisation.</a:t>
             </a:r>
           </a:p>
           <a:p>
@@ -1497,25 +1395,13 @@
           <a:p>
             <a:r>
               <a:rPr lang="en-US" sz="1400" b="0" dirty="0"/>
-              <a:t>A systematic review uses a pre-specified, reproducible search (remember PubMed and Boolean operators from Session 2) and appraises every study found. A meta-analysis then pools the results into one estimate: the diamond at the bottom of a forest plot.</a:t>
+              <a:t>Illustrative forest plot. A meta-analysis is only as good as the studies it pools.</a:t>
             </a:r>
           </a:p>
           <a:p>
             <a:r>
               <a:rPr lang="en-US" sz="1400" b="0" dirty="0"/>
-              <a:t>The forest plot here is illustrative: each square is one trial, the line its 95% confidence interval, the vertical line 'no difference'. Session 4 reads a PRISMA flow diagram and a forest plot step by step.</a:t>
-            </a:r>
-          </a:p>
-          <a:p>
-            <a:r>
-              <a:rPr lang="en-US" sz="1400" b="0" dirty="0"/>
-              <a:t>Misconception: 'a meta-analysis is always the best evidence'. It is only as good as the studies it pools: garbage in, garbage out. A review of small biased trials gives a precise wrong answer.</a:t>
-            </a:r>
-          </a:p>
-          <a:p>
-            <a:r>
-              <a:rPr lang="en-US" sz="1400" b="0" dirty="0"/>
-              <a:t>Ask the class (call on two or three people, microphone on): what is the difference between a narrative review and a systematic review? Expected answer: the systematic review has a stated, reproducible method for search and selection. A narrative review is the author's choice.</a:t>
+              <a:t>Ask: 'Narrative vs systematic review?' Expected: a systematic review has a stated, reproducible search and selection.</a:t>
             </a:r>
           </a:p>
           <a:p>
@@ -1602,25 +1488,13 @@
           <a:p>
             <a:r>
               <a:rPr lang="en-US" sz="1400" b="0" dirty="0"/>
-              <a:t>Recap from Session 1, now with the two papers placed on it. Paper 1 (Boulet) is an RCT, Paper 2 (Hyun) a cohort.</a:t>
+              <a:t>A 48-patient pilot does not overrule a careful cohort on mortality.</a:t>
             </a:r>
           </a:p>
           <a:p>
             <a:r>
               <a:rPr lang="en-US" sz="1400" b="0" dirty="0"/>
-              <a:t>Teaching point: the pyramid ranks designs by their typical protection against bias for questions about treatment effects. It does not rank questions about prevalence, prognosis or rare harms, where other designs are the right tool.</a:t>
-            </a:r>
-          </a:p>
-          <a:p>
-            <a:r>
-              <a:rPr lang="en-US" sz="1400" b="0" dirty="0"/>
-              <a:t>Misconception: 'anything on a higher level beats anything lower down'. A 48-patient pilot RCT does not overrule a careful multicentre cohort on mortality. They answer different parts of the question.</a:t>
-            </a:r>
-          </a:p>
-          <a:p>
-            <a:r>
-              <a:rPr lang="en-US" sz="1400" b="0" dirty="0"/>
-              <a:t>Ask the class (poll): which paper is higher, and does that make it more useful for our mortality question? Expected answer: Boulet is higher, but it was not designed or powered for mortality, so for mortality it adds little.</a:t>
+              <a:t>Poll: 'Which paper is higher, and is it more useful for our mortality question?' Expected: Boulet is higher, but it was not powered for mortality.</a:t>
             </a:r>
           </a:p>
           <a:p>
@@ -1707,37 +1581,19 @@
           <a:p>
             <a:r>
               <a:rPr lang="en-US" sz="1400" b="0" dirty="0"/>
-              <a:t>This is the tool for the 'Name that design' exercise at the end of 3.1. Walk it once slowly with Paper 1 (Boulet), then with Paper 2 (Hyun).</a:t>
+              <a:t>Walk the tree once with Boulet (assigned, random: RCT) and once with Hyun (not assigned, comparison, exposure first: cohort). Do not name designs from title words.</a:t>
             </a:r>
           </a:p>
           <a:p>
             <a:r>
               <a:rPr lang="en-US" sz="1400" b="0" dirty="0"/>
-              <a:t>Boulet: did the investigator assign the strategy? Yes. At random? Yes. RCT.</a:t>
+              <a:t>Poll: 'Fluid balance and kidney function of every patient on one day?' Expected: cross-sectional. 'Protocol from one date, before vs after?' Expected: non-randomised (quasi-experimental).</a:t>
             </a:r>
           </a:p>
           <a:p>
             <a:r>
               <a:rPr lang="en-US" sz="1400" b="0" dirty="0"/>
-              <a:t>Hyun: assigned? No. Comparison group? Yes (positive vs negative balance). Exposure measured first and outcome followed afterwards? Yes. Cohort.</a:t>
-            </a:r>
-          </a:p>
-          <a:p>
-            <a:r>
-              <a:rPr lang="en-US" sz="1400" b="0" dirty="0"/>
-              <a:t>Misconception: people name the design from words in the title ('prospective', 'registry', 'retrospective'). Titles can mislead, so use the three questions instead.</a:t>
-            </a:r>
-          </a:p>
-          <a:p>
-            <a:r>
-              <a:rPr lang="en-US" sz="1400" b="0" dirty="0"/>
-              <a:t>Ask the class (poll): a study compares the fluid balance and the kidney function of every ICU patient on one day. What design? Expected answer: no assignment, comparison yes, same moment = cross-sectional. And a fluid protocol introduced on one date, compared before and after? Assigned but not random: a non-randomised (quasi-experimental) study.</a:t>
-            </a:r>
-          </a:p>
-          <a:p>
-            <a:r>
-              <a:rPr lang="en-US" sz="1400" b="0" dirty="0"/>
-              <a:t>Timing: 5 minutes. The same tree is also in the Session 3 exercise sheet (PDF), Part A, so participants can keep it open during the exercise.</a:t>
+              <a:t>Timing: 5 minutes.</a:t>
             </a:r>
           </a:p>
         </p:txBody>
@@ -1818,31 +1674,19 @@
           <a:p>
             <a:r>
               <a:rPr lang="en-US" sz="1400" b="0" dirty="0"/>
-              <a:t>Do not read every line. Pick one strength and one weakness per card and link it to a picture they have just seen.</a:t>
+              <a:t>Pick one strength and one weakness per card. The RCT balances unknown confounders but trial patients are selected (Boulet excluded patients over 85).</a:t>
             </a:r>
           </a:p>
           <a:p>
             <a:r>
               <a:rPr lang="en-US" sz="1400" b="0" dirty="0"/>
-              <a:t>Teaching point: the RCT's unique strength is balancing unknown confounders. Its weakness is often generalisability: trial patients are selected (Boulet excluded patients over 85, those needing dialysis and the severely malnourished).</a:t>
+              <a:t>Ask: 'Which design for risk factors of a rare drug reaction?' Expected: case-control.</a:t>
             </a:r>
           </a:p>
           <a:p>
             <a:r>
               <a:rPr lang="en-US" sz="1400" b="0" dirty="0"/>
-              <a:t>Misconception: 'case-control studies are weak'. For a rare outcome they are often the only feasible design, and they first linked smoking with lung cancer.</a:t>
-            </a:r>
-          </a:p>
-          <a:p>
-            <a:r>
-              <a:rPr lang="en-US" sz="1400" b="0" dirty="0"/>
-              <a:t>Ask the class (call on two or three people, microphone on): which design would you choose to find risk factors for a rare drug reaction? Expected answer: case-control.</a:t>
-            </a:r>
-          </a:p>
-          <a:p>
-            <a:r>
-              <a:rPr lang="en-US" sz="1400" b="0" dirty="0"/>
-              <a:t>Timing: 2 minutes. The same table is in the Session 3 exercise sheet (PDF).</a:t>
+              <a:t>Timing: 2 minutes.</a:t>
             </a:r>
           </a:p>
         </p:txBody>
@@ -1923,37 +1767,25 @@
           <a:p>
             <a:r>
               <a:rPr lang="en-US" sz="1400" b="0" dirty="0"/>
-              <a:t>Purpose: wake up Session 2 and put each participant's own question back in front of them. Today's proposal builder chooses a design for it.</a:t>
+              <a:t>Three poll questions. Show results, then the answer.</a:t>
             </a:r>
           </a:p>
           <a:p>
             <a:r>
               <a:rPr lang="en-US" sz="1400" b="0" dirty="0"/>
-              <a:t>Run it as three poll questions (Zoom or Teams poll). Show the results, then the answer.</a:t>
+              <a:t>Answers: Q1 AND narrows, OR widens. Q2 the figures and tables. Q3 spin.</a:t>
             </a:r>
           </a:p>
           <a:p>
             <a:r>
               <a:rPr lang="en-US" sz="1400" b="0" dirty="0"/>
-              <a:t>Answers. Q1: AND with another concept narrows the search. OR widens it. Q2: the figures and tables (reading order: title, abstract, figures and tables, then methods). Q3: spin (describing a non-significant result as if it were a benefit).</a:t>
+              <a:t>After Q3 ask for a rewrite. Expected: 'mortality did not differ clearly between groups (p = 0.42)'.</a:t>
             </a:r>
           </a:p>
           <a:p>
             <a:r>
               <a:rPr lang="en-US" sz="1400" b="0" dirty="0"/>
-              <a:t>Misconception to catch: 'p = 0.42 is nearly significant'. It is not. The honest phrase is 'no clear difference'.</a:t>
-            </a:r>
-          </a:p>
-          <a:p>
-            <a:r>
-              <a:rPr lang="en-US" sz="1400" b="0" dirty="0"/>
-              <a:t>Ask the class after Q3 (call on two or three people, microphone on): how should the sentence be rewritten? Expected answer: 'mortality did not differ clearly between groups (p = 0.42)'.</a:t>
-            </a:r>
-          </a:p>
-          <a:p>
-            <a:r>
-              <a:rPr lang="en-US" sz="1400" b="0" dirty="0"/>
-              <a:t>Timing: 9 minutes (about 6 for the questions, 3 for re-reading). Together with the opening slide this is the 10-minute recap.</a:t>
+              <a:t>Timing: 9 minutes.</a:t>
             </a:r>
           </a:p>
         </p:txBody>
@@ -2034,37 +1866,19 @@
           <a:p>
             <a:r>
               <a:rPr lang="en-US" sz="1400" b="0" dirty="0"/>
-              <a:t>Back to the running example to close 3.1.</a:t>
+              <a:t>Adjusting or matching reduces measured confounding only.</a:t>
             </a:r>
           </a:p>
           <a:p>
             <a:r>
               <a:rPr lang="en-US" sz="1400" b="0" dirty="0"/>
-              <a:t>Boulet (RCT): because chance made the groups comparable, any difference in fluid balance can be attributed to the strategy. But with 48 patients and 6 deaths in each arm, it cannot tell us anything firm about mortality. Clinicians knew the allocation, which could influence how much fluid they gave.</a:t>
+              <a:t>Ask for one honest conclusion per paper. Expected: Boulet 'did not clearly reduce day-5 fluid balance'. Hyun 'a positive balance on days 2-3 was associated with higher mortality'.</a:t>
             </a:r>
           </a:p>
           <a:p>
             <a:r>
               <a:rPr lang="en-US" sz="1400" b="0" dirty="0"/>
-              <a:t>Hyun (cohort): thousands of patients and the outcome we care about. A positive balance on days 2-3 was associated with higher 28-day mortality (hazard ratio, HR, 2.13 for day 2 and 1.56 for day 3, no clear difference on day 1). But it cannot prove that the fluid caused the deaths, because sicker patients receive more fluid.</a:t>
-            </a:r>
-          </a:p>
-          <a:p>
-            <a:r>
-              <a:rPr lang="en-US" sz="1400" b="0" dirty="0"/>
-              <a:t>Misconception: 'adjusted' or 'propensity-matched' turns an association into a cause. It reduces measured confounding only.</a:t>
-            </a:r>
-          </a:p>
-          <a:p>
-            <a:r>
-              <a:rPr lang="en-US" sz="1400" b="0" dirty="0"/>
-              <a:t>Ask the class (call on two or three people, microphone on): write one honest sentence for each paper's conclusion. Expected answer: for Boulet, 'the strategy did not clearly reduce day-5 fluid balance'. For Hyun, 'a positive balance on days 2-3 was associated with higher mortality'.</a:t>
-            </a:r>
-          </a:p>
-          <a:p>
-            <a:r>
-              <a:rPr lang="en-US" sz="1400" b="0" dirty="0"/>
-              <a:t>Timing: 4 minutes. Then a 3-minute poll, then the exercise.</a:t>
+              <a:t>Timing: 4 minutes.</a:t>
             </a:r>
           </a:p>
         </p:txBody>
@@ -2145,25 +1959,13 @@
           <a:p>
             <a:r>
               <a:rPr lang="en-US" sz="1400" b="0" dirty="0"/>
-              <a:t>Run it as a three-question poll (right or wrong for each sentence). Show the results after each.</a:t>
+              <a:t>Three-question poll. Answers: A right. B wrong, a cohort says 'associated with'. C right.</a:t>
             </a:r>
           </a:p>
           <a:p>
             <a:r>
               <a:rPr lang="en-US" sz="1400" b="0" dirty="0"/>
-              <a:t>Answers. A: right. A randomised trial may make causal statements, and this one honestly reports a null result. B: wrong. A cohort can say 'associated with', not 'causes' (Hyun's own abstract correctly says 'associated'). C: right. 'Associated' is the right word for a cross-sectional survey. It cannot show which came first.</a:t>
-            </a:r>
-          </a:p>
-          <a:p>
-            <a:r>
-              <a:rPr lang="en-US" sz="1400" b="0" dirty="0"/>
-              <a:t>Teaching point: this is question 8 of the 10-question appraisal checklist used in Session 8 (Course/Resources/Critical_Appraisal_Checklist.pdf): do the words match the design?</a:t>
-            </a:r>
-          </a:p>
-          <a:p>
-            <a:r>
-              <a:rPr lang="en-US" sz="1400" b="0" dirty="0"/>
-              <a:t>Timing: 3 minutes. This closes the 45 minutes of 3.1.</a:t>
+              <a:t>Timing: 3 minutes. 3.1 ends here.</a:t>
             </a:r>
           </a:p>
         </p:txBody>
@@ -2244,37 +2046,19 @@
           <a:p>
             <a:r>
               <a:rPr lang="en-US" sz="1400" b="0" dirty="0"/>
-              <a:t>Whole-class exercise, about 2.5 minutes per abstract. Sheet: Course/Practicals/s3_exercises.md, Part A (sent as a PDF before the session). Answer key: Course/Solutions/s3_solutions.md, Part A.</a:t>
+              <a:t>About 2.5 minutes per abstract: read it, poll, ask one person for the phrase that proves it, type it on screen.</a:t>
             </a:r>
           </a:p>
           <a:p>
             <a:r>
               <a:rPr lang="en-US" sz="1400" b="0" dirty="0"/>
-              <a:t>Run it: show abstract 1 on the shared screen and read it aloud. Open a poll with the design choices (cross-sectional, case-control, cohort, non-randomised study, RCT, systematic review). Show the results. Ask one volunteer (raise hand, microphone on) for the phrase that proves it, and type it next to the abstract on the shared screen. Then the next abstract.</a:t>
+              <a:t>Abstracts 3 and 4 are the hardest. If someone says 'old records, so case-control', ask: selected by outcome or by exposure?</a:t>
             </a:r>
           </a:p>
           <a:p>
             <a:r>
               <a:rPr lang="en-US" sz="1400" b="0" dirty="0"/>
-              <a:t>Abstracts 3 (case-control, looks back from dialysis) and 4 (retrospective cohort that sounds like a case-control) are usually the hardest. Spend the extra time there.</a:t>
-            </a:r>
-          </a:p>
-          <a:p>
-            <a:r>
-              <a:rPr lang="en-US" sz="1400" b="0" dirty="0"/>
-              <a:t>Teaching point: the evidence phrase matters more than the label: 'randomly allocated', 'compared with patients who did not', 'divided them by', 'on one day'.</a:t>
-            </a:r>
-          </a:p>
-          <a:p>
-            <a:r>
-              <a:rPr lang="en-US" sz="1400" b="0" dirty="0"/>
-              <a:t>Misconception to listen for: 'it used old records so it is case-control'. Ask: were people selected by outcome or by exposure?</a:t>
-            </a:r>
-          </a:p>
-          <a:p>
-            <a:r>
-              <a:rPr lang="en-US" sz="1400" b="0" dirty="0"/>
-              <a:t>If the class is quick: the sheet has nine more abstracts on other topics for self-study (Part A, extra practice). Announce the break at the end of this slide.</a:t>
+              <a:t>Key: s3_solutions, Part A. Announce the break at the end.</a:t>
             </a:r>
           </a:p>
         </p:txBody>
@@ -2355,19 +2139,7 @@
           <a:p>
             <a:r>
               <a:rPr lang="en-US" sz="1400" b="0" dirty="0"/>
-              <a:t>The slide is only a picture on purpose. Before the break, say: stand up, stretch, drink some water. Optional thought: which design might fit your own question? We restart with more study designs.</a:t>
-            </a:r>
-          </a:p>
-          <a:p>
-            <a:r>
-              <a:rPr lang="en-US" sz="1400" b="0" dirty="0"/>
-              <a:t>15-minute break (20:40-20:55). Put a countdown timer on the shared screen and leave the session open.</a:t>
-            </a:r>
-          </a:p>
-          <a:p>
-            <a:r>
-              <a:rPr lang="en-US" sz="1400" b="0" dirty="0"/>
-              <a:t>Restart on time: start the next slide even if a few people have not yet turned their cameras back on.</a:t>
+              <a:t>Break 20:40-20:55. Put a countdown timer on screen. Restart on time.</a:t>
             </a:r>
           </a:p>
         </p:txBody>
@@ -2448,13 +2220,7 @@
           <a:p>
             <a:r>
               <a:rPr lang="en-US" sz="1400" b="0" dirty="0"/>
-              <a:t>Section marker for 3.2 (30 minutes).</a:t>
-            </a:r>
-          </a:p>
-          <a:p>
-            <a:r>
-              <a:rPr lang="en-US" sz="1400" b="0" dirty="0"/>
-              <a:t>Why this matters: most projects in a hospital department are not classic two-arm trials. They are unit-level changes, quality-improvement projects, pilots or interviews. Knowing these designs lets participants choose something feasible for their own proposal.</a:t>
+              <a:t>3.2 runs 30 minutes. Most hospital projects are unit-level changes, QI, pilots or interviews.</a:t>
             </a:r>
           </a:p>
           <a:p>
@@ -2541,37 +2307,13 @@
           <a:p>
             <a:r>
               <a:rPr lang="en-US" sz="1400" b="0" dirty="0"/>
-              <a:t>Most trials are parallel: each patient gets one treatment (Boulet). Three variants solve particular problems.</a:t>
+              <a:t>Crossover only for stable chronic conditions, never septic shock. A cluster trial is a proper RCT, analysed for clustering.</a:t>
             </a:r>
           </a:p>
           <a:p>
             <a:r>
               <a:rPr lang="en-US" sz="1400" b="0" dirty="0"/>
-              <a:t>Crossover: each patient receives both treatments in random order, with a washout in between, and acts as their own control, so fewer patients are needed. Only for stable, chronic conditions where the effect wears off (e.g. inhalers in chronic obstructive pulmonary disease). Useless in septic shock: the patient is not the same on day 7.</a:t>
-            </a:r>
-          </a:p>
-          <a:p>
-            <a:r>
-              <a:rPr lang="en-US" sz="1400" b="0" dirty="0"/>
-              <a:t>Cluster: whole wards, ICUs or hospitals are randomised, not individual patients. Use it when the intervention works at unit level (a hand-hygiene programme, a sepsis bundle, a nurse-led fluid charting protocol) or when patients in the same unit would 'contaminate' each other. Needs more patients, because patients in one cluster resemble each other.</a:t>
-            </a:r>
-          </a:p>
-          <a:p>
-            <a:r>
-              <a:rPr lang="en-US" sz="1400" b="0" dirty="0"/>
-              <a:t>Factorial: two questions in one trial. Patients are randomised twice (e.g. fluid strategy and vitamin C), giving four groups. Efficient if the two treatments do not interact.</a:t>
-            </a:r>
-          </a:p>
-          <a:p>
-            <a:r>
-              <a:rPr lang="en-US" sz="1400" b="0" dirty="0"/>
-              <a:t>Misconception: 'a cluster trial is a weaker trial'. It is a proper RCT. The analysis must account for clustering.</a:t>
-            </a:r>
-          </a:p>
-          <a:p>
-            <a:r>
-              <a:rPr lang="en-US" sz="1400" b="0" dirty="0"/>
-              <a:t>Ask the class (poll): you want to test a new fluid-balance charting protocol run by ICU nurses. Which layout? Expected answer: cluster. Randomise ICUs, not patients.</a:t>
+              <a:t>Poll: 'A nurse-led fluid-charting protocol: which layout?' Expected: cluster, randomise ICUs.</a:t>
             </a:r>
           </a:p>
           <a:p>
@@ -2658,31 +2400,19 @@
           <a:p>
             <a:r>
               <a:rPr lang="en-US" sz="1400" b="0" dirty="0"/>
-              <a:t>A superiority trial asks: is the new treatment better? A non-inferiority trial asks: is it not unacceptably worse (usually because it is cheaper, safer, simpler or uses less fluid).</a:t>
+              <a:t>The margin is fixed in the protocol before the data. A superior, B non-inferior, C inconclusive, D inferior.</a:t>
             </a:r>
           </a:p>
           <a:p>
             <a:r>
               <a:rPr lang="en-US" sz="1400" b="0" dirty="0"/>
-              <a:t>The margin (here +5 percentage points of mortality, hypothetical) is the largest loss we would accept. It is fixed in the protocol, before the data, with clinical reasoning.</a:t>
+              <a:t>Boulet's p = 0.42 does not show restriction is as good as usual care.</a:t>
             </a:r>
           </a:p>
           <a:p>
             <a:r>
               <a:rPr lang="en-US" sz="1400" b="0" dirty="0"/>
-              <a:t>Read the bars (difference and 95% confidence interval, CI). A: the whole CI is below 0, so superior. B: the CI crosses 0 but stays below the margin, so non-inferior. C: the CI crosses the margin, so inconclusive. D: the whole CI is above the margin, so inferior.</a:t>
-            </a:r>
-          </a:p>
-          <a:p>
-            <a:r>
-              <a:rPr lang="en-US" sz="1400" b="0" dirty="0"/>
-              <a:t>Misconception: 'p &gt; 0.05 in a superiority trial shows the treatments are equivalent'. No. Absence of evidence is not evidence of absence. Boulet's p = 0.42 does not show that restriction is as good as usual care.</a:t>
-            </a:r>
-          </a:p>
-          <a:p>
-            <a:r>
-              <a:rPr lang="en-US" sz="1400" b="0" dirty="0"/>
-              <a:t>Ask the class (poll): who should decide the margin: the statistician or the clinicians? Expected answer: clinicians (and patients), with the statistician. It is a clinical judgement.</a:t>
+              <a:t>Poll: 'Who decides the margin?' Expected: clinicians and patients, with the statistician.</a:t>
             </a:r>
           </a:p>
           <a:p>
@@ -2769,31 +2499,13 @@
           <a:p>
             <a:r>
               <a:rPr lang="en-US" sz="1400" b="0" dirty="0"/>
-              <a:t>Boulet 2024 calls itself a pilot. Its real value is in the numbers on the left: 1,201 patients screened for 50 randomised (about 4%), roughly 3 patients per month across 3 ICUs, 48 of 50 analysed.</a:t>
+              <a:t>Boulet: 1,201 screened, 50 randomised, about 3 patients per month. A pilot tests feasibility, not effectiveness, and is planned as a pilot from the start.</a:t>
             </a:r>
           </a:p>
           <a:p>
             <a:r>
               <a:rPr lang="en-US" sz="1400" b="0" dirty="0"/>
-              <a:t>A pilot or feasibility study tests the machinery of the big trial: recruitment, consent, whether staff can deliver the intervention, whether outcomes can be measured completely, and the numbers needed to calculate the sample size.</a:t>
-            </a:r>
-          </a:p>
-          <a:p>
-            <a:r>
-              <a:rPr lang="en-US" sz="1400" b="0" dirty="0"/>
-              <a:t>Teaching point: a pilot should not be used to claim effectiveness. Its success criteria are about feasibility (e.g. 'recruit 2 patients per site per month', 'over 90% data completeness').</a:t>
-            </a:r>
-          </a:p>
-          <a:p>
-            <a:r>
-              <a:rPr lang="en-US" sz="1400" b="0" dirty="0"/>
-              <a:t>Misconception: 'our small study did not find an effect, so we call it a pilot'. A pilot is planned as a pilot from the start, with feasibility objectives.</a:t>
-            </a:r>
-          </a:p>
-          <a:p>
-            <a:r>
-              <a:rPr lang="en-US" sz="1400" b="0" dirty="0"/>
-              <a:t>Ask the class (poll): from these numbers, would you launch a 1,000-patient trial in the same 3 ICUs? Expected answer: not as designed. At 3 patients per month it would take decades. You need many more sites or broader eligibility.</a:t>
+              <a:t>Poll: 'Would you launch a 1,000-patient trial in the same 3 ICUs?' Expected: not as designed. It would take decades.</a:t>
             </a:r>
           </a:p>
           <a:p>
@@ -2880,37 +2592,13 @@
           <a:p>
             <a:r>
               <a:rPr lang="en-US" sz="1400" b="0" dirty="0"/>
-              <a:t>Most quality-improvement (QI) projects introduce a change for everyone at once, with no randomisation and no parallel control. These are quasi-experimental designs.</a:t>
+              <a:t>Before-after is weak: rates often fall anyway. ITS compares the post-change data with the earlier trend (level and slope).</a:t>
             </a:r>
           </a:p>
           <a:p>
             <a:r>
               <a:rPr lang="en-US" sz="1400" b="0" dirty="0"/>
-              <a:t>The simple before-after study compares the average before with the average after. Weak: rates often fall anyway (seasons, new staff, other projects, regression to the mean after a bad month).</a:t>
-            </a:r>
-          </a:p>
-          <a:p>
-            <a:r>
-              <a:rPr lang="en-US" sz="1400" b="0" dirty="0"/>
-              <a:t>The interrupted time series (ITS) is much stronger: many measurements before and after (here 24 monthly points each). We compare what happened with what the pre-change trend predicted (dashed line). We look for a change in level (the drop) and in slope (steeper fall).</a:t>
-            </a:r>
-          </a:p>
-          <a:p>
-            <a:r>
-              <a:rPr lang="en-US" sz="1400" b="0" dirty="0"/>
-              <a:t>Teaching point: ITS is the standard design for evaluating a bundle, a protocol or a policy in one hospital. Add a control series (a unit that did not change) to make it stronger.</a:t>
-            </a:r>
-          </a:p>
-          <a:p>
-            <a:r>
-              <a:rPr lang="en-US" sz="1400" b="0" dirty="0"/>
-              <a:t>Misconception: 'the infection rate fell after our bundle, so the bundle worked'. Only if the fall is bigger than the existing trend.</a:t>
-            </a:r>
-          </a:p>
-          <a:p>
-            <a:r>
-              <a:rPr lang="en-US" sz="1400" b="0" dirty="0"/>
-              <a:t>Ask the class (call on two or three people, microphone on): what else changed in your hospital in the same month as your last QI project? Expected answer: usually something (staff rotation, a new policy, an audit), which is exactly why a trend matters.</a:t>
+              <a:t>Ask: 'What else changed in your hospital in the month of your last QI project?' Expected: usually something.</a:t>
             </a:r>
           </a:p>
           <a:p>
@@ -2997,37 +2685,13 @@
           <a:p>
             <a:r>
               <a:rPr lang="en-US" sz="1400" b="0" dirty="0"/>
-              <a:t>Some questions are not about how many or how much but about why, how and what it is like. Why do nurses not chart urine output at night? How do families experience surrogate consent in the ICU? Numbers cannot answer these.</a:t>
+              <a:t>Sampling is purposive, until no new themes appear. Reporting: COREQ or SRQR.</a:t>
             </a:r>
           </a:p>
           <a:p>
             <a:r>
               <a:rPr lang="en-US" sz="1400" b="0" dirty="0"/>
-              <a:t>Three main methods: in-depth interviews (one person, open questions), focus groups (6-8 people, discussion reveals shared views and disagreements), and observation (what people actually do, which may differ from what they say).</a:t>
-            </a:r>
-          </a:p>
-          <a:p>
-            <a:r>
-              <a:rPr lang="en-US" sz="1400" b="0" dirty="0"/>
-              <a:t>Sampling is purposive (choose people who know the topic) and continues until no new themes emerge (saturation). Analysis looks for themes in transcripts. Reporting guidelines: COREQ (Consolidated criteria for Reporting Qualitative research) or SRQR (Standards for Reporting Qualitative Research).</a:t>
-            </a:r>
-          </a:p>
-          <a:p>
-            <a:r>
-              <a:rPr lang="en-US" sz="1400" b="0" dirty="0"/>
-              <a:t>Mixed methods combine both: a trial plus interviews to understand why an intervention was or was not delivered.</a:t>
-            </a:r>
-          </a:p>
-          <a:p>
-            <a:r>
-              <a:rPr lang="en-US" sz="1400" b="0" dirty="0"/>
-              <a:t>Misconception: 'qualitative means anecdotal'. Done properly it is systematic, transparent and peer-reviewed.</a:t>
-            </a:r>
-          </a:p>
-          <a:p>
-            <a:r>
-              <a:rPr lang="en-US" sz="1400" b="0" dirty="0"/>
-              <a:t>Ask the class (call on two or three people, microphone on): one question about fluid management in your unit that only interviews could answer. Expected answer: why fluid charts are incomplete, why doctors hesitate to stop maintenance fluids.</a:t>
+              <a:t>Ask: 'One fluid question only interviews could answer?' Expected: why fluid charts are incomplete, why doctors hesitate to stop maintenance fluids.</a:t>
             </a:r>
           </a:p>
           <a:p>
@@ -3114,31 +2778,13 @@
           <a:p>
             <a:r>
               <a:rPr lang="en-US" sz="1400" b="0" dirty="0"/>
-              <a:t>Section 3.1 starts here (45 minutes in all, this slide to the 'caused or associated' poll).</a:t>
+              <a:t>3.1 starts here (45 minutes). Read the four headings only.</a:t>
             </a:r>
           </a:p>
           <a:p>
             <a:r>
               <a:rPr lang="en-US" sz="1400" b="0" dirty="0"/>
-              <a:t>Read the four headings only. The details come slide by slide. These words are also listed at the top of the Session 3 exercise sheet (PDF sent before the session).</a:t>
-            </a:r>
-          </a:p>
-          <a:p>
-            <a:r>
-              <a:rPr lang="en-US" sz="1400" b="0" dirty="0"/>
-              <a:t>Teaching point: almost every design question becomes easy once people can name the exposure and the outcome. We practise that first.</a:t>
-            </a:r>
-          </a:p>
-          <a:p>
-            <a:r>
-              <a:rPr lang="en-US" sz="1400" b="0" dirty="0"/>
-              <a:t>Misconception: 'design names must be memorised'. No. They can be worked out from the two questions on the key message.</a:t>
-            </a:r>
-          </a:p>
-          <a:p>
-            <a:r>
-              <a:rPr lang="en-US" sz="1400" b="0" dirty="0"/>
-              <a:t>Ask the class (call on two or three people, microphone on): in our fluid question, what is the exposure and what is the outcome? Expected answer: exposure = restrictive fluid strategy (vs usual care). Outcome = death by day 28.</a:t>
+              <a:t>Ask: 'In our fluid question, what is the exposure and what is the outcome?' Expected: restrictive fluids (vs usual care), death by day 28.</a:t>
             </a:r>
           </a:p>
           <a:p>
@@ -3225,37 +2871,19 @@
           <a:p>
             <a:r>
               <a:rPr lang="en-US" sz="1400" b="0" dirty="0"/>
-              <a:t>This is the practical summary of both sections of today. Read each row as: if your question sounds like this, start with this design.</a:t>
+              <a:t>In the proposal builder everyone justifies their design this way: 'my question is about X, so the best feasible design is Y'. A retrospective cohort with honest limits is acceptable.</a:t>
             </a:r>
           </a:p>
           <a:p>
             <a:r>
               <a:rPr lang="en-US" sz="1400" b="0" dirty="0"/>
-              <a:t>Teaching point: in the proposal builder later today every participant will justify the design of their own question with exactly this logic: 'my question is about X, so the best feasible design is Y'.</a:t>
+              <a:t>Poll: 'How many ICU patients have a positive fluid balance today?' Expected: cross-sectional.</a:t>
             </a:r>
           </a:p>
           <a:p>
             <a:r>
               <a:rPr lang="en-US" sz="1400" b="0" dirty="0"/>
-              <a:t>Note the word feasible: the ideal design for 'does restriction save lives?' is a large RCT, but a participant with one ICU and no funding may honestly choose a retrospective cohort and state its limits.</a:t>
-            </a:r>
-          </a:p>
-          <a:p>
-            <a:r>
-              <a:rPr lang="en-US" sz="1400" b="0" dirty="0"/>
-              <a:t>Misconception: 'we must do an RCT to be taken seriously'. A well-done, honestly reported cohort is publishable and useful.</a:t>
-            </a:r>
-          </a:p>
-          <a:p>
-            <a:r>
-              <a:rPr lang="en-US" sz="1400" b="0" dirty="0"/>
-              <a:t>Ask the class (poll): we want to know how many ICU patients have a positive fluid balance today. Which design? Expected answer: cross-sectional (point prevalence).</a:t>
-            </a:r>
-          </a:p>
-          <a:p>
-            <a:r>
-              <a:rPr lang="en-US" sz="1400" b="0" dirty="0"/>
-              <a:t>Timing: 5.5 minutes. This closes the 30 minutes of 3.2.</a:t>
+              <a:t>Timing: 5.5 minutes. 3.2 ends here.</a:t>
             </a:r>
           </a:p>
         </p:txBody>
@@ -3336,37 +2964,31 @@
           <a:p>
             <a:r>
               <a:rPr lang="en-US" sz="1400" b="0" dirty="0"/>
-              <a:t>Whole-class exercise. Sheet: Session 3 exercise sheet (Course/Practicals/s3_exercises.md, PDF sent before the session), Part B. Key: Course/Solutions/s3_solutions.md, Part B.</a:t>
+              <a:t>About 2 minutes per question, then 5 minutes on people's own questions.</a:t>
             </a:r>
           </a:p>
           <a:p>
             <a:r>
               <a:rPr lang="en-US" sz="1400" b="0" dirty="0"/>
-              <a:t>Run it: about 2 minutes per question (10 minutes), then 5 minutes for the participants' own questions.</a:t>
+              <a:t>Answers: 1 non-inferiority RCT. 2 cluster RCT. 3 interrupted time series. 4 qualitative interviews or focus groups. 5 pilot or feasibility study.</a:t>
             </a:r>
           </a:p>
           <a:p>
             <a:r>
               <a:rPr lang="en-US" sz="1400" b="0" dirty="0"/>
-              <a:t>Answers for the five questions: 1 a cheaper strategy that only needs to be not worse for 28-day mortality (non-inferiority RCT, margin fixed in advance), 2 a nurse-led fluid-balance charting protocol for whole ICUs (cluster randomised trial), 3 a sepsis bundle with a fluid limit already introduced in 2023, with monthly data (interrupted time series), 4 why night nurses find it hard to record urine output (qualitative interviews or focus groups), 5 can our two ICUs recruit patients and deliver restrictive fluids before a large trial (pilot or feasibility study).</a:t>
+              <a:t>Then call on 4 or 5 people: 'my design is ..., so I may say caused / associated'.</a:t>
             </a:r>
           </a:p>
           <a:p>
             <a:r>
               <a:rPr lang="en-US" sz="1400" b="0" dirty="0"/>
-              <a:t>Own questions: call on four or five people to say 'my design is ..., so I may say caused / associated' with the microphone on, and comment briefly. This is the bridge to the proposal builder.</a:t>
+              <a:t>Watch for: an RCT for a harm or prognosis question. Ask: could you ethically assign this?</a:t>
             </a:r>
           </a:p>
           <a:p>
             <a:r>
               <a:rPr lang="en-US" sz="1400" b="0" dirty="0"/>
-              <a:t>Common problem: choosing an RCT for a harm or prognosis question. Ask: could you ethically assign this exposure?</a:t>
-            </a:r>
-          </a:p>
-          <a:p>
-            <a:r>
-              <a:rPr lang="en-US" sz="1400" b="0" dirty="0"/>
-              <a:t>If the class is quick: Part B of the sheet also has four questions on other topics for self-study.</a:t>
+              <a:t>Key: s3_solutions, Part B.</a:t>
             </a:r>
           </a:p>
         </p:txBody>
@@ -3447,43 +3069,25 @@
           <a:p>
             <a:r>
               <a:rPr lang="en-US" sz="1400" b="0" dirty="0"/>
-              <a:t>Proposal builder 3 starts here (45 minutes in all, the figure shown on the builder banner and in the agenda: this slide 3 minutes, then 42 minutes of builder work).</a:t>
+              <a:t>Proposal builder 3 starts here (3 minutes on this slide, then 42 minutes).</a:t>
             </a:r>
           </a:p>
           <a:p>
             <a:r>
               <a:rPr lang="en-US" sz="1400" b="0" dirty="0"/>
-              <a:t>This slide prepares the proposal builder: everyone writes the study population of their own proposal today.</a:t>
+              <a:t>Boulet included ages 18-85 within 24 h of vasopressors, and excluded dialysis within 24 h, end-stage kidney disease and BMI below 18.</a:t>
             </a:r>
           </a:p>
           <a:p>
             <a:r>
               <a:rPr lang="en-US" sz="1400" b="0" dirty="0"/>
-              <a:t>Walk down the funnel with the ICU example (an observational version of our fluid question). Source population: everyone who could be studied. Inclusion criteria: the P (Population) of the PICO, made measurable (age 18 or over, septic shock, vasopressor started within 24 h). Exclusion criteria: people who meet the inclusion criteria but must be removed for a reason, such as safety or an outcome that cannot be measured (chronic dialysis, comfort care only).</a:t>
+              <a:t>'Age under 18' is not an exclusion, it is simply not included.</a:t>
             </a:r>
           </a:p>
           <a:p>
             <a:r>
               <a:rPr lang="en-US" sz="1400" b="0" dirty="0"/>
-              <a:t>Compare with Paper 1 (Boulet): included septic shock, age 18-85, within 24 h of vasopressor start. Excluded acute kidney injury needing renal replacement therapy within 24 h, end-stage kidney disease, severe malnutrition (body mass index below 18).</a:t>
-            </a:r>
-          </a:p>
-          <a:p>
-            <a:r>
-              <a:rPr lang="en-US" sz="1400" b="0" dirty="0"/>
-              <a:t>Misconception: writing exclusions as the opposite of inclusions ('age under 18' is not an exclusion, it is simply not included).</a:t>
-            </a:r>
-          </a:p>
-          <a:p>
-            <a:r>
-              <a:rPr lang="en-US" sz="1400" b="0" dirty="0"/>
-              <a:t>Teaching point: every extra exclusion makes the study cleaner but the result applies to fewer patients (external validity, Session 4).</a:t>
-            </a:r>
-          </a:p>
-          <a:p>
-            <a:r>
-              <a:rPr lang="en-US" sz="1400" b="0" dirty="0"/>
-              <a:t>Ask the class (call on two or three people, microphone on): give one good exclusion criterion for our fluid study. Expected: chronic dialysis (the fluid balance cannot be interpreted), comfort care only.</a:t>
+              <a:t>Ask: 'One good exclusion for our fluid study?' Expected: chronic dialysis, comfort care only.</a:t>
             </a:r>
           </a:p>
           <a:p>
@@ -3570,37 +3174,25 @@
           <a:p>
             <a:r>
               <a:rPr lang="en-US" sz="1400" b="0" dirty="0"/>
-              <a:t>Worksheet: Session 3 exercise sheet (PDF), Part C, and the proposal template (Course/Templates/Research_Proposal_Template.docx, Part 2). Everyone writes their own proposal. There are no groups.</a:t>
+              <a:t>15 minutes: fill in Part 2a for the running example on screen, thinking aloud. 20 minutes: everyone drafts alone. 7 minutes: three volunteers read their design and justification.</a:t>
             </a:r>
           </a:p>
           <a:p>
             <a:r>
               <a:rPr lang="en-US" sz="1400" b="0" dirty="0"/>
-              <a:t>Rhythm (42 minutes): 15 minutes in which the instructor fills in Part 2a for the running example on the shared screen, thinking aloud, 20 minutes in which participants draft their own Part 2a quietly (cameras optional, the instructor stays online for questions in the chat), 7 minutes in which three volunteers read their design and justification sentence aloud and the instructor comments.</a:t>
+              <a:t>Model: retrospective cohort, one adult ICU, 3 years. An RCT is not feasible without funding, so we say 'associated with'. Full model in s3_solutions, Part C.</a:t>
             </a:r>
           </a:p>
           <a:p>
             <a:r>
               <a:rPr lang="en-US" sz="1400" b="0" dirty="0"/>
-              <a:t>Model answer for the running example (observational version), to write live: retrospective cohort of adults with septic shock in our ICU over 3 years. Justification: an RCT is ideal but not feasible for one ICU without funding. Existing charts record fluid in and out and outcomes. We will say 'associated with'. Setting: one adult mixed ICU, 3 calendar years, electronic chart and ICU register. Inclusion and exclusion as on the funnel slide. Full model in Course/Solutions/s3_solutions.md, Part C.</a:t>
+              <a:t>Watch for: an RCT for an exposure that cannot be assigned, a setting far too large, exclusions that repeat the inclusions.</a:t>
             </a:r>
           </a:p>
           <a:p>
             <a:r>
               <a:rPr lang="en-US" sz="1400" b="0" dirty="0"/>
-              <a:t>Common problems: an RCT chosen for an exposure that cannot be assigned. A setting that is far too large. Exclusions that repeat the inclusions in the negative.</a:t>
-            </a:r>
-          </a:p>
-          <a:p>
-            <a:r>
-              <a:rPr lang="en-US" sz="1400" b="0" dirty="0"/>
-              <a:t>The rest of Part 2 (exposure, comparator, outcomes, biases) is built in Session 4.</a:t>
-            </a:r>
-          </a:p>
-          <a:p>
-            <a:r>
-              <a:rPr lang="en-US" sz="1400" b="0" dirty="0"/>
-              <a:t>Timing: warn at 10 minutes and 2 minutes before the end of the individual slot.</a:t>
+              <a:t>Warn at 10 and 2 minutes before the end.</a:t>
             </a:r>
           </a:p>
         </p:txBody>
@@ -3681,19 +3273,13 @@
           <a:p>
             <a:r>
               <a:rPr lang="en-US" sz="1400" b="0" dirty="0"/>
-              <a:t>Session recap (22:25). Ask three volunteers (raise hand) to explain one card each in their own words.</a:t>
+              <a:t>Ask three volunteers to explain one card each. If time is short, read the key message only.</a:t>
             </a:r>
           </a:p>
           <a:p>
             <a:r>
               <a:rPr lang="en-US" sz="1400" b="0" dirty="0"/>
-              <a:t>If time is short, read the key message only.</a:t>
-            </a:r>
-          </a:p>
-          <a:p>
-            <a:r>
-              <a:rPr lang="en-US" sz="1400" b="0" dirty="0"/>
-              <a:t>Timing: 2 minutes. With the wrap-up slide (3 minutes) this is the 5-minute close.</a:t>
+              <a:t>Timing: 2 minutes.</a:t>
             </a:r>
           </a:p>
         </p:txBody>
@@ -3774,19 +3360,19 @@
           <a:p>
             <a:r>
               <a:rPr lang="en-US" sz="1400" b="0" dirty="0"/>
-              <a:t>Exit question answer: a cohort (grouped by the exposure the doctors chose, followed forward). It may only say 'associated', because doctors choose restrictive fluids for patients who differ in many ways (less sick, or more fluid-overloaded). This previews confounding by indication next Saturday.</a:t>
+              <a:t>Exit answer: a cohort. It may only say 'associated' (confounding by indication, next Saturday).</a:t>
             </a:r>
           </a:p>
           <a:p>
             <a:r>
               <a:rPr lang="en-US" sz="1400" b="0" dirty="0"/>
-              <a:t>Purpose of the exit question: it checks whether the main idea of today landed. Read all the answers before Session 4 and open Session 4 by showing three of them (anonymously).</a:t>
+              <a:t>Open Session 4 with three anonymous answers.</a:t>
             </a:r>
           </a:p>
           <a:p>
             <a:r>
               <a:rPr lang="en-US" sz="1400" b="0" dirty="0"/>
-              <a:t>Timing: 3 minutes after the 2-minute recap slide (5 minutes in all, as on the banner and in the agenda). Finish at 22:30.</a:t>
+              <a:t>Timing: 3 minutes. Finish at 22:30.</a:t>
             </a:r>
           </a:p>
         </p:txBody>
@@ -3867,13 +3453,7 @@
           <a:p>
             <a:r>
               <a:rPr lang="en-US" sz="1400" b="0" dirty="0"/>
-              <a:t>Extra: the slides after this point are optional. Use them if the class is quick, for questions, or point participants to them for self-study (the deck is shared as a PDF after the session).</a:t>
-            </a:r>
-          </a:p>
-          <a:p>
-            <a:r>
-              <a:rPr lang="en-US" sz="1400" b="0" dirty="0"/>
-              <a:t>Timing: skip in the live session unless time allows.</a:t>
+              <a:t>Optional. Use if time allows, or for self-study.</a:t>
             </a:r>
           </a:p>
         </p:txBody>
@@ -3954,19 +3534,7 @@
           <a:p>
             <a:r>
               <a:rPr lang="en-US" sz="1400" b="0" dirty="0"/>
-              <a:t>Extra: a slow walk-through of the decision tree with the two running-example papers (both in Course/Papers). Useful if the 'Name that design' exercise showed confusion.</a:t>
-            </a:r>
-          </a:p>
-          <a:p>
-            <a:r>
-              <a:rPr lang="en-US" sz="1400" b="0" dirty="0"/>
-              <a:t>Boulet: assigned? Yes. Random? Yes. So RCT. Hyun: assigned? No. Comparison group? Yes. Exposure measured before outcome? Yes. So cohort.</a:t>
-            </a:r>
-          </a:p>
-          <a:p>
-            <a:r>
-              <a:rPr lang="en-US" sz="1400" b="0" dirty="0"/>
-              <a:t>Ask participants to do the same for a paper from their own reference list (Proposal Part 1).</a:t>
+              <a:t>Use if 'Name that design' showed confusion. Then ask people to try a paper from their own reference list.</a:t>
             </a:r>
           </a:p>
           <a:p>
@@ -4053,19 +3621,13 @@
           <a:p>
             <a:r>
               <a:rPr lang="en-US" sz="1400" b="0" dirty="0"/>
-              <a:t>Extra: three more scenarios from other wards, for a quick poll or for self-study.</a:t>
+              <a:t>Watch for scenario C: two groups, but the physiotherapist decided, not chance.</a:t>
             </a:r>
           </a:p>
           <a:p>
             <a:r>
               <a:rPr lang="en-US" sz="1400" b="0" dirty="0"/>
-              <a:t>Watch for scenario C: some will say RCT because there are two groups. Ask: who decided who got mobilised? (The physiotherapist, not chance.)</a:t>
-            </a:r>
-          </a:p>
-          <a:p>
-            <a:r>
-              <a:rPr lang="en-US" sz="1400" b="0" dirty="0"/>
-              <a:t>Timing: 3 minutes including the answer slide, if used.</a:t>
+              <a:t>Timing: 3 minutes with the answers, if used.</a:t>
             </a:r>
           </a:p>
         </p:txBody>
@@ -4146,25 +3708,7 @@
           <a:p>
             <a:r>
               <a:rPr lang="en-US" sz="1400" b="0" dirty="0"/>
-              <a:t>Extra: answers to the previous slide.</a:t>
-            </a:r>
-          </a:p>
-          <a:p>
-            <a:r>
-              <a:rPr lang="en-US" sz="1400" b="0" dirty="0"/>
-              <a:t>Teaching point for C: two groups do not make a trial. If chance did not decide, it is observational.</a:t>
-            </a:r>
-          </a:p>
-          <a:p>
-            <a:r>
-              <a:rPr lang="en-US" sz="1400" b="0" dirty="0"/>
-              <a:t>Misconception: 'looking at old records makes it case-control'. Selection decides: by outcome = case-control. By exposure = cohort.</a:t>
-            </a:r>
-          </a:p>
-          <a:p>
-            <a:r>
-              <a:rPr lang="en-US" sz="1400" b="0" dirty="0"/>
-              <a:t>Timing: included in the 3 minutes, if used.</a:t>
+              <a:t>Two groups do not make a trial. Selected by outcome = case-control, by exposure = cohort.</a:t>
             </a:r>
           </a:p>
         </p:txBody>
@@ -4245,37 +3789,13 @@
           <a:p>
             <a:r>
               <a:rPr lang="en-US" sz="1400" b="0" dirty="0"/>
-              <a:t>This is the thread for the whole session. Read the question aloud: it is the PICO (Population, Intervention, Comparison, Outcome) the class built in Session 1.</a:t>
+              <a:t>Boulet assigned the strategy by chance. Hyun only observed. Boulet's primary outcome was fluid balance, not mortality.</a:t>
             </a:r>
           </a:p>
           <a:p>
             <a:r>
               <a:rPr lang="en-US" sz="1400" b="0" dirty="0"/>
-              <a:t>Where the papers are: both full texts (original and annotated) are in the course folder, Course/Papers: 'Paper 1 - Boulet 2024 Crit Care (RCT)' and 'Paper 2 - Hyun 2023 Ann Intensive Care (cohort)'. Participants met them in Session 2.</a:t>
-            </a:r>
-          </a:p>
-          <a:p>
-            <a:r>
-              <a:rPr lang="en-US" sz="1400" b="0" dirty="0"/>
-              <a:t>Teaching point: Boulet assigned the fluid strategy by chance (an experiment). Hyun only observed what clinicians did and what happened afterwards (an observational cohort).</a:t>
-            </a:r>
-          </a:p>
-          <a:p>
-            <a:r>
-              <a:rPr lang="en-US" sz="1400" b="0" dirty="0"/>
-              <a:t>Point out a detail people miss: Boulet's primary outcome was fluid balance at day 5, not mortality. It was a pilot trial. Hyun looked at 28-day mortality, which is our question, but could not assign anything.</a:t>
-            </a:r>
-          </a:p>
-          <a:p>
-            <a:r>
-              <a:rPr lang="en-US" sz="1400" b="0" dirty="0"/>
-              <a:t>Misconception: 'the bigger study is always the better study'. Size reduces random error. It does not remove bias. We come back to this in Session 4.</a:t>
-            </a:r>
-          </a:p>
-          <a:p>
-            <a:r>
-              <a:rPr lang="en-US" sz="1400" b="0" dirty="0"/>
-              <a:t>Ask the class (poll, or call on two or three people): which study would you trust more to tell you whether restriction saves lives? Expected answer: mixed, and that is the point. Neither answers it fully. Keep the tension. We resolve it by the end of 3.1.</a:t>
+              <a:t>Ask (poll): 'Which study would you trust more on whether restriction saves lives?' Expected: mixed. Neither answers it fully. Resolve it by the end of 3.1.</a:t>
             </a:r>
           </a:p>
           <a:p>
@@ -4362,13 +3882,7 @@
           <a:p>
             <a:r>
               <a:rPr lang="en-US" sz="1400" b="0" dirty="0"/>
-              <a:t>Extra: more practice on the 3.2 designs, with examples from other topics.</a:t>
-            </a:r>
-          </a:p>
-          <a:p>
-            <a:r>
-              <a:rPr lang="en-US" sz="1400" b="0" dirty="0"/>
-              <a:t>Answers. A: non-inferiority trial. Define the margin in advance. B: cluster randomised trial. Randomise wards, not patients. C: qualitative design using in-depth interviews (or focus groups) with families.</a:t>
+              <a:t>Answers: A non-inferiority trial with a margin set in advance. B cluster RCT. C qualitative interviews or focus groups.</a:t>
             </a:r>
           </a:p>
           <a:p>
@@ -4455,25 +3969,7 @@
           <a:p>
             <a:r>
               <a:rPr lang="en-US" sz="1400" b="0" dirty="0"/>
-              <a:t>Extra: for participants planning a case-control study.</a:t>
-            </a:r>
-          </a:p>
-          <a:p>
-            <a:r>
-              <a:rPr lang="en-US" sz="1400" b="0" dirty="0"/>
-              <a:t>Controls must come from the population that produced the cases: in the candidaemia example, other ICU patients in the same units and months, not healthy volunteers.</a:t>
-            </a:r>
-          </a:p>
-          <a:p>
-            <a:r>
-              <a:rPr lang="en-US" sz="1400" b="0" dirty="0"/>
-              <a:t>Exposure must be measured the same way in cases and controls, ideally by someone who does not know which is which.</a:t>
-            </a:r>
-          </a:p>
-          <a:p>
-            <a:r>
-              <a:rPr lang="en-US" sz="1400" b="0" dirty="0"/>
-              <a:t>Matching on a few factors can improve efficiency, but over-matching (on things linked to the exposure) hides the effect.</a:t>
+              <a:t>Controls from the same units and months. Measure exposure the same way in both groups. Do not over-match.</a:t>
             </a:r>
           </a:p>
           <a:p>
@@ -4560,19 +4056,7 @@
           <a:p>
             <a:r>
               <a:rPr lang="en-US" sz="1400" b="0" dirty="0"/>
-              <a:t>Extra: completes the margin picture from 3.2.</a:t>
-            </a:r>
-          </a:p>
-          <a:p>
-            <a:r>
-              <a:rPr lang="en-US" sz="1400" b="0" dirty="0"/>
-              <a:t>Superiority trials are the usual type. Equivalence trials (common for generic drugs) need the CI inside a margin on both sides. Non-inferiority trials need only the upper side.</a:t>
-            </a:r>
-          </a:p>
-          <a:p>
-            <a:r>
-              <a:rPr lang="en-US" sz="1400" b="0" dirty="0"/>
-              <a:t>Misconception: 'a failed superiority trial shows equivalence'. No. It was not designed with a margin.</a:t>
+              <a:t>A failed superiority trial does not show equivalence: it had no margin.</a:t>
             </a:r>
           </a:p>
           <a:p>
@@ -4659,19 +4143,7 @@
           <a:p>
             <a:r>
               <a:rPr lang="en-US" sz="1400" b="0" dirty="0"/>
-              <a:t>Extra: for participants whose project evaluates a change already made in their unit.</a:t>
-            </a:r>
-          </a:p>
-          <a:p>
-            <a:r>
-              <a:rPr lang="en-US" sz="1400" b="0" dirty="0"/>
-              <a:t>The interrupted time series compares the post-change data with the trend before the change. More data points, a control series and a diary of other changes make it much more convincing.</a:t>
-            </a:r>
-          </a:p>
-          <a:p>
-            <a:r>
-              <a:rPr lang="en-US" sz="1400" b="0" dirty="0"/>
-              <a:t>Reporting guideline for quality-improvement projects: SQUIRE 2.0 (Standards for QUality Improvement Reporting Excellence).</a:t>
+              <a:t>More data points, a control series and a diary of other changes. Reporting: SQUIRE 2.0.</a:t>
             </a:r>
           </a:p>
           <a:p>
@@ -4758,7 +4230,7 @@
           <a:p>
             <a:r>
               <a:rPr lang="en-US" sz="1400" b="0" dirty="0"/>
-              <a:t>Copyright slide. Leave it on screen while participants leave the meeting.</a:t>
+              <a:t>Leave on screen while people leave the meeting.</a:t>
             </a:r>
           </a:p>
         </p:txBody>
@@ -4839,19 +4311,7 @@
           <a:p>
             <a:r>
               <a:rPr lang="en-US" sz="1400" b="0" dirty="0"/>
-              <a:t>Section marker for 3.1. The 45 minutes run from the key-words slide to the 'caused or associated' poll, including one short poll.</a:t>
-            </a:r>
-          </a:p>
-          <a:p>
-            <a:r>
-              <a:rPr lang="en-US" sz="1400" b="0" dirty="0"/>
-              <a:t>Teaching point: we learn designs as pictures on a timeline, not as definitions. For each design we ask: who decided the exposure, and in which direction does time run? Each picture is followed by a worked example in steps.</a:t>
-            </a:r>
-          </a:p>
-          <a:p>
-            <a:r>
-              <a:rPr lang="en-US" sz="1400" b="0" dirty="0"/>
-              <a:t>Tell the class they do not need to memorise names. By the end they will be able to sketch them.</a:t>
+              <a:t>For each design ask: who decided the exposure, and which way does time run? No need to memorise names.</a:t>
             </a:r>
           </a:p>
           <a:p>
@@ -4938,25 +4398,13 @@
           <a:p>
             <a:r>
               <a:rPr lang="en-US" sz="1400" b="0" dirty="0"/>
-              <a:t>Go left to right. Descriptive studies describe what is there, with no comparison. Analytical studies compare groups to test an association, and they come in two kinds: observational (the investigator watches what happens in normal care) and experimental (the investigator decides who gets what).</a:t>
+              <a:t>Observational does not mean bad: harm, prognosis and rare diseases often need it.</a:t>
             </a:r>
           </a:p>
           <a:p>
             <a:r>
               <a:rPr lang="en-US" sz="1400" b="0" dirty="0"/>
-              <a:t>Systematic reviews sit apart: they are studies of studies, combining many of the designs on this slide.</a:t>
-            </a:r>
-          </a:p>
-          <a:p>
-            <a:r>
-              <a:rPr lang="en-US" sz="1400" b="0" dirty="0"/>
-              <a:t>Misconception: 'observational means bad'. No. Many key questions (harm, prognosis, rare diseases) can only be answered observationally. It is about fit, not rank.</a:t>
-            </a:r>
-          </a:p>
-          <a:p>
-            <a:r>
-              <a:rPr lang="en-US" sz="1400" b="0" dirty="0"/>
-              <a:t>Ask the class (poll): which card does Paper 1 (Boulet) belong to? Paper 2 (Hyun)? Expected answer: Boulet = experimental, RCT. Hyun = observational, cohort.</a:t>
+              <a:t>Poll: 'Which card for Paper 1? Paper 2?' Expected: Boulet experimental (RCT), Hyun observational (cohort).</a:t>
             </a:r>
           </a:p>
           <a:p>
@@ -5043,31 +4491,13 @@
           <a:p>
             <a:r>
               <a:rPr lang="en-US" sz="1400" b="0" dirty="0"/>
-              <a:t>Before any design, everyone must be able to name the two pieces of a question.</a:t>
+              <a:t>Fluid balance is the outcome in Boulet but the exposure in Hyun. A treatment is an exposure too.</a:t>
             </a:r>
           </a:p>
           <a:p>
             <a:r>
               <a:rPr lang="en-US" sz="1400" b="0" dirty="0"/>
-              <a:t>Exposure: what comes first (a treatment, a strategy, a risk factor, a behaviour). Outcome: what we count later (death, infection, injury, a lab value). The comparison group is people without the exposure, or with usual care.</a:t>
-            </a:r>
-          </a:p>
-          <a:p>
-            <a:r>
-              <a:rPr lang="en-US" sz="1400" b="0" dirty="0"/>
-              <a:t>Walk down the rows. The same variable can play different roles: fluid balance is the outcome in Boulet (day-5 balance) but the exposure in Hyun (balance by day 3, outcome death). The last two rows are other examples that come back later today.</a:t>
-            </a:r>
-          </a:p>
-          <a:p>
-            <a:r>
-              <a:rPr lang="en-US" sz="1400" b="0" dirty="0"/>
-              <a:t>Misconception: 'the exposure must be harmful'. No. A treatment is an exposure too.</a:t>
-            </a:r>
-          </a:p>
-          <a:p>
-            <a:r>
-              <a:rPr lang="en-US" sz="1400" b="0" dirty="0"/>
-              <a:t>Ask the class (call on two or three people, microphone on): in our running question, name the exposure, the outcome and the comparison. Expected: restrictive fluid strategy. Death by day 28, usual care.</a:t>
+              <a:t>Ask: 'Name the exposure, outcome and comparison in our question.' Expected: restrictive fluids, death by day 28, usual care.</a:t>
             </a:r>
           </a:p>
           <a:p>
@@ -5154,31 +4584,13 @@
           <a:p>
             <a:r>
               <a:rPr lang="en-US" sz="1400" b="0" dirty="0"/>
-              <a:t>Case report or series: a few unusual patients written up in detail. Historically important (first reports of AIDS, thalidomide harms) because they raise alarms and hypotheses.</a:t>
+              <a:t>Cross-sectional: exposure and outcome measured at the same moment, so time order is unknown.</a:t>
             </a:r>
           </a:p>
           <a:p>
             <a:r>
               <a:rPr lang="en-US" sz="1400" b="0" dirty="0"/>
-              <a:t>Cross-sectional study: one snapshot of a population at one moment, for example a one-day survey of every patient in the ICU. It measures prevalence (how many have it now).</a:t>
-            </a:r>
-          </a:p>
-          <a:p>
-            <a:r>
-              <a:rPr lang="en-US" sz="1400" b="0" dirty="0"/>
-              <a:t>Teaching point: in a cross-sectional study exposure and outcome are measured at the same moment, so you usually cannot tell which came first.</a:t>
-            </a:r>
-          </a:p>
-          <a:p>
-            <a:r>
-              <a:rPr lang="en-US" sz="1400" b="0" dirty="0"/>
-              <a:t>Misconception: 'a cross-sectional study can show cause because it has two groups'. It can compare groups (analytical cross-sectional), but time order is missing.</a:t>
-            </a:r>
-          </a:p>
-          <a:p>
-            <a:r>
-              <a:rPr lang="en-US" sz="1400" b="0" dirty="0"/>
-              <a:t>Ask the class (call on two or three people, microphone on): how could you measure, on one day, how common a positive fluid balance is in your ICU? Expected answer: a point-prevalence survey of all patients present that day.</a:t>
+              <a:t>Ask: 'How could you measure, on one day, how common a positive fluid balance is in your ICU?' Expected: a point-prevalence survey.</a:t>
             </a:r>
           </a:p>
           <a:p>
@@ -5265,31 +4677,13 @@
           <a:p>
             <a:r>
               <a:rPr lang="en-US" sz="1400" b="0" dirty="0"/>
-              <a:t>Another example (outside the fluid question), to make 'cross-sectional' concrete. Hypothetical numbers.</a:t>
+              <a:t>Hypothetical numbers. You cannot tell whether the mattress or the injury came first. For 'how common is it now?' this is the right design.</a:t>
             </a:r>
           </a:p>
           <a:p>
             <a:r>
               <a:rPr lang="en-US" sz="1400" b="0" dirty="0"/>
-              <a:t>Steps 1-2: everyone present on one day, examined the same way (this protects against information bias, which we meet in Session 4). Step 3: exposure (mattress) and outcome (pressure injury) are recorded at the same moment. Step 4: the result is a prevalence: 37 of 412 patients, 9%.</a:t>
-            </a:r>
-          </a:p>
-          <a:p>
-            <a:r>
-              <a:rPr lang="en-US" sz="1400" b="0" dirty="0"/>
-              <a:t>Teaching point: you can compare groups (injury on standard vs air mattress), but you cannot tell whether the mattress came first or whether patients with injuries were moved onto air mattresses.</a:t>
-            </a:r>
-          </a:p>
-          <a:p>
-            <a:r>
-              <a:rPr lang="en-US" sz="1400" b="0" dirty="0"/>
-              <a:t>Misconception: 'cross-sectional = low quality'. For 'how common is it now?' it is exactly the right design, and it is cheap and fast.</a:t>
-            </a:r>
-          </a:p>
-          <a:p>
-            <a:r>
-              <a:rPr lang="en-US" sz="1400" b="0" dirty="0"/>
-              <a:t>Ask the class (call on two or three people, microphone on): what in our ICU could you measure in one day for the fluid question? Expected: today's fluid balance and today's kidney function for every patient present.</a:t>
+              <a:t>Ask: 'What could you measure in one day for the fluid question?' Expected: today's fluid balance and kidney function for every patient.</a:t>
             </a:r>
           </a:p>
           <a:p>
@@ -22597,7 +21991,7 @@
                 <a:latin typeface="Arial"/>
                 <a:cs typeface="Arial"/>
               </a:rPr>
-              <a:t>Why: it checks today's key idea. The instructor reads every answer and opens Session 4 with them</a:t>
+              <a:t>Homework: finish your own Proposal Part 2a (design, setting, population)</a:t>
             </a:r>
           </a:p>
           <a:p>
@@ -22622,7 +22016,7 @@
                 <a:latin typeface="Arial"/>
                 <a:cs typeface="Arial"/>
               </a:rPr>
-              <a:t>Homework: finish your own Proposal Part 2a (design, setting, population)</a:t>
+              <a:t>Reading: 'Patients' in Paper 1 (Boulet) and 'Data source' in Paper 2 (Hyun)</a:t>
             </a:r>
           </a:p>
           <a:p>
@@ -22647,31 +22041,6 @@
                 <a:latin typeface="Arial"/>
                 <a:cs typeface="Arial"/>
               </a:rPr>
-              <a:t>Reading: 'Patients' in Paper 1 (Boulet) and 'Data source' in Paper 2 (Hyun), in Course/Papers</a:t>
-            </a:r>
-          </a:p>
-          <a:p>
-            <a:pPr marL="380000" indent="-380000" algn="l">
-              <a:lnSpc>
-                <a:spcPct val="104000"/>
-              </a:lnSpc>
-              <a:spcBef>
-                <a:spcPts val="450"/>
-              </a:spcBef>
-              <a:buClr>
-                <a:srgbClr val="1F5C7A"/>
-              </a:buClr>
-              <a:buFont typeface="Arial"/>
-              <a:buChar char="•"/>
-            </a:pPr>
-            <a:r>
-              <a:rPr lang="en-US" sz="1650" dirty="0">
-                <a:solidFill>
-                  <a:srgbClr val="000000"/>
-                </a:solidFill>
-                <a:latin typeface="Arial"/>
-                <a:cs typeface="Arial"/>
-              </a:rPr>
               <a:t>Next Saturday (Session 4): can we trust the result, and how big is the effect?</a:t>
             </a:r>
           </a:p>
@@ -22729,7 +22098,7 @@
                 <a:latin typeface="Arial"/>
                 <a:cs typeface="Arial"/>
               </a:rPr>
-              <a:t>One exit answer per person, in the chat or the form</a:t>
+              <a:t>One exit answer per person, in the chat</a:t>
             </a:r>
           </a:p>
         </p:txBody>
@@ -25160,7 +24529,7 @@
                 <a:latin typeface="Arial"/>
                 <a:cs typeface="Arial"/>
               </a:rPr>
-              <a:t>In adults with septic shock, does a restrictive fluid strategy reduce 28-day mortality? Both papers: course folder, Course/Papers</a:t>
+              <a:t>In adults with septic shock, does a restrictive fluid strategy reduce 28-day mortality? Both papers were emailed before Session 1</a:t>
             </a:r>
           </a:p>
         </p:txBody>
